--- a/Curso Gas B/05 - ITC-ICG 08 - Aparatos de gas/05 - ITC-ICG 08 - Aparatos de gas - Vídeo 2.pptx
+++ b/Curso Gas B/05 - ITC-ICG 08 - Aparatos de gas/05 - ITC-ICG 08 - Aparatos de gas - Vídeo 2.pptx
@@ -17,6 +17,8 @@
     <p:sldId id="265" r:id="rId17"/>
     <p:sldId id="266" r:id="rId18"/>
     <p:sldId id="267" r:id="rId19"/>
+    <p:sldId id="268" r:id="rId20"/>
+    <p:sldId id="269" r:id="rId21"/>
   </p:sldIdLst>
   <p:sldSz cx="12191695" cy="6858000" type="screen4x3"/>
   <p:notesSz cx="6858000" cy="9144000"/>
@@ -513,12 +515,12 @@
           <a:lstStyle/>
           <a:p>
             <a:r>
-              <a:t>N1: Dejamos la fábrica. ¿Qué empieza aquí de verdad?</a:t>
-            </a:r>
-          </a:p>
-          <a:p>
-            <a:r>
-              <a:t>N2: Tu trabajo de piso. En este vídeo vemos cómo se clasifican los aparatos según por dónde respiran y expulsan humos, los tipos A, B y C; quién puede conectarlos, arrancarlos, mantenerlos y adecuarlos; qué se comprueba al ponerlos en marcha y qué certificado hay que entregar. Es el corazón práctico de la ITC-ICG cero ocho y una de las zonas más preguntadas del examen. Atención especial a no confundir los tipos de aparato con las categorías de instalador.</a:t>
+              <a:t>N1: Ya sé qué exige la norma de fábrica. ¿Y ahora qué toca?</a:t>
+            </a:r>
+          </a:p>
+          <a:p>
+            <a:r>
+              <a:t>N2: Ahora empieza tu trabajo de verdad. Dejamos la fábrica y bajamos al piso. En este vídeo vemos cómo se clasifican los aparatos según por dónde respiran y expulsan humos, los tipos A, B y C; quién puede conectarlos, ponerlos en marcha, mantenerlos y adecuarlos; qué se comprueba al arrancarlos y qué certificado hay que entregar. Es el corazón práctico de la ITC-ICG cero ocho y una de las zonas más preguntadas del examen. Y una advertencia de oro desde ya: no vamos a confundir los tipos de aparato con las categorías de instalador.</a:t>
             </a:r>
           </a:p>
         </p:txBody>
@@ -588,12 +590,12 @@
           <a:lstStyle/>
           <a:p>
             <a:r>
-              <a:t>N1: Terminas de arrancar el aparato. ¿Qué haces ahora?</a:t>
-            </a:r>
-          </a:p>
-          <a:p>
-            <a:r>
-              <a:t>N2: Las comprobaciones mínimas salen de la UNE sesenta mil seiscientos setenta, parte diez, más las indicaciones adicionales del fabricante: nunca es solo la norma ni solo el manual, son las dos cosas. Después emites y entregas al cliente el certificado de puesta en marcha, con el modelo del anexo cuatro, y guardas copia cinco años a disposición del órgano competente de la Comunidad Autónoma. Dos datos de examen que caen juntos: certificado de puesta en marcha y cinco años de archivo.</a:t>
+              <a:t>N1: ¿Qué es adecuar un aparato por cambio de familia de gas?</a:t>
+            </a:r>
+          </a:p>
+          <a:p>
+            <a:r>
+              <a:t>N2: Cambiar de familia es, ni más ni menos, cambiar el tipo de gas. Por ejemplo, pasar una caldera de gas natural, que es la segunda familia, a propano o butano, que es la tercera familia; hay que cambiar inyectores y reglajes. La ITC lo reserva a dos: al servicio técnico del fabricante con sistema de calidad certificado, o a instaladores de gas de categoría A o B que cumplan el capítulo cuatro de la ITC-ICG cero nueve. Fíjate en que aquí sí manda la categoría del carné: la categoría C no puede hacerlo. Y una condición de oro: los recambios deben ser de características idénticas a las aprobadas en la certificación de tipo. Nada de piezas que hacen el apaño, porque una mala adecuación te da llamas amarillas y monóxido de carbono.</a:t>
             </a:r>
           </a:p>
         </p:txBody>
@@ -663,12 +665,12 @@
           <a:lstStyle/>
           <a:p>
             <a:r>
-              <a:t>N1: ¿Qué bloques tiene el certificado del anexo cuatro?</a:t>
-            </a:r>
-          </a:p>
-          <a:p>
-            <a:r>
-              <a:t>N2: Son fáciles de recordar: quién arranca, el agente; para quién, el cliente; qué, el aparato con tipo, marca, modelo, potencia y número de fabricación; y cómo salió, las pruebas. Lo firma el técnico, con sello de empresa, y también el cliente. Y ojo al detalle que gusta al examen: cuando procede, se adjunta la impresión del análisis de combustión, esa tira que escupe el analizador con CO, CO dos, tiro y rendimiento. Es la prueba física de que la combustión es correcta.</a:t>
+              <a:t>N1: Al arrancar el aparato, ¿qué se comprueba y qué papel se entrega?</a:t>
+            </a:r>
+          </a:p>
+          <a:p>
+            <a:r>
+              <a:t>N2: Dos cosas van juntas. Primero, las comprobaciones mínimas para la puesta en marcha de los aparatos conectados salen de la norma UNE sesenta mil seiscientos setenta, parte diez, más las indicaciones adicionales del fabricante. Nunca es solo la norma ni solo el manual: son las dos cosas, porque el fabricante conoce su aparato y puede exigir pasos extra. Segundo, no basta con dejarlo funcionando: el agente que hace la puesta en marcha debe emitir y entregar al cliente un certificado de puesta en marcha, según el modelo del anexo cuatro. Y guardarse una copia cinco años a disposición de la comunidad autónoma. Dos datos de examen que caen juntos: certificado de puesta en marcha, y cinco años de archivo.</a:t>
             </a:r>
           </a:p>
         </p:txBody>
@@ -738,12 +740,172 @@
           <a:lstStyle/>
           <a:p>
             <a:r>
-              <a:t>N1: Tres ideas para no olvidar de este vídeo, ¿cuáles?</a:t>
-            </a:r>
-          </a:p>
-          <a:p>
-            <a:r>
-              <a:t>N2: Primero, los tipos A, B y C se distinguen por de dónde respira el aparato y por dónde echa el humo; el A depende de la ventilación, el B del tiro, y el C es el menos dependiente de la estancia. Segundo, instalar un aparato no necesita ni autorización ni comunicación, pero sí exige entregar el certificado de puesta en marcha, firmado por técnico y cliente con el ticket del análisis, y guardarlo cinco años. Y tercero, los conducidos de más de veinticuatro coma cuatro kilovatios y el cambio de familia de gas piden gente especialmente cualificada y componentes idénticos: nada de apaños.</a:t>
+              <a:t>N1: Después de instalar el aparato, ¿hay que comunicar algo a la Administración?</a:t>
+            </a:r>
+          </a:p>
+          <a:p>
+            <a:r>
+              <a:t>N2: No se precisa ninguna comunicación. Cierra el círculo con lo que vimos en el cinco punto uno: instalar un aparato ni necesita autorización previa ni comunicación posterior. Lo único obligatorio es el certificado de puesta en marcha que le das al cliente y archivas tú. Pero ojo con no mezclar dos papeles: esto es del aparato. La comunicación de la instalación receptora es otra cosa, esa sí, la presenta el titular en un plazo de treinta días. Instalación y aparato tienen su propio papeleo; no los confundas.</a:t>
+            </a:r>
+          </a:p>
+        </p:txBody>
+      </p:sp>
+      <p:sp>
+        <p:nvSpPr>
+          <p:cNvPr id="4" name="Slide Number Placeholder 3"/>
+          <p:cNvSpPr>
+            <a:spLocks noGrp="1"/>
+          </p:cNvSpPr>
+          <p:nvPr>
+            <p:ph type="sldNum" idx="5" sz="quarter"/>
+          </p:nvPr>
+        </p:nvSpPr>
+        <p:spPr/>
+      </p:sp>
+    </p:spTree>
+  </p:cSld>
+  <p:clrMapOvr>
+    <a:masterClrMapping/>
+  </p:clrMapOvr>
+</p:notes>
+</file>
+
+<file path=ppt/notesSlides/notesSlide13.xml><?xml version="1.0" encoding="utf-8"?>
+<p:notes xmlns:a="http://schemas.openxmlformats.org/drawingml/2006/main" xmlns:p="http://schemas.openxmlformats.org/presentationml/2006/main" xmlns:r="http://schemas.openxmlformats.org/officeDocument/2006/relationships">
+  <p:cSld>
+    <p:spTree>
+      <p:nvGrpSpPr>
+        <p:cNvPr id="1" name=""/>
+        <p:cNvGrpSpPr/>
+        <p:nvPr/>
+      </p:nvGrpSpPr>
+      <p:grpSpPr>
+        <a:xfrm>
+          <a:off x="0" y="0"/>
+          <a:ext cx="0" cy="0"/>
+          <a:chOff x="0" y="0"/>
+          <a:chExt cx="0" cy="0"/>
+        </a:xfrm>
+      </p:grpSpPr>
+      <p:sp>
+        <p:nvSpPr>
+          <p:cNvPr id="2" name="Slide Image Placeholder 1"/>
+          <p:cNvSpPr>
+            <a:spLocks noGrp="1"/>
+          </p:cNvSpPr>
+          <p:nvPr>
+            <p:ph type="sldImg" idx="2"/>
+          </p:nvPr>
+        </p:nvSpPr>
+        <p:spPr/>
+      </p:sp>
+      <p:sp>
+        <p:nvSpPr>
+          <p:cNvPr id="3" name="Notes Placeholder 2"/>
+          <p:cNvSpPr>
+            <a:spLocks noGrp="1"/>
+          </p:cNvSpPr>
+          <p:nvPr>
+            <p:ph type="body" idx="3" sz="quarter"/>
+          </p:nvPr>
+        </p:nvSpPr>
+        <p:spPr/>
+        <p:txBody>
+          <a:bodyPr/>
+          <a:lstStyle/>
+          <a:p>
+            <a:r>
+              <a:t>N1: ¿Qué información mínima lleva ese certificado?</a:t>
+            </a:r>
+          </a:p>
+          <a:p>
+            <a:r>
+              <a:t>N2: Tiene bloques fáciles de recordar, contesta a cuatro preguntas: quién arranca, el agente, con nombre, dirección, NIF y categoría; para quién, el cliente, con nombre y dirección; qué, el aparato, con tipo, marca, modelo, potencia y número de fabricación; y cómo salió, las pruebas realizadas y sus resultados. Y aquí un detalle que le encanta al examen: cuando procede, se adjunta la impresión del análisis de combustión, ese ticket de papel que escupe el analizador con el monóxido de carbono, el dióxido de carbono, el tiro y el rendimiento. Es la prueba física de que la combustión es correcta. Por último, lo firma el técnico, con sello de la empresa, y también lo firma el cliente.</a:t>
+            </a:r>
+          </a:p>
+        </p:txBody>
+      </p:sp>
+      <p:sp>
+        <p:nvSpPr>
+          <p:cNvPr id="4" name="Slide Number Placeholder 3"/>
+          <p:cNvSpPr>
+            <a:spLocks noGrp="1"/>
+          </p:cNvSpPr>
+          <p:nvPr>
+            <p:ph type="sldNum" idx="5" sz="quarter"/>
+          </p:nvPr>
+        </p:nvSpPr>
+        <p:spPr/>
+      </p:sp>
+    </p:spTree>
+  </p:cSld>
+  <p:clrMapOvr>
+    <a:masterClrMapping/>
+  </p:clrMapOvr>
+</p:notes>
+</file>
+
+<file path=ppt/notesSlides/notesSlide14.xml><?xml version="1.0" encoding="utf-8"?>
+<p:notes xmlns:a="http://schemas.openxmlformats.org/drawingml/2006/main" xmlns:p="http://schemas.openxmlformats.org/presentationml/2006/main" xmlns:r="http://schemas.openxmlformats.org/officeDocument/2006/relationships">
+  <p:cSld>
+    <p:spTree>
+      <p:nvGrpSpPr>
+        <p:cNvPr id="1" name=""/>
+        <p:cNvGrpSpPr/>
+        <p:nvPr/>
+      </p:nvGrpSpPr>
+      <p:grpSpPr>
+        <a:xfrm>
+          <a:off x="0" y="0"/>
+          <a:ext cx="0" cy="0"/>
+          <a:chOff x="0" y="0"/>
+          <a:chExt cx="0" cy="0"/>
+        </a:xfrm>
+      </p:grpSpPr>
+      <p:sp>
+        <p:nvSpPr>
+          <p:cNvPr id="2" name="Slide Image Placeholder 1"/>
+          <p:cNvSpPr>
+            <a:spLocks noGrp="1"/>
+          </p:cNvSpPr>
+          <p:nvPr>
+            <p:ph type="sldImg" idx="2"/>
+          </p:nvPr>
+        </p:nvSpPr>
+        <p:spPr/>
+      </p:sp>
+      <p:sp>
+        <p:nvSpPr>
+          <p:cNvPr id="3" name="Notes Placeholder 2"/>
+          <p:cNvSpPr>
+            <a:spLocks noGrp="1"/>
+          </p:cNvSpPr>
+          <p:nvPr>
+            <p:ph type="body" idx="3" sz="quarter"/>
+          </p:nvPr>
+        </p:nvSpPr>
+        <p:spPr/>
+        <p:txBody>
+          <a:bodyPr/>
+          <a:lstStyle/>
+          <a:p>
+            <a:r>
+              <a:t>N1: Este vídeo es muy práctico. ¿Cómo lo ordeno en la cabeza?</a:t>
+            </a:r>
+          </a:p>
+          <a:p>
+            <a:r>
+              <a:t>N2: Sigamos el hilo, que va del aparato al papel. Primero, aprendiste a clasificar por combustión: A respira del local y echa al local, B respira del local y echa fuera, C respira de fuera y echa fuera; B y C son los conducidos. Y no confundes eso con la categoría del carné, que es otra letra distinta. Segundo, quién conecta: siempre el instalador y según la parte siete, salvo el latiguillo de goma, que lo pone el usuario; y el suelto va por la parte seis. Tercero, quién arranca y repara: por encima de veinticuatro coma cuatro kilovatios y conducido, gente muy cualificada; y adecuar de familia de gas, categorías A o B con piezas idénticas. Y cuarto, cómo cierras: comprobaciones según la parte diez más el fabricante, certificado de puesta en marcha del anexo cuatro con el ticket del análisis de combustión, y cinco años de archivo.</a:t>
+            </a:r>
+          </a:p>
+          <a:p>
+            <a:r>
+              <a:t>N1: ¿Y esto cómo aparece en el examen y en la obra?</a:t>
+            </a:r>
+          </a:p>
+          <a:p>
+            <a:r>
+              <a:t>N2: En el examen te van a cruzar las letras a propósito, te van a preguntar quién puede conectar el latiguillo, o a partir de cuántos kilovatios hace falta gente cualificada, o cuántos años se archiva el certificado. En la obra es tu día a día: un flexible caducado es olor a gas asegurado, y sin el análisis de combustión no sabes si has dejado una avería dentro de casa. Hoy ya no eres solo teoría: sabes dejar un aparato en regla y con su papel firmado. En el siguiente vídeo entramos en la letra pequeña de la certificación, el anexo uno: cómo un organismo de control demuestra que ese aparato es de fiar. Vamos a por él.</a:t>
             </a:r>
           </a:p>
         </p:txBody>
@@ -818,7 +980,7 @@
           </a:p>
           <a:p>
             <a:r>
-              <a:t>N2: Tres tipos de aparato por su combustión: A, B y C. El umbral de veinticuatro coma cuatro kilovatios, que separa el aparato exigente del normal. Y los cinco años que hay que archivar el certificado de puesta en marcha a disposición de la Comunidad Autónoma. Con estos tres números tienes el esqueleto del vídeo.</a:t>
+              <a:t>N2: Tres. Primero, tres tipos de aparato según el circuito de combustión: A, B y C. Segundo, veinticuatro coma cuatro kilovatios, que es la potencia que separa los aparatos exigentes de los normales, a la hora de decidir quién puede arrancarlos. Y tercero, cinco años, que es lo que tienes que guardar el certificado de puesta en marcha a disposición de la comunidad autónoma. Con estos tres números tienes las claves numéricas del vídeo.</a:t>
             </a:r>
           </a:p>
         </p:txBody>
@@ -888,12 +1050,12 @@
           <a:lstStyle/>
           <a:p>
             <a:r>
-              <a:t>N1: ¿Cómo clasifica la ITC los aparatos por su combustión?</a:t>
-            </a:r>
-          </a:p>
-          <a:p>
-            <a:r>
-              <a:t>N2: Por de dónde toman el aire para quemar y por dónde evacúan los humos. El tipo A, no conducido, coge aire del local y devuelve los humos al local; por eso exige buena ventilación del recinto: una cocina, un horno, una encimera. El tipo B, de cámara abierta, coge aire del local pero echa los humos al exterior por un conducto: el calentador o la caldera atmosférica. Y el tipo C, estanco, toma el aire de fuera y expulsa los humos fuera, sin tocar el aire de la estancia: la caldera estanca. Los tipos B y C son los que la norma llama conducidos.</a:t>
+              <a:t>N1: ¿Por qué se clasifican los aparatos en tipos?</a:t>
+            </a:r>
+          </a:p>
+          <a:p>
+            <a:r>
+              <a:t>N2: Porque todo aparato de gas necesita dos cosas: aire para quemar y una salida para los humos. Y según de dónde toma el aire y por dónde echa los humos, se clasifica en tipo A, B o C. Piénsalo con una frase que te va a salvar en el examen: de dónde respira y por dónde echa el humo. Esta clasificación es la que la propia ITC usa cuando habla de aparatos conducidos, así que domínala bien porque es materia fija. En las siguientes diapositivas vemos los tres tipos uno a uno.</a:t>
             </a:r>
           </a:p>
         </p:txBody>
@@ -963,12 +1125,12 @@
           <a:lstStyle/>
           <a:p>
             <a:r>
-              <a:t>N1: ¿Cómo no confundirlos nunca?</a:t>
-            </a:r>
-          </a:p>
-          <a:p>
-            <a:r>
-              <a:t>N2: Piensa en respirar y echar el humo. El A respira del local y echa al local. El B respira del local y echa fuera. El C respira de fuera y echa fuera. Cuanto más aislado del local está el circuito, más seguro es respecto al ambiente: por eso el C es el que menos depende de la ventilación de la estancia y el mejor en locales complicados, como un baño pequeño. El A, en cambio, si le falta ventilación, acumula CO.</a:t>
+              <a:t>N1: ¿En qué se diferencian el A, el B y el C?</a:t>
+            </a:r>
+          </a:p>
+          <a:p>
+            <a:r>
+              <a:t>N2: Vamos con la frase paso a paso. El tipo A es no conducido: coge el aire del local y devuelve los humos al local, no tiene conducto de evacuación; por eso exige que el recinto esté bien ventilado, como una cocina o un horno. El tipo B es conducido de cámara abierta: coge el aire de combustión del local donde está, pero evacúa los humos al exterior por un conducto; su cámara está abierta al ambiente, como un calentador o una caldera atmosférica. El tipo C es estanco: su circuito, entrada de aire, cámara y salida de humos, está aislado respecto al local; toma el aire de fuera y echa los humos fuera, sin intercambiar aire con la estancia. La lógica: cuanto más aislado del local, más seguro respecto al ambiente; por eso el C es el que menos depende de la ventilación de la estancia.</a:t>
             </a:r>
           </a:p>
         </p:txBody>
@@ -1038,12 +1200,12 @@
           <a:lstStyle/>
           <a:p>
             <a:r>
-              <a:t>N1: Comparten letra. ¿Dónde está la trampa?</a:t>
-            </a:r>
-          </a:p>
-          <a:p>
-            <a:r>
-              <a:t>N2: Es una trampa clásica de examen. El tipo A, B o C describe cómo quema y evacúa el aparato, su circuito de combustión. La categoría A, B o C, que está en la ITC-ICG cero nueve, es el nivel del carné del instalador, qué instalaciones puede montar una persona. No tienen nada que ver una letra con la otra: un instalador de categoría B puede trabajar con aparatos de tipo A, B o C sin problema.</a:t>
+              <a:t>N1: Tipos A, B, C y categorías A, B, C. ¿No es fácil liarse?</a:t>
+            </a:r>
+          </a:p>
+          <a:p>
+            <a:r>
+              <a:t>N2: Es la trampa clásica del examen, así que vamos a dejarlo clavado. Los aparatos de tipo B y C son los que la ITC llama aparatos conducidos, porque van unidos a un conducto de evacuación de humos. Ahora, no confundas los tipos de aparato con las categorías de instalador de la ITC-ICG cero nueve. Son cosas distintas que comparten letra para liarte. El tipo A, B o C describe cómo quema y evacúa el aparato, su circuito de combustión. La categoría A, B o C es el nivel del carné del instalador, qué instalaciones puede montar una persona. No tienen nada que ver una letra con la otra: un instalador de categoría B puede trabajar con aparatos de tipo A, B o C sin problema.</a:t>
             </a:r>
           </a:p>
         </p:txBody>
@@ -1113,12 +1275,12 @@
           <a:lstStyle/>
           <a:p>
             <a:r>
-              <a:t>N1: ¿Hay que pedir permiso a la Administración para poner un aparato?</a:t>
-            </a:r>
-          </a:p>
-          <a:p>
-            <a:r>
-              <a:t>N2: No. Instalar un aparato ni necesita autorización previa, que es el apartado cinco uno, ni comunicación posterior, que es el cinco cinco. Lo normal en gas es hacer y, cuando toca, comunicar; aquí ni siquiera hay que comunicar. Lo único obligatorio es el certificado de puesta en marcha que le das al cliente y archivas tú. No lo confundas con la comunicación de la instalación receptora: esa sí, la presenta el titular a los treinta días, pero es de la instalación, no del aparato.</a:t>
+              <a:t>N1: Para colocar un aparato, ¿hay que pedir permiso a la Administración?</a:t>
+            </a:r>
+          </a:p>
+          <a:p>
+            <a:r>
+              <a:t>N2: No. La instalación de los aparatos de gas no precisa autorización administrativa. Enlázalo con la lógica de todo el Reglamento de gas: lo normal es hacer y, cuando toca, comunicar; no pedir permiso y esperar de brazos cruzados. Y en el caso del aparato, la cosa va todavía más lejos, porque como veremos al final del apartado cinco, ni siquiera hay que comunicar. El único papel obligatorio será el certificado de puesta en marcha que le das al cliente.</a:t>
             </a:r>
           </a:p>
         </p:txBody>
@@ -1188,12 +1350,12 @@
           <a:lstStyle/>
           <a:p>
             <a:r>
-              <a:t>N1: ¿Puede el usuario conectar su propio aparato?</a:t>
-            </a:r>
-          </a:p>
-          <a:p>
-            <a:r>
-              <a:t>N2: Por regla general conecta el instalador, según la UNE sesenta mil seiscientos setenta, en su parte siete. La única excepción es el tubo flexible elastomérico con abrazadera, el típico latiguillo de goma de una cocina de butano: ese lo puede poner el propio usuario. Por eso cualquiera cambia el tubo de su cocina, pero conectar una caldera con tubería rígida es cosa del instalador. Y los aparatos no conectados a instalación receptora van por las condiciones de ubicación de la UNE sesenta mil seiscientos setenta, parte seis, capítulo cuatro. Regla de bolsillo: conectado a la siete, suelto a la seis.</a:t>
+              <a:t>N1: ¿Puede cualquiera conectar un aparato de gas?</a:t>
+            </a:r>
+          </a:p>
+          <a:p>
+            <a:r>
+              <a:t>N2: La regla general es clara: la conexión de los aparatos a las instalaciones receptoras se hace según la norma UNE sesenta mil seiscientos setenta, parte siete, y siempre por un instalador. Pero hay una única excepción, y es muy práctica de conocer: cuando la conexión se hace con un tubo flexible elastomérico con abrazadera, que es el típico latiguillo de goma de una cocina de butano, la puede hacer el propio usuario. Por eso cualquiera puede cambiar el tubo de su cocina de gas, pero no conectar una caldera con tubería rígida: eso, sí o sí, es cosa del instalador.</a:t>
             </a:r>
           </a:p>
         </p:txBody>
@@ -1263,12 +1425,12 @@
           <a:lstStyle/>
           <a:p>
             <a:r>
-              <a:t>N1: ¿Dónde está la línea que separa el aparato exigente del normal?</a:t>
-            </a:r>
-          </a:p>
-          <a:p>
-            <a:r>
-              <a:t>N2: Aquí. Los conducidos de tipo B y C de más de veinticuatro coma cuatro kilovatios de potencia útil y las vitrocerámicas de fuegos cubiertos solo los ponen en marcha, mantienen o reparan el servicio técnico del fabricante con sistema de calidad certificado, o instaladores que cumplan el capítulo cuatro de la ITC-ICG cero nueve. Todo lo demás, los de menor potencia y los de tipo A, lo puede hacer el servicio técnico del fabricante o una empresa instaladora. Truco: más de veinticuatro coma cuatro kilovatios y con humos conducidos, gente especialmente cualificada.</a:t>
+              <a:t>N1: ¿Y los aparatos que no van conectados a la instalación receptora?</a:t>
+            </a:r>
+          </a:p>
+          <a:p>
+            <a:r>
+              <a:t>N2: Distingue las dos normas gemelas, porque el examen las cruza. Los aparatos conectados a una instalación receptora van por la UNE sesenta mil seiscientos setenta, parte siete, la de conexión. Los no conectados, por ejemplo una estufa o un aparato suelto, deben cumplir las condiciones de ubicación del capítulo cuatro de la UNE sesenta mil seiscientos setenta, parte seis. La regla de bolsillo para no fallar: conectado, la parte siete; suelto, la parte seis.</a:t>
             </a:r>
           </a:p>
         </p:txBody>
@@ -1338,12 +1500,12 @@
           <a:lstStyle/>
           <a:p>
             <a:r>
-              <a:t>N1: ¿Quién puede adecuar un aparato a otro gas?</a:t>
-            </a:r>
-          </a:p>
-          <a:p>
-            <a:r>
-              <a:t>N2: Adecuar por cambio de familia es, por ejemplo, pasar una caldera de gas natural, que es la segunda familia, a propano o butano, que es la tercera: hay que cambiar inyectores y reglajes. La ITC lo reserva al servicio técnico del fabricante con calidad certificada o a instaladores de categoría A o B; aquí sí manda el carné, y la categoría C no puede. Y una condición de oro: los recambios deben ser idénticos a los aprobados en la certificación de tipo. Cambiar inyectores por unos que hacen el apaño da mala combustión, llamas amarillas y CO.</a:t>
+              <a:t>N1: ¿Quién puede poner en marcha, mantener y reparar un aparato?</a:t>
+            </a:r>
+          </a:p>
+          <a:p>
+            <a:r>
+              <a:t>N2: Aquí hay una línea que separa el aparato exigente del aparato normal, y es la potencia. Los aparatos conducidos, es decir tipo B y C, de más de veinticuatro coma cuatro kilovatios de potencia útil, y las vitrocerámicas a gas de fuegos cubiertos, solo los pueden poner en marcha, mantener o reparar el servicio técnico del fabricante con un sistema de calidad certificado, o instaladores de gas que cumplan el capítulo cuatro de la ITC-ICG cero nueve. Para todo lo demás, los de menor potencia o los de tipo A, basta con el servicio técnico del fabricante o una empresa instaladora. Truco: más de veinticuatro coma cuatro kilovatios y con humos conducidos, gente especialmente cualificada.</a:t>
             </a:r>
           </a:p>
         </p:txBody>
@@ -4456,7 +4618,7 @@
                 </a:solidFill>
                 <a:latin typeface="Montserrat"/>
               </a:rPr>
-              <a:t>Tipos de aparato y puesta en marcha</a:t>
+              <a:t>Tipos, conexión y puesta en marcha</a:t>
             </a:r>
           </a:p>
           <a:p>
@@ -4467,7 +4629,7 @@
                 </a:solidFill>
                 <a:latin typeface="Montserrat"/>
               </a:rPr>
-              <a:t>Clasificación A/B/C, conexión y certificado</a:t>
+              <a:t>Aparatos A, B y C; quién conecta, arranca y certifica</a:t>
             </a:r>
           </a:p>
         </p:txBody>
@@ -4598,7 +4760,7 @@
                 </a:solidFill>
                 <a:latin typeface="Montserrat"/>
               </a:rPr>
-              <a:t>010 / 012</a:t>
+              <a:t>010 / 014</a:t>
             </a:r>
           </a:p>
         </p:txBody>
@@ -4666,7 +4828,7 @@
                 </a:solidFill>
                 <a:latin typeface="Montserrat"/>
               </a:rPr>
-              <a:t>APARTADO 5.4</a:t>
+              <a:t>APARTADO 5.3.2 · ADECUACIÓN</a:t>
             </a:r>
           </a:p>
         </p:txBody>
@@ -4700,7 +4862,7 @@
                 </a:solidFill>
                 <a:latin typeface="Montserrat"/>
               </a:rPr>
-              <a:t>Comprobaciones y certificado</a:t>
+              <a:t>Cambiar de familia de gas</a:t>
             </a:r>
           </a:p>
         </p:txBody>
@@ -4748,7 +4910,7 @@
                 </a:solidFill>
                 <a:latin typeface="Montserrat"/>
               </a:rPr>
-              <a:t>Comprobaciones: UNE 60670-10 + fabricante</a:t>
+              <a:t>Ejemplo: de natural a propano/butano</a:t>
             </a:r>
           </a:p>
           <a:p>
@@ -4773,7 +4935,7 @@
                 </a:solidFill>
                 <a:latin typeface="Montserrat"/>
               </a:rPr>
-              <a:t>Emitir y entregar el certificado al cliente</a:t>
+              <a:t>Solo SAT certificado o categorías A o B</a:t>
             </a:r>
           </a:p>
           <a:p>
@@ -4798,7 +4960,7 @@
                 </a:solidFill>
                 <a:latin typeface="Montserrat"/>
               </a:rPr>
-              <a:t>Modelo del anexo 4</a:t>
+              <a:t>La categoría C no puede</a:t>
             </a:r>
           </a:p>
           <a:p>
@@ -4823,14 +4985,14 @@
                 </a:solidFill>
                 <a:latin typeface="Montserrat"/>
               </a:rPr>
-              <a:t>Archivar 5 años (Comunidad Autónoma)</a:t>
-            </a:r>
-          </a:p>
-        </p:txBody>
-      </p:sp>
-      <p:sp>
-        <p:nvSpPr>
-          <p:cNvPr id="8" name="imgph" descr="IMGQ:combustion gas analyzer boiler"/>
+              <a:t>Componentes idénticos a los certificados</a:t>
+            </a:r>
+          </a:p>
+        </p:txBody>
+      </p:sp>
+      <p:sp>
+        <p:nvSpPr>
+          <p:cNvPr id="8" name="imgph" descr="IMGQ:gas burner injector nozzle replacement"/>
           <p:cNvSpPr/>
           <p:nvPr/>
         </p:nvSpPr>
@@ -4916,7 +5078,7 @@
                 </a:solidFill>
                 <a:latin typeface="Montserrat"/>
               </a:rPr>
-              <a:t>combustion gas analyzer boiler</a:t>
+              <a:t>gas burner injector nozzle replacement</a:t>
             </a:r>
           </a:p>
         </p:txBody>
@@ -5013,7 +5175,7 @@
                 </a:solidFill>
                 <a:latin typeface="Montserrat"/>
               </a:rPr>
-              <a:t>011 / 012</a:t>
+              <a:t>011 / 014</a:t>
             </a:r>
           </a:p>
         </p:txBody>
@@ -5081,7 +5243,7 @@
                 </a:solidFill>
                 <a:latin typeface="Montserrat"/>
               </a:rPr>
-              <a:t>ANEXO 4 · CONTENIDO</a:t>
+              <a:t>APARTADO 5.4 · COMPROBACIONES</a:t>
             </a:r>
           </a:p>
         </p:txBody>
@@ -5115,7 +5277,7 @@
                 </a:solidFill>
                 <a:latin typeface="Montserrat"/>
               </a:rPr>
-              <a:t>Qué lleva el certificado</a:t>
+              <a:t>El papel que cierra el trabajo</a:t>
             </a:r>
           </a:p>
         </p:txBody>
@@ -5163,7 +5325,7 @@
                 </a:solidFill>
                 <a:latin typeface="Montserrat"/>
               </a:rPr>
-              <a:t>Agente, cliente y datos del aparato</a:t>
+              <a:t>Comprobaciones: UNE 60670-10 + fabricante</a:t>
             </a:r>
           </a:p>
           <a:p>
@@ -5188,7 +5350,7 @@
                 </a:solidFill>
                 <a:latin typeface="Montserrat"/>
               </a:rPr>
-              <a:t>Pruebas: análisis de combustión</a:t>
+              <a:t>Emites certificado de puesta en marcha</a:t>
             </a:r>
           </a:p>
           <a:p>
@@ -5213,7 +5375,7 @@
                 </a:solidFill>
                 <a:latin typeface="Montserrat"/>
               </a:rPr>
-              <a:t>Firma del técnico y sello</a:t>
+              <a:t>Modelo del anexo 4; lo firma el cliente</a:t>
             </a:r>
           </a:p>
           <a:p>
@@ -5238,14 +5400,14 @@
                 </a:solidFill>
                 <a:latin typeface="Montserrat"/>
               </a:rPr>
-              <a:t>Firma del cliente</a:t>
-            </a:r>
-          </a:p>
-        </p:txBody>
-      </p:sp>
-      <p:sp>
-        <p:nvSpPr>
-          <p:cNvPr id="8" name="imgph" descr="IMGQ:signed certificate document"/>
+              <a:t>Archivas 5 años (comunidad autónoma)</a:t>
+            </a:r>
+          </a:p>
+        </p:txBody>
+      </p:sp>
+      <p:sp>
+        <p:nvSpPr>
+          <p:cNvPr id="8" name="imgph" descr="IMGQ:flue gas combustion analyzer boiler"/>
           <p:cNvSpPr/>
           <p:nvPr/>
         </p:nvSpPr>
@@ -5331,7 +5493,7 @@
                 </a:solidFill>
                 <a:latin typeface="Montserrat"/>
               </a:rPr>
-              <a:t>signed certificate document</a:t>
+              <a:t>flue gas combustion analyzer boiler</a:t>
             </a:r>
           </a:p>
         </p:txBody>
@@ -5428,7 +5590,7 @@
                 </a:solidFill>
                 <a:latin typeface="Montserrat"/>
               </a:rPr>
-              <a:t>012 / 012</a:t>
+              <a:t>012 / 014</a:t>
             </a:r>
           </a:p>
         </p:txBody>
@@ -5475,8 +5637,8 @@
         </p:nvSpPr>
         <p:spPr>
           <a:xfrm>
-            <a:off x="822960" y="640080"/>
-            <a:ext cx="10058400" cy="914400"/>
+            <a:off x="822960" y="457200"/>
+            <a:ext cx="8229600" cy="365760"/>
           </a:xfrm>
           <a:prstGeom prst="rect">
             <a:avLst/>
@@ -5490,13 +5652,13 @@
           <a:lstStyle/>
           <a:p>
             <a:r>
-              <a:rPr sz="3000" b="1" i="0">
-                <a:solidFill>
-                  <a:srgbClr val="1E2761"/>
-                </a:solidFill>
-                <a:latin typeface="Montserrat"/>
-              </a:rPr>
-              <a:t>Qué me llevo</a:t>
+              <a:rPr sz="1200" b="1" i="0">
+                <a:solidFill>
+                  <a:srgbClr val="64748B"/>
+                </a:solidFill>
+                <a:latin typeface="Montserrat"/>
+              </a:rPr>
+              <a:t>APARTADO 5.5 · COMUNICACIÓN</a:t>
             </a:r>
           </a:p>
         </p:txBody>
@@ -5509,8 +5671,8 @@
         </p:nvSpPr>
         <p:spPr>
           <a:xfrm>
-            <a:off x="822960" y="2011680"/>
-            <a:ext cx="10058400" cy="3657600"/>
+            <a:off x="822960" y="868680"/>
+            <a:ext cx="10515600" cy="914400"/>
           </a:xfrm>
           <a:prstGeom prst="rect">
             <a:avLst/>
@@ -5523,78 +5685,951 @@
           </a:bodyPr>
           <a:lstStyle/>
           <a:p>
+            <a:r>
+              <a:rPr sz="2700" b="1" i="0">
+                <a:solidFill>
+                  <a:srgbClr val="1E2761"/>
+                </a:solidFill>
+                <a:latin typeface="Montserrat"/>
+              </a:rPr>
+              <a:t>Ni permiso antes, ni aviso después</a:t>
+            </a:r>
+          </a:p>
+        </p:txBody>
+      </p:sp>
+      <p:sp>
+        <p:nvSpPr>
+          <p:cNvPr id="7" name="TextBox 6"/>
+          <p:cNvSpPr txBox="1"/>
+          <p:nvPr/>
+        </p:nvSpPr>
+        <p:spPr>
+          <a:xfrm>
+            <a:off x="822960" y="1920240"/>
+            <a:ext cx="4983480" cy="4206240"/>
+          </a:xfrm>
+          <a:prstGeom prst="rect">
+            <a:avLst/>
+          </a:prstGeom>
+          <a:noFill/>
+        </p:spPr>
+        <p:txBody>
+          <a:bodyPr wrap="square">
+            <a:spAutoFit/>
+          </a:bodyPr>
+          <a:lstStyle/>
+          <a:p>
             <a:pPr>
               <a:spcAft>
-                <a:spcPts val="1400"/>
+                <a:spcPts val="1000"/>
               </a:spcAft>
             </a:pPr>
             <a:r>
-              <a:rPr sz="2000" b="1" i="0">
+              <a:rPr sz="1600" b="1" i="0">
                 <a:solidFill>
                   <a:srgbClr val="2E3A80"/>
                 </a:solidFill>
                 <a:latin typeface="Montserrat"/>
               </a:rPr>
-              <a:t>✓  </a:t>
-            </a:r>
-            <a:r>
-              <a:rPr sz="2000" b="0" i="0">
+              <a:t>•  </a:t>
+            </a:r>
+            <a:r>
+              <a:rPr sz="1600" b="0" i="0">
                 <a:solidFill>
                   <a:srgbClr val="1B2330"/>
                 </a:solidFill>
                 <a:latin typeface="Montserrat"/>
               </a:rPr>
-              <a:t>A/B/C: por dónde respira y echa humo</a:t>
+              <a:t>El aparato no precisa comunicación</a:t>
             </a:r>
           </a:p>
           <a:p>
             <a:pPr>
               <a:spcAft>
-                <a:spcPts val="1400"/>
+                <a:spcPts val="1000"/>
               </a:spcAft>
             </a:pPr>
             <a:r>
-              <a:rPr sz="2000" b="1" i="0">
+              <a:rPr sz="1600" b="1" i="0">
                 <a:solidFill>
                   <a:srgbClr val="2E3A80"/>
                 </a:solidFill>
                 <a:latin typeface="Montserrat"/>
               </a:rPr>
-              <a:t>✓  </a:t>
-            </a:r>
-            <a:r>
-              <a:rPr sz="2000" b="0" i="0">
+              <a:t>•  </a:t>
+            </a:r>
+            <a:r>
+              <a:rPr sz="1600" b="0" i="0">
                 <a:solidFill>
                   <a:srgbClr val="1B2330"/>
                 </a:solidFill>
                 <a:latin typeface="Montserrat"/>
               </a:rPr>
-              <a:t>Ni permiso ni comunicación; sí certificado</a:t>
+              <a:t>Sí es obligatorio el certificado al cliente</a:t>
             </a:r>
           </a:p>
           <a:p>
             <a:pPr>
               <a:spcAft>
-                <a:spcPts val="1400"/>
+                <a:spcPts val="1000"/>
               </a:spcAft>
             </a:pPr>
             <a:r>
+              <a:rPr sz="1600" b="1" i="0">
+                <a:solidFill>
+                  <a:srgbClr val="2E3A80"/>
+                </a:solidFill>
+                <a:latin typeface="Montserrat"/>
+              </a:rPr>
+              <a:t>•  </a:t>
+            </a:r>
+            <a:r>
+              <a:rPr sz="1600" b="0" i="0">
+                <a:solidFill>
+                  <a:srgbClr val="1B2330"/>
+                </a:solidFill>
+                <a:latin typeface="Montserrat"/>
+              </a:rPr>
+              <a:t>No confundir con la instalación receptora</a:t>
+            </a:r>
+          </a:p>
+        </p:txBody>
+      </p:sp>
+      <p:sp>
+        <p:nvSpPr>
+          <p:cNvPr id="8" name="imgph" descr="IMGQ:gas installation paperwork clipboard"/>
+          <p:cNvSpPr/>
+          <p:nvPr/>
+        </p:nvSpPr>
+        <p:spPr>
+          <a:xfrm>
+            <a:off x="5806440" y="1051560"/>
+            <a:ext cx="5298947" cy="4629150"/>
+          </a:xfrm>
+          <a:prstGeom prst="roundRect">
+            <a:avLst/>
+          </a:prstGeom>
+          <a:solidFill>
+            <a:srgbClr val="F3F6FB"/>
+          </a:solidFill>
+          <a:ln w="12700">
+            <a:solidFill>
+              <a:srgbClr val="C7D2E6"/>
+            </a:solidFill>
+          </a:ln>
+          <a:effectLst/>
+        </p:spPr>
+        <p:style>
+          <a:lnRef idx="1">
+            <a:schemeClr val="accent1"/>
+          </a:lnRef>
+          <a:fillRef idx="3">
+            <a:schemeClr val="accent1"/>
+          </a:fillRef>
+          <a:effectRef idx="2">
+            <a:schemeClr val="accent1"/>
+          </a:effectRef>
+          <a:fontRef idx="minor">
+            <a:schemeClr val="lt1"/>
+          </a:fontRef>
+        </p:style>
+        <p:txBody>
+          <a:bodyPr rtlCol="0" anchor="ctr"/>
+          <a:lstStyle/>
+          <a:p>
+            <a:pPr algn="ctr"/>
+          </a:p>
+        </p:txBody>
+      </p:sp>
+      <p:sp>
+        <p:nvSpPr>
+          <p:cNvPr id="9" name="TextBox 8"/>
+          <p:cNvSpPr txBox="1"/>
+          <p:nvPr/>
+        </p:nvSpPr>
+        <p:spPr>
+          <a:xfrm>
+            <a:off x="6080760" y="2726055"/>
+            <a:ext cx="4750307" cy="1280160"/>
+          </a:xfrm>
+          <a:prstGeom prst="rect">
+            <a:avLst/>
+          </a:prstGeom>
+          <a:noFill/>
+        </p:spPr>
+        <p:txBody>
+          <a:bodyPr wrap="square">
+            <a:spAutoFit/>
+          </a:bodyPr>
+          <a:lstStyle/>
+          <a:p>
+            <a:pPr algn="ctr"/>
+            <a:r>
+              <a:rPr sz="1400" b="1" i="0">
+                <a:solidFill>
+                  <a:srgbClr val="64748B"/>
+                </a:solidFill>
+                <a:latin typeface="Montserrat"/>
+              </a:rPr>
+              <a:t>IMAGEN REALISTA</a:t>
+            </a:r>
+          </a:p>
+          <a:p>
+            <a:pPr algn="ctr"/>
+            <a:r>
+              <a:rPr sz="1100" b="0" i="1">
+                <a:solidFill>
+                  <a:srgbClr val="64748B"/>
+                </a:solidFill>
+                <a:latin typeface="Montserrat"/>
+              </a:rPr>
+              <a:t>gas installation paperwork clipboard</a:t>
+            </a:r>
+          </a:p>
+        </p:txBody>
+      </p:sp>
+    </p:spTree>
+  </p:cSld>
+  <p:clrMapOvr>
+    <a:masterClrMapping/>
+  </p:clrMapOvr>
+</p:sld>
+</file>
+
+<file path=ppt/slides/slide13.xml><?xml version="1.0" encoding="utf-8"?>
+<p:sld xmlns:a="http://schemas.openxmlformats.org/drawingml/2006/main" xmlns:p="http://schemas.openxmlformats.org/presentationml/2006/main" xmlns:r="http://schemas.openxmlformats.org/officeDocument/2006/relationships">
+  <p:cSld>
+    <p:spTree>
+      <p:nvGrpSpPr>
+        <p:cNvPr id="1" name=""/>
+        <p:cNvGrpSpPr/>
+        <p:nvPr/>
+      </p:nvGrpSpPr>
+      <p:grpSpPr/>
+      <p:sp>
+        <p:nvSpPr>
+          <p:cNvPr id="2" name="Rectangle 1"/>
+          <p:cNvSpPr/>
+          <p:nvPr/>
+        </p:nvSpPr>
+        <p:spPr>
+          <a:xfrm>
+            <a:off x="0" y="0"/>
+            <a:ext cx="12191695" cy="6858000"/>
+          </a:xfrm>
+          <a:prstGeom prst="rect">
+            <a:avLst/>
+          </a:prstGeom>
+          <a:solidFill>
+            <a:srgbClr val="FFFFFF"/>
+          </a:solidFill>
+          <a:ln>
+            <a:noFill/>
+          </a:ln>
+          <a:effectLst/>
+        </p:spPr>
+        <p:style>
+          <a:lnRef idx="1">
+            <a:schemeClr val="accent1"/>
+          </a:lnRef>
+          <a:fillRef idx="3">
+            <a:schemeClr val="accent1"/>
+          </a:fillRef>
+          <a:effectRef idx="2">
+            <a:schemeClr val="accent1"/>
+          </a:effectRef>
+          <a:fontRef idx="minor">
+            <a:schemeClr val="lt1"/>
+          </a:fontRef>
+        </p:style>
+        <p:txBody>
+          <a:bodyPr rtlCol="0" anchor="ctr"/>
+          <a:lstStyle/>
+          <a:p>
+            <a:pPr algn="ctr"/>
+          </a:p>
+        </p:txBody>
+      </p:sp>
+      <p:sp>
+        <p:nvSpPr>
+          <p:cNvPr id="3" name="TextBox 2"/>
+          <p:cNvSpPr txBox="1"/>
+          <p:nvPr/>
+        </p:nvSpPr>
+        <p:spPr>
+          <a:xfrm>
+            <a:off x="10607040" y="320040"/>
+            <a:ext cx="1371600" cy="365760"/>
+          </a:xfrm>
+          <a:prstGeom prst="rect">
+            <a:avLst/>
+          </a:prstGeom>
+          <a:noFill/>
+        </p:spPr>
+        <p:txBody>
+          <a:bodyPr wrap="square">
+            <a:spAutoFit/>
+          </a:bodyPr>
+          <a:lstStyle/>
+          <a:p>
+            <a:pPr algn="r"/>
+            <a:r>
+              <a:rPr sz="1000" b="1" i="0">
+                <a:solidFill>
+                  <a:srgbClr val="64748B"/>
+                </a:solidFill>
+                <a:latin typeface="Montserrat"/>
+              </a:rPr>
+              <a:t>013 / 014</a:t>
+            </a:r>
+          </a:p>
+        </p:txBody>
+      </p:sp>
+      <p:sp>
+        <p:nvSpPr>
+          <p:cNvPr id="4" name="TextBox 3"/>
+          <p:cNvSpPr txBox="1"/>
+          <p:nvPr/>
+        </p:nvSpPr>
+        <p:spPr>
+          <a:xfrm>
+            <a:off x="457200" y="6419088"/>
+            <a:ext cx="8229600" cy="365760"/>
+          </a:xfrm>
+          <a:prstGeom prst="rect">
+            <a:avLst/>
+          </a:prstGeom>
+          <a:noFill/>
+        </p:spPr>
+        <p:txBody>
+          <a:bodyPr wrap="square">
+            <a:spAutoFit/>
+          </a:bodyPr>
+          <a:lstStyle/>
+          <a:p>
+            <a:r>
+              <a:rPr sz="900" b="0" i="0">
+                <a:solidFill>
+                  <a:srgbClr val="64748B"/>
+                </a:solidFill>
+                <a:latin typeface="Montserrat"/>
+              </a:rPr>
+              <a:t>Curso Gas B · Tema 05 · Aparatos de gas</a:t>
+            </a:r>
+          </a:p>
+        </p:txBody>
+      </p:sp>
+      <p:sp>
+        <p:nvSpPr>
+          <p:cNvPr id="5" name="TextBox 4"/>
+          <p:cNvSpPr txBox="1"/>
+          <p:nvPr/>
+        </p:nvSpPr>
+        <p:spPr>
+          <a:xfrm>
+            <a:off x="822960" y="457200"/>
+            <a:ext cx="8229600" cy="365760"/>
+          </a:xfrm>
+          <a:prstGeom prst="rect">
+            <a:avLst/>
+          </a:prstGeom>
+          <a:noFill/>
+        </p:spPr>
+        <p:txBody>
+          <a:bodyPr wrap="square">
+            <a:spAutoFit/>
+          </a:bodyPr>
+          <a:lstStyle/>
+          <a:p>
+            <a:r>
+              <a:rPr sz="1200" b="1" i="0">
+                <a:solidFill>
+                  <a:srgbClr val="64748B"/>
+                </a:solidFill>
+                <a:latin typeface="Montserrat"/>
+              </a:rPr>
+              <a:t>ANEXO 4 · CERTIFICADO</a:t>
+            </a:r>
+          </a:p>
+        </p:txBody>
+      </p:sp>
+      <p:sp>
+        <p:nvSpPr>
+          <p:cNvPr id="6" name="TextBox 5"/>
+          <p:cNvSpPr txBox="1"/>
+          <p:nvPr/>
+        </p:nvSpPr>
+        <p:spPr>
+          <a:xfrm>
+            <a:off x="822960" y="868680"/>
+            <a:ext cx="10515600" cy="914400"/>
+          </a:xfrm>
+          <a:prstGeom prst="rect">
+            <a:avLst/>
+          </a:prstGeom>
+          <a:noFill/>
+        </p:spPr>
+        <p:txBody>
+          <a:bodyPr wrap="square">
+            <a:spAutoFit/>
+          </a:bodyPr>
+          <a:lstStyle/>
+          <a:p>
+            <a:r>
+              <a:rPr sz="2700" b="1" i="0">
+                <a:solidFill>
+                  <a:srgbClr val="1E2761"/>
+                </a:solidFill>
+                <a:latin typeface="Montserrat"/>
+              </a:rPr>
+              <a:t>Qué lleva el certificado</a:t>
+            </a:r>
+          </a:p>
+        </p:txBody>
+      </p:sp>
+      <p:sp>
+        <p:nvSpPr>
+          <p:cNvPr id="7" name="TextBox 6"/>
+          <p:cNvSpPr txBox="1"/>
+          <p:nvPr/>
+        </p:nvSpPr>
+        <p:spPr>
+          <a:xfrm>
+            <a:off x="822960" y="1920240"/>
+            <a:ext cx="4983480" cy="4206240"/>
+          </a:xfrm>
+          <a:prstGeom prst="rect">
+            <a:avLst/>
+          </a:prstGeom>
+          <a:noFill/>
+        </p:spPr>
+        <p:txBody>
+          <a:bodyPr wrap="square">
+            <a:spAutoFit/>
+          </a:bodyPr>
+          <a:lstStyle/>
+          <a:p>
+            <a:pPr>
+              <a:spcAft>
+                <a:spcPts val="1000"/>
+              </a:spcAft>
+            </a:pPr>
+            <a:r>
+              <a:rPr sz="1600" b="1" i="0">
+                <a:solidFill>
+                  <a:srgbClr val="2E3A80"/>
+                </a:solidFill>
+                <a:latin typeface="Montserrat"/>
+              </a:rPr>
+              <a:t>•  </a:t>
+            </a:r>
+            <a:r>
+              <a:rPr sz="1600" b="0" i="0">
+                <a:solidFill>
+                  <a:srgbClr val="1B2330"/>
+                </a:solidFill>
+                <a:latin typeface="Montserrat"/>
+              </a:rPr>
+              <a:t>Agente, cliente y datos del aparato</a:t>
+            </a:r>
+          </a:p>
+          <a:p>
+            <a:pPr>
+              <a:spcAft>
+                <a:spcPts val="1000"/>
+              </a:spcAft>
+            </a:pPr>
+            <a:r>
+              <a:rPr sz="1600" b="1" i="0">
+                <a:solidFill>
+                  <a:srgbClr val="2E3A80"/>
+                </a:solidFill>
+                <a:latin typeface="Montserrat"/>
+              </a:rPr>
+              <a:t>•  </a:t>
+            </a:r>
+            <a:r>
+              <a:rPr sz="1600" b="0" i="0">
+                <a:solidFill>
+                  <a:srgbClr val="1B2330"/>
+                </a:solidFill>
+                <a:latin typeface="Montserrat"/>
+              </a:rPr>
+              <a:t>Pruebas y sus resultados</a:t>
+            </a:r>
+          </a:p>
+          <a:p>
+            <a:pPr>
+              <a:spcAft>
+                <a:spcPts val="1000"/>
+              </a:spcAft>
+            </a:pPr>
+            <a:r>
+              <a:rPr sz="1600" b="1" i="0">
+                <a:solidFill>
+                  <a:srgbClr val="2E3A80"/>
+                </a:solidFill>
+                <a:latin typeface="Montserrat"/>
+              </a:rPr>
+              <a:t>•  </a:t>
+            </a:r>
+            <a:r>
+              <a:rPr sz="1600" b="0" i="0">
+                <a:solidFill>
+                  <a:srgbClr val="1B2330"/>
+                </a:solidFill>
+                <a:latin typeface="Montserrat"/>
+              </a:rPr>
+              <a:t>Ticket del análisis de combustión</a:t>
+            </a:r>
+          </a:p>
+          <a:p>
+            <a:pPr>
+              <a:spcAft>
+                <a:spcPts val="1000"/>
+              </a:spcAft>
+            </a:pPr>
+            <a:r>
+              <a:rPr sz="1600" b="1" i="0">
+                <a:solidFill>
+                  <a:srgbClr val="2E3A80"/>
+                </a:solidFill>
+                <a:latin typeface="Montserrat"/>
+              </a:rPr>
+              <a:t>•  </a:t>
+            </a:r>
+            <a:r>
+              <a:rPr sz="1600" b="0" i="0">
+                <a:solidFill>
+                  <a:srgbClr val="1B2330"/>
+                </a:solidFill>
+                <a:latin typeface="Montserrat"/>
+              </a:rPr>
+              <a:t>Firma del técnico, sello y firma del cliente</a:t>
+            </a:r>
+          </a:p>
+        </p:txBody>
+      </p:sp>
+      <p:sp>
+        <p:nvSpPr>
+          <p:cNvPr id="8" name="imgph" descr="IMGQ:signed technical certificate document"/>
+          <p:cNvSpPr/>
+          <p:nvPr/>
+        </p:nvSpPr>
+        <p:spPr>
+          <a:xfrm>
+            <a:off x="5806440" y="1051560"/>
+            <a:ext cx="5298947" cy="4629150"/>
+          </a:xfrm>
+          <a:prstGeom prst="roundRect">
+            <a:avLst/>
+          </a:prstGeom>
+          <a:solidFill>
+            <a:srgbClr val="F3F6FB"/>
+          </a:solidFill>
+          <a:ln w="12700">
+            <a:solidFill>
+              <a:srgbClr val="C7D2E6"/>
+            </a:solidFill>
+          </a:ln>
+          <a:effectLst/>
+        </p:spPr>
+        <p:style>
+          <a:lnRef idx="1">
+            <a:schemeClr val="accent1"/>
+          </a:lnRef>
+          <a:fillRef idx="3">
+            <a:schemeClr val="accent1"/>
+          </a:fillRef>
+          <a:effectRef idx="2">
+            <a:schemeClr val="accent1"/>
+          </a:effectRef>
+          <a:fontRef idx="minor">
+            <a:schemeClr val="lt1"/>
+          </a:fontRef>
+        </p:style>
+        <p:txBody>
+          <a:bodyPr rtlCol="0" anchor="ctr"/>
+          <a:lstStyle/>
+          <a:p>
+            <a:pPr algn="ctr"/>
+          </a:p>
+        </p:txBody>
+      </p:sp>
+      <p:sp>
+        <p:nvSpPr>
+          <p:cNvPr id="9" name="TextBox 8"/>
+          <p:cNvSpPr txBox="1"/>
+          <p:nvPr/>
+        </p:nvSpPr>
+        <p:spPr>
+          <a:xfrm>
+            <a:off x="6080760" y="2726055"/>
+            <a:ext cx="4750307" cy="1280160"/>
+          </a:xfrm>
+          <a:prstGeom prst="rect">
+            <a:avLst/>
+          </a:prstGeom>
+          <a:noFill/>
+        </p:spPr>
+        <p:txBody>
+          <a:bodyPr wrap="square">
+            <a:spAutoFit/>
+          </a:bodyPr>
+          <a:lstStyle/>
+          <a:p>
+            <a:pPr algn="ctr"/>
+            <a:r>
+              <a:rPr sz="1400" b="1" i="0">
+                <a:solidFill>
+                  <a:srgbClr val="64748B"/>
+                </a:solidFill>
+                <a:latin typeface="Montserrat"/>
+              </a:rPr>
+              <a:t>IMAGEN REALISTA</a:t>
+            </a:r>
+          </a:p>
+          <a:p>
+            <a:pPr algn="ctr"/>
+            <a:r>
+              <a:rPr sz="1100" b="0" i="1">
+                <a:solidFill>
+                  <a:srgbClr val="64748B"/>
+                </a:solidFill>
+                <a:latin typeface="Montserrat"/>
+              </a:rPr>
+              <a:t>signed technical certificate document</a:t>
+            </a:r>
+          </a:p>
+        </p:txBody>
+      </p:sp>
+    </p:spTree>
+  </p:cSld>
+  <p:clrMapOvr>
+    <a:masterClrMapping/>
+  </p:clrMapOvr>
+</p:sld>
+</file>
+
+<file path=ppt/slides/slide14.xml><?xml version="1.0" encoding="utf-8"?>
+<p:sld xmlns:a="http://schemas.openxmlformats.org/drawingml/2006/main" xmlns:p="http://schemas.openxmlformats.org/presentationml/2006/main" xmlns:r="http://schemas.openxmlformats.org/officeDocument/2006/relationships">
+  <p:cSld>
+    <p:spTree>
+      <p:nvGrpSpPr>
+        <p:cNvPr id="1" name=""/>
+        <p:cNvGrpSpPr/>
+        <p:nvPr/>
+      </p:nvGrpSpPr>
+      <p:grpSpPr/>
+      <p:sp>
+        <p:nvSpPr>
+          <p:cNvPr id="2" name="Rectangle 1"/>
+          <p:cNvSpPr/>
+          <p:nvPr/>
+        </p:nvSpPr>
+        <p:spPr>
+          <a:xfrm>
+            <a:off x="0" y="0"/>
+            <a:ext cx="12191695" cy="6858000"/>
+          </a:xfrm>
+          <a:prstGeom prst="rect">
+            <a:avLst/>
+          </a:prstGeom>
+          <a:solidFill>
+            <a:srgbClr val="1E2761"/>
+          </a:solidFill>
+          <a:ln>
+            <a:noFill/>
+          </a:ln>
+          <a:effectLst/>
+        </p:spPr>
+        <p:style>
+          <a:lnRef idx="1">
+            <a:schemeClr val="accent1"/>
+          </a:lnRef>
+          <a:fillRef idx="3">
+            <a:schemeClr val="accent1"/>
+          </a:fillRef>
+          <a:effectRef idx="2">
+            <a:schemeClr val="accent1"/>
+          </a:effectRef>
+          <a:fontRef idx="minor">
+            <a:schemeClr val="lt1"/>
+          </a:fontRef>
+        </p:style>
+        <p:txBody>
+          <a:bodyPr rtlCol="0" anchor="ctr"/>
+          <a:lstStyle/>
+          <a:p>
+            <a:pPr algn="ctr"/>
+          </a:p>
+        </p:txBody>
+      </p:sp>
+      <p:sp>
+        <p:nvSpPr>
+          <p:cNvPr id="3" name="TextBox 2"/>
+          <p:cNvSpPr txBox="1"/>
+          <p:nvPr/>
+        </p:nvSpPr>
+        <p:spPr>
+          <a:xfrm>
+            <a:off x="822960" y="640080"/>
+            <a:ext cx="10515600" cy="457200"/>
+          </a:xfrm>
+          <a:prstGeom prst="rect">
+            <a:avLst/>
+          </a:prstGeom>
+          <a:noFill/>
+        </p:spPr>
+        <p:txBody>
+          <a:bodyPr wrap="square">
+            <a:spAutoFit/>
+          </a:bodyPr>
+          <a:lstStyle/>
+          <a:p>
+            <a:r>
+              <a:rPr sz="1400" b="1" i="0">
+                <a:solidFill>
+                  <a:srgbClr val="CADCFC"/>
+                </a:solidFill>
+                <a:latin typeface="Montserrat"/>
+              </a:rPr>
+              <a:t>LO QUE YA DOMINAS</a:t>
+            </a:r>
+          </a:p>
+        </p:txBody>
+      </p:sp>
+      <p:sp>
+        <p:nvSpPr>
+          <p:cNvPr id="4" name="TextBox 3"/>
+          <p:cNvSpPr txBox="1"/>
+          <p:nvPr/>
+        </p:nvSpPr>
+        <p:spPr>
+          <a:xfrm>
+            <a:off x="822960" y="1143000"/>
+            <a:ext cx="10515600" cy="1097280"/>
+          </a:xfrm>
+          <a:prstGeom prst="rect">
+            <a:avLst/>
+          </a:prstGeom>
+          <a:noFill/>
+        </p:spPr>
+        <p:txBody>
+          <a:bodyPr wrap="square">
+            <a:spAutoFit/>
+          </a:bodyPr>
+          <a:lstStyle/>
+          <a:p>
+            <a:r>
+              <a:rPr sz="3400" b="1" i="0">
+                <a:solidFill>
+                  <a:srgbClr val="FFFFFF"/>
+                </a:solidFill>
+                <a:latin typeface="Montserrat"/>
+              </a:rPr>
+              <a:t>Ya sabes clasificar, conectar y certificar</a:t>
+            </a:r>
+          </a:p>
+        </p:txBody>
+      </p:sp>
+      <p:sp>
+        <p:nvSpPr>
+          <p:cNvPr id="5" name="TextBox 4"/>
+          <p:cNvSpPr txBox="1"/>
+          <p:nvPr/>
+        </p:nvSpPr>
+        <p:spPr>
+          <a:xfrm>
+            <a:off x="822960" y="2514600"/>
+            <a:ext cx="10515600" cy="2834640"/>
+          </a:xfrm>
+          <a:prstGeom prst="rect">
+            <a:avLst/>
+          </a:prstGeom>
+          <a:noFill/>
+        </p:spPr>
+        <p:txBody>
+          <a:bodyPr wrap="square">
+            <a:spAutoFit/>
+          </a:bodyPr>
+          <a:lstStyle/>
+          <a:p>
+            <a:pPr>
+              <a:spcAft>
+                <a:spcPts val="1200"/>
+              </a:spcAft>
+            </a:pPr>
+            <a:r>
               <a:rPr sz="2000" b="1" i="0">
                 <a:solidFill>
-                  <a:srgbClr val="2E3A80"/>
+                  <a:srgbClr val="CADCFC"/>
                 </a:solidFill>
                 <a:latin typeface="Montserrat"/>
               </a:rPr>
               <a:t>✓  </a:t>
             </a:r>
             <a:r>
-              <a:rPr sz="2000" b="0" i="0">
-                <a:solidFill>
-                  <a:srgbClr val="1B2330"/>
-                </a:solidFill>
-                <a:latin typeface="Montserrat"/>
-              </a:rPr>
-              <a:t>Conducido &gt; 24,4 kW = gente cualificada</a:t>
+              <a:rPr sz="1900" b="0" i="0">
+                <a:solidFill>
+                  <a:srgbClr val="FFFFFF"/>
+                </a:solidFill>
+                <a:latin typeface="Montserrat"/>
+              </a:rPr>
+              <a:t>Tipos A, B y C: de dónde respira y por dónde echa el humo</a:t>
+            </a:r>
+          </a:p>
+          <a:p>
+            <a:pPr>
+              <a:spcAft>
+                <a:spcPts val="1200"/>
+              </a:spcAft>
+            </a:pPr>
+            <a:r>
+              <a:rPr sz="2000" b="1" i="0">
+                <a:solidFill>
+                  <a:srgbClr val="CADCFC"/>
+                </a:solidFill>
+                <a:latin typeface="Montserrat"/>
+              </a:rPr>
+              <a:t>✓  </a:t>
+            </a:r>
+            <a:r>
+              <a:rPr sz="1900" b="0" i="0">
+                <a:solidFill>
+                  <a:srgbClr val="FFFFFF"/>
+                </a:solidFill>
+                <a:latin typeface="Montserrat"/>
+              </a:rPr>
+              <a:t>Tipo de aparato ≠ categoría del carné</a:t>
+            </a:r>
+          </a:p>
+          <a:p>
+            <a:pPr>
+              <a:spcAft>
+                <a:spcPts val="1200"/>
+              </a:spcAft>
+            </a:pPr>
+            <a:r>
+              <a:rPr sz="2000" b="1" i="0">
+                <a:solidFill>
+                  <a:srgbClr val="CADCFC"/>
+                </a:solidFill>
+                <a:latin typeface="Montserrat"/>
+              </a:rPr>
+              <a:t>✓  </a:t>
+            </a:r>
+            <a:r>
+              <a:rPr sz="1900" b="0" i="0">
+                <a:solidFill>
+                  <a:srgbClr val="FFFFFF"/>
+                </a:solidFill>
+                <a:latin typeface="Montserrat"/>
+              </a:rPr>
+              <a:t>Conectado → 7; suelto → 6; latiguillo lo pone el usuario</a:t>
+            </a:r>
+          </a:p>
+          <a:p>
+            <a:pPr>
+              <a:spcAft>
+                <a:spcPts val="1200"/>
+              </a:spcAft>
+            </a:pPr>
+            <a:r>
+              <a:rPr sz="2000" b="1" i="0">
+                <a:solidFill>
+                  <a:srgbClr val="CADCFC"/>
+                </a:solidFill>
+                <a:latin typeface="Montserrat"/>
+              </a:rPr>
+              <a:t>✓  </a:t>
+            </a:r>
+            <a:r>
+              <a:rPr sz="1900" b="0" i="0">
+                <a:solidFill>
+                  <a:srgbClr val="FFFFFF"/>
+                </a:solidFill>
+                <a:latin typeface="Montserrat"/>
+              </a:rPr>
+              <a:t>Arrancas, certificas (anexo 4) y archivas 5 años</a:t>
+            </a:r>
+          </a:p>
+        </p:txBody>
+      </p:sp>
+      <p:sp>
+        <p:nvSpPr>
+          <p:cNvPr id="6" name="Rounded Rectangle 5"/>
+          <p:cNvSpPr/>
+          <p:nvPr/>
+        </p:nvSpPr>
+        <p:spPr>
+          <a:xfrm>
+            <a:off x="822960" y="5532120"/>
+            <a:ext cx="10515600" cy="777240"/>
+          </a:xfrm>
+          <a:prstGeom prst="roundRect">
+            <a:avLst/>
+          </a:prstGeom>
+          <a:solidFill>
+            <a:srgbClr val="2E3A80"/>
+          </a:solidFill>
+          <a:ln>
+            <a:noFill/>
+          </a:ln>
+          <a:effectLst/>
+        </p:spPr>
+        <p:style>
+          <a:lnRef idx="1">
+            <a:schemeClr val="accent1"/>
+          </a:lnRef>
+          <a:fillRef idx="3">
+            <a:schemeClr val="accent1"/>
+          </a:fillRef>
+          <a:effectRef idx="2">
+            <a:schemeClr val="accent1"/>
+          </a:effectRef>
+          <a:fontRef idx="minor">
+            <a:schemeClr val="lt1"/>
+          </a:fontRef>
+        </p:style>
+        <p:txBody>
+          <a:bodyPr rtlCol="0" anchor="ctr"/>
+          <a:lstStyle/>
+          <a:p>
+            <a:pPr algn="ctr"/>
+          </a:p>
+        </p:txBody>
+      </p:sp>
+      <p:sp>
+        <p:nvSpPr>
+          <p:cNvPr id="7" name="TextBox 6"/>
+          <p:cNvSpPr txBox="1"/>
+          <p:nvPr/>
+        </p:nvSpPr>
+        <p:spPr>
+          <a:xfrm>
+            <a:off x="1051560" y="5605272"/>
+            <a:ext cx="10058400" cy="640080"/>
+          </a:xfrm>
+          <a:prstGeom prst="rect">
+            <a:avLst/>
+          </a:prstGeom>
+          <a:noFill/>
+        </p:spPr>
+        <p:txBody>
+          <a:bodyPr wrap="square">
+            <a:spAutoFit/>
+          </a:bodyPr>
+          <a:lstStyle/>
+          <a:p>
+            <a:r>
+              <a:rPr sz="1500" b="1" i="1">
+                <a:solidFill>
+                  <a:srgbClr val="CADCFC"/>
+                </a:solidFill>
+                <a:latin typeface="Montserrat"/>
+              </a:rPr>
+              <a:t>Ya no eres solo teoría: sabes dejar un aparato en regla. Vamos a la letra pequeña de la certificación.</a:t>
             </a:r>
           </a:p>
         </p:txBody>
@@ -5691,7 +6726,7 @@
                 </a:solidFill>
                 <a:latin typeface="Montserrat"/>
               </a:rPr>
-              <a:t>002 / 012</a:t>
+              <a:t>002 / 014</a:t>
             </a:r>
           </a:p>
         </p:txBody>
@@ -5875,7 +6910,7 @@
                 </a:solidFill>
                 <a:latin typeface="Montserrat"/>
               </a:rPr>
-              <a:t>tipos de aparato: A, B y C</a:t>
+              <a:t>tipos de aparato por combustión</a:t>
             </a:r>
           </a:p>
         </p:txBody>
@@ -5991,7 +7026,7 @@
                 </a:solidFill>
                 <a:latin typeface="Montserrat"/>
               </a:rPr>
-              <a:t>kW, umbral del aparato exigente</a:t>
+              <a:t>kW: umbral de aparatos exigentes</a:t>
             </a:r>
           </a:p>
         </p:txBody>
@@ -6107,7 +7142,7 @@
                 </a:solidFill>
                 <a:latin typeface="Montserrat"/>
               </a:rPr>
-              <a:t>años de archivo del certificado</a:t>
+              <a:t>años archivando el certificado</a:t>
             </a:r>
           </a:p>
         </p:txBody>
@@ -6204,7 +7239,7 @@
                 </a:solidFill>
                 <a:latin typeface="Montserrat"/>
               </a:rPr>
-              <a:t>003 / 012</a:t>
+              <a:t>003 / 014</a:t>
             </a:r>
           </a:p>
         </p:txBody>
@@ -6306,7 +7341,7 @@
                 </a:solidFill>
                 <a:latin typeface="Montserrat"/>
               </a:rPr>
-              <a:t>Aparatos tipo A, B y C</a:t>
+              <a:t>De dónde respira y por dónde echa el humo</a:t>
             </a:r>
           </a:p>
         </p:txBody>
@@ -6354,7 +7389,7 @@
                 </a:solidFill>
                 <a:latin typeface="Montserrat"/>
               </a:rPr>
-              <a:t>A: aire del local, humos al local</a:t>
+              <a:t>Clasificación por combustión: A, B y C</a:t>
             </a:r>
           </a:p>
           <a:p>
@@ -6379,7 +7414,7 @@
                 </a:solidFill>
                 <a:latin typeface="Montserrat"/>
               </a:rPr>
-              <a:t>B: aire del local, humos al exterior</a:t>
+              <a:t>Toma de aire y evacuación de humos</a:t>
             </a:r>
           </a:p>
           <a:p>
@@ -6404,39 +7439,14 @@
                 </a:solidFill>
                 <a:latin typeface="Montserrat"/>
               </a:rPr>
-              <a:t>C: estanco, aire y humos al exterior</a:t>
-            </a:r>
-          </a:p>
-          <a:p>
-            <a:pPr>
-              <a:spcAft>
-                <a:spcPts val="1000"/>
-              </a:spcAft>
-            </a:pPr>
-            <a:r>
-              <a:rPr sz="1600" b="1" i="0">
-                <a:solidFill>
-                  <a:srgbClr val="2E3A80"/>
-                </a:solidFill>
-                <a:latin typeface="Montserrat"/>
-              </a:rPr>
-              <a:t>•  </a:t>
-            </a:r>
-            <a:r>
-              <a:rPr sz="1600" b="0" i="0">
-                <a:solidFill>
-                  <a:srgbClr val="1B2330"/>
-                </a:solidFill>
-                <a:latin typeface="Montserrat"/>
-              </a:rPr>
-              <a:t>B y C = conducidos</a:t>
-            </a:r>
-          </a:p>
-        </p:txBody>
-      </p:sp>
-      <p:sp>
-        <p:nvSpPr>
-          <p:cNvPr id="8" name="imgph" descr="IMGQ:condensing gas boiler flue"/>
+              <a:t>Materia fija de examen</a:t>
+            </a:r>
+          </a:p>
+        </p:txBody>
+      </p:sp>
+      <p:sp>
+        <p:nvSpPr>
+          <p:cNvPr id="8" name="imgph" descr="IMGQ:condensing gas boiler flue pipe"/>
           <p:cNvSpPr/>
           <p:nvPr/>
         </p:nvSpPr>
@@ -6522,7 +7532,7 @@
                 </a:solidFill>
                 <a:latin typeface="Montserrat"/>
               </a:rPr>
-              <a:t>condensing gas boiler flue</a:t>
+              <a:t>condensing gas boiler flue pipe</a:t>
             </a:r>
           </a:p>
         </p:txBody>
@@ -6619,7 +7629,7 @@
                 </a:solidFill>
                 <a:latin typeface="Montserrat"/>
               </a:rPr>
-              <a:t>004 / 012</a:t>
+              <a:t>004 / 014</a:t>
             </a:r>
           </a:p>
         </p:txBody>
@@ -6687,7 +7697,7 @@
                 </a:solidFill>
                 <a:latin typeface="Montserrat"/>
               </a:rPr>
-              <a:t>REGLA MNEMOTÉCNICA</a:t>
+              <a:t>TIPOS A · B · C</a:t>
             </a:r>
           </a:p>
         </p:txBody>
@@ -6721,7 +7731,7 @@
                 </a:solidFill>
                 <a:latin typeface="Montserrat"/>
               </a:rPr>
-              <a:t>Por dónde respira y por dónde echa el humo</a:t>
+              <a:t>Los tres tipos, uno a uno</a:t>
             </a:r>
           </a:p>
         </p:txBody>
@@ -6769,7 +7779,7 @@
                 </a:solidFill>
                 <a:latin typeface="Montserrat"/>
               </a:rPr>
-              <a:t>A: respira y echa al local</a:t>
+              <a:t>A: respira del local, echa al local</a:t>
             </a:r>
           </a:p>
           <a:p>
@@ -6819,7 +7829,7 @@
                 </a:solidFill>
                 <a:latin typeface="Montserrat"/>
               </a:rPr>
-              <a:t>C: respira y echa fuera</a:t>
+              <a:t>C: respira de fuera, echa fuera (estanco)</a:t>
             </a:r>
           </a:p>
           <a:p>
@@ -6844,14 +7854,14 @@
                 </a:solidFill>
                 <a:latin typeface="Montserrat"/>
               </a:rPr>
-              <a:t>Más aislado = menos depende de ventilación</a:t>
-            </a:r>
-          </a:p>
-        </p:txBody>
-      </p:sp>
-      <p:sp>
-        <p:nvSpPr>
-          <p:cNvPr id="8" name="imgph" descr="IMGQ:wall vent grille exterior"/>
+              <a:t>Más aislado del local, más seguro</a:t>
+            </a:r>
+          </a:p>
+        </p:txBody>
+      </p:sp>
+      <p:sp>
+        <p:nvSpPr>
+          <p:cNvPr id="8" name="imgph" descr="IMGQ:sealed balanced flue gas boiler"/>
           <p:cNvSpPr/>
           <p:nvPr/>
         </p:nvSpPr>
@@ -6937,7 +7947,7 @@
                 </a:solidFill>
                 <a:latin typeface="Montserrat"/>
               </a:rPr>
-              <a:t>wall vent grille exterior</a:t>
+              <a:t>sealed balanced flue gas boiler</a:t>
             </a:r>
           </a:p>
         </p:txBody>
@@ -7034,7 +8044,7 @@
                 </a:solidFill>
                 <a:latin typeface="Montserrat"/>
               </a:rPr>
-              <a:t>005 / 012</a:t>
+              <a:t>005 / 014</a:t>
             </a:r>
           </a:p>
         </p:txBody>
@@ -7102,7 +8112,7 @@
                 </a:solidFill>
                 <a:latin typeface="Montserrat"/>
               </a:rPr>
-              <a:t>AVISO DE EXAMEN</a:t>
+              <a:t>CONDUCIDOS VS. CARNÉ</a:t>
             </a:r>
           </a:p>
         </p:txBody>
@@ -7136,7 +8146,7 @@
                 </a:solidFill>
                 <a:latin typeface="Montserrat"/>
               </a:rPr>
-              <a:t>Tipos ≠ categorías de instalador</a:t>
+              <a:t>No confundas tipo con categoría</a:t>
             </a:r>
           </a:p>
         </p:txBody>
@@ -7184,7 +8194,7 @@
                 </a:solidFill>
                 <a:latin typeface="Montserrat"/>
               </a:rPr>
-              <a:t>Tipo A/B/C: cómo quema el aparato</a:t>
+              <a:t>B y C = aparatos conducidos</a:t>
             </a:r>
           </a:p>
           <a:p>
@@ -7209,7 +8219,7 @@
                 </a:solidFill>
                 <a:latin typeface="Montserrat"/>
               </a:rPr>
-              <a:t>Categoría A/B/C: nivel del carné</a:t>
+              <a:t>Tipo A/B/C = cómo quema el aparato</a:t>
             </a:r>
           </a:p>
           <a:p>
@@ -7234,7 +8244,32 @@
                 </a:solidFill>
                 <a:latin typeface="Montserrat"/>
               </a:rPr>
-              <a:t>Categoría B trabaja con A, B y C</a:t>
+              <a:t>Categoría A/B/C = carné del instalador</a:t>
+            </a:r>
+          </a:p>
+          <a:p>
+            <a:pPr>
+              <a:spcAft>
+                <a:spcPts val="1000"/>
+              </a:spcAft>
+            </a:pPr>
+            <a:r>
+              <a:rPr sz="1600" b="1" i="0">
+                <a:solidFill>
+                  <a:srgbClr val="2E3A80"/>
+                </a:solidFill>
+                <a:latin typeface="Montserrat"/>
+              </a:rPr>
+              <a:t>•  </a:t>
+            </a:r>
+            <a:r>
+              <a:rPr sz="1600" b="0" i="0">
+                <a:solidFill>
+                  <a:srgbClr val="1B2330"/>
+                </a:solidFill>
+                <a:latin typeface="Montserrat"/>
+              </a:rPr>
+              <a:t>Con categoría B trabajas tipos A, B o C</a:t>
             </a:r>
           </a:p>
         </p:txBody>
@@ -7424,7 +8459,7 @@
                 </a:solidFill>
                 <a:latin typeface="Montserrat"/>
               </a:rPr>
-              <a:t>006 / 012</a:t>
+              <a:t>006 / 014</a:t>
             </a:r>
           </a:p>
         </p:txBody>
@@ -7492,7 +8527,7 @@
                 </a:solidFill>
                 <a:latin typeface="Montserrat"/>
               </a:rPr>
-              <a:t>APARTADOS 5.1 Y 5.5</a:t>
+              <a:t>APARTADO 5.1 · AUTORIZACIÓN</a:t>
             </a:r>
           </a:p>
         </p:txBody>
@@ -7526,7 +8561,7 @@
                 </a:solidFill>
                 <a:latin typeface="Montserrat"/>
               </a:rPr>
-              <a:t>Trámite con la Administración: ninguno</a:t>
+              <a:t>Instalar un aparato no pide permiso</a:t>
             </a:r>
           </a:p>
         </p:txBody>
@@ -7574,7 +8609,7 @@
                 </a:solidFill>
                 <a:latin typeface="Montserrat"/>
               </a:rPr>
-              <a:t>No precisa autorización previa</a:t>
+              <a:t>No precisa autorización administrativa</a:t>
             </a:r>
           </a:p>
           <a:p>
@@ -7599,7 +8634,7 @@
                 </a:solidFill>
                 <a:latin typeface="Montserrat"/>
               </a:rPr>
-              <a:t>No precisa comunicación posterior</a:t>
+              <a:t>En gas: hacer y, si toca, comunicar</a:t>
             </a:r>
           </a:p>
           <a:p>
@@ -7624,14 +8659,14 @@
                 </a:solidFill>
                 <a:latin typeface="Montserrat"/>
               </a:rPr>
-              <a:t>Sí: certificado de puesta en marcha</a:t>
-            </a:r>
-          </a:p>
-        </p:txBody>
-      </p:sp>
-      <p:sp>
-        <p:nvSpPr>
-          <p:cNvPr id="8" name="imgph" descr="IMGQ:office paperwork stamp desk"/>
+              <a:t>Aquí ni siquiera hay que comunicar</a:t>
+            </a:r>
+          </a:p>
+        </p:txBody>
+      </p:sp>
+      <p:sp>
+        <p:nvSpPr>
+          <p:cNvPr id="8" name="imgph" descr="IMGQ:gas boiler wall mounted kitchen"/>
           <p:cNvSpPr/>
           <p:nvPr/>
         </p:nvSpPr>
@@ -7717,7 +8752,7 @@
                 </a:solidFill>
                 <a:latin typeface="Montserrat"/>
               </a:rPr>
-              <a:t>office paperwork stamp desk</a:t>
+              <a:t>gas boiler wall mounted kitchen</a:t>
             </a:r>
           </a:p>
         </p:txBody>
@@ -7814,7 +8849,7 @@
                 </a:solidFill>
                 <a:latin typeface="Montserrat"/>
               </a:rPr>
-              <a:t>007 / 012</a:t>
+              <a:t>007 / 014</a:t>
             </a:r>
           </a:p>
         </p:txBody>
@@ -7964,7 +8999,7 @@
                 </a:solidFill>
                 <a:latin typeface="Montserrat"/>
               </a:rPr>
-              <a:t>Regla: siempre el instalador (UNE 60670-7)</a:t>
+              <a:t>Regla: siempre un instalador</a:t>
             </a:r>
           </a:p>
           <a:p>
@@ -7989,7 +9024,7 @@
                 </a:solidFill>
                 <a:latin typeface="Montserrat"/>
               </a:rPr>
-              <a:t>Excepción: tubo flexible con abrazadera</a:t>
+              <a:t>Conexión según UNE 60670-7</a:t>
             </a:r>
           </a:p>
           <a:p>
@@ -8014,7 +9049,32 @@
                 </a:solidFill>
                 <a:latin typeface="Montserrat"/>
               </a:rPr>
-              <a:t>No conectados: UNE 60670-6, cap. 4</a:t>
+              <a:t>Excepción: tubo flexible con abrazadera</a:t>
+            </a:r>
+          </a:p>
+          <a:p>
+            <a:pPr>
+              <a:spcAft>
+                <a:spcPts val="1000"/>
+              </a:spcAft>
+            </a:pPr>
+            <a:r>
+              <a:rPr sz="1600" b="1" i="0">
+                <a:solidFill>
+                  <a:srgbClr val="2E3A80"/>
+                </a:solidFill>
+                <a:latin typeface="Montserrat"/>
+              </a:rPr>
+              <a:t>•  </a:t>
+            </a:r>
+            <a:r>
+              <a:rPr sz="1600" b="0" i="0">
+                <a:solidFill>
+                  <a:srgbClr val="1B2330"/>
+                </a:solidFill>
+                <a:latin typeface="Montserrat"/>
+              </a:rPr>
+              <a:t>Ese lo puede poner el usuario</a:t>
             </a:r>
           </a:p>
         </p:txBody>
@@ -8204,7 +9264,7 @@
                 </a:solidFill>
                 <a:latin typeface="Montserrat"/>
               </a:rPr>
-              <a:t>008 / 012</a:t>
+              <a:t>008 / 014</a:t>
             </a:r>
           </a:p>
         </p:txBody>
@@ -8272,7 +9332,7 @@
                 </a:solidFill>
                 <a:latin typeface="Montserrat"/>
               </a:rPr>
-              <a:t>APARTADO 5.3.1</a:t>
+              <a:t>APARTADO 5.2 · NO CONECTADOS</a:t>
             </a:r>
           </a:p>
         </p:txBody>
@@ -8306,7 +9366,7 @@
                 </a:solidFill>
                 <a:latin typeface="Montserrat"/>
               </a:rPr>
-              <a:t>Quién arranca, mantiene y repara</a:t>
+              <a:t>Los aparatos sueltos</a:t>
             </a:r>
           </a:p>
         </p:txBody>
@@ -8354,7 +9414,7 @@
                 </a:solidFill>
                 <a:latin typeface="Montserrat"/>
               </a:rPr>
-              <a:t>Conducidos (B/C) &gt; 24,4 kW</a:t>
+              <a:t>No conectados a instalación receptora</a:t>
             </a:r>
           </a:p>
           <a:p>
@@ -8379,7 +9439,7 @@
                 </a:solidFill>
                 <a:latin typeface="Montserrat"/>
               </a:rPr>
-              <a:t>y vitrocerámicas de fuegos cubiertos</a:t>
+              <a:t>Condiciones de ubicación: UNE 60670-6</a:t>
             </a:r>
           </a:p>
           <a:p>
@@ -8404,39 +9464,14 @@
                 </a:solidFill>
                 <a:latin typeface="Montserrat"/>
               </a:rPr>
-              <a:t>→ SAT certificado o instalador cap. 4</a:t>
-            </a:r>
-          </a:p>
-          <a:p>
-            <a:pPr>
-              <a:spcAft>
-                <a:spcPts val="1000"/>
-              </a:spcAft>
-            </a:pPr>
-            <a:r>
-              <a:rPr sz="1600" b="1" i="0">
-                <a:solidFill>
-                  <a:srgbClr val="2E3A80"/>
-                </a:solidFill>
-                <a:latin typeface="Montserrat"/>
-              </a:rPr>
-              <a:t>•  </a:t>
-            </a:r>
-            <a:r>
-              <a:rPr sz="1600" b="0" i="0">
-                <a:solidFill>
-                  <a:srgbClr val="1B2330"/>
-                </a:solidFill>
-                <a:latin typeface="Montserrat"/>
-              </a:rPr>
-              <a:t>Resto: SAT o empresa instaladora</a:t>
-            </a:r>
-          </a:p>
-        </p:txBody>
-      </p:sp>
-      <p:sp>
-        <p:nvSpPr>
-          <p:cNvPr id="8" name="imgph" descr="IMGQ:technician servicing gas boiler"/>
+              <a:t>Regla: conectado → 7; suelto → 6</a:t>
+            </a:r>
+          </a:p>
+        </p:txBody>
+      </p:sp>
+      <p:sp>
+        <p:nvSpPr>
+          <p:cNvPr id="8" name="imgph" descr="IMGQ:portable gas heater room"/>
           <p:cNvSpPr/>
           <p:nvPr/>
         </p:nvSpPr>
@@ -8522,7 +9557,7 @@
                 </a:solidFill>
                 <a:latin typeface="Montserrat"/>
               </a:rPr>
-              <a:t>technician servicing gas boiler</a:t>
+              <a:t>portable gas heater room</a:t>
             </a:r>
           </a:p>
         </p:txBody>
@@ -8619,7 +9654,7 @@
                 </a:solidFill>
                 <a:latin typeface="Montserrat"/>
               </a:rPr>
-              <a:t>009 / 012</a:t>
+              <a:t>009 / 014</a:t>
             </a:r>
           </a:p>
         </p:txBody>
@@ -8687,7 +9722,7 @@
                 </a:solidFill>
                 <a:latin typeface="Montserrat"/>
               </a:rPr>
-              <a:t>APARTADO 5.3.2</a:t>
+              <a:t>APARTADO 5.3.1 · QUIÉN ARRANCA</a:t>
             </a:r>
           </a:p>
         </p:txBody>
@@ -8721,7 +9756,7 @@
                 </a:solidFill>
                 <a:latin typeface="Montserrat"/>
               </a:rPr>
-              <a:t>Cambio de familia de gas</a:t>
+              <a:t>El umbral de los 24,4 kW</a:t>
             </a:r>
           </a:p>
         </p:txBody>
@@ -8769,7 +9804,7 @@
                 </a:solidFill>
                 <a:latin typeface="Montserrat"/>
               </a:rPr>
-              <a:t>Ejemplo: de natural a propano/butano</a:t>
+              <a:t>Conducidos (B y C) de más de 24,4 kW</a:t>
             </a:r>
           </a:p>
           <a:p>
@@ -8794,7 +9829,7 @@
                 </a:solidFill>
                 <a:latin typeface="Montserrat"/>
               </a:rPr>
-              <a:t>SAT certificado o instalador cat. A o B</a:t>
+              <a:t>Y vitrocerámicas de fuegos cubiertos</a:t>
             </a:r>
           </a:p>
           <a:p>
@@ -8819,7 +9854,7 @@
                 </a:solidFill>
                 <a:latin typeface="Montserrat"/>
               </a:rPr>
-              <a:t>La categoría C no puede</a:t>
+              <a:t>Solo SAT certificado o instalador cualificado</a:t>
             </a:r>
           </a:p>
           <a:p>
@@ -8844,14 +9879,14 @@
                 </a:solidFill>
                 <a:latin typeface="Montserrat"/>
               </a:rPr>
-              <a:t>Componentes idénticos al certificado</a:t>
-            </a:r>
-          </a:p>
-        </p:txBody>
-      </p:sp>
-      <p:sp>
-        <p:nvSpPr>
-          <p:cNvPr id="8" name="imgph" descr="IMGQ:gas injector nozzle replacement"/>
+              <a:t>El resto: SAT o empresa instaladora</a:t>
+            </a:r>
+          </a:p>
+        </p:txBody>
+      </p:sp>
+      <p:sp>
+        <p:nvSpPr>
+          <p:cNvPr id="8" name="imgph" descr="IMGQ:technician servicing gas boiler"/>
           <p:cNvSpPr/>
           <p:nvPr/>
         </p:nvSpPr>
@@ -8937,7 +9972,7 @@
                 </a:solidFill>
                 <a:latin typeface="Montserrat"/>
               </a:rPr>
-              <a:t>gas injector nozzle replacement</a:t>
+              <a:t>technician servicing gas boiler</a:t>
             </a:r>
           </a:p>
         </p:txBody>

--- a/Curso Gas B/05 - ITC-ICG 08 - Aparatos de gas/05 - ITC-ICG 08 - Aparatos de gas - Vídeo 2.pptx
+++ b/Curso Gas B/05 - ITC-ICG 08 - Aparatos de gas/05 - ITC-ICG 08 - Aparatos de gas - Vídeo 2.pptx
@@ -19,6 +19,7 @@
     <p:sldId id="267" r:id="rId19"/>
     <p:sldId id="268" r:id="rId20"/>
     <p:sldId id="269" r:id="rId21"/>
+    <p:sldId id="270" r:id="rId22"/>
   </p:sldIdLst>
   <p:sldSz cx="12191695" cy="6858000" type="screen4x3"/>
   <p:notesSz cx="6858000" cy="9144000"/>
@@ -590,12 +591,12 @@
           <a:lstStyle/>
           <a:p>
             <a:r>
-              <a:t>N1: ¿Qué es adecuar un aparato por cambio de familia de gas?</a:t>
-            </a:r>
-          </a:p>
-          <a:p>
-            <a:r>
-              <a:t>N2: Cambiar de familia es, ni más ni menos, cambiar el tipo de gas. Por ejemplo, pasar una caldera de gas natural, que es la segunda familia, a propano o butano, que es la tercera familia; hay que cambiar inyectores y reglajes. La ITC lo reserva a dos: al servicio técnico del fabricante con sistema de calidad certificado, o a instaladores de gas de categoría A o B que cumplan el capítulo cuatro de la ITC-ICG cero nueve. Fíjate en que aquí sí manda la categoría del carné: la categoría C no puede hacerlo. Y una condición de oro: los recambios deben ser de características idénticas a las aprobadas en la certificación de tipo. Nada de piezas que hacen el apaño, porque una mala adecuación te da llamas amarillas y monóxido de carbono.</a:t>
+              <a:t>N1: ¿Quién puede poner en marcha, mantener y reparar un aparato?</a:t>
+            </a:r>
+          </a:p>
+          <a:p>
+            <a:r>
+              <a:t>N2: Aquí hay una línea que separa el aparato exigente del aparato normal, y es la potencia. Los aparatos conducidos, es decir tipo B y C, de más de veinticuatro coma cuatro kilovatios de potencia útil, y las vitrocerámicas a gas de fuegos cubiertos, solo los pueden poner en marcha, mantener o reparar el servicio técnico del fabricante con un sistema de calidad certificado, o instaladores de gas que cumplan el capítulo cuatro de la ITC-ICG cero nueve. Para todo lo demás, los de menor potencia o los de tipo A, basta con el servicio técnico del fabricante o una empresa instaladora. Truco: más de veinticuatro coma cuatro kilovatios y con humos conducidos, gente especialmente cualificada.</a:t>
             </a:r>
           </a:p>
         </p:txBody>
@@ -665,12 +666,12 @@
           <a:lstStyle/>
           <a:p>
             <a:r>
-              <a:t>N1: Al arrancar el aparato, ¿qué se comprueba y qué papel se entrega?</a:t>
-            </a:r>
-          </a:p>
-          <a:p>
-            <a:r>
-              <a:t>N2: Dos cosas van juntas. Primero, las comprobaciones mínimas para la puesta en marcha de los aparatos conectados salen de la norma UNE sesenta mil seiscientos setenta, parte diez, más las indicaciones adicionales del fabricante. Nunca es solo la norma ni solo el manual: son las dos cosas, porque el fabricante conoce su aparato y puede exigir pasos extra. Segundo, no basta con dejarlo funcionando: el agente que hace la puesta en marcha debe emitir y entregar al cliente un certificado de puesta en marcha, según el modelo del anexo cuatro. Y guardarse una copia cinco años a disposición de la comunidad autónoma. Dos datos de examen que caen juntos: certificado de puesta en marcha, y cinco años de archivo.</a:t>
+              <a:t>N1: ¿Qué es adecuar un aparato por cambio de familia de gas?</a:t>
+            </a:r>
+          </a:p>
+          <a:p>
+            <a:r>
+              <a:t>N2: Cambiar de familia es, ni más ni menos, cambiar el tipo de gas. Por ejemplo, pasar una caldera de gas natural, que es la segunda familia, a propano o butano, que es la tercera familia; hay que cambiar inyectores y reglajes. La ITC lo reserva a dos: al servicio técnico del fabricante con sistema de calidad certificado, o a instaladores de gas de categoría A o B que cumplan el capítulo cuatro de la ITC-ICG cero nueve. Fíjate en que aquí sí manda la categoría del carné: la categoría C no puede hacerlo. Y una condición de oro: los recambios deben ser de características idénticas a las aprobadas en la certificación de tipo. Nada de piezas que hacen el apaño, porque una mala adecuación te da llamas amarillas y monóxido de carbono.</a:t>
             </a:r>
           </a:p>
         </p:txBody>
@@ -740,12 +741,12 @@
           <a:lstStyle/>
           <a:p>
             <a:r>
-              <a:t>N1: Después de instalar el aparato, ¿hay que comunicar algo a la Administración?</a:t>
-            </a:r>
-          </a:p>
-          <a:p>
-            <a:r>
-              <a:t>N2: No se precisa ninguna comunicación. Cierra el círculo con lo que vimos en el cinco punto uno: instalar un aparato ni necesita autorización previa ni comunicación posterior. Lo único obligatorio es el certificado de puesta en marcha que le das al cliente y archivas tú. Pero ojo con no mezclar dos papeles: esto es del aparato. La comunicación de la instalación receptora es otra cosa, esa sí, la presenta el titular en un plazo de treinta días. Instalación y aparato tienen su propio papeleo; no los confundas.</a:t>
+              <a:t>N1: Al arrancar el aparato, ¿qué se comprueba y qué papel se entrega?</a:t>
+            </a:r>
+          </a:p>
+          <a:p>
+            <a:r>
+              <a:t>N2: Dos cosas van juntas. Primero, las comprobaciones mínimas para la puesta en marcha de los aparatos conectados salen de la norma UNE sesenta mil seiscientos setenta, parte diez, más las indicaciones adicionales del fabricante. Nunca es solo la norma ni solo el manual: son las dos cosas, porque el fabricante conoce su aparato y puede exigir pasos extra. Segundo, no basta con dejarlo funcionando: el agente que hace la puesta en marcha debe emitir y entregar al cliente un certificado de puesta en marcha, según el modelo del anexo cuatro. Y guardarse una copia cinco años a disposición de la comunidad autónoma. Dos datos de examen que caen juntos: certificado de puesta en marcha, y cinco años de archivo.</a:t>
             </a:r>
           </a:p>
         </p:txBody>
@@ -815,12 +816,12 @@
           <a:lstStyle/>
           <a:p>
             <a:r>
-              <a:t>N1: ¿Qué información mínima lleva ese certificado?</a:t>
-            </a:r>
-          </a:p>
-          <a:p>
-            <a:r>
-              <a:t>N2: Tiene bloques fáciles de recordar, contesta a cuatro preguntas: quién arranca, el agente, con nombre, dirección, NIF y categoría; para quién, el cliente, con nombre y dirección; qué, el aparato, con tipo, marca, modelo, potencia y número de fabricación; y cómo salió, las pruebas realizadas y sus resultados. Y aquí un detalle que le encanta al examen: cuando procede, se adjunta la impresión del análisis de combustión, ese ticket de papel que escupe el analizador con el monóxido de carbono, el dióxido de carbono, el tiro y el rendimiento. Es la prueba física de que la combustión es correcta. Por último, lo firma el técnico, con sello de la empresa, y también lo firma el cliente.</a:t>
+              <a:t>N1: Después de instalar el aparato, ¿hay que comunicar algo a la Administración?</a:t>
+            </a:r>
+          </a:p>
+          <a:p>
+            <a:r>
+              <a:t>N2: No se precisa ninguna comunicación. Cierra el círculo con lo que vimos en el cinco punto uno: instalar un aparato ni necesita autorización previa ni comunicación posterior. Lo único obligatorio es el certificado de puesta en marcha que le das al cliente y archivas tú. Pero ojo con no mezclar dos papeles: esto es del aparato. La comunicación de la instalación receptora es otra cosa, esa sí, la presenta el titular en un plazo de treinta días. Instalación y aparato tienen su propio papeleo; no los confundas.</a:t>
             </a:r>
           </a:p>
         </p:txBody>
@@ -890,6 +891,81 @@
           <a:lstStyle/>
           <a:p>
             <a:r>
+              <a:t>N1: ¿Qué información mínima lleva ese certificado?</a:t>
+            </a:r>
+          </a:p>
+          <a:p>
+            <a:r>
+              <a:t>N2: Tiene bloques fáciles de recordar, contesta a cuatro preguntas: quién arranca, el agente, con nombre, dirección, NIF y categoría; para quién, el cliente, con nombre y dirección; qué, el aparato, con tipo, marca, modelo, potencia y número de fabricación; y cómo salió, las pruebas realizadas y sus resultados. Y aquí un detalle que le encanta al examen: cuando procede, se adjunta la impresión del análisis de combustión, ese ticket de papel que escupe el analizador con el monóxido de carbono, el dióxido de carbono, el tiro y el rendimiento. Es la prueba física de que la combustión es correcta. Por último, lo firma el técnico, con sello de la empresa, y también lo firma el cliente.</a:t>
+            </a:r>
+          </a:p>
+        </p:txBody>
+      </p:sp>
+      <p:sp>
+        <p:nvSpPr>
+          <p:cNvPr id="4" name="Slide Number Placeholder 3"/>
+          <p:cNvSpPr>
+            <a:spLocks noGrp="1"/>
+          </p:cNvSpPr>
+          <p:nvPr>
+            <p:ph type="sldNum" idx="5" sz="quarter"/>
+          </p:nvPr>
+        </p:nvSpPr>
+        <p:spPr/>
+      </p:sp>
+    </p:spTree>
+  </p:cSld>
+  <p:clrMapOvr>
+    <a:masterClrMapping/>
+  </p:clrMapOvr>
+</p:notes>
+</file>
+
+<file path=ppt/notesSlides/notesSlide15.xml><?xml version="1.0" encoding="utf-8"?>
+<p:notes xmlns:a="http://schemas.openxmlformats.org/drawingml/2006/main" xmlns:p="http://schemas.openxmlformats.org/presentationml/2006/main" xmlns:r="http://schemas.openxmlformats.org/officeDocument/2006/relationships">
+  <p:cSld>
+    <p:spTree>
+      <p:nvGrpSpPr>
+        <p:cNvPr id="1" name=""/>
+        <p:cNvGrpSpPr/>
+        <p:nvPr/>
+      </p:nvGrpSpPr>
+      <p:grpSpPr>
+        <a:xfrm>
+          <a:off x="0" y="0"/>
+          <a:ext cx="0" cy="0"/>
+          <a:chOff x="0" y="0"/>
+          <a:chExt cx="0" cy="0"/>
+        </a:xfrm>
+      </p:grpSpPr>
+      <p:sp>
+        <p:nvSpPr>
+          <p:cNvPr id="2" name="Slide Image Placeholder 1"/>
+          <p:cNvSpPr>
+            <a:spLocks noGrp="1"/>
+          </p:cNvSpPr>
+          <p:nvPr>
+            <p:ph type="sldImg" idx="2"/>
+          </p:nvPr>
+        </p:nvSpPr>
+        <p:spPr/>
+      </p:sp>
+      <p:sp>
+        <p:nvSpPr>
+          <p:cNvPr id="3" name="Notes Placeholder 2"/>
+          <p:cNvSpPr>
+            <a:spLocks noGrp="1"/>
+          </p:cNvSpPr>
+          <p:nvPr>
+            <p:ph type="body" idx="3" sz="quarter"/>
+          </p:nvPr>
+        </p:nvSpPr>
+        <p:spPr/>
+        <p:txBody>
+          <a:bodyPr/>
+          <a:lstStyle/>
+          <a:p>
+            <a:r>
               <a:t>N1: Este vídeo es muy práctico. ¿Cómo lo ordeno en la cabeza?</a:t>
             </a:r>
           </a:p>
@@ -1048,16 +1124,7 @@
         <p:txBody>
           <a:bodyPr/>
           <a:lstStyle/>
-          <a:p>
-            <a:r>
-              <a:t>N1: ¿Por qué se clasifican los aparatos en tipos?</a:t>
-            </a:r>
-          </a:p>
-          <a:p>
-            <a:r>
-              <a:t>N2: Porque todo aparato de gas necesita dos cosas: aire para quemar y una salida para los humos. Y según de dónde toma el aire y por dónde echa los humos, se clasifica en tipo A, B o C. Piénsalo con una frase que te va a salvar en el examen: de dónde respira y por dónde echa el humo. Esta clasificación es la que la propia ITC usa cuando habla de aparatos conducidos, así que domínala bien porque es materia fija. En las siguientes diapositivas vemos los tres tipos uno a uno.</a:t>
-            </a:r>
-          </a:p>
+          <a:p/>
         </p:txBody>
       </p:sp>
       <p:sp>
@@ -1125,12 +1192,12 @@
           <a:lstStyle/>
           <a:p>
             <a:r>
-              <a:t>N1: ¿En qué se diferencian el A, el B y el C?</a:t>
-            </a:r>
-          </a:p>
-          <a:p>
-            <a:r>
-              <a:t>N2: Vamos con la frase paso a paso. El tipo A es no conducido: coge el aire del local y devuelve los humos al local, no tiene conducto de evacuación; por eso exige que el recinto esté bien ventilado, como una cocina o un horno. El tipo B es conducido de cámara abierta: coge el aire de combustión del local donde está, pero evacúa los humos al exterior por un conducto; su cámara está abierta al ambiente, como un calentador o una caldera atmosférica. El tipo C es estanco: su circuito, entrada de aire, cámara y salida de humos, está aislado respecto al local; toma el aire de fuera y echa los humos fuera, sin intercambiar aire con la estancia. La lógica: cuanto más aislado del local, más seguro respecto al ambiente; por eso el C es el que menos depende de la ventilación de la estancia.</a:t>
+              <a:t>N1: ¿Por qué se clasifican los aparatos en tipos?</a:t>
+            </a:r>
+          </a:p>
+          <a:p>
+            <a:r>
+              <a:t>N2: Porque todo aparato de gas necesita dos cosas: aire para quemar y una salida para los humos. Y según de dónde toma el aire y por dónde echa los humos, se clasifica en tipo A, B o C. Piénsalo con una frase que te va a salvar en el examen: de dónde respira y por dónde echa el humo. Esta clasificación es la que la propia ITC usa cuando habla de aparatos conducidos, así que domínala bien porque es materia fija. En las siguientes diapositivas vemos los tres tipos uno a uno.</a:t>
             </a:r>
           </a:p>
         </p:txBody>
@@ -1200,12 +1267,12 @@
           <a:lstStyle/>
           <a:p>
             <a:r>
-              <a:t>N1: Tipos A, B, C y categorías A, B, C. ¿No es fácil liarse?</a:t>
-            </a:r>
-          </a:p>
-          <a:p>
-            <a:r>
-              <a:t>N2: Es la trampa clásica del examen, así que vamos a dejarlo clavado. Los aparatos de tipo B y C son los que la ITC llama aparatos conducidos, porque van unidos a un conducto de evacuación de humos. Ahora, no confundas los tipos de aparato con las categorías de instalador de la ITC-ICG cero nueve. Son cosas distintas que comparten letra para liarte. El tipo A, B o C describe cómo quema y evacúa el aparato, su circuito de combustión. La categoría A, B o C es el nivel del carné del instalador, qué instalaciones puede montar una persona. No tienen nada que ver una letra con la otra: un instalador de categoría B puede trabajar con aparatos de tipo A, B o C sin problema.</a:t>
+              <a:t>N1: ¿En qué se diferencian el A, el B y el C?</a:t>
+            </a:r>
+          </a:p>
+          <a:p>
+            <a:r>
+              <a:t>N2: Vamos con la frase paso a paso. El tipo A es no conducido: coge el aire del local y devuelve los humos al local, no tiene conducto de evacuación; por eso exige que el recinto esté bien ventilado, como una cocina o un horno. El tipo B es conducido de cámara abierta: coge el aire de combustión del local donde está, pero evacúa los humos al exterior por un conducto; su cámara está abierta al ambiente, como un calentador o una caldera atmosférica. El tipo C es estanco: su circuito, entrada de aire, cámara y salida de humos, está aislado respecto al local; toma el aire de fuera y echa los humos fuera, sin intercambiar aire con la estancia. La lógica: cuanto más aislado del local, más seguro respecto al ambiente; por eso el C es el que menos depende de la ventilación de la estancia.</a:t>
             </a:r>
           </a:p>
         </p:txBody>
@@ -1275,12 +1342,12 @@
           <a:lstStyle/>
           <a:p>
             <a:r>
-              <a:t>N1: Para colocar un aparato, ¿hay que pedir permiso a la Administración?</a:t>
-            </a:r>
-          </a:p>
-          <a:p>
-            <a:r>
-              <a:t>N2: No. La instalación de los aparatos de gas no precisa autorización administrativa. Enlázalo con la lógica de todo el Reglamento de gas: lo normal es hacer y, cuando toca, comunicar; no pedir permiso y esperar de brazos cruzados. Y en el caso del aparato, la cosa va todavía más lejos, porque como veremos al final del apartado cinco, ni siquiera hay que comunicar. El único papel obligatorio será el certificado de puesta en marcha que le das al cliente.</a:t>
+              <a:t>N1: Tipos A, B, C y categorías A, B, C. ¿No es fácil liarse?</a:t>
+            </a:r>
+          </a:p>
+          <a:p>
+            <a:r>
+              <a:t>N2: Es la trampa clásica del examen, así que vamos a dejarlo clavado. Los aparatos de tipo B y C son los que la ITC llama aparatos conducidos, porque van unidos a un conducto de evacuación de humos. Ahora, no confundas los tipos de aparato con las categorías de instalador de la ITC-ICG cero nueve. Son cosas distintas que comparten letra para liarte. El tipo A, B o C describe cómo quema y evacúa el aparato, su circuito de combustión. La categoría A, B o C es el nivel del carné del instalador, qué instalaciones puede montar una persona. No tienen nada que ver una letra con la otra: un instalador de categoría B puede trabajar con aparatos de tipo A, B o C sin problema.</a:t>
             </a:r>
           </a:p>
         </p:txBody>
@@ -1350,12 +1417,12 @@
           <a:lstStyle/>
           <a:p>
             <a:r>
-              <a:t>N1: ¿Puede cualquiera conectar un aparato de gas?</a:t>
-            </a:r>
-          </a:p>
-          <a:p>
-            <a:r>
-              <a:t>N2: La regla general es clara: la conexión de los aparatos a las instalaciones receptoras se hace según la norma UNE sesenta mil seiscientos setenta, parte siete, y siempre por un instalador. Pero hay una única excepción, y es muy práctica de conocer: cuando la conexión se hace con un tubo flexible elastomérico con abrazadera, que es el típico latiguillo de goma de una cocina de butano, la puede hacer el propio usuario. Por eso cualquiera puede cambiar el tubo de su cocina de gas, pero no conectar una caldera con tubería rígida: eso, sí o sí, es cosa del instalador.</a:t>
+              <a:t>N1: Para colocar un aparato, ¿hay que pedir permiso a la Administración?</a:t>
+            </a:r>
+          </a:p>
+          <a:p>
+            <a:r>
+              <a:t>N2: No. La instalación de los aparatos de gas no precisa autorización administrativa. Enlázalo con la lógica de todo el Reglamento de gas: lo normal es hacer y, cuando toca, comunicar; no pedir permiso y esperar de brazos cruzados. Y en el caso del aparato, la cosa va todavía más lejos, porque como veremos al final del apartado cinco, ni siquiera hay que comunicar. El único papel obligatorio será el certificado de puesta en marcha que le das al cliente.</a:t>
             </a:r>
           </a:p>
         </p:txBody>
@@ -1425,12 +1492,12 @@
           <a:lstStyle/>
           <a:p>
             <a:r>
-              <a:t>N1: ¿Y los aparatos que no van conectados a la instalación receptora?</a:t>
-            </a:r>
-          </a:p>
-          <a:p>
-            <a:r>
-              <a:t>N2: Distingue las dos normas gemelas, porque el examen las cruza. Los aparatos conectados a una instalación receptora van por la UNE sesenta mil seiscientos setenta, parte siete, la de conexión. Los no conectados, por ejemplo una estufa o un aparato suelto, deben cumplir las condiciones de ubicación del capítulo cuatro de la UNE sesenta mil seiscientos setenta, parte seis. La regla de bolsillo para no fallar: conectado, la parte siete; suelto, la parte seis.</a:t>
+              <a:t>N1: ¿Puede cualquiera conectar un aparato de gas?</a:t>
+            </a:r>
+          </a:p>
+          <a:p>
+            <a:r>
+              <a:t>N2: La regla general es clara: la conexión de los aparatos a las instalaciones receptoras se hace según la norma UNE sesenta mil seiscientos setenta, parte siete, y siempre por un instalador. Pero hay una única excepción, y es muy práctica de conocer: cuando la conexión se hace con un tubo flexible elastomérico con abrazadera, que es el típico latiguillo de goma de una cocina de butano, la puede hacer el propio usuario. Por eso cualquiera puede cambiar el tubo de su cocina de gas, pero no conectar una caldera con tubería rígida: eso, sí o sí, es cosa del instalador.</a:t>
             </a:r>
           </a:p>
         </p:txBody>
@@ -1500,12 +1567,12 @@
           <a:lstStyle/>
           <a:p>
             <a:r>
-              <a:t>N1: ¿Quién puede poner en marcha, mantener y reparar un aparato?</a:t>
-            </a:r>
-          </a:p>
-          <a:p>
-            <a:r>
-              <a:t>N2: Aquí hay una línea que separa el aparato exigente del aparato normal, y es la potencia. Los aparatos conducidos, es decir tipo B y C, de más de veinticuatro coma cuatro kilovatios de potencia útil, y las vitrocerámicas a gas de fuegos cubiertos, solo los pueden poner en marcha, mantener o reparar el servicio técnico del fabricante con un sistema de calidad certificado, o instaladores de gas que cumplan el capítulo cuatro de la ITC-ICG cero nueve. Para todo lo demás, los de menor potencia o los de tipo A, basta con el servicio técnico del fabricante o una empresa instaladora. Truco: más de veinticuatro coma cuatro kilovatios y con humos conducidos, gente especialmente cualificada.</a:t>
+              <a:t>N1: ¿Y los aparatos que no van conectados a la instalación receptora?</a:t>
+            </a:r>
+          </a:p>
+          <a:p>
+            <a:r>
+              <a:t>N2: Distingue las dos normas gemelas, porque el examen las cruza. Los aparatos conectados a una instalación receptora van por la UNE sesenta mil seiscientos setenta, parte siete, la de conexión. Los no conectados, por ejemplo una estufa o un aparato suelto, deben cumplir las condiciones de ubicación del capítulo cuatro de la UNE sesenta mil seiscientos setenta, parte seis. La regla de bolsillo para no fallar: conectado, la parte siete; suelto, la parte seis.</a:t>
             </a:r>
           </a:p>
         </p:txBody>
@@ -4580,7 +4647,7 @@
             <a:r>
               <a:rPr sz="1400" b="1" i="0">
                 <a:solidFill>
-                  <a:srgbClr val="CADCFC"/>
+                  <a:srgbClr val="F4A24C"/>
                 </a:solidFill>
                 <a:latin typeface="Montserrat"/>
               </a:rPr>
@@ -4591,13 +4658,57 @@
       </p:sp>
       <p:sp>
         <p:nvSpPr>
-          <p:cNvPr id="4" name="TextBox 3"/>
+          <p:cNvPr id="4" name="Rounded Rectangle 3"/>
+          <p:cNvSpPr/>
+          <p:nvPr/>
+        </p:nvSpPr>
+        <p:spPr>
+          <a:xfrm>
+            <a:off x="868680" y="2057400"/>
+            <a:ext cx="1463040" cy="82296"/>
+          </a:xfrm>
+          <a:prstGeom prst="roundRect">
+            <a:avLst/>
+          </a:prstGeom>
+          <a:solidFill>
+            <a:srgbClr val="E8801A"/>
+          </a:solidFill>
+          <a:ln>
+            <a:noFill/>
+          </a:ln>
+          <a:effectLst/>
+        </p:spPr>
+        <p:style>
+          <a:lnRef idx="1">
+            <a:schemeClr val="accent1"/>
+          </a:lnRef>
+          <a:fillRef idx="3">
+            <a:schemeClr val="accent1"/>
+          </a:fillRef>
+          <a:effectRef idx="2">
+            <a:schemeClr val="accent1"/>
+          </a:effectRef>
+          <a:fontRef idx="minor">
+            <a:schemeClr val="lt1"/>
+          </a:fontRef>
+        </p:style>
+        <p:txBody>
+          <a:bodyPr rtlCol="0" anchor="ctr"/>
+          <a:lstStyle/>
+          <a:p>
+            <a:pPr algn="ctr"/>
+          </a:p>
+        </p:txBody>
+      </p:sp>
+      <p:sp>
+        <p:nvSpPr>
+          <p:cNvPr id="5" name="TextBox 4"/>
           <p:cNvSpPr txBox="1"/>
           <p:nvPr/>
         </p:nvSpPr>
         <p:spPr>
           <a:xfrm>
-            <a:off x="822960" y="2194560"/>
+            <a:off x="822960" y="2286000"/>
             <a:ext cx="10515600" cy="2011680"/>
           </a:xfrm>
           <a:prstGeom prst="rect">
@@ -4636,7 +4747,7 @@
       </p:sp>
       <p:sp>
         <p:nvSpPr>
-          <p:cNvPr id="5" name="TextBox 4"/>
+          <p:cNvPr id="6" name="TextBox 5"/>
           <p:cNvSpPr txBox="1"/>
           <p:nvPr/>
         </p:nvSpPr>
@@ -4760,7 +4871,7 @@
                 </a:solidFill>
                 <a:latin typeface="Montserrat"/>
               </a:rPr>
-              <a:t>010 / 014</a:t>
+              <a:t>010 / 015</a:t>
             </a:r>
           </a:p>
         </p:txBody>
@@ -4808,7 +4919,7 @@
         <p:spPr>
           <a:xfrm>
             <a:off x="822960" y="457200"/>
-            <a:ext cx="8229600" cy="365760"/>
+            <a:ext cx="10058400" cy="365760"/>
           </a:xfrm>
           <a:prstGeom prst="rect">
             <a:avLst/>
@@ -4822,13 +4933,13 @@
           <a:lstStyle/>
           <a:p>
             <a:r>
-              <a:rPr sz="1200" b="1" i="0">
-                <a:solidFill>
-                  <a:srgbClr val="64748B"/>
-                </a:solidFill>
-                <a:latin typeface="Montserrat"/>
-              </a:rPr>
-              <a:t>APARTADO 5.3.2 · ADECUACIÓN</a:t>
+              <a:rPr sz="1300" b="1" i="0">
+                <a:solidFill>
+                  <a:srgbClr val="E8801A"/>
+                </a:solidFill>
+                <a:latin typeface="Montserrat"/>
+              </a:rPr>
+              <a:t>APARTADO 5.3.1 · QUIÉN ARRANCA</a:t>
             </a:r>
           </a:p>
         </p:txBody>
@@ -4856,26 +4967,70 @@
           <a:lstStyle/>
           <a:p>
             <a:r>
-              <a:rPr sz="2700" b="1" i="0">
+              <a:rPr sz="2800" b="1" i="0">
                 <a:solidFill>
                   <a:srgbClr val="1E2761"/>
                 </a:solidFill>
                 <a:latin typeface="Montserrat"/>
               </a:rPr>
-              <a:t>Cambiar de familia de gas</a:t>
-            </a:r>
-          </a:p>
-        </p:txBody>
-      </p:sp>
-      <p:sp>
-        <p:nvSpPr>
-          <p:cNvPr id="7" name="TextBox 6"/>
+              <a:t>El umbral de los 24,4 kW</a:t>
+            </a:r>
+          </a:p>
+        </p:txBody>
+      </p:sp>
+      <p:sp>
+        <p:nvSpPr>
+          <p:cNvPr id="7" name="Rounded Rectangle 6"/>
+          <p:cNvSpPr/>
+          <p:nvPr/>
+        </p:nvSpPr>
+        <p:spPr>
+          <a:xfrm>
+            <a:off x="868680" y="1627632"/>
+            <a:ext cx="2011680" cy="73152"/>
+          </a:xfrm>
+          <a:prstGeom prst="roundRect">
+            <a:avLst/>
+          </a:prstGeom>
+          <a:solidFill>
+            <a:srgbClr val="E8801A"/>
+          </a:solidFill>
+          <a:ln>
+            <a:noFill/>
+          </a:ln>
+          <a:effectLst/>
+        </p:spPr>
+        <p:style>
+          <a:lnRef idx="1">
+            <a:schemeClr val="accent1"/>
+          </a:lnRef>
+          <a:fillRef idx="3">
+            <a:schemeClr val="accent1"/>
+          </a:fillRef>
+          <a:effectRef idx="2">
+            <a:schemeClr val="accent1"/>
+          </a:effectRef>
+          <a:fontRef idx="minor">
+            <a:schemeClr val="lt1"/>
+          </a:fontRef>
+        </p:style>
+        <p:txBody>
+          <a:bodyPr rtlCol="0" anchor="ctr"/>
+          <a:lstStyle/>
+          <a:p>
+            <a:pPr algn="ctr"/>
+          </a:p>
+        </p:txBody>
+      </p:sp>
+      <p:sp>
+        <p:nvSpPr>
+          <p:cNvPr id="8" name="TextBox 7"/>
           <p:cNvSpPr txBox="1"/>
           <p:nvPr/>
         </p:nvSpPr>
         <p:spPr>
           <a:xfrm>
-            <a:off x="822960" y="1920240"/>
+            <a:off x="822960" y="1965960"/>
             <a:ext cx="4983480" cy="4206240"/>
           </a:xfrm>
           <a:prstGeom prst="rect">
@@ -4891,17 +5046,17 @@
           <a:p>
             <a:pPr>
               <a:spcAft>
-                <a:spcPts val="1000"/>
+                <a:spcPts val="1100"/>
               </a:spcAft>
             </a:pPr>
             <a:r>
               <a:rPr sz="1600" b="1" i="0">
                 <a:solidFill>
-                  <a:srgbClr val="2E3A80"/>
-                </a:solidFill>
-                <a:latin typeface="Montserrat"/>
-              </a:rPr>
-              <a:t>•  </a:t>
+                  <a:srgbClr val="E8801A"/>
+                </a:solidFill>
+                <a:latin typeface="Montserrat"/>
+              </a:rPr>
+              <a:t>▸  </a:t>
             </a:r>
             <a:r>
               <a:rPr sz="1600" b="0" i="0">
@@ -4910,23 +5065,23 @@
                 </a:solidFill>
                 <a:latin typeface="Montserrat"/>
               </a:rPr>
-              <a:t>Ejemplo: de natural a propano/butano</a:t>
+              <a:t>Conducidos (B y C) de más de 24,4 kW</a:t>
             </a:r>
           </a:p>
           <a:p>
             <a:pPr>
               <a:spcAft>
-                <a:spcPts val="1000"/>
+                <a:spcPts val="1100"/>
               </a:spcAft>
             </a:pPr>
             <a:r>
               <a:rPr sz="1600" b="1" i="0">
                 <a:solidFill>
-                  <a:srgbClr val="2E3A80"/>
-                </a:solidFill>
-                <a:latin typeface="Montserrat"/>
-              </a:rPr>
-              <a:t>•  </a:t>
+                  <a:srgbClr val="E8801A"/>
+                </a:solidFill>
+                <a:latin typeface="Montserrat"/>
+              </a:rPr>
+              <a:t>▸  </a:t>
             </a:r>
             <a:r>
               <a:rPr sz="1600" b="0" i="0">
@@ -4935,23 +5090,23 @@
                 </a:solidFill>
                 <a:latin typeface="Montserrat"/>
               </a:rPr>
-              <a:t>Solo SAT certificado o categorías A o B</a:t>
+              <a:t>Y vitrocerámicas de fuegos cubiertos</a:t>
             </a:r>
           </a:p>
           <a:p>
             <a:pPr>
               <a:spcAft>
-                <a:spcPts val="1000"/>
+                <a:spcPts val="1100"/>
               </a:spcAft>
             </a:pPr>
             <a:r>
               <a:rPr sz="1600" b="1" i="0">
                 <a:solidFill>
-                  <a:srgbClr val="2E3A80"/>
-                </a:solidFill>
-                <a:latin typeface="Montserrat"/>
-              </a:rPr>
-              <a:t>•  </a:t>
+                  <a:srgbClr val="E8801A"/>
+                </a:solidFill>
+                <a:latin typeface="Montserrat"/>
+              </a:rPr>
+              <a:t>▸  </a:t>
             </a:r>
             <a:r>
               <a:rPr sz="1600" b="0" i="0">
@@ -4960,23 +5115,23 @@
                 </a:solidFill>
                 <a:latin typeface="Montserrat"/>
               </a:rPr>
-              <a:t>La categoría C no puede</a:t>
+              <a:t>Solo SAT certificado o instalador cualificado</a:t>
             </a:r>
           </a:p>
           <a:p>
             <a:pPr>
               <a:spcAft>
-                <a:spcPts val="1000"/>
+                <a:spcPts val="1100"/>
               </a:spcAft>
             </a:pPr>
             <a:r>
               <a:rPr sz="1600" b="1" i="0">
                 <a:solidFill>
-                  <a:srgbClr val="2E3A80"/>
-                </a:solidFill>
-                <a:latin typeface="Montserrat"/>
-              </a:rPr>
-              <a:t>•  </a:t>
+                  <a:srgbClr val="E8801A"/>
+                </a:solidFill>
+                <a:latin typeface="Montserrat"/>
+              </a:rPr>
+              <a:t>▸  </a:t>
             </a:r>
             <a:r>
               <a:rPr sz="1600" b="0" i="0">
@@ -4985,14 +5140,14 @@
                 </a:solidFill>
                 <a:latin typeface="Montserrat"/>
               </a:rPr>
-              <a:t>Componentes idénticos a los certificados</a:t>
-            </a:r>
-          </a:p>
-        </p:txBody>
-      </p:sp>
-      <p:sp>
-        <p:nvSpPr>
-          <p:cNvPr id="8" name="imgph" descr="IMGQ:gas burner injector nozzle replacement"/>
+              <a:t>El resto: SAT o empresa instaladora</a:t>
+            </a:r>
+          </a:p>
+        </p:txBody>
+      </p:sp>
+      <p:sp>
+        <p:nvSpPr>
+          <p:cNvPr id="9" name="imgph" descr="IMGQ:technician servicing gas boiler"/>
           <p:cNvSpPr/>
           <p:nvPr/>
         </p:nvSpPr>
@@ -5038,7 +5193,7 @@
       </p:sp>
       <p:sp>
         <p:nvSpPr>
-          <p:cNvPr id="9" name="TextBox 8"/>
+          <p:cNvPr id="10" name="TextBox 9"/>
           <p:cNvSpPr txBox="1"/>
           <p:nvPr/>
         </p:nvSpPr>
@@ -5078,7 +5233,7 @@
                 </a:solidFill>
                 <a:latin typeface="Montserrat"/>
               </a:rPr>
-              <a:t>gas burner injector nozzle replacement</a:t>
+              <a:t>technician servicing gas boiler</a:t>
             </a:r>
           </a:p>
         </p:txBody>
@@ -5175,7 +5330,7 @@
                 </a:solidFill>
                 <a:latin typeface="Montserrat"/>
               </a:rPr>
-              <a:t>011 / 014</a:t>
+              <a:t>011 / 015</a:t>
             </a:r>
           </a:p>
         </p:txBody>
@@ -5223,7 +5378,7 @@
         <p:spPr>
           <a:xfrm>
             <a:off x="822960" y="457200"/>
-            <a:ext cx="8229600" cy="365760"/>
+            <a:ext cx="10058400" cy="365760"/>
           </a:xfrm>
           <a:prstGeom prst="rect">
             <a:avLst/>
@@ -5237,13 +5392,13 @@
           <a:lstStyle/>
           <a:p>
             <a:r>
-              <a:rPr sz="1200" b="1" i="0">
-                <a:solidFill>
-                  <a:srgbClr val="64748B"/>
-                </a:solidFill>
-                <a:latin typeface="Montserrat"/>
-              </a:rPr>
-              <a:t>APARTADO 5.4 · COMPROBACIONES</a:t>
+              <a:rPr sz="1300" b="1" i="0">
+                <a:solidFill>
+                  <a:srgbClr val="E8801A"/>
+                </a:solidFill>
+                <a:latin typeface="Montserrat"/>
+              </a:rPr>
+              <a:t>APARTADO 5.3.2 · ADECUACIÓN</a:t>
             </a:r>
           </a:p>
         </p:txBody>
@@ -5271,26 +5426,70 @@
           <a:lstStyle/>
           <a:p>
             <a:r>
-              <a:rPr sz="2700" b="1" i="0">
+              <a:rPr sz="2800" b="1" i="0">
                 <a:solidFill>
                   <a:srgbClr val="1E2761"/>
                 </a:solidFill>
                 <a:latin typeface="Montserrat"/>
               </a:rPr>
-              <a:t>El papel que cierra el trabajo</a:t>
-            </a:r>
-          </a:p>
-        </p:txBody>
-      </p:sp>
-      <p:sp>
-        <p:nvSpPr>
-          <p:cNvPr id="7" name="TextBox 6"/>
+              <a:t>Cambiar de familia de gas</a:t>
+            </a:r>
+          </a:p>
+        </p:txBody>
+      </p:sp>
+      <p:sp>
+        <p:nvSpPr>
+          <p:cNvPr id="7" name="Rounded Rectangle 6"/>
+          <p:cNvSpPr/>
+          <p:nvPr/>
+        </p:nvSpPr>
+        <p:spPr>
+          <a:xfrm>
+            <a:off x="868680" y="1627632"/>
+            <a:ext cx="2011680" cy="73152"/>
+          </a:xfrm>
+          <a:prstGeom prst="roundRect">
+            <a:avLst/>
+          </a:prstGeom>
+          <a:solidFill>
+            <a:srgbClr val="E8801A"/>
+          </a:solidFill>
+          <a:ln>
+            <a:noFill/>
+          </a:ln>
+          <a:effectLst/>
+        </p:spPr>
+        <p:style>
+          <a:lnRef idx="1">
+            <a:schemeClr val="accent1"/>
+          </a:lnRef>
+          <a:fillRef idx="3">
+            <a:schemeClr val="accent1"/>
+          </a:fillRef>
+          <a:effectRef idx="2">
+            <a:schemeClr val="accent1"/>
+          </a:effectRef>
+          <a:fontRef idx="minor">
+            <a:schemeClr val="lt1"/>
+          </a:fontRef>
+        </p:style>
+        <p:txBody>
+          <a:bodyPr rtlCol="0" anchor="ctr"/>
+          <a:lstStyle/>
+          <a:p>
+            <a:pPr algn="ctr"/>
+          </a:p>
+        </p:txBody>
+      </p:sp>
+      <p:sp>
+        <p:nvSpPr>
+          <p:cNvPr id="8" name="TextBox 7"/>
           <p:cNvSpPr txBox="1"/>
           <p:nvPr/>
         </p:nvSpPr>
         <p:spPr>
           <a:xfrm>
-            <a:off x="822960" y="1920240"/>
+            <a:off x="822960" y="1965960"/>
             <a:ext cx="4983480" cy="4206240"/>
           </a:xfrm>
           <a:prstGeom prst="rect">
@@ -5306,17 +5505,17 @@
           <a:p>
             <a:pPr>
               <a:spcAft>
-                <a:spcPts val="1000"/>
+                <a:spcPts val="1100"/>
               </a:spcAft>
             </a:pPr>
             <a:r>
               <a:rPr sz="1600" b="1" i="0">
                 <a:solidFill>
-                  <a:srgbClr val="2E3A80"/>
-                </a:solidFill>
-                <a:latin typeface="Montserrat"/>
-              </a:rPr>
-              <a:t>•  </a:t>
+                  <a:srgbClr val="E8801A"/>
+                </a:solidFill>
+                <a:latin typeface="Montserrat"/>
+              </a:rPr>
+              <a:t>▸  </a:t>
             </a:r>
             <a:r>
               <a:rPr sz="1600" b="0" i="0">
@@ -5325,23 +5524,23 @@
                 </a:solidFill>
                 <a:latin typeface="Montserrat"/>
               </a:rPr>
-              <a:t>Comprobaciones: UNE 60670-10 + fabricante</a:t>
+              <a:t>Ejemplo: de natural a propano/butano</a:t>
             </a:r>
           </a:p>
           <a:p>
             <a:pPr>
               <a:spcAft>
-                <a:spcPts val="1000"/>
+                <a:spcPts val="1100"/>
               </a:spcAft>
             </a:pPr>
             <a:r>
               <a:rPr sz="1600" b="1" i="0">
                 <a:solidFill>
-                  <a:srgbClr val="2E3A80"/>
-                </a:solidFill>
-                <a:latin typeface="Montserrat"/>
-              </a:rPr>
-              <a:t>•  </a:t>
+                  <a:srgbClr val="E8801A"/>
+                </a:solidFill>
+                <a:latin typeface="Montserrat"/>
+              </a:rPr>
+              <a:t>▸  </a:t>
             </a:r>
             <a:r>
               <a:rPr sz="1600" b="0" i="0">
@@ -5350,23 +5549,23 @@
                 </a:solidFill>
                 <a:latin typeface="Montserrat"/>
               </a:rPr>
-              <a:t>Emites certificado de puesta en marcha</a:t>
+              <a:t>Solo SAT certificado o categorías A o B</a:t>
             </a:r>
           </a:p>
           <a:p>
             <a:pPr>
               <a:spcAft>
-                <a:spcPts val="1000"/>
+                <a:spcPts val="1100"/>
               </a:spcAft>
             </a:pPr>
             <a:r>
               <a:rPr sz="1600" b="1" i="0">
                 <a:solidFill>
-                  <a:srgbClr val="2E3A80"/>
-                </a:solidFill>
-                <a:latin typeface="Montserrat"/>
-              </a:rPr>
-              <a:t>•  </a:t>
+                  <a:srgbClr val="E8801A"/>
+                </a:solidFill>
+                <a:latin typeface="Montserrat"/>
+              </a:rPr>
+              <a:t>▸  </a:t>
             </a:r>
             <a:r>
               <a:rPr sz="1600" b="0" i="0">
@@ -5375,23 +5574,23 @@
                 </a:solidFill>
                 <a:latin typeface="Montserrat"/>
               </a:rPr>
-              <a:t>Modelo del anexo 4; lo firma el cliente</a:t>
+              <a:t>La categoría C no puede</a:t>
             </a:r>
           </a:p>
           <a:p>
             <a:pPr>
               <a:spcAft>
-                <a:spcPts val="1000"/>
+                <a:spcPts val="1100"/>
               </a:spcAft>
             </a:pPr>
             <a:r>
               <a:rPr sz="1600" b="1" i="0">
                 <a:solidFill>
-                  <a:srgbClr val="2E3A80"/>
-                </a:solidFill>
-                <a:latin typeface="Montserrat"/>
-              </a:rPr>
-              <a:t>•  </a:t>
+                  <a:srgbClr val="E8801A"/>
+                </a:solidFill>
+                <a:latin typeface="Montserrat"/>
+              </a:rPr>
+              <a:t>▸  </a:t>
             </a:r>
             <a:r>
               <a:rPr sz="1600" b="0" i="0">
@@ -5400,14 +5599,14 @@
                 </a:solidFill>
                 <a:latin typeface="Montserrat"/>
               </a:rPr>
-              <a:t>Archivas 5 años (comunidad autónoma)</a:t>
-            </a:r>
-          </a:p>
-        </p:txBody>
-      </p:sp>
-      <p:sp>
-        <p:nvSpPr>
-          <p:cNvPr id="8" name="imgph" descr="IMGQ:flue gas combustion analyzer boiler"/>
+              <a:t>Componentes idénticos a los certificados</a:t>
+            </a:r>
+          </a:p>
+        </p:txBody>
+      </p:sp>
+      <p:sp>
+        <p:nvSpPr>
+          <p:cNvPr id="9" name="imgph" descr="IMGQ:gas burner injector nozzle replacement"/>
           <p:cNvSpPr/>
           <p:nvPr/>
         </p:nvSpPr>
@@ -5453,7 +5652,7 @@
       </p:sp>
       <p:sp>
         <p:nvSpPr>
-          <p:cNvPr id="9" name="TextBox 8"/>
+          <p:cNvPr id="10" name="TextBox 9"/>
           <p:cNvSpPr txBox="1"/>
           <p:nvPr/>
         </p:nvSpPr>
@@ -5493,7 +5692,7 @@
                 </a:solidFill>
                 <a:latin typeface="Montserrat"/>
               </a:rPr>
-              <a:t>flue gas combustion analyzer boiler</a:t>
+              <a:t>gas burner injector nozzle replacement</a:t>
             </a:r>
           </a:p>
         </p:txBody>
@@ -5590,7 +5789,7 @@
                 </a:solidFill>
                 <a:latin typeface="Montserrat"/>
               </a:rPr>
-              <a:t>012 / 014</a:t>
+              <a:t>012 / 015</a:t>
             </a:r>
           </a:p>
         </p:txBody>
@@ -5638,7 +5837,7 @@
         <p:spPr>
           <a:xfrm>
             <a:off x="822960" y="457200"/>
-            <a:ext cx="8229600" cy="365760"/>
+            <a:ext cx="10058400" cy="365760"/>
           </a:xfrm>
           <a:prstGeom prst="rect">
             <a:avLst/>
@@ -5652,13 +5851,13 @@
           <a:lstStyle/>
           <a:p>
             <a:r>
-              <a:rPr sz="1200" b="1" i="0">
-                <a:solidFill>
-                  <a:srgbClr val="64748B"/>
-                </a:solidFill>
-                <a:latin typeface="Montserrat"/>
-              </a:rPr>
-              <a:t>APARTADO 5.5 · COMUNICACIÓN</a:t>
+              <a:rPr sz="1300" b="1" i="0">
+                <a:solidFill>
+                  <a:srgbClr val="E8801A"/>
+                </a:solidFill>
+                <a:latin typeface="Montserrat"/>
+              </a:rPr>
+              <a:t>APARTADO 5.4 · COMPROBACIONES</a:t>
             </a:r>
           </a:p>
         </p:txBody>
@@ -5686,26 +5885,70 @@
           <a:lstStyle/>
           <a:p>
             <a:r>
-              <a:rPr sz="2700" b="1" i="0">
+              <a:rPr sz="2800" b="1" i="0">
                 <a:solidFill>
                   <a:srgbClr val="1E2761"/>
                 </a:solidFill>
                 <a:latin typeface="Montserrat"/>
               </a:rPr>
-              <a:t>Ni permiso antes, ni aviso después</a:t>
-            </a:r>
-          </a:p>
-        </p:txBody>
-      </p:sp>
-      <p:sp>
-        <p:nvSpPr>
-          <p:cNvPr id="7" name="TextBox 6"/>
+              <a:t>El papel que cierra el trabajo</a:t>
+            </a:r>
+          </a:p>
+        </p:txBody>
+      </p:sp>
+      <p:sp>
+        <p:nvSpPr>
+          <p:cNvPr id="7" name="Rounded Rectangle 6"/>
+          <p:cNvSpPr/>
+          <p:nvPr/>
+        </p:nvSpPr>
+        <p:spPr>
+          <a:xfrm>
+            <a:off x="868680" y="1627632"/>
+            <a:ext cx="2011680" cy="73152"/>
+          </a:xfrm>
+          <a:prstGeom prst="roundRect">
+            <a:avLst/>
+          </a:prstGeom>
+          <a:solidFill>
+            <a:srgbClr val="E8801A"/>
+          </a:solidFill>
+          <a:ln>
+            <a:noFill/>
+          </a:ln>
+          <a:effectLst/>
+        </p:spPr>
+        <p:style>
+          <a:lnRef idx="1">
+            <a:schemeClr val="accent1"/>
+          </a:lnRef>
+          <a:fillRef idx="3">
+            <a:schemeClr val="accent1"/>
+          </a:fillRef>
+          <a:effectRef idx="2">
+            <a:schemeClr val="accent1"/>
+          </a:effectRef>
+          <a:fontRef idx="minor">
+            <a:schemeClr val="lt1"/>
+          </a:fontRef>
+        </p:style>
+        <p:txBody>
+          <a:bodyPr rtlCol="0" anchor="ctr"/>
+          <a:lstStyle/>
+          <a:p>
+            <a:pPr algn="ctr"/>
+          </a:p>
+        </p:txBody>
+      </p:sp>
+      <p:sp>
+        <p:nvSpPr>
+          <p:cNvPr id="8" name="TextBox 7"/>
           <p:cNvSpPr txBox="1"/>
           <p:nvPr/>
         </p:nvSpPr>
         <p:spPr>
           <a:xfrm>
-            <a:off x="822960" y="1920240"/>
+            <a:off x="822960" y="1965960"/>
             <a:ext cx="4983480" cy="4206240"/>
           </a:xfrm>
           <a:prstGeom prst="rect">
@@ -5721,17 +5964,17 @@
           <a:p>
             <a:pPr>
               <a:spcAft>
-                <a:spcPts val="1000"/>
+                <a:spcPts val="1100"/>
               </a:spcAft>
             </a:pPr>
             <a:r>
               <a:rPr sz="1600" b="1" i="0">
                 <a:solidFill>
-                  <a:srgbClr val="2E3A80"/>
-                </a:solidFill>
-                <a:latin typeface="Montserrat"/>
-              </a:rPr>
-              <a:t>•  </a:t>
+                  <a:srgbClr val="E8801A"/>
+                </a:solidFill>
+                <a:latin typeface="Montserrat"/>
+              </a:rPr>
+              <a:t>▸  </a:t>
             </a:r>
             <a:r>
               <a:rPr sz="1600" b="0" i="0">
@@ -5740,23 +5983,23 @@
                 </a:solidFill>
                 <a:latin typeface="Montserrat"/>
               </a:rPr>
-              <a:t>El aparato no precisa comunicación</a:t>
+              <a:t>Comprobaciones: UNE 60670-10 + fabricante</a:t>
             </a:r>
           </a:p>
           <a:p>
             <a:pPr>
               <a:spcAft>
-                <a:spcPts val="1000"/>
+                <a:spcPts val="1100"/>
               </a:spcAft>
             </a:pPr>
             <a:r>
               <a:rPr sz="1600" b="1" i="0">
                 <a:solidFill>
-                  <a:srgbClr val="2E3A80"/>
-                </a:solidFill>
-                <a:latin typeface="Montserrat"/>
-              </a:rPr>
-              <a:t>•  </a:t>
+                  <a:srgbClr val="E8801A"/>
+                </a:solidFill>
+                <a:latin typeface="Montserrat"/>
+              </a:rPr>
+              <a:t>▸  </a:t>
             </a:r>
             <a:r>
               <a:rPr sz="1600" b="0" i="0">
@@ -5765,23 +6008,23 @@
                 </a:solidFill>
                 <a:latin typeface="Montserrat"/>
               </a:rPr>
-              <a:t>Sí es obligatorio el certificado al cliente</a:t>
+              <a:t>Emites certificado de puesta en marcha</a:t>
             </a:r>
           </a:p>
           <a:p>
             <a:pPr>
               <a:spcAft>
-                <a:spcPts val="1000"/>
+                <a:spcPts val="1100"/>
               </a:spcAft>
             </a:pPr>
             <a:r>
               <a:rPr sz="1600" b="1" i="0">
                 <a:solidFill>
-                  <a:srgbClr val="2E3A80"/>
-                </a:solidFill>
-                <a:latin typeface="Montserrat"/>
-              </a:rPr>
-              <a:t>•  </a:t>
+                  <a:srgbClr val="E8801A"/>
+                </a:solidFill>
+                <a:latin typeface="Montserrat"/>
+              </a:rPr>
+              <a:t>▸  </a:t>
             </a:r>
             <a:r>
               <a:rPr sz="1600" b="0" i="0">
@@ -5790,14 +6033,39 @@
                 </a:solidFill>
                 <a:latin typeface="Montserrat"/>
               </a:rPr>
-              <a:t>No confundir con la instalación receptora</a:t>
-            </a:r>
-          </a:p>
-        </p:txBody>
-      </p:sp>
-      <p:sp>
-        <p:nvSpPr>
-          <p:cNvPr id="8" name="imgph" descr="IMGQ:gas installation paperwork clipboard"/>
+              <a:t>Modelo del anexo 4; lo firma el cliente</a:t>
+            </a:r>
+          </a:p>
+          <a:p>
+            <a:pPr>
+              <a:spcAft>
+                <a:spcPts val="1100"/>
+              </a:spcAft>
+            </a:pPr>
+            <a:r>
+              <a:rPr sz="1600" b="1" i="0">
+                <a:solidFill>
+                  <a:srgbClr val="E8801A"/>
+                </a:solidFill>
+                <a:latin typeface="Montserrat"/>
+              </a:rPr>
+              <a:t>▸  </a:t>
+            </a:r>
+            <a:r>
+              <a:rPr sz="1600" b="0" i="0">
+                <a:solidFill>
+                  <a:srgbClr val="1B2330"/>
+                </a:solidFill>
+                <a:latin typeface="Montserrat"/>
+              </a:rPr>
+              <a:t>Archivas 5 años (comunidad autónoma)</a:t>
+            </a:r>
+          </a:p>
+        </p:txBody>
+      </p:sp>
+      <p:sp>
+        <p:nvSpPr>
+          <p:cNvPr id="9" name="imgph" descr="IMGQ:flue gas combustion analyzer boiler"/>
           <p:cNvSpPr/>
           <p:nvPr/>
         </p:nvSpPr>
@@ -5843,7 +6111,7 @@
       </p:sp>
       <p:sp>
         <p:nvSpPr>
-          <p:cNvPr id="9" name="TextBox 8"/>
+          <p:cNvPr id="10" name="TextBox 9"/>
           <p:cNvSpPr txBox="1"/>
           <p:nvPr/>
         </p:nvSpPr>
@@ -5883,7 +6151,7 @@
                 </a:solidFill>
                 <a:latin typeface="Montserrat"/>
               </a:rPr>
-              <a:t>gas installation paperwork clipboard</a:t>
+              <a:t>flue gas combustion analyzer boiler</a:t>
             </a:r>
           </a:p>
         </p:txBody>
@@ -5980,7 +6248,7 @@
                 </a:solidFill>
                 <a:latin typeface="Montserrat"/>
               </a:rPr>
-              <a:t>013 / 014</a:t>
+              <a:t>013 / 015</a:t>
             </a:r>
           </a:p>
         </p:txBody>
@@ -6028,7 +6296,7 @@
         <p:spPr>
           <a:xfrm>
             <a:off x="822960" y="457200"/>
-            <a:ext cx="8229600" cy="365760"/>
+            <a:ext cx="10058400" cy="365760"/>
           </a:xfrm>
           <a:prstGeom prst="rect">
             <a:avLst/>
@@ -6042,13 +6310,13 @@
           <a:lstStyle/>
           <a:p>
             <a:r>
-              <a:rPr sz="1200" b="1" i="0">
-                <a:solidFill>
-                  <a:srgbClr val="64748B"/>
-                </a:solidFill>
-                <a:latin typeface="Montserrat"/>
-              </a:rPr>
-              <a:t>ANEXO 4 · CERTIFICADO</a:t>
+              <a:rPr sz="1300" b="1" i="0">
+                <a:solidFill>
+                  <a:srgbClr val="E8801A"/>
+                </a:solidFill>
+                <a:latin typeface="Montserrat"/>
+              </a:rPr>
+              <a:t>APARTADO 5.5 · COMUNICACIÓN</a:t>
             </a:r>
           </a:p>
         </p:txBody>
@@ -6076,26 +6344,70 @@
           <a:lstStyle/>
           <a:p>
             <a:r>
-              <a:rPr sz="2700" b="1" i="0">
+              <a:rPr sz="2800" b="1" i="0">
                 <a:solidFill>
                   <a:srgbClr val="1E2761"/>
                 </a:solidFill>
                 <a:latin typeface="Montserrat"/>
               </a:rPr>
-              <a:t>Qué lleva el certificado</a:t>
-            </a:r>
-          </a:p>
-        </p:txBody>
-      </p:sp>
-      <p:sp>
-        <p:nvSpPr>
-          <p:cNvPr id="7" name="TextBox 6"/>
+              <a:t>Ni permiso antes, ni aviso después</a:t>
+            </a:r>
+          </a:p>
+        </p:txBody>
+      </p:sp>
+      <p:sp>
+        <p:nvSpPr>
+          <p:cNvPr id="7" name="Rounded Rectangle 6"/>
+          <p:cNvSpPr/>
+          <p:nvPr/>
+        </p:nvSpPr>
+        <p:spPr>
+          <a:xfrm>
+            <a:off x="868680" y="1627632"/>
+            <a:ext cx="2011680" cy="73152"/>
+          </a:xfrm>
+          <a:prstGeom prst="roundRect">
+            <a:avLst/>
+          </a:prstGeom>
+          <a:solidFill>
+            <a:srgbClr val="E8801A"/>
+          </a:solidFill>
+          <a:ln>
+            <a:noFill/>
+          </a:ln>
+          <a:effectLst/>
+        </p:spPr>
+        <p:style>
+          <a:lnRef idx="1">
+            <a:schemeClr val="accent1"/>
+          </a:lnRef>
+          <a:fillRef idx="3">
+            <a:schemeClr val="accent1"/>
+          </a:fillRef>
+          <a:effectRef idx="2">
+            <a:schemeClr val="accent1"/>
+          </a:effectRef>
+          <a:fontRef idx="minor">
+            <a:schemeClr val="lt1"/>
+          </a:fontRef>
+        </p:style>
+        <p:txBody>
+          <a:bodyPr rtlCol="0" anchor="ctr"/>
+          <a:lstStyle/>
+          <a:p>
+            <a:pPr algn="ctr"/>
+          </a:p>
+        </p:txBody>
+      </p:sp>
+      <p:sp>
+        <p:nvSpPr>
+          <p:cNvPr id="8" name="TextBox 7"/>
           <p:cNvSpPr txBox="1"/>
           <p:nvPr/>
         </p:nvSpPr>
         <p:spPr>
           <a:xfrm>
-            <a:off x="822960" y="1920240"/>
+            <a:off x="822960" y="1965960"/>
             <a:ext cx="4983480" cy="4206240"/>
           </a:xfrm>
           <a:prstGeom prst="rect">
@@ -6111,17 +6423,17 @@
           <a:p>
             <a:pPr>
               <a:spcAft>
-                <a:spcPts val="1000"/>
+                <a:spcPts val="1100"/>
               </a:spcAft>
             </a:pPr>
             <a:r>
               <a:rPr sz="1600" b="1" i="0">
                 <a:solidFill>
-                  <a:srgbClr val="2E3A80"/>
-                </a:solidFill>
-                <a:latin typeface="Montserrat"/>
-              </a:rPr>
-              <a:t>•  </a:t>
+                  <a:srgbClr val="E8801A"/>
+                </a:solidFill>
+                <a:latin typeface="Montserrat"/>
+              </a:rPr>
+              <a:t>▸  </a:t>
             </a:r>
             <a:r>
               <a:rPr sz="1600" b="0" i="0">
@@ -6130,23 +6442,23 @@
                 </a:solidFill>
                 <a:latin typeface="Montserrat"/>
               </a:rPr>
-              <a:t>Agente, cliente y datos del aparato</a:t>
+              <a:t>El aparato no precisa comunicación</a:t>
             </a:r>
           </a:p>
           <a:p>
             <a:pPr>
               <a:spcAft>
-                <a:spcPts val="1000"/>
+                <a:spcPts val="1100"/>
               </a:spcAft>
             </a:pPr>
             <a:r>
               <a:rPr sz="1600" b="1" i="0">
                 <a:solidFill>
-                  <a:srgbClr val="2E3A80"/>
-                </a:solidFill>
-                <a:latin typeface="Montserrat"/>
-              </a:rPr>
-              <a:t>•  </a:t>
+                  <a:srgbClr val="E8801A"/>
+                </a:solidFill>
+                <a:latin typeface="Montserrat"/>
+              </a:rPr>
+              <a:t>▸  </a:t>
             </a:r>
             <a:r>
               <a:rPr sz="1600" b="0" i="0">
@@ -6155,23 +6467,23 @@
                 </a:solidFill>
                 <a:latin typeface="Montserrat"/>
               </a:rPr>
-              <a:t>Pruebas y sus resultados</a:t>
+              <a:t>Sí es obligatorio el certificado al cliente</a:t>
             </a:r>
           </a:p>
           <a:p>
             <a:pPr>
               <a:spcAft>
-                <a:spcPts val="1000"/>
+                <a:spcPts val="1100"/>
               </a:spcAft>
             </a:pPr>
             <a:r>
               <a:rPr sz="1600" b="1" i="0">
                 <a:solidFill>
-                  <a:srgbClr val="2E3A80"/>
-                </a:solidFill>
-                <a:latin typeface="Montserrat"/>
-              </a:rPr>
-              <a:t>•  </a:t>
+                  <a:srgbClr val="E8801A"/>
+                </a:solidFill>
+                <a:latin typeface="Montserrat"/>
+              </a:rPr>
+              <a:t>▸  </a:t>
             </a:r>
             <a:r>
               <a:rPr sz="1600" b="0" i="0">
@@ -6180,39 +6492,14 @@
                 </a:solidFill>
                 <a:latin typeface="Montserrat"/>
               </a:rPr>
-              <a:t>Ticket del análisis de combustión</a:t>
-            </a:r>
-          </a:p>
-          <a:p>
-            <a:pPr>
-              <a:spcAft>
-                <a:spcPts val="1000"/>
-              </a:spcAft>
-            </a:pPr>
-            <a:r>
-              <a:rPr sz="1600" b="1" i="0">
-                <a:solidFill>
-                  <a:srgbClr val="2E3A80"/>
-                </a:solidFill>
-                <a:latin typeface="Montserrat"/>
-              </a:rPr>
-              <a:t>•  </a:t>
-            </a:r>
-            <a:r>
-              <a:rPr sz="1600" b="0" i="0">
-                <a:solidFill>
-                  <a:srgbClr val="1B2330"/>
-                </a:solidFill>
-                <a:latin typeface="Montserrat"/>
-              </a:rPr>
-              <a:t>Firma del técnico, sello y firma del cliente</a:t>
-            </a:r>
-          </a:p>
-        </p:txBody>
-      </p:sp>
-      <p:sp>
-        <p:nvSpPr>
-          <p:cNvPr id="8" name="imgph" descr="IMGQ:signed technical certificate document"/>
+              <a:t>No confundir con la instalación receptora</a:t>
+            </a:r>
+          </a:p>
+        </p:txBody>
+      </p:sp>
+      <p:sp>
+        <p:nvSpPr>
+          <p:cNvPr id="9" name="imgph" descr="IMGQ:gas installation paperwork clipboard"/>
           <p:cNvSpPr/>
           <p:nvPr/>
         </p:nvSpPr>
@@ -6258,7 +6545,7 @@
       </p:sp>
       <p:sp>
         <p:nvSpPr>
-          <p:cNvPr id="9" name="TextBox 8"/>
+          <p:cNvPr id="10" name="TextBox 9"/>
           <p:cNvSpPr txBox="1"/>
           <p:nvPr/>
         </p:nvSpPr>
@@ -6298,7 +6585,7 @@
                 </a:solidFill>
                 <a:latin typeface="Montserrat"/>
               </a:rPr>
-              <a:t>signed technical certificate document</a:t>
+              <a:t>gas installation paperwork clipboard</a:t>
             </a:r>
           </a:p>
         </p:txBody>
@@ -6336,6 +6623,465 @@
             <a:avLst/>
           </a:prstGeom>
           <a:solidFill>
+            <a:srgbClr val="FFFFFF"/>
+          </a:solidFill>
+          <a:ln>
+            <a:noFill/>
+          </a:ln>
+          <a:effectLst/>
+        </p:spPr>
+        <p:style>
+          <a:lnRef idx="1">
+            <a:schemeClr val="accent1"/>
+          </a:lnRef>
+          <a:fillRef idx="3">
+            <a:schemeClr val="accent1"/>
+          </a:fillRef>
+          <a:effectRef idx="2">
+            <a:schemeClr val="accent1"/>
+          </a:effectRef>
+          <a:fontRef idx="minor">
+            <a:schemeClr val="lt1"/>
+          </a:fontRef>
+        </p:style>
+        <p:txBody>
+          <a:bodyPr rtlCol="0" anchor="ctr"/>
+          <a:lstStyle/>
+          <a:p>
+            <a:pPr algn="ctr"/>
+          </a:p>
+        </p:txBody>
+      </p:sp>
+      <p:sp>
+        <p:nvSpPr>
+          <p:cNvPr id="3" name="TextBox 2"/>
+          <p:cNvSpPr txBox="1"/>
+          <p:nvPr/>
+        </p:nvSpPr>
+        <p:spPr>
+          <a:xfrm>
+            <a:off x="10607040" y="320040"/>
+            <a:ext cx="1371600" cy="365760"/>
+          </a:xfrm>
+          <a:prstGeom prst="rect">
+            <a:avLst/>
+          </a:prstGeom>
+          <a:noFill/>
+        </p:spPr>
+        <p:txBody>
+          <a:bodyPr wrap="square">
+            <a:spAutoFit/>
+          </a:bodyPr>
+          <a:lstStyle/>
+          <a:p>
+            <a:pPr algn="r"/>
+            <a:r>
+              <a:rPr sz="1000" b="1" i="0">
+                <a:solidFill>
+                  <a:srgbClr val="64748B"/>
+                </a:solidFill>
+                <a:latin typeface="Montserrat"/>
+              </a:rPr>
+              <a:t>014 / 015</a:t>
+            </a:r>
+          </a:p>
+        </p:txBody>
+      </p:sp>
+      <p:sp>
+        <p:nvSpPr>
+          <p:cNvPr id="4" name="TextBox 3"/>
+          <p:cNvSpPr txBox="1"/>
+          <p:nvPr/>
+        </p:nvSpPr>
+        <p:spPr>
+          <a:xfrm>
+            <a:off x="457200" y="6419088"/>
+            <a:ext cx="8229600" cy="365760"/>
+          </a:xfrm>
+          <a:prstGeom prst="rect">
+            <a:avLst/>
+          </a:prstGeom>
+          <a:noFill/>
+        </p:spPr>
+        <p:txBody>
+          <a:bodyPr wrap="square">
+            <a:spAutoFit/>
+          </a:bodyPr>
+          <a:lstStyle/>
+          <a:p>
+            <a:r>
+              <a:rPr sz="900" b="0" i="0">
+                <a:solidFill>
+                  <a:srgbClr val="64748B"/>
+                </a:solidFill>
+                <a:latin typeface="Montserrat"/>
+              </a:rPr>
+              <a:t>Curso Gas B · Tema 05 · Aparatos de gas</a:t>
+            </a:r>
+          </a:p>
+        </p:txBody>
+      </p:sp>
+      <p:sp>
+        <p:nvSpPr>
+          <p:cNvPr id="5" name="TextBox 4"/>
+          <p:cNvSpPr txBox="1"/>
+          <p:nvPr/>
+        </p:nvSpPr>
+        <p:spPr>
+          <a:xfrm>
+            <a:off x="822960" y="457200"/>
+            <a:ext cx="10058400" cy="365760"/>
+          </a:xfrm>
+          <a:prstGeom prst="rect">
+            <a:avLst/>
+          </a:prstGeom>
+          <a:noFill/>
+        </p:spPr>
+        <p:txBody>
+          <a:bodyPr wrap="square">
+            <a:spAutoFit/>
+          </a:bodyPr>
+          <a:lstStyle/>
+          <a:p>
+            <a:r>
+              <a:rPr sz="1300" b="1" i="0">
+                <a:solidFill>
+                  <a:srgbClr val="E8801A"/>
+                </a:solidFill>
+                <a:latin typeface="Montserrat"/>
+              </a:rPr>
+              <a:t>ANEXO 4 · CERTIFICADO</a:t>
+            </a:r>
+          </a:p>
+        </p:txBody>
+      </p:sp>
+      <p:sp>
+        <p:nvSpPr>
+          <p:cNvPr id="6" name="TextBox 5"/>
+          <p:cNvSpPr txBox="1"/>
+          <p:nvPr/>
+        </p:nvSpPr>
+        <p:spPr>
+          <a:xfrm>
+            <a:off x="822960" y="868680"/>
+            <a:ext cx="10515600" cy="914400"/>
+          </a:xfrm>
+          <a:prstGeom prst="rect">
+            <a:avLst/>
+          </a:prstGeom>
+          <a:noFill/>
+        </p:spPr>
+        <p:txBody>
+          <a:bodyPr wrap="square">
+            <a:spAutoFit/>
+          </a:bodyPr>
+          <a:lstStyle/>
+          <a:p>
+            <a:r>
+              <a:rPr sz="2800" b="1" i="0">
+                <a:solidFill>
+                  <a:srgbClr val="1E2761"/>
+                </a:solidFill>
+                <a:latin typeface="Montserrat"/>
+              </a:rPr>
+              <a:t>Qué lleva el certificado</a:t>
+            </a:r>
+          </a:p>
+        </p:txBody>
+      </p:sp>
+      <p:sp>
+        <p:nvSpPr>
+          <p:cNvPr id="7" name="Rounded Rectangle 6"/>
+          <p:cNvSpPr/>
+          <p:nvPr/>
+        </p:nvSpPr>
+        <p:spPr>
+          <a:xfrm>
+            <a:off x="868680" y="1627632"/>
+            <a:ext cx="2011680" cy="73152"/>
+          </a:xfrm>
+          <a:prstGeom prst="roundRect">
+            <a:avLst/>
+          </a:prstGeom>
+          <a:solidFill>
+            <a:srgbClr val="E8801A"/>
+          </a:solidFill>
+          <a:ln>
+            <a:noFill/>
+          </a:ln>
+          <a:effectLst/>
+        </p:spPr>
+        <p:style>
+          <a:lnRef idx="1">
+            <a:schemeClr val="accent1"/>
+          </a:lnRef>
+          <a:fillRef idx="3">
+            <a:schemeClr val="accent1"/>
+          </a:fillRef>
+          <a:effectRef idx="2">
+            <a:schemeClr val="accent1"/>
+          </a:effectRef>
+          <a:fontRef idx="minor">
+            <a:schemeClr val="lt1"/>
+          </a:fontRef>
+        </p:style>
+        <p:txBody>
+          <a:bodyPr rtlCol="0" anchor="ctr"/>
+          <a:lstStyle/>
+          <a:p>
+            <a:pPr algn="ctr"/>
+          </a:p>
+        </p:txBody>
+      </p:sp>
+      <p:sp>
+        <p:nvSpPr>
+          <p:cNvPr id="8" name="TextBox 7"/>
+          <p:cNvSpPr txBox="1"/>
+          <p:nvPr/>
+        </p:nvSpPr>
+        <p:spPr>
+          <a:xfrm>
+            <a:off x="822960" y="1965960"/>
+            <a:ext cx="4983480" cy="4206240"/>
+          </a:xfrm>
+          <a:prstGeom prst="rect">
+            <a:avLst/>
+          </a:prstGeom>
+          <a:noFill/>
+        </p:spPr>
+        <p:txBody>
+          <a:bodyPr wrap="square">
+            <a:spAutoFit/>
+          </a:bodyPr>
+          <a:lstStyle/>
+          <a:p>
+            <a:pPr>
+              <a:spcAft>
+                <a:spcPts val="1100"/>
+              </a:spcAft>
+            </a:pPr>
+            <a:r>
+              <a:rPr sz="1600" b="1" i="0">
+                <a:solidFill>
+                  <a:srgbClr val="E8801A"/>
+                </a:solidFill>
+                <a:latin typeface="Montserrat"/>
+              </a:rPr>
+              <a:t>▸  </a:t>
+            </a:r>
+            <a:r>
+              <a:rPr sz="1600" b="0" i="0">
+                <a:solidFill>
+                  <a:srgbClr val="1B2330"/>
+                </a:solidFill>
+                <a:latin typeface="Montserrat"/>
+              </a:rPr>
+              <a:t>Agente, cliente y datos del aparato</a:t>
+            </a:r>
+          </a:p>
+          <a:p>
+            <a:pPr>
+              <a:spcAft>
+                <a:spcPts val="1100"/>
+              </a:spcAft>
+            </a:pPr>
+            <a:r>
+              <a:rPr sz="1600" b="1" i="0">
+                <a:solidFill>
+                  <a:srgbClr val="E8801A"/>
+                </a:solidFill>
+                <a:latin typeface="Montserrat"/>
+              </a:rPr>
+              <a:t>▸  </a:t>
+            </a:r>
+            <a:r>
+              <a:rPr sz="1600" b="0" i="0">
+                <a:solidFill>
+                  <a:srgbClr val="1B2330"/>
+                </a:solidFill>
+                <a:latin typeface="Montserrat"/>
+              </a:rPr>
+              <a:t>Pruebas y sus resultados</a:t>
+            </a:r>
+          </a:p>
+          <a:p>
+            <a:pPr>
+              <a:spcAft>
+                <a:spcPts val="1100"/>
+              </a:spcAft>
+            </a:pPr>
+            <a:r>
+              <a:rPr sz="1600" b="1" i="0">
+                <a:solidFill>
+                  <a:srgbClr val="E8801A"/>
+                </a:solidFill>
+                <a:latin typeface="Montserrat"/>
+              </a:rPr>
+              <a:t>▸  </a:t>
+            </a:r>
+            <a:r>
+              <a:rPr sz="1600" b="0" i="0">
+                <a:solidFill>
+                  <a:srgbClr val="1B2330"/>
+                </a:solidFill>
+                <a:latin typeface="Montserrat"/>
+              </a:rPr>
+              <a:t>Ticket del análisis de combustión</a:t>
+            </a:r>
+          </a:p>
+          <a:p>
+            <a:pPr>
+              <a:spcAft>
+                <a:spcPts val="1100"/>
+              </a:spcAft>
+            </a:pPr>
+            <a:r>
+              <a:rPr sz="1600" b="1" i="0">
+                <a:solidFill>
+                  <a:srgbClr val="E8801A"/>
+                </a:solidFill>
+                <a:latin typeface="Montserrat"/>
+              </a:rPr>
+              <a:t>▸  </a:t>
+            </a:r>
+            <a:r>
+              <a:rPr sz="1600" b="0" i="0">
+                <a:solidFill>
+                  <a:srgbClr val="1B2330"/>
+                </a:solidFill>
+                <a:latin typeface="Montserrat"/>
+              </a:rPr>
+              <a:t>Firma del técnico, sello y firma del cliente</a:t>
+            </a:r>
+          </a:p>
+        </p:txBody>
+      </p:sp>
+      <p:sp>
+        <p:nvSpPr>
+          <p:cNvPr id="9" name="imgph" descr="IMGQ:signed technical certificate document"/>
+          <p:cNvSpPr/>
+          <p:nvPr/>
+        </p:nvSpPr>
+        <p:spPr>
+          <a:xfrm>
+            <a:off x="5806440" y="1051560"/>
+            <a:ext cx="5298947" cy="4629150"/>
+          </a:xfrm>
+          <a:prstGeom prst="roundRect">
+            <a:avLst/>
+          </a:prstGeom>
+          <a:solidFill>
+            <a:srgbClr val="F3F6FB"/>
+          </a:solidFill>
+          <a:ln w="12700">
+            <a:solidFill>
+              <a:srgbClr val="C7D2E6"/>
+            </a:solidFill>
+          </a:ln>
+          <a:effectLst/>
+        </p:spPr>
+        <p:style>
+          <a:lnRef idx="1">
+            <a:schemeClr val="accent1"/>
+          </a:lnRef>
+          <a:fillRef idx="3">
+            <a:schemeClr val="accent1"/>
+          </a:fillRef>
+          <a:effectRef idx="2">
+            <a:schemeClr val="accent1"/>
+          </a:effectRef>
+          <a:fontRef idx="minor">
+            <a:schemeClr val="lt1"/>
+          </a:fontRef>
+        </p:style>
+        <p:txBody>
+          <a:bodyPr rtlCol="0" anchor="ctr"/>
+          <a:lstStyle/>
+          <a:p>
+            <a:pPr algn="ctr"/>
+          </a:p>
+        </p:txBody>
+      </p:sp>
+      <p:sp>
+        <p:nvSpPr>
+          <p:cNvPr id="10" name="TextBox 9"/>
+          <p:cNvSpPr txBox="1"/>
+          <p:nvPr/>
+        </p:nvSpPr>
+        <p:spPr>
+          <a:xfrm>
+            <a:off x="6080760" y="2726055"/>
+            <a:ext cx="4750307" cy="1280160"/>
+          </a:xfrm>
+          <a:prstGeom prst="rect">
+            <a:avLst/>
+          </a:prstGeom>
+          <a:noFill/>
+        </p:spPr>
+        <p:txBody>
+          <a:bodyPr wrap="square">
+            <a:spAutoFit/>
+          </a:bodyPr>
+          <a:lstStyle/>
+          <a:p>
+            <a:pPr algn="ctr"/>
+            <a:r>
+              <a:rPr sz="1400" b="1" i="0">
+                <a:solidFill>
+                  <a:srgbClr val="64748B"/>
+                </a:solidFill>
+                <a:latin typeface="Montserrat"/>
+              </a:rPr>
+              <a:t>IMAGEN REALISTA</a:t>
+            </a:r>
+          </a:p>
+          <a:p>
+            <a:pPr algn="ctr"/>
+            <a:r>
+              <a:rPr sz="1100" b="0" i="1">
+                <a:solidFill>
+                  <a:srgbClr val="64748B"/>
+                </a:solidFill>
+                <a:latin typeface="Montserrat"/>
+              </a:rPr>
+              <a:t>signed technical certificate document</a:t>
+            </a:r>
+          </a:p>
+        </p:txBody>
+      </p:sp>
+    </p:spTree>
+  </p:cSld>
+  <p:clrMapOvr>
+    <a:masterClrMapping/>
+  </p:clrMapOvr>
+</p:sld>
+</file>
+
+<file path=ppt/slides/slide15.xml><?xml version="1.0" encoding="utf-8"?>
+<p:sld xmlns:a="http://schemas.openxmlformats.org/drawingml/2006/main" xmlns:p="http://schemas.openxmlformats.org/presentationml/2006/main" xmlns:r="http://schemas.openxmlformats.org/officeDocument/2006/relationships">
+  <p:cSld>
+    <p:spTree>
+      <p:nvGrpSpPr>
+        <p:cNvPr id="1" name=""/>
+        <p:cNvGrpSpPr/>
+        <p:nvPr/>
+      </p:nvGrpSpPr>
+      <p:grpSpPr/>
+      <p:sp>
+        <p:nvSpPr>
+          <p:cNvPr id="2" name="Rectangle 1"/>
+          <p:cNvSpPr/>
+          <p:nvPr/>
+        </p:nvSpPr>
+        <p:spPr>
+          <a:xfrm>
+            <a:off x="0" y="0"/>
+            <a:ext cx="12191695" cy="6858000"/>
+          </a:xfrm>
+          <a:prstGeom prst="rect">
+            <a:avLst/>
+          </a:prstGeom>
+          <a:solidFill>
             <a:srgbClr val="1E2761"/>
           </a:solidFill>
           <a:ln>
@@ -6390,7 +7136,7 @@
             <a:r>
               <a:rPr sz="1400" b="1" i="0">
                 <a:solidFill>
-                  <a:srgbClr val="CADCFC"/>
+                  <a:srgbClr val="F4A24C"/>
                 </a:solidFill>
                 <a:latin typeface="Montserrat"/>
               </a:rPr>
@@ -6401,13 +7147,57 @@
       </p:sp>
       <p:sp>
         <p:nvSpPr>
-          <p:cNvPr id="4" name="TextBox 3"/>
+          <p:cNvPr id="4" name="Rounded Rectangle 3"/>
+          <p:cNvSpPr/>
+          <p:nvPr/>
+        </p:nvSpPr>
+        <p:spPr>
+          <a:xfrm>
+            <a:off x="868680" y="1051560"/>
+            <a:ext cx="1463040" cy="82296"/>
+          </a:xfrm>
+          <a:prstGeom prst="roundRect">
+            <a:avLst/>
+          </a:prstGeom>
+          <a:solidFill>
+            <a:srgbClr val="E8801A"/>
+          </a:solidFill>
+          <a:ln>
+            <a:noFill/>
+          </a:ln>
+          <a:effectLst/>
+        </p:spPr>
+        <p:style>
+          <a:lnRef idx="1">
+            <a:schemeClr val="accent1"/>
+          </a:lnRef>
+          <a:fillRef idx="3">
+            <a:schemeClr val="accent1"/>
+          </a:fillRef>
+          <a:effectRef idx="2">
+            <a:schemeClr val="accent1"/>
+          </a:effectRef>
+          <a:fontRef idx="minor">
+            <a:schemeClr val="lt1"/>
+          </a:fontRef>
+        </p:style>
+        <p:txBody>
+          <a:bodyPr rtlCol="0" anchor="ctr"/>
+          <a:lstStyle/>
+          <a:p>
+            <a:pPr algn="ctr"/>
+          </a:p>
+        </p:txBody>
+      </p:sp>
+      <p:sp>
+        <p:nvSpPr>
+          <p:cNvPr id="5" name="TextBox 4"/>
           <p:cNvSpPr txBox="1"/>
           <p:nvPr/>
         </p:nvSpPr>
         <p:spPr>
           <a:xfrm>
-            <a:off x="822960" y="1143000"/>
+            <a:off x="822960" y="1234440"/>
             <a:ext cx="10515600" cy="1097280"/>
           </a:xfrm>
           <a:prstGeom prst="rect">
@@ -6435,14 +7225,14 @@
       </p:sp>
       <p:sp>
         <p:nvSpPr>
-          <p:cNvPr id="5" name="TextBox 4"/>
+          <p:cNvPr id="6" name="TextBox 5"/>
           <p:cNvSpPr txBox="1"/>
           <p:nvPr/>
         </p:nvSpPr>
         <p:spPr>
           <a:xfrm>
-            <a:off x="822960" y="2514600"/>
-            <a:ext cx="10515600" cy="2834640"/>
+            <a:off x="822960" y="2606040"/>
+            <a:ext cx="10515600" cy="2743200"/>
           </a:xfrm>
           <a:prstGeom prst="rect">
             <a:avLst/>
@@ -6463,7 +7253,7 @@
             <a:r>
               <a:rPr sz="2000" b="1" i="0">
                 <a:solidFill>
-                  <a:srgbClr val="CADCFC"/>
+                  <a:srgbClr val="F4A24C"/>
                 </a:solidFill>
                 <a:latin typeface="Montserrat"/>
               </a:rPr>
@@ -6488,7 +7278,7 @@
             <a:r>
               <a:rPr sz="2000" b="1" i="0">
                 <a:solidFill>
-                  <a:srgbClr val="CADCFC"/>
+                  <a:srgbClr val="F4A24C"/>
                 </a:solidFill>
                 <a:latin typeface="Montserrat"/>
               </a:rPr>
@@ -6513,7 +7303,7 @@
             <a:r>
               <a:rPr sz="2000" b="1" i="0">
                 <a:solidFill>
-                  <a:srgbClr val="CADCFC"/>
+                  <a:srgbClr val="F4A24C"/>
                 </a:solidFill>
                 <a:latin typeface="Montserrat"/>
               </a:rPr>
@@ -6538,7 +7328,7 @@
             <a:r>
               <a:rPr sz="2000" b="1" i="0">
                 <a:solidFill>
-                  <a:srgbClr val="CADCFC"/>
+                  <a:srgbClr val="F4A24C"/>
                 </a:solidFill>
                 <a:latin typeface="Montserrat"/>
               </a:rPr>
@@ -6558,20 +7348,20 @@
       </p:sp>
       <p:sp>
         <p:nvSpPr>
-          <p:cNvPr id="6" name="Rounded Rectangle 5"/>
+          <p:cNvPr id="7" name="Rounded Rectangle 6"/>
           <p:cNvSpPr/>
           <p:nvPr/>
         </p:nvSpPr>
         <p:spPr>
           <a:xfrm>
             <a:off x="822960" y="5532120"/>
-            <a:ext cx="10515600" cy="777240"/>
+            <a:ext cx="10515600" cy="822960"/>
           </a:xfrm>
           <a:prstGeom prst="roundRect">
             <a:avLst/>
           </a:prstGeom>
           <a:solidFill>
-            <a:srgbClr val="2E3A80"/>
+            <a:srgbClr val="E8801A"/>
           </a:solidFill>
           <a:ln>
             <a:noFill/>
@@ -6602,13 +7392,13 @@
       </p:sp>
       <p:sp>
         <p:nvSpPr>
-          <p:cNvPr id="7" name="TextBox 6"/>
+          <p:cNvPr id="8" name="TextBox 7"/>
           <p:cNvSpPr txBox="1"/>
           <p:nvPr/>
         </p:nvSpPr>
         <p:spPr>
           <a:xfrm>
-            <a:off x="1051560" y="5605272"/>
+            <a:off x="1051560" y="5623560"/>
             <a:ext cx="10058400" cy="640080"/>
           </a:xfrm>
           <a:prstGeom prst="rect">
@@ -6625,7 +7415,7 @@
             <a:r>
               <a:rPr sz="1500" b="1" i="1">
                 <a:solidFill>
-                  <a:srgbClr val="CADCFC"/>
+                  <a:srgbClr val="1E2761"/>
                 </a:solidFill>
                 <a:latin typeface="Montserrat"/>
               </a:rPr>
@@ -6726,7 +7516,7 @@
                 </a:solidFill>
                 <a:latin typeface="Montserrat"/>
               </a:rPr>
-              <a:t>002 / 014</a:t>
+              <a:t>002 / 015</a:t>
             </a:r>
           </a:p>
         </p:txBody>
@@ -6790,7 +7580,7 @@
             <a:r>
               <a:rPr sz="2700" b="1" i="0">
                 <a:solidFill>
-                  <a:srgbClr val="1E2761"/>
+                  <a:srgbClr val="E8801A"/>
                 </a:solidFill>
                 <a:latin typeface="Montserrat"/>
               </a:rPr>
@@ -6802,6 +7592,50 @@
       <p:sp>
         <p:nvSpPr>
           <p:cNvPr id="6" name="Rounded Rectangle 5"/>
+          <p:cNvSpPr/>
+          <p:nvPr/>
+        </p:nvSpPr>
+        <p:spPr>
+          <a:xfrm>
+            <a:off x="868680" y="1234440"/>
+            <a:ext cx="1463040" cy="73152"/>
+          </a:xfrm>
+          <a:prstGeom prst="roundRect">
+            <a:avLst/>
+          </a:prstGeom>
+          <a:solidFill>
+            <a:srgbClr val="1E2761"/>
+          </a:solidFill>
+          <a:ln>
+            <a:noFill/>
+          </a:ln>
+          <a:effectLst/>
+        </p:spPr>
+        <p:style>
+          <a:lnRef idx="1">
+            <a:schemeClr val="accent1"/>
+          </a:lnRef>
+          <a:fillRef idx="3">
+            <a:schemeClr val="accent1"/>
+          </a:fillRef>
+          <a:effectRef idx="2">
+            <a:schemeClr val="accent1"/>
+          </a:effectRef>
+          <a:fontRef idx="minor">
+            <a:schemeClr val="lt1"/>
+          </a:fontRef>
+        </p:style>
+        <p:txBody>
+          <a:bodyPr rtlCol="0" anchor="ctr"/>
+          <a:lstStyle/>
+          <a:p>
+            <a:pPr algn="ctr"/>
+          </a:p>
+        </p:txBody>
+      </p:sp>
+      <p:sp>
+        <p:nvSpPr>
+          <p:cNvPr id="7" name="Rounded Rectangle 6"/>
           <p:cNvSpPr/>
           <p:nvPr/>
         </p:nvSpPr>
@@ -6847,7 +7681,7 @@
       </p:sp>
       <p:sp>
         <p:nvSpPr>
-          <p:cNvPr id="7" name="TextBox 6"/>
+          <p:cNvPr id="8" name="TextBox 7"/>
           <p:cNvSpPr txBox="1"/>
           <p:nvPr/>
         </p:nvSpPr>
@@ -6882,7 +7716,7 @@
       </p:sp>
       <p:sp>
         <p:nvSpPr>
-          <p:cNvPr id="8" name="TextBox 7"/>
+          <p:cNvPr id="9" name="TextBox 8"/>
           <p:cNvSpPr txBox="1"/>
           <p:nvPr/>
         </p:nvSpPr>
@@ -6917,7 +7751,7 @@
       </p:sp>
       <p:sp>
         <p:nvSpPr>
-          <p:cNvPr id="9" name="Rounded Rectangle 8"/>
+          <p:cNvPr id="10" name="Rounded Rectangle 9"/>
           <p:cNvSpPr/>
           <p:nvPr/>
         </p:nvSpPr>
@@ -6963,7 +7797,7 @@
       </p:sp>
       <p:sp>
         <p:nvSpPr>
-          <p:cNvPr id="10" name="TextBox 9"/>
+          <p:cNvPr id="11" name="TextBox 10"/>
           <p:cNvSpPr txBox="1"/>
           <p:nvPr/>
         </p:nvSpPr>
@@ -6998,7 +7832,7 @@
       </p:sp>
       <p:sp>
         <p:nvSpPr>
-          <p:cNvPr id="11" name="TextBox 10"/>
+          <p:cNvPr id="12" name="TextBox 11"/>
           <p:cNvSpPr txBox="1"/>
           <p:nvPr/>
         </p:nvSpPr>
@@ -7033,7 +7867,7 @@
       </p:sp>
       <p:sp>
         <p:nvSpPr>
-          <p:cNvPr id="12" name="Rounded Rectangle 11"/>
+          <p:cNvPr id="13" name="Rounded Rectangle 12"/>
           <p:cNvSpPr/>
           <p:nvPr/>
         </p:nvSpPr>
@@ -7079,7 +7913,7 @@
       </p:sp>
       <p:sp>
         <p:nvSpPr>
-          <p:cNvPr id="13" name="TextBox 12"/>
+          <p:cNvPr id="14" name="TextBox 13"/>
           <p:cNvSpPr txBox="1"/>
           <p:nvPr/>
         </p:nvSpPr>
@@ -7114,7 +7948,7 @@
       </p:sp>
       <p:sp>
         <p:nvSpPr>
-          <p:cNvPr id="14" name="TextBox 13"/>
+          <p:cNvPr id="15" name="TextBox 14"/>
           <p:cNvSpPr txBox="1"/>
           <p:nvPr/>
         </p:nvSpPr>
@@ -7239,7 +8073,7 @@
                 </a:solidFill>
                 <a:latin typeface="Montserrat"/>
               </a:rPr>
-              <a:t>003 / 014</a:t>
+              <a:t>003 / 015</a:t>
             </a:r>
           </a:p>
         </p:txBody>
@@ -7286,7 +8120,7 @@
         </p:nvSpPr>
         <p:spPr>
           <a:xfrm>
-            <a:off x="822960" y="457200"/>
+            <a:off x="822960" y="502920"/>
             <a:ext cx="8229600" cy="365760"/>
           </a:xfrm>
           <a:prstGeom prst="rect">
@@ -7301,13 +8135,13 @@
           <a:lstStyle/>
           <a:p>
             <a:r>
-              <a:rPr sz="1200" b="1" i="0">
-                <a:solidFill>
-                  <a:srgbClr val="64748B"/>
-                </a:solidFill>
-                <a:latin typeface="Montserrat"/>
-              </a:rPr>
-              <a:t>CIRCUITO DE COMBUSTIÓN</a:t>
+              <a:rPr sz="1300" b="1" i="0">
+                <a:solidFill>
+                  <a:srgbClr val="E8801A"/>
+                </a:solidFill>
+                <a:latin typeface="Montserrat"/>
+              </a:rPr>
+              <a:t>PARTES DE ESTE VÍDEO</a:t>
             </a:r>
           </a:p>
         </p:txBody>
@@ -7320,7 +8154,7 @@
         </p:nvSpPr>
         <p:spPr>
           <a:xfrm>
-            <a:off x="822960" y="868680"/>
+            <a:off x="822960" y="914400"/>
             <a:ext cx="10515600" cy="914400"/>
           </a:xfrm>
           <a:prstGeom prst="rect">
@@ -7341,130 +8175,30 @@
                 </a:solidFill>
                 <a:latin typeface="Montserrat"/>
               </a:rPr>
-              <a:t>De dónde respira y por dónde echa el humo</a:t>
-            </a:r>
-          </a:p>
-        </p:txBody>
-      </p:sp>
-      <p:sp>
-        <p:nvSpPr>
-          <p:cNvPr id="7" name="TextBox 6"/>
-          <p:cNvSpPr txBox="1"/>
-          <p:nvPr/>
-        </p:nvSpPr>
-        <p:spPr>
-          <a:xfrm>
-            <a:off x="822960" y="1920240"/>
-            <a:ext cx="4983480" cy="4206240"/>
-          </a:xfrm>
-          <a:prstGeom prst="rect">
-            <a:avLst/>
-          </a:prstGeom>
-          <a:noFill/>
-        </p:spPr>
-        <p:txBody>
-          <a:bodyPr wrap="square">
-            <a:spAutoFit/>
-          </a:bodyPr>
-          <a:lstStyle/>
-          <a:p>
-            <a:pPr>
-              <a:spcAft>
-                <a:spcPts val="1000"/>
-              </a:spcAft>
-            </a:pPr>
-            <a:r>
-              <a:rPr sz="1600" b="1" i="0">
-                <a:solidFill>
-                  <a:srgbClr val="2E3A80"/>
-                </a:solidFill>
-                <a:latin typeface="Montserrat"/>
-              </a:rPr>
-              <a:t>•  </a:t>
-            </a:r>
-            <a:r>
-              <a:rPr sz="1600" b="0" i="0">
-                <a:solidFill>
-                  <a:srgbClr val="1B2330"/>
-                </a:solidFill>
-                <a:latin typeface="Montserrat"/>
-              </a:rPr>
-              <a:t>Clasificación por combustión: A, B y C</a:t>
-            </a:r>
-          </a:p>
-          <a:p>
-            <a:pPr>
-              <a:spcAft>
-                <a:spcPts val="1000"/>
-              </a:spcAft>
-            </a:pPr>
-            <a:r>
-              <a:rPr sz="1600" b="1" i="0">
-                <a:solidFill>
-                  <a:srgbClr val="2E3A80"/>
-                </a:solidFill>
-                <a:latin typeface="Montserrat"/>
-              </a:rPr>
-              <a:t>•  </a:t>
-            </a:r>
-            <a:r>
-              <a:rPr sz="1600" b="0" i="0">
-                <a:solidFill>
-                  <a:srgbClr val="1B2330"/>
-                </a:solidFill>
-                <a:latin typeface="Montserrat"/>
-              </a:rPr>
-              <a:t>Toma de aire y evacuación de humos</a:t>
-            </a:r>
-          </a:p>
-          <a:p>
-            <a:pPr>
-              <a:spcAft>
-                <a:spcPts val="1000"/>
-              </a:spcAft>
-            </a:pPr>
-            <a:r>
-              <a:rPr sz="1600" b="1" i="0">
-                <a:solidFill>
-                  <a:srgbClr val="2E3A80"/>
-                </a:solidFill>
-                <a:latin typeface="Montserrat"/>
-              </a:rPr>
-              <a:t>•  </a:t>
-            </a:r>
-            <a:r>
-              <a:rPr sz="1600" b="0" i="0">
-                <a:solidFill>
-                  <a:srgbClr val="1B2330"/>
-                </a:solidFill>
-                <a:latin typeface="Montserrat"/>
-              </a:rPr>
-              <a:t>Materia fija de examen</a:t>
-            </a:r>
-          </a:p>
-        </p:txBody>
-      </p:sp>
-      <p:sp>
-        <p:nvSpPr>
-          <p:cNvPr id="8" name="imgph" descr="IMGQ:condensing gas boiler flue pipe"/>
+              <a:t>En este vídeo</a:t>
+            </a:r>
+          </a:p>
+        </p:txBody>
+      </p:sp>
+      <p:sp>
+        <p:nvSpPr>
+          <p:cNvPr id="7" name="Rounded Rectangle 6"/>
           <p:cNvSpPr/>
           <p:nvPr/>
         </p:nvSpPr>
         <p:spPr>
           <a:xfrm>
-            <a:off x="5806440" y="1051560"/>
-            <a:ext cx="5298947" cy="4629150"/>
+            <a:off x="868680" y="1673352"/>
+            <a:ext cx="2011680" cy="73152"/>
           </a:xfrm>
           <a:prstGeom prst="roundRect">
             <a:avLst/>
           </a:prstGeom>
           <a:solidFill>
-            <a:srgbClr val="F3F6FB"/>
+            <a:srgbClr val="E8801A"/>
           </a:solidFill>
-          <a:ln w="12700">
-            <a:solidFill>
-              <a:srgbClr val="C7D2E6"/>
-            </a:solidFill>
+          <a:ln>
+            <a:noFill/>
           </a:ln>
           <a:effectLst/>
         </p:spPr>
@@ -7492,14 +8226,14 @@
       </p:sp>
       <p:sp>
         <p:nvSpPr>
-          <p:cNvPr id="9" name="TextBox 8"/>
+          <p:cNvPr id="8" name="TextBox 7"/>
           <p:cNvSpPr txBox="1"/>
           <p:nvPr/>
         </p:nvSpPr>
         <p:spPr>
           <a:xfrm>
-            <a:off x="6080760" y="2726055"/>
-            <a:ext cx="4750307" cy="1280160"/>
+            <a:off x="822960" y="2103120"/>
+            <a:ext cx="10515600" cy="4023360"/>
           </a:xfrm>
           <a:prstGeom prst="rect">
             <a:avLst/>
@@ -7512,27 +8246,228 @@
           </a:bodyPr>
           <a:lstStyle/>
           <a:p>
-            <a:pPr algn="ctr"/>
-            <a:r>
-              <a:rPr sz="1400" b="1" i="0">
-                <a:solidFill>
-                  <a:srgbClr val="64748B"/>
-                </a:solidFill>
-                <a:latin typeface="Montserrat"/>
-              </a:rPr>
-              <a:t>IMAGEN REALISTA</a:t>
-            </a:r>
-          </a:p>
-          <a:p>
-            <a:pPr algn="ctr"/>
-            <a:r>
-              <a:rPr sz="1100" b="0" i="1">
-                <a:solidFill>
-                  <a:srgbClr val="64748B"/>
-                </a:solidFill>
-                <a:latin typeface="Montserrat"/>
-              </a:rPr>
-              <a:t>condensing gas boiler flue pipe</a:t>
+            <a:pPr>
+              <a:spcAft>
+                <a:spcPts val="900"/>
+              </a:spcAft>
+            </a:pPr>
+            <a:r>
+              <a:rPr sz="1800" b="1" i="0">
+                <a:solidFill>
+                  <a:srgbClr val="E8801A"/>
+                </a:solidFill>
+                <a:latin typeface="Montserrat"/>
+              </a:rPr>
+              <a:t>01   </a:t>
+            </a:r>
+            <a:r>
+              <a:rPr sz="1700" b="0" i="0">
+                <a:solidFill>
+                  <a:srgbClr val="1B2330"/>
+                </a:solidFill>
+                <a:latin typeface="Montserrat"/>
+              </a:rPr>
+              <a:t>Circuito de combustión</a:t>
+            </a:r>
+          </a:p>
+          <a:p>
+            <a:pPr>
+              <a:spcAft>
+                <a:spcPts val="900"/>
+              </a:spcAft>
+            </a:pPr>
+            <a:r>
+              <a:rPr sz="1800" b="1" i="0">
+                <a:solidFill>
+                  <a:srgbClr val="E8801A"/>
+                </a:solidFill>
+                <a:latin typeface="Montserrat"/>
+              </a:rPr>
+              <a:t>02   </a:t>
+            </a:r>
+            <a:r>
+              <a:rPr sz="1700" b="0" i="0">
+                <a:solidFill>
+                  <a:srgbClr val="1B2330"/>
+                </a:solidFill>
+                <a:latin typeface="Montserrat"/>
+              </a:rPr>
+              <a:t>Tipos A</a:t>
+            </a:r>
+          </a:p>
+          <a:p>
+            <a:pPr>
+              <a:spcAft>
+                <a:spcPts val="900"/>
+              </a:spcAft>
+            </a:pPr>
+            <a:r>
+              <a:rPr sz="1800" b="1" i="0">
+                <a:solidFill>
+                  <a:srgbClr val="E8801A"/>
+                </a:solidFill>
+                <a:latin typeface="Montserrat"/>
+              </a:rPr>
+              <a:t>03   </a:t>
+            </a:r>
+            <a:r>
+              <a:rPr sz="1700" b="0" i="0">
+                <a:solidFill>
+                  <a:srgbClr val="1B2330"/>
+                </a:solidFill>
+                <a:latin typeface="Montserrat"/>
+              </a:rPr>
+              <a:t>Conducidos vs. carné</a:t>
+            </a:r>
+          </a:p>
+          <a:p>
+            <a:pPr>
+              <a:spcAft>
+                <a:spcPts val="900"/>
+              </a:spcAft>
+            </a:pPr>
+            <a:r>
+              <a:rPr sz="1800" b="1" i="0">
+                <a:solidFill>
+                  <a:srgbClr val="E8801A"/>
+                </a:solidFill>
+                <a:latin typeface="Montserrat"/>
+              </a:rPr>
+              <a:t>04   </a:t>
+            </a:r>
+            <a:r>
+              <a:rPr sz="1700" b="0" i="0">
+                <a:solidFill>
+                  <a:srgbClr val="1B2330"/>
+                </a:solidFill>
+                <a:latin typeface="Montserrat"/>
+              </a:rPr>
+              <a:t>Apartado 5.1</a:t>
+            </a:r>
+          </a:p>
+          <a:p>
+            <a:pPr>
+              <a:spcAft>
+                <a:spcPts val="900"/>
+              </a:spcAft>
+            </a:pPr>
+            <a:r>
+              <a:rPr sz="1800" b="1" i="0">
+                <a:solidFill>
+                  <a:srgbClr val="E8801A"/>
+                </a:solidFill>
+                <a:latin typeface="Montserrat"/>
+              </a:rPr>
+              <a:t>05   </a:t>
+            </a:r>
+            <a:r>
+              <a:rPr sz="1700" b="0" i="0">
+                <a:solidFill>
+                  <a:srgbClr val="1B2330"/>
+                </a:solidFill>
+                <a:latin typeface="Montserrat"/>
+              </a:rPr>
+              <a:t>Apartado 5.2</a:t>
+            </a:r>
+          </a:p>
+          <a:p>
+            <a:pPr>
+              <a:spcAft>
+                <a:spcPts val="900"/>
+              </a:spcAft>
+            </a:pPr>
+            <a:r>
+              <a:rPr sz="1800" b="1" i="0">
+                <a:solidFill>
+                  <a:srgbClr val="E8801A"/>
+                </a:solidFill>
+                <a:latin typeface="Montserrat"/>
+              </a:rPr>
+              <a:t>06   </a:t>
+            </a:r>
+            <a:r>
+              <a:rPr sz="1700" b="0" i="0">
+                <a:solidFill>
+                  <a:srgbClr val="1B2330"/>
+                </a:solidFill>
+                <a:latin typeface="Montserrat"/>
+              </a:rPr>
+              <a:t>Apartado 5.3.1</a:t>
+            </a:r>
+          </a:p>
+          <a:p>
+            <a:pPr>
+              <a:spcAft>
+                <a:spcPts val="900"/>
+              </a:spcAft>
+            </a:pPr>
+            <a:r>
+              <a:rPr sz="1800" b="1" i="0">
+                <a:solidFill>
+                  <a:srgbClr val="E8801A"/>
+                </a:solidFill>
+                <a:latin typeface="Montserrat"/>
+              </a:rPr>
+              <a:t>07   </a:t>
+            </a:r>
+            <a:r>
+              <a:rPr sz="1700" b="0" i="0">
+                <a:solidFill>
+                  <a:srgbClr val="1B2330"/>
+                </a:solidFill>
+                <a:latin typeface="Montserrat"/>
+              </a:rPr>
+              <a:t>Apartado 5.3.2</a:t>
+            </a:r>
+          </a:p>
+          <a:p>
+            <a:pPr>
+              <a:spcAft>
+                <a:spcPts val="900"/>
+              </a:spcAft>
+            </a:pPr>
+            <a:r>
+              <a:rPr sz="1800" b="1" i="0">
+                <a:solidFill>
+                  <a:srgbClr val="E8801A"/>
+                </a:solidFill>
+                <a:latin typeface="Montserrat"/>
+              </a:rPr>
+              <a:t>08   </a:t>
+            </a:r>
+            <a:r>
+              <a:rPr sz="1700" b="0" i="0">
+                <a:solidFill>
+                  <a:srgbClr val="1B2330"/>
+                </a:solidFill>
+                <a:latin typeface="Montserrat"/>
+              </a:rPr>
+              <a:t>Apartado 5.4</a:t>
+            </a:r>
+          </a:p>
+          <a:p>
+            <a:pPr>
+              <a:spcAft>
+                <a:spcPts val="900"/>
+              </a:spcAft>
+            </a:pPr>
+            <a:r>
+              <a:rPr sz="1800" b="1" i="0">
+                <a:solidFill>
+                  <a:srgbClr val="E8801A"/>
+                </a:solidFill>
+                <a:latin typeface="Montserrat"/>
+              </a:rPr>
+              <a:t>09   </a:t>
+            </a:r>
+            <a:r>
+              <a:rPr sz="1700" b="0" i="0">
+                <a:solidFill>
+                  <a:srgbClr val="1B2330"/>
+                </a:solidFill>
+                <a:latin typeface="Montserrat"/>
+              </a:rPr>
+              <a:t>Apartado 5.5</a:t>
             </a:r>
           </a:p>
         </p:txBody>
@@ -7629,7 +8564,7 @@
                 </a:solidFill>
                 <a:latin typeface="Montserrat"/>
               </a:rPr>
-              <a:t>004 / 014</a:t>
+              <a:t>004 / 015</a:t>
             </a:r>
           </a:p>
         </p:txBody>
@@ -7677,7 +8612,7 @@
         <p:spPr>
           <a:xfrm>
             <a:off x="822960" y="457200"/>
-            <a:ext cx="8229600" cy="365760"/>
+            <a:ext cx="10058400" cy="365760"/>
           </a:xfrm>
           <a:prstGeom prst="rect">
             <a:avLst/>
@@ -7691,13 +8626,13 @@
           <a:lstStyle/>
           <a:p>
             <a:r>
-              <a:rPr sz="1200" b="1" i="0">
-                <a:solidFill>
-                  <a:srgbClr val="64748B"/>
-                </a:solidFill>
-                <a:latin typeface="Montserrat"/>
-              </a:rPr>
-              <a:t>TIPOS A · B · C</a:t>
+              <a:rPr sz="1300" b="1" i="0">
+                <a:solidFill>
+                  <a:srgbClr val="E8801A"/>
+                </a:solidFill>
+                <a:latin typeface="Montserrat"/>
+              </a:rPr>
+              <a:t>CIRCUITO DE COMBUSTIÓN</a:t>
             </a:r>
           </a:p>
         </p:txBody>
@@ -7725,26 +8660,70 @@
           <a:lstStyle/>
           <a:p>
             <a:r>
-              <a:rPr sz="2700" b="1" i="0">
+              <a:rPr sz="2800" b="1" i="0">
                 <a:solidFill>
                   <a:srgbClr val="1E2761"/>
                 </a:solidFill>
                 <a:latin typeface="Montserrat"/>
               </a:rPr>
-              <a:t>Los tres tipos, uno a uno</a:t>
-            </a:r>
-          </a:p>
-        </p:txBody>
-      </p:sp>
-      <p:sp>
-        <p:nvSpPr>
-          <p:cNvPr id="7" name="TextBox 6"/>
+              <a:t>De dónde respira y por dónde echa el humo</a:t>
+            </a:r>
+          </a:p>
+        </p:txBody>
+      </p:sp>
+      <p:sp>
+        <p:nvSpPr>
+          <p:cNvPr id="7" name="Rounded Rectangle 6"/>
+          <p:cNvSpPr/>
+          <p:nvPr/>
+        </p:nvSpPr>
+        <p:spPr>
+          <a:xfrm>
+            <a:off x="868680" y="1627632"/>
+            <a:ext cx="2011680" cy="73152"/>
+          </a:xfrm>
+          <a:prstGeom prst="roundRect">
+            <a:avLst/>
+          </a:prstGeom>
+          <a:solidFill>
+            <a:srgbClr val="E8801A"/>
+          </a:solidFill>
+          <a:ln>
+            <a:noFill/>
+          </a:ln>
+          <a:effectLst/>
+        </p:spPr>
+        <p:style>
+          <a:lnRef idx="1">
+            <a:schemeClr val="accent1"/>
+          </a:lnRef>
+          <a:fillRef idx="3">
+            <a:schemeClr val="accent1"/>
+          </a:fillRef>
+          <a:effectRef idx="2">
+            <a:schemeClr val="accent1"/>
+          </a:effectRef>
+          <a:fontRef idx="minor">
+            <a:schemeClr val="lt1"/>
+          </a:fontRef>
+        </p:style>
+        <p:txBody>
+          <a:bodyPr rtlCol="0" anchor="ctr"/>
+          <a:lstStyle/>
+          <a:p>
+            <a:pPr algn="ctr"/>
+          </a:p>
+        </p:txBody>
+      </p:sp>
+      <p:sp>
+        <p:nvSpPr>
+          <p:cNvPr id="8" name="TextBox 7"/>
           <p:cNvSpPr txBox="1"/>
           <p:nvPr/>
         </p:nvSpPr>
         <p:spPr>
           <a:xfrm>
-            <a:off x="822960" y="1920240"/>
+            <a:off x="822960" y="1965960"/>
             <a:ext cx="4983480" cy="4206240"/>
           </a:xfrm>
           <a:prstGeom prst="rect">
@@ -7760,17 +8739,17 @@
           <a:p>
             <a:pPr>
               <a:spcAft>
-                <a:spcPts val="1000"/>
+                <a:spcPts val="1100"/>
               </a:spcAft>
             </a:pPr>
             <a:r>
               <a:rPr sz="1600" b="1" i="0">
                 <a:solidFill>
-                  <a:srgbClr val="2E3A80"/>
-                </a:solidFill>
-                <a:latin typeface="Montserrat"/>
-              </a:rPr>
-              <a:t>•  </a:t>
+                  <a:srgbClr val="E8801A"/>
+                </a:solidFill>
+                <a:latin typeface="Montserrat"/>
+              </a:rPr>
+              <a:t>▸  </a:t>
             </a:r>
             <a:r>
               <a:rPr sz="1600" b="0" i="0">
@@ -7779,23 +8758,23 @@
                 </a:solidFill>
                 <a:latin typeface="Montserrat"/>
               </a:rPr>
-              <a:t>A: respira del local, echa al local</a:t>
+              <a:t>Clasificación por combustión: A, B y C</a:t>
             </a:r>
           </a:p>
           <a:p>
             <a:pPr>
               <a:spcAft>
-                <a:spcPts val="1000"/>
+                <a:spcPts val="1100"/>
               </a:spcAft>
             </a:pPr>
             <a:r>
               <a:rPr sz="1600" b="1" i="0">
                 <a:solidFill>
-                  <a:srgbClr val="2E3A80"/>
-                </a:solidFill>
-                <a:latin typeface="Montserrat"/>
-              </a:rPr>
-              <a:t>•  </a:t>
+                  <a:srgbClr val="E8801A"/>
+                </a:solidFill>
+                <a:latin typeface="Montserrat"/>
+              </a:rPr>
+              <a:t>▸  </a:t>
             </a:r>
             <a:r>
               <a:rPr sz="1600" b="0" i="0">
@@ -7804,23 +8783,23 @@
                 </a:solidFill>
                 <a:latin typeface="Montserrat"/>
               </a:rPr>
-              <a:t>B: respira del local, echa fuera</a:t>
+              <a:t>Toma de aire y evacuación de humos</a:t>
             </a:r>
           </a:p>
           <a:p>
             <a:pPr>
               <a:spcAft>
-                <a:spcPts val="1000"/>
+                <a:spcPts val="1100"/>
               </a:spcAft>
             </a:pPr>
             <a:r>
               <a:rPr sz="1600" b="1" i="0">
                 <a:solidFill>
-                  <a:srgbClr val="2E3A80"/>
-                </a:solidFill>
-                <a:latin typeface="Montserrat"/>
-              </a:rPr>
-              <a:t>•  </a:t>
+                  <a:srgbClr val="E8801A"/>
+                </a:solidFill>
+                <a:latin typeface="Montserrat"/>
+              </a:rPr>
+              <a:t>▸  </a:t>
             </a:r>
             <a:r>
               <a:rPr sz="1600" b="0" i="0">
@@ -7829,39 +8808,14 @@
                 </a:solidFill>
                 <a:latin typeface="Montserrat"/>
               </a:rPr>
-              <a:t>C: respira de fuera, echa fuera (estanco)</a:t>
-            </a:r>
-          </a:p>
-          <a:p>
-            <a:pPr>
-              <a:spcAft>
-                <a:spcPts val="1000"/>
-              </a:spcAft>
-            </a:pPr>
-            <a:r>
-              <a:rPr sz="1600" b="1" i="0">
-                <a:solidFill>
-                  <a:srgbClr val="2E3A80"/>
-                </a:solidFill>
-                <a:latin typeface="Montserrat"/>
-              </a:rPr>
-              <a:t>•  </a:t>
-            </a:r>
-            <a:r>
-              <a:rPr sz="1600" b="0" i="0">
-                <a:solidFill>
-                  <a:srgbClr val="1B2330"/>
-                </a:solidFill>
-                <a:latin typeface="Montserrat"/>
-              </a:rPr>
-              <a:t>Más aislado del local, más seguro</a:t>
-            </a:r>
-          </a:p>
-        </p:txBody>
-      </p:sp>
-      <p:sp>
-        <p:nvSpPr>
-          <p:cNvPr id="8" name="imgph" descr="IMGQ:sealed balanced flue gas boiler"/>
+              <a:t>Materia fija de examen</a:t>
+            </a:r>
+          </a:p>
+        </p:txBody>
+      </p:sp>
+      <p:sp>
+        <p:nvSpPr>
+          <p:cNvPr id="9" name="imgph" descr="IMGQ:condensing gas boiler flue pipe"/>
           <p:cNvSpPr/>
           <p:nvPr/>
         </p:nvSpPr>
@@ -7907,7 +8861,7 @@
       </p:sp>
       <p:sp>
         <p:nvSpPr>
-          <p:cNvPr id="9" name="TextBox 8"/>
+          <p:cNvPr id="10" name="TextBox 9"/>
           <p:cNvSpPr txBox="1"/>
           <p:nvPr/>
         </p:nvSpPr>
@@ -7947,7 +8901,7 @@
                 </a:solidFill>
                 <a:latin typeface="Montserrat"/>
               </a:rPr>
-              <a:t>sealed balanced flue gas boiler</a:t>
+              <a:t>condensing gas boiler flue pipe</a:t>
             </a:r>
           </a:p>
         </p:txBody>
@@ -8044,7 +8998,7 @@
                 </a:solidFill>
                 <a:latin typeface="Montserrat"/>
               </a:rPr>
-              <a:t>005 / 014</a:t>
+              <a:t>005 / 015</a:t>
             </a:r>
           </a:p>
         </p:txBody>
@@ -8092,7 +9046,7 @@
         <p:spPr>
           <a:xfrm>
             <a:off x="822960" y="457200"/>
-            <a:ext cx="8229600" cy="365760"/>
+            <a:ext cx="10058400" cy="365760"/>
           </a:xfrm>
           <a:prstGeom prst="rect">
             <a:avLst/>
@@ -8106,13 +9060,13 @@
           <a:lstStyle/>
           <a:p>
             <a:r>
-              <a:rPr sz="1200" b="1" i="0">
-                <a:solidFill>
-                  <a:srgbClr val="64748B"/>
-                </a:solidFill>
-                <a:latin typeface="Montserrat"/>
-              </a:rPr>
-              <a:t>CONDUCIDOS VS. CARNÉ</a:t>
+              <a:rPr sz="1300" b="1" i="0">
+                <a:solidFill>
+                  <a:srgbClr val="E8801A"/>
+                </a:solidFill>
+                <a:latin typeface="Montserrat"/>
+              </a:rPr>
+              <a:t>TIPOS A · B · C</a:t>
             </a:r>
           </a:p>
         </p:txBody>
@@ -8140,26 +9094,70 @@
           <a:lstStyle/>
           <a:p>
             <a:r>
-              <a:rPr sz="2700" b="1" i="0">
+              <a:rPr sz="2800" b="1" i="0">
                 <a:solidFill>
                   <a:srgbClr val="1E2761"/>
                 </a:solidFill>
                 <a:latin typeface="Montserrat"/>
               </a:rPr>
-              <a:t>No confundas tipo con categoría</a:t>
-            </a:r>
-          </a:p>
-        </p:txBody>
-      </p:sp>
-      <p:sp>
-        <p:nvSpPr>
-          <p:cNvPr id="7" name="TextBox 6"/>
+              <a:t>Los tres tipos, uno a uno</a:t>
+            </a:r>
+          </a:p>
+        </p:txBody>
+      </p:sp>
+      <p:sp>
+        <p:nvSpPr>
+          <p:cNvPr id="7" name="Rounded Rectangle 6"/>
+          <p:cNvSpPr/>
+          <p:nvPr/>
+        </p:nvSpPr>
+        <p:spPr>
+          <a:xfrm>
+            <a:off x="868680" y="1627632"/>
+            <a:ext cx="2011680" cy="73152"/>
+          </a:xfrm>
+          <a:prstGeom prst="roundRect">
+            <a:avLst/>
+          </a:prstGeom>
+          <a:solidFill>
+            <a:srgbClr val="E8801A"/>
+          </a:solidFill>
+          <a:ln>
+            <a:noFill/>
+          </a:ln>
+          <a:effectLst/>
+        </p:spPr>
+        <p:style>
+          <a:lnRef idx="1">
+            <a:schemeClr val="accent1"/>
+          </a:lnRef>
+          <a:fillRef idx="3">
+            <a:schemeClr val="accent1"/>
+          </a:fillRef>
+          <a:effectRef idx="2">
+            <a:schemeClr val="accent1"/>
+          </a:effectRef>
+          <a:fontRef idx="minor">
+            <a:schemeClr val="lt1"/>
+          </a:fontRef>
+        </p:style>
+        <p:txBody>
+          <a:bodyPr rtlCol="0" anchor="ctr"/>
+          <a:lstStyle/>
+          <a:p>
+            <a:pPr algn="ctr"/>
+          </a:p>
+        </p:txBody>
+      </p:sp>
+      <p:sp>
+        <p:nvSpPr>
+          <p:cNvPr id="8" name="TextBox 7"/>
           <p:cNvSpPr txBox="1"/>
           <p:nvPr/>
         </p:nvSpPr>
         <p:spPr>
           <a:xfrm>
-            <a:off x="822960" y="1920240"/>
+            <a:off x="822960" y="1965960"/>
             <a:ext cx="4983480" cy="4206240"/>
           </a:xfrm>
           <a:prstGeom prst="rect">
@@ -8175,17 +9173,17 @@
           <a:p>
             <a:pPr>
               <a:spcAft>
-                <a:spcPts val="1000"/>
+                <a:spcPts val="1100"/>
               </a:spcAft>
             </a:pPr>
             <a:r>
               <a:rPr sz="1600" b="1" i="0">
                 <a:solidFill>
-                  <a:srgbClr val="2E3A80"/>
-                </a:solidFill>
-                <a:latin typeface="Montserrat"/>
-              </a:rPr>
-              <a:t>•  </a:t>
+                  <a:srgbClr val="E8801A"/>
+                </a:solidFill>
+                <a:latin typeface="Montserrat"/>
+              </a:rPr>
+              <a:t>▸  </a:t>
             </a:r>
             <a:r>
               <a:rPr sz="1600" b="0" i="0">
@@ -8194,23 +9192,23 @@
                 </a:solidFill>
                 <a:latin typeface="Montserrat"/>
               </a:rPr>
-              <a:t>B y C = aparatos conducidos</a:t>
+              <a:t>A: respira del local, echa al local</a:t>
             </a:r>
           </a:p>
           <a:p>
             <a:pPr>
               <a:spcAft>
-                <a:spcPts val="1000"/>
+                <a:spcPts val="1100"/>
               </a:spcAft>
             </a:pPr>
             <a:r>
               <a:rPr sz="1600" b="1" i="0">
                 <a:solidFill>
-                  <a:srgbClr val="2E3A80"/>
-                </a:solidFill>
-                <a:latin typeface="Montserrat"/>
-              </a:rPr>
-              <a:t>•  </a:t>
+                  <a:srgbClr val="E8801A"/>
+                </a:solidFill>
+                <a:latin typeface="Montserrat"/>
+              </a:rPr>
+              <a:t>▸  </a:t>
             </a:r>
             <a:r>
               <a:rPr sz="1600" b="0" i="0">
@@ -8219,23 +9217,23 @@
                 </a:solidFill>
                 <a:latin typeface="Montserrat"/>
               </a:rPr>
-              <a:t>Tipo A/B/C = cómo quema el aparato</a:t>
+              <a:t>B: respira del local, echa fuera</a:t>
             </a:r>
           </a:p>
           <a:p>
             <a:pPr>
               <a:spcAft>
-                <a:spcPts val="1000"/>
+                <a:spcPts val="1100"/>
               </a:spcAft>
             </a:pPr>
             <a:r>
               <a:rPr sz="1600" b="1" i="0">
                 <a:solidFill>
-                  <a:srgbClr val="2E3A80"/>
-                </a:solidFill>
-                <a:latin typeface="Montserrat"/>
-              </a:rPr>
-              <a:t>•  </a:t>
+                  <a:srgbClr val="E8801A"/>
+                </a:solidFill>
+                <a:latin typeface="Montserrat"/>
+              </a:rPr>
+              <a:t>▸  </a:t>
             </a:r>
             <a:r>
               <a:rPr sz="1600" b="0" i="0">
@@ -8244,23 +9242,23 @@
                 </a:solidFill>
                 <a:latin typeface="Montserrat"/>
               </a:rPr>
-              <a:t>Categoría A/B/C = carné del instalador</a:t>
+              <a:t>C: respira de fuera, echa fuera (estanco)</a:t>
             </a:r>
           </a:p>
           <a:p>
             <a:pPr>
               <a:spcAft>
-                <a:spcPts val="1000"/>
+                <a:spcPts val="1100"/>
               </a:spcAft>
             </a:pPr>
             <a:r>
               <a:rPr sz="1600" b="1" i="0">
                 <a:solidFill>
-                  <a:srgbClr val="2E3A80"/>
-                </a:solidFill>
-                <a:latin typeface="Montserrat"/>
-              </a:rPr>
-              <a:t>•  </a:t>
+                  <a:srgbClr val="E8801A"/>
+                </a:solidFill>
+                <a:latin typeface="Montserrat"/>
+              </a:rPr>
+              <a:t>▸  </a:t>
             </a:r>
             <a:r>
               <a:rPr sz="1600" b="0" i="0">
@@ -8269,14 +9267,14 @@
                 </a:solidFill>
                 <a:latin typeface="Montserrat"/>
               </a:rPr>
-              <a:t>Con categoría B trabajas tipos A, B o C</a:t>
-            </a:r>
-          </a:p>
-        </p:txBody>
-      </p:sp>
-      <p:sp>
-        <p:nvSpPr>
-          <p:cNvPr id="8" name="imgph" descr="IMGQ:gas installer certification card"/>
+              <a:t>Más aislado del local, más seguro</a:t>
+            </a:r>
+          </a:p>
+        </p:txBody>
+      </p:sp>
+      <p:sp>
+        <p:nvSpPr>
+          <p:cNvPr id="9" name="imgph" descr="IMGQ:sealed balanced flue gas boiler"/>
           <p:cNvSpPr/>
           <p:nvPr/>
         </p:nvSpPr>
@@ -8322,7 +9320,7 @@
       </p:sp>
       <p:sp>
         <p:nvSpPr>
-          <p:cNvPr id="9" name="TextBox 8"/>
+          <p:cNvPr id="10" name="TextBox 9"/>
           <p:cNvSpPr txBox="1"/>
           <p:nvPr/>
         </p:nvSpPr>
@@ -8362,7 +9360,7 @@
                 </a:solidFill>
                 <a:latin typeface="Montserrat"/>
               </a:rPr>
-              <a:t>gas installer certification card</a:t>
+              <a:t>sealed balanced flue gas boiler</a:t>
             </a:r>
           </a:p>
         </p:txBody>
@@ -8459,7 +9457,7 @@
                 </a:solidFill>
                 <a:latin typeface="Montserrat"/>
               </a:rPr>
-              <a:t>006 / 014</a:t>
+              <a:t>006 / 015</a:t>
             </a:r>
           </a:p>
         </p:txBody>
@@ -8507,7 +9505,7 @@
         <p:spPr>
           <a:xfrm>
             <a:off x="822960" y="457200"/>
-            <a:ext cx="8229600" cy="365760"/>
+            <a:ext cx="10058400" cy="365760"/>
           </a:xfrm>
           <a:prstGeom prst="rect">
             <a:avLst/>
@@ -8521,13 +9519,13 @@
           <a:lstStyle/>
           <a:p>
             <a:r>
-              <a:rPr sz="1200" b="1" i="0">
-                <a:solidFill>
-                  <a:srgbClr val="64748B"/>
-                </a:solidFill>
-                <a:latin typeface="Montserrat"/>
-              </a:rPr>
-              <a:t>APARTADO 5.1 · AUTORIZACIÓN</a:t>
+              <a:rPr sz="1300" b="1" i="0">
+                <a:solidFill>
+                  <a:srgbClr val="E8801A"/>
+                </a:solidFill>
+                <a:latin typeface="Montserrat"/>
+              </a:rPr>
+              <a:t>CONDUCIDOS VS. CARNÉ</a:t>
             </a:r>
           </a:p>
         </p:txBody>
@@ -8555,26 +9553,70 @@
           <a:lstStyle/>
           <a:p>
             <a:r>
-              <a:rPr sz="2700" b="1" i="0">
+              <a:rPr sz="2800" b="1" i="0">
                 <a:solidFill>
                   <a:srgbClr val="1E2761"/>
                 </a:solidFill>
                 <a:latin typeface="Montserrat"/>
               </a:rPr>
-              <a:t>Instalar un aparato no pide permiso</a:t>
-            </a:r>
-          </a:p>
-        </p:txBody>
-      </p:sp>
-      <p:sp>
-        <p:nvSpPr>
-          <p:cNvPr id="7" name="TextBox 6"/>
+              <a:t>No confundas tipo con categoría</a:t>
+            </a:r>
+          </a:p>
+        </p:txBody>
+      </p:sp>
+      <p:sp>
+        <p:nvSpPr>
+          <p:cNvPr id="7" name="Rounded Rectangle 6"/>
+          <p:cNvSpPr/>
+          <p:nvPr/>
+        </p:nvSpPr>
+        <p:spPr>
+          <a:xfrm>
+            <a:off x="868680" y="1627632"/>
+            <a:ext cx="2011680" cy="73152"/>
+          </a:xfrm>
+          <a:prstGeom prst="roundRect">
+            <a:avLst/>
+          </a:prstGeom>
+          <a:solidFill>
+            <a:srgbClr val="E8801A"/>
+          </a:solidFill>
+          <a:ln>
+            <a:noFill/>
+          </a:ln>
+          <a:effectLst/>
+        </p:spPr>
+        <p:style>
+          <a:lnRef idx="1">
+            <a:schemeClr val="accent1"/>
+          </a:lnRef>
+          <a:fillRef idx="3">
+            <a:schemeClr val="accent1"/>
+          </a:fillRef>
+          <a:effectRef idx="2">
+            <a:schemeClr val="accent1"/>
+          </a:effectRef>
+          <a:fontRef idx="minor">
+            <a:schemeClr val="lt1"/>
+          </a:fontRef>
+        </p:style>
+        <p:txBody>
+          <a:bodyPr rtlCol="0" anchor="ctr"/>
+          <a:lstStyle/>
+          <a:p>
+            <a:pPr algn="ctr"/>
+          </a:p>
+        </p:txBody>
+      </p:sp>
+      <p:sp>
+        <p:nvSpPr>
+          <p:cNvPr id="8" name="TextBox 7"/>
           <p:cNvSpPr txBox="1"/>
           <p:nvPr/>
         </p:nvSpPr>
         <p:spPr>
           <a:xfrm>
-            <a:off x="822960" y="1920240"/>
+            <a:off x="822960" y="1965960"/>
             <a:ext cx="4983480" cy="4206240"/>
           </a:xfrm>
           <a:prstGeom prst="rect">
@@ -8590,17 +9632,17 @@
           <a:p>
             <a:pPr>
               <a:spcAft>
-                <a:spcPts val="1000"/>
+                <a:spcPts val="1100"/>
               </a:spcAft>
             </a:pPr>
             <a:r>
               <a:rPr sz="1600" b="1" i="0">
                 <a:solidFill>
-                  <a:srgbClr val="2E3A80"/>
-                </a:solidFill>
-                <a:latin typeface="Montserrat"/>
-              </a:rPr>
-              <a:t>•  </a:t>
+                  <a:srgbClr val="E8801A"/>
+                </a:solidFill>
+                <a:latin typeface="Montserrat"/>
+              </a:rPr>
+              <a:t>▸  </a:t>
             </a:r>
             <a:r>
               <a:rPr sz="1600" b="0" i="0">
@@ -8609,23 +9651,23 @@
                 </a:solidFill>
                 <a:latin typeface="Montserrat"/>
               </a:rPr>
-              <a:t>No precisa autorización administrativa</a:t>
+              <a:t>B y C = aparatos conducidos</a:t>
             </a:r>
           </a:p>
           <a:p>
             <a:pPr>
               <a:spcAft>
-                <a:spcPts val="1000"/>
+                <a:spcPts val="1100"/>
               </a:spcAft>
             </a:pPr>
             <a:r>
               <a:rPr sz="1600" b="1" i="0">
                 <a:solidFill>
-                  <a:srgbClr val="2E3A80"/>
-                </a:solidFill>
-                <a:latin typeface="Montserrat"/>
-              </a:rPr>
-              <a:t>•  </a:t>
+                  <a:srgbClr val="E8801A"/>
+                </a:solidFill>
+                <a:latin typeface="Montserrat"/>
+              </a:rPr>
+              <a:t>▸  </a:t>
             </a:r>
             <a:r>
               <a:rPr sz="1600" b="0" i="0">
@@ -8634,23 +9676,23 @@
                 </a:solidFill>
                 <a:latin typeface="Montserrat"/>
               </a:rPr>
-              <a:t>En gas: hacer y, si toca, comunicar</a:t>
+              <a:t>Tipo A/B/C = cómo quema el aparato</a:t>
             </a:r>
           </a:p>
           <a:p>
             <a:pPr>
               <a:spcAft>
-                <a:spcPts val="1000"/>
+                <a:spcPts val="1100"/>
               </a:spcAft>
             </a:pPr>
             <a:r>
               <a:rPr sz="1600" b="1" i="0">
                 <a:solidFill>
-                  <a:srgbClr val="2E3A80"/>
-                </a:solidFill>
-                <a:latin typeface="Montserrat"/>
-              </a:rPr>
-              <a:t>•  </a:t>
+                  <a:srgbClr val="E8801A"/>
+                </a:solidFill>
+                <a:latin typeface="Montserrat"/>
+              </a:rPr>
+              <a:t>▸  </a:t>
             </a:r>
             <a:r>
               <a:rPr sz="1600" b="0" i="0">
@@ -8659,14 +9701,39 @@
                 </a:solidFill>
                 <a:latin typeface="Montserrat"/>
               </a:rPr>
-              <a:t>Aquí ni siquiera hay que comunicar</a:t>
-            </a:r>
-          </a:p>
-        </p:txBody>
-      </p:sp>
-      <p:sp>
-        <p:nvSpPr>
-          <p:cNvPr id="8" name="imgph" descr="IMGQ:gas boiler wall mounted kitchen"/>
+              <a:t>Categoría A/B/C = carné del instalador</a:t>
+            </a:r>
+          </a:p>
+          <a:p>
+            <a:pPr>
+              <a:spcAft>
+                <a:spcPts val="1100"/>
+              </a:spcAft>
+            </a:pPr>
+            <a:r>
+              <a:rPr sz="1600" b="1" i="0">
+                <a:solidFill>
+                  <a:srgbClr val="E8801A"/>
+                </a:solidFill>
+                <a:latin typeface="Montserrat"/>
+              </a:rPr>
+              <a:t>▸  </a:t>
+            </a:r>
+            <a:r>
+              <a:rPr sz="1600" b="0" i="0">
+                <a:solidFill>
+                  <a:srgbClr val="1B2330"/>
+                </a:solidFill>
+                <a:latin typeface="Montserrat"/>
+              </a:rPr>
+              <a:t>Con categoría B trabajas tipos A, B o C</a:t>
+            </a:r>
+          </a:p>
+        </p:txBody>
+      </p:sp>
+      <p:sp>
+        <p:nvSpPr>
+          <p:cNvPr id="9" name="imgph" descr="IMGQ:gas installer certification card"/>
           <p:cNvSpPr/>
           <p:nvPr/>
         </p:nvSpPr>
@@ -8712,7 +9779,7 @@
       </p:sp>
       <p:sp>
         <p:nvSpPr>
-          <p:cNvPr id="9" name="TextBox 8"/>
+          <p:cNvPr id="10" name="TextBox 9"/>
           <p:cNvSpPr txBox="1"/>
           <p:nvPr/>
         </p:nvSpPr>
@@ -8752,7 +9819,7 @@
                 </a:solidFill>
                 <a:latin typeface="Montserrat"/>
               </a:rPr>
-              <a:t>gas boiler wall mounted kitchen</a:t>
+              <a:t>gas installer certification card</a:t>
             </a:r>
           </a:p>
         </p:txBody>
@@ -8849,7 +9916,7 @@
                 </a:solidFill>
                 <a:latin typeface="Montserrat"/>
               </a:rPr>
-              <a:t>007 / 014</a:t>
+              <a:t>007 / 015</a:t>
             </a:r>
           </a:p>
         </p:txBody>
@@ -8897,7 +9964,7 @@
         <p:spPr>
           <a:xfrm>
             <a:off x="822960" y="457200"/>
-            <a:ext cx="8229600" cy="365760"/>
+            <a:ext cx="10058400" cy="365760"/>
           </a:xfrm>
           <a:prstGeom prst="rect">
             <a:avLst/>
@@ -8911,13 +9978,13 @@
           <a:lstStyle/>
           <a:p>
             <a:r>
-              <a:rPr sz="1200" b="1" i="0">
-                <a:solidFill>
-                  <a:srgbClr val="64748B"/>
-                </a:solidFill>
-                <a:latin typeface="Montserrat"/>
-              </a:rPr>
-              <a:t>APARTADO 5.2 · CONEXIÓN</a:t>
+              <a:rPr sz="1300" b="1" i="0">
+                <a:solidFill>
+                  <a:srgbClr val="E8801A"/>
+                </a:solidFill>
+                <a:latin typeface="Montserrat"/>
+              </a:rPr>
+              <a:t>APARTADO 5.1 · AUTORIZACIÓN</a:t>
             </a:r>
           </a:p>
         </p:txBody>
@@ -8945,26 +10012,70 @@
           <a:lstStyle/>
           <a:p>
             <a:r>
-              <a:rPr sz="2700" b="1" i="0">
+              <a:rPr sz="2800" b="1" i="0">
                 <a:solidFill>
                   <a:srgbClr val="1E2761"/>
                 </a:solidFill>
                 <a:latin typeface="Montserrat"/>
               </a:rPr>
-              <a:t>Quién conecta el aparato</a:t>
-            </a:r>
-          </a:p>
-        </p:txBody>
-      </p:sp>
-      <p:sp>
-        <p:nvSpPr>
-          <p:cNvPr id="7" name="TextBox 6"/>
+              <a:t>Instalar un aparato no pide permiso</a:t>
+            </a:r>
+          </a:p>
+        </p:txBody>
+      </p:sp>
+      <p:sp>
+        <p:nvSpPr>
+          <p:cNvPr id="7" name="Rounded Rectangle 6"/>
+          <p:cNvSpPr/>
+          <p:nvPr/>
+        </p:nvSpPr>
+        <p:spPr>
+          <a:xfrm>
+            <a:off x="868680" y="1627632"/>
+            <a:ext cx="2011680" cy="73152"/>
+          </a:xfrm>
+          <a:prstGeom prst="roundRect">
+            <a:avLst/>
+          </a:prstGeom>
+          <a:solidFill>
+            <a:srgbClr val="E8801A"/>
+          </a:solidFill>
+          <a:ln>
+            <a:noFill/>
+          </a:ln>
+          <a:effectLst/>
+        </p:spPr>
+        <p:style>
+          <a:lnRef idx="1">
+            <a:schemeClr val="accent1"/>
+          </a:lnRef>
+          <a:fillRef idx="3">
+            <a:schemeClr val="accent1"/>
+          </a:fillRef>
+          <a:effectRef idx="2">
+            <a:schemeClr val="accent1"/>
+          </a:effectRef>
+          <a:fontRef idx="minor">
+            <a:schemeClr val="lt1"/>
+          </a:fontRef>
+        </p:style>
+        <p:txBody>
+          <a:bodyPr rtlCol="0" anchor="ctr"/>
+          <a:lstStyle/>
+          <a:p>
+            <a:pPr algn="ctr"/>
+          </a:p>
+        </p:txBody>
+      </p:sp>
+      <p:sp>
+        <p:nvSpPr>
+          <p:cNvPr id="8" name="TextBox 7"/>
           <p:cNvSpPr txBox="1"/>
           <p:nvPr/>
         </p:nvSpPr>
         <p:spPr>
           <a:xfrm>
-            <a:off x="822960" y="1920240"/>
+            <a:off x="822960" y="1965960"/>
             <a:ext cx="4983480" cy="4206240"/>
           </a:xfrm>
           <a:prstGeom prst="rect">
@@ -8980,17 +10091,17 @@
           <a:p>
             <a:pPr>
               <a:spcAft>
-                <a:spcPts val="1000"/>
+                <a:spcPts val="1100"/>
               </a:spcAft>
             </a:pPr>
             <a:r>
               <a:rPr sz="1600" b="1" i="0">
                 <a:solidFill>
-                  <a:srgbClr val="2E3A80"/>
-                </a:solidFill>
-                <a:latin typeface="Montserrat"/>
-              </a:rPr>
-              <a:t>•  </a:t>
+                  <a:srgbClr val="E8801A"/>
+                </a:solidFill>
+                <a:latin typeface="Montserrat"/>
+              </a:rPr>
+              <a:t>▸  </a:t>
             </a:r>
             <a:r>
               <a:rPr sz="1600" b="0" i="0">
@@ -8999,23 +10110,23 @@
                 </a:solidFill>
                 <a:latin typeface="Montserrat"/>
               </a:rPr>
-              <a:t>Regla: siempre un instalador</a:t>
+              <a:t>No precisa autorización administrativa</a:t>
             </a:r>
           </a:p>
           <a:p>
             <a:pPr>
               <a:spcAft>
-                <a:spcPts val="1000"/>
+                <a:spcPts val="1100"/>
               </a:spcAft>
             </a:pPr>
             <a:r>
               <a:rPr sz="1600" b="1" i="0">
                 <a:solidFill>
-                  <a:srgbClr val="2E3A80"/>
-                </a:solidFill>
-                <a:latin typeface="Montserrat"/>
-              </a:rPr>
-              <a:t>•  </a:t>
+                  <a:srgbClr val="E8801A"/>
+                </a:solidFill>
+                <a:latin typeface="Montserrat"/>
+              </a:rPr>
+              <a:t>▸  </a:t>
             </a:r>
             <a:r>
               <a:rPr sz="1600" b="0" i="0">
@@ -9024,23 +10135,23 @@
                 </a:solidFill>
                 <a:latin typeface="Montserrat"/>
               </a:rPr>
-              <a:t>Conexión según UNE 60670-7</a:t>
+              <a:t>En gas: hacer y, si toca, comunicar</a:t>
             </a:r>
           </a:p>
           <a:p>
             <a:pPr>
               <a:spcAft>
-                <a:spcPts val="1000"/>
+                <a:spcPts val="1100"/>
               </a:spcAft>
             </a:pPr>
             <a:r>
               <a:rPr sz="1600" b="1" i="0">
                 <a:solidFill>
-                  <a:srgbClr val="2E3A80"/>
-                </a:solidFill>
-                <a:latin typeface="Montserrat"/>
-              </a:rPr>
-              <a:t>•  </a:t>
+                  <a:srgbClr val="E8801A"/>
+                </a:solidFill>
+                <a:latin typeface="Montserrat"/>
+              </a:rPr>
+              <a:t>▸  </a:t>
             </a:r>
             <a:r>
               <a:rPr sz="1600" b="0" i="0">
@@ -9049,39 +10160,14 @@
                 </a:solidFill>
                 <a:latin typeface="Montserrat"/>
               </a:rPr>
-              <a:t>Excepción: tubo flexible con abrazadera</a:t>
-            </a:r>
-          </a:p>
-          <a:p>
-            <a:pPr>
-              <a:spcAft>
-                <a:spcPts val="1000"/>
-              </a:spcAft>
-            </a:pPr>
-            <a:r>
-              <a:rPr sz="1600" b="1" i="0">
-                <a:solidFill>
-                  <a:srgbClr val="2E3A80"/>
-                </a:solidFill>
-                <a:latin typeface="Montserrat"/>
-              </a:rPr>
-              <a:t>•  </a:t>
-            </a:r>
-            <a:r>
-              <a:rPr sz="1600" b="0" i="0">
-                <a:solidFill>
-                  <a:srgbClr val="1B2330"/>
-                </a:solidFill>
-                <a:latin typeface="Montserrat"/>
-              </a:rPr>
-              <a:t>Ese lo puede poner el usuario</a:t>
-            </a:r>
-          </a:p>
-        </p:txBody>
-      </p:sp>
-      <p:sp>
-        <p:nvSpPr>
-          <p:cNvPr id="8" name="imgph" descr="IMGQ:flexible gas hose stove connection"/>
+              <a:t>Aquí ni siquiera hay que comunicar</a:t>
+            </a:r>
+          </a:p>
+        </p:txBody>
+      </p:sp>
+      <p:sp>
+        <p:nvSpPr>
+          <p:cNvPr id="9" name="imgph" descr="IMGQ:gas boiler wall mounted kitchen"/>
           <p:cNvSpPr/>
           <p:nvPr/>
         </p:nvSpPr>
@@ -9127,7 +10213,7 @@
       </p:sp>
       <p:sp>
         <p:nvSpPr>
-          <p:cNvPr id="9" name="TextBox 8"/>
+          <p:cNvPr id="10" name="TextBox 9"/>
           <p:cNvSpPr txBox="1"/>
           <p:nvPr/>
         </p:nvSpPr>
@@ -9167,7 +10253,7 @@
                 </a:solidFill>
                 <a:latin typeface="Montserrat"/>
               </a:rPr>
-              <a:t>flexible gas hose stove connection</a:t>
+              <a:t>gas boiler wall mounted kitchen</a:t>
             </a:r>
           </a:p>
         </p:txBody>
@@ -9264,7 +10350,7 @@
                 </a:solidFill>
                 <a:latin typeface="Montserrat"/>
               </a:rPr>
-              <a:t>008 / 014</a:t>
+              <a:t>008 / 015</a:t>
             </a:r>
           </a:p>
         </p:txBody>
@@ -9312,7 +10398,7 @@
         <p:spPr>
           <a:xfrm>
             <a:off x="822960" y="457200"/>
-            <a:ext cx="8229600" cy="365760"/>
+            <a:ext cx="10058400" cy="365760"/>
           </a:xfrm>
           <a:prstGeom prst="rect">
             <a:avLst/>
@@ -9326,13 +10412,13 @@
           <a:lstStyle/>
           <a:p>
             <a:r>
-              <a:rPr sz="1200" b="1" i="0">
-                <a:solidFill>
-                  <a:srgbClr val="64748B"/>
-                </a:solidFill>
-                <a:latin typeface="Montserrat"/>
-              </a:rPr>
-              <a:t>APARTADO 5.2 · NO CONECTADOS</a:t>
+              <a:rPr sz="1300" b="1" i="0">
+                <a:solidFill>
+                  <a:srgbClr val="E8801A"/>
+                </a:solidFill>
+                <a:latin typeface="Montserrat"/>
+              </a:rPr>
+              <a:t>APARTADO 5.2 · CONEXIÓN</a:t>
             </a:r>
           </a:p>
         </p:txBody>
@@ -9360,26 +10446,70 @@
           <a:lstStyle/>
           <a:p>
             <a:r>
-              <a:rPr sz="2700" b="1" i="0">
+              <a:rPr sz="2800" b="1" i="0">
                 <a:solidFill>
                   <a:srgbClr val="1E2761"/>
                 </a:solidFill>
                 <a:latin typeface="Montserrat"/>
               </a:rPr>
-              <a:t>Los aparatos sueltos</a:t>
-            </a:r>
-          </a:p>
-        </p:txBody>
-      </p:sp>
-      <p:sp>
-        <p:nvSpPr>
-          <p:cNvPr id="7" name="TextBox 6"/>
+              <a:t>Quién conecta el aparato</a:t>
+            </a:r>
+          </a:p>
+        </p:txBody>
+      </p:sp>
+      <p:sp>
+        <p:nvSpPr>
+          <p:cNvPr id="7" name="Rounded Rectangle 6"/>
+          <p:cNvSpPr/>
+          <p:nvPr/>
+        </p:nvSpPr>
+        <p:spPr>
+          <a:xfrm>
+            <a:off x="868680" y="1627632"/>
+            <a:ext cx="2011680" cy="73152"/>
+          </a:xfrm>
+          <a:prstGeom prst="roundRect">
+            <a:avLst/>
+          </a:prstGeom>
+          <a:solidFill>
+            <a:srgbClr val="E8801A"/>
+          </a:solidFill>
+          <a:ln>
+            <a:noFill/>
+          </a:ln>
+          <a:effectLst/>
+        </p:spPr>
+        <p:style>
+          <a:lnRef idx="1">
+            <a:schemeClr val="accent1"/>
+          </a:lnRef>
+          <a:fillRef idx="3">
+            <a:schemeClr val="accent1"/>
+          </a:fillRef>
+          <a:effectRef idx="2">
+            <a:schemeClr val="accent1"/>
+          </a:effectRef>
+          <a:fontRef idx="minor">
+            <a:schemeClr val="lt1"/>
+          </a:fontRef>
+        </p:style>
+        <p:txBody>
+          <a:bodyPr rtlCol="0" anchor="ctr"/>
+          <a:lstStyle/>
+          <a:p>
+            <a:pPr algn="ctr"/>
+          </a:p>
+        </p:txBody>
+      </p:sp>
+      <p:sp>
+        <p:nvSpPr>
+          <p:cNvPr id="8" name="TextBox 7"/>
           <p:cNvSpPr txBox="1"/>
           <p:nvPr/>
         </p:nvSpPr>
         <p:spPr>
           <a:xfrm>
-            <a:off x="822960" y="1920240"/>
+            <a:off x="822960" y="1965960"/>
             <a:ext cx="4983480" cy="4206240"/>
           </a:xfrm>
           <a:prstGeom prst="rect">
@@ -9395,17 +10525,17 @@
           <a:p>
             <a:pPr>
               <a:spcAft>
-                <a:spcPts val="1000"/>
+                <a:spcPts val="1100"/>
               </a:spcAft>
             </a:pPr>
             <a:r>
               <a:rPr sz="1600" b="1" i="0">
                 <a:solidFill>
-                  <a:srgbClr val="2E3A80"/>
-                </a:solidFill>
-                <a:latin typeface="Montserrat"/>
-              </a:rPr>
-              <a:t>•  </a:t>
+                  <a:srgbClr val="E8801A"/>
+                </a:solidFill>
+                <a:latin typeface="Montserrat"/>
+              </a:rPr>
+              <a:t>▸  </a:t>
             </a:r>
             <a:r>
               <a:rPr sz="1600" b="0" i="0">
@@ -9414,23 +10544,23 @@
                 </a:solidFill>
                 <a:latin typeface="Montserrat"/>
               </a:rPr>
-              <a:t>No conectados a instalación receptora</a:t>
+              <a:t>Regla: siempre un instalador</a:t>
             </a:r>
           </a:p>
           <a:p>
             <a:pPr>
               <a:spcAft>
-                <a:spcPts val="1000"/>
+                <a:spcPts val="1100"/>
               </a:spcAft>
             </a:pPr>
             <a:r>
               <a:rPr sz="1600" b="1" i="0">
                 <a:solidFill>
-                  <a:srgbClr val="2E3A80"/>
-                </a:solidFill>
-                <a:latin typeface="Montserrat"/>
-              </a:rPr>
-              <a:t>•  </a:t>
+                  <a:srgbClr val="E8801A"/>
+                </a:solidFill>
+                <a:latin typeface="Montserrat"/>
+              </a:rPr>
+              <a:t>▸  </a:t>
             </a:r>
             <a:r>
               <a:rPr sz="1600" b="0" i="0">
@@ -9439,23 +10569,23 @@
                 </a:solidFill>
                 <a:latin typeface="Montserrat"/>
               </a:rPr>
-              <a:t>Condiciones de ubicación: UNE 60670-6</a:t>
+              <a:t>Conexión según UNE 60670-7</a:t>
             </a:r>
           </a:p>
           <a:p>
             <a:pPr>
               <a:spcAft>
-                <a:spcPts val="1000"/>
+                <a:spcPts val="1100"/>
               </a:spcAft>
             </a:pPr>
             <a:r>
               <a:rPr sz="1600" b="1" i="0">
                 <a:solidFill>
-                  <a:srgbClr val="2E3A80"/>
-                </a:solidFill>
-                <a:latin typeface="Montserrat"/>
-              </a:rPr>
-              <a:t>•  </a:t>
+                  <a:srgbClr val="E8801A"/>
+                </a:solidFill>
+                <a:latin typeface="Montserrat"/>
+              </a:rPr>
+              <a:t>▸  </a:t>
             </a:r>
             <a:r>
               <a:rPr sz="1600" b="0" i="0">
@@ -9464,14 +10594,39 @@
                 </a:solidFill>
                 <a:latin typeface="Montserrat"/>
               </a:rPr>
-              <a:t>Regla: conectado → 7; suelto → 6</a:t>
-            </a:r>
-          </a:p>
-        </p:txBody>
-      </p:sp>
-      <p:sp>
-        <p:nvSpPr>
-          <p:cNvPr id="8" name="imgph" descr="IMGQ:portable gas heater room"/>
+              <a:t>Excepción: tubo flexible con abrazadera</a:t>
+            </a:r>
+          </a:p>
+          <a:p>
+            <a:pPr>
+              <a:spcAft>
+                <a:spcPts val="1100"/>
+              </a:spcAft>
+            </a:pPr>
+            <a:r>
+              <a:rPr sz="1600" b="1" i="0">
+                <a:solidFill>
+                  <a:srgbClr val="E8801A"/>
+                </a:solidFill>
+                <a:latin typeface="Montserrat"/>
+              </a:rPr>
+              <a:t>▸  </a:t>
+            </a:r>
+            <a:r>
+              <a:rPr sz="1600" b="0" i="0">
+                <a:solidFill>
+                  <a:srgbClr val="1B2330"/>
+                </a:solidFill>
+                <a:latin typeface="Montserrat"/>
+              </a:rPr>
+              <a:t>Ese lo puede poner el usuario</a:t>
+            </a:r>
+          </a:p>
+        </p:txBody>
+      </p:sp>
+      <p:sp>
+        <p:nvSpPr>
+          <p:cNvPr id="9" name="imgph" descr="IMGQ:flexible gas hose stove connection"/>
           <p:cNvSpPr/>
           <p:nvPr/>
         </p:nvSpPr>
@@ -9517,7 +10672,7 @@
       </p:sp>
       <p:sp>
         <p:nvSpPr>
-          <p:cNvPr id="9" name="TextBox 8"/>
+          <p:cNvPr id="10" name="TextBox 9"/>
           <p:cNvSpPr txBox="1"/>
           <p:nvPr/>
         </p:nvSpPr>
@@ -9557,7 +10712,7 @@
                 </a:solidFill>
                 <a:latin typeface="Montserrat"/>
               </a:rPr>
-              <a:t>portable gas heater room</a:t>
+              <a:t>flexible gas hose stove connection</a:t>
             </a:r>
           </a:p>
         </p:txBody>
@@ -9654,7 +10809,7 @@
                 </a:solidFill>
                 <a:latin typeface="Montserrat"/>
               </a:rPr>
-              <a:t>009 / 014</a:t>
+              <a:t>009 / 015</a:t>
             </a:r>
           </a:p>
         </p:txBody>
@@ -9702,7 +10857,7 @@
         <p:spPr>
           <a:xfrm>
             <a:off x="822960" y="457200"/>
-            <a:ext cx="8229600" cy="365760"/>
+            <a:ext cx="10058400" cy="365760"/>
           </a:xfrm>
           <a:prstGeom prst="rect">
             <a:avLst/>
@@ -9716,13 +10871,13 @@
           <a:lstStyle/>
           <a:p>
             <a:r>
-              <a:rPr sz="1200" b="1" i="0">
-                <a:solidFill>
-                  <a:srgbClr val="64748B"/>
-                </a:solidFill>
-                <a:latin typeface="Montserrat"/>
-              </a:rPr>
-              <a:t>APARTADO 5.3.1 · QUIÉN ARRANCA</a:t>
+              <a:rPr sz="1300" b="1" i="0">
+                <a:solidFill>
+                  <a:srgbClr val="E8801A"/>
+                </a:solidFill>
+                <a:latin typeface="Montserrat"/>
+              </a:rPr>
+              <a:t>APARTADO 5.2 · NO CONECTADOS</a:t>
             </a:r>
           </a:p>
         </p:txBody>
@@ -9750,26 +10905,70 @@
           <a:lstStyle/>
           <a:p>
             <a:r>
-              <a:rPr sz="2700" b="1" i="0">
+              <a:rPr sz="2800" b="1" i="0">
                 <a:solidFill>
                   <a:srgbClr val="1E2761"/>
                 </a:solidFill>
                 <a:latin typeface="Montserrat"/>
               </a:rPr>
-              <a:t>El umbral de los 24,4 kW</a:t>
-            </a:r>
-          </a:p>
-        </p:txBody>
-      </p:sp>
-      <p:sp>
-        <p:nvSpPr>
-          <p:cNvPr id="7" name="TextBox 6"/>
+              <a:t>Los aparatos sueltos</a:t>
+            </a:r>
+          </a:p>
+        </p:txBody>
+      </p:sp>
+      <p:sp>
+        <p:nvSpPr>
+          <p:cNvPr id="7" name="Rounded Rectangle 6"/>
+          <p:cNvSpPr/>
+          <p:nvPr/>
+        </p:nvSpPr>
+        <p:spPr>
+          <a:xfrm>
+            <a:off x="868680" y="1627632"/>
+            <a:ext cx="2011680" cy="73152"/>
+          </a:xfrm>
+          <a:prstGeom prst="roundRect">
+            <a:avLst/>
+          </a:prstGeom>
+          <a:solidFill>
+            <a:srgbClr val="E8801A"/>
+          </a:solidFill>
+          <a:ln>
+            <a:noFill/>
+          </a:ln>
+          <a:effectLst/>
+        </p:spPr>
+        <p:style>
+          <a:lnRef idx="1">
+            <a:schemeClr val="accent1"/>
+          </a:lnRef>
+          <a:fillRef idx="3">
+            <a:schemeClr val="accent1"/>
+          </a:fillRef>
+          <a:effectRef idx="2">
+            <a:schemeClr val="accent1"/>
+          </a:effectRef>
+          <a:fontRef idx="minor">
+            <a:schemeClr val="lt1"/>
+          </a:fontRef>
+        </p:style>
+        <p:txBody>
+          <a:bodyPr rtlCol="0" anchor="ctr"/>
+          <a:lstStyle/>
+          <a:p>
+            <a:pPr algn="ctr"/>
+          </a:p>
+        </p:txBody>
+      </p:sp>
+      <p:sp>
+        <p:nvSpPr>
+          <p:cNvPr id="8" name="TextBox 7"/>
           <p:cNvSpPr txBox="1"/>
           <p:nvPr/>
         </p:nvSpPr>
         <p:spPr>
           <a:xfrm>
-            <a:off x="822960" y="1920240"/>
+            <a:off x="822960" y="1965960"/>
             <a:ext cx="4983480" cy="4206240"/>
           </a:xfrm>
           <a:prstGeom prst="rect">
@@ -9785,17 +10984,17 @@
           <a:p>
             <a:pPr>
               <a:spcAft>
-                <a:spcPts val="1000"/>
+                <a:spcPts val="1100"/>
               </a:spcAft>
             </a:pPr>
             <a:r>
               <a:rPr sz="1600" b="1" i="0">
                 <a:solidFill>
-                  <a:srgbClr val="2E3A80"/>
-                </a:solidFill>
-                <a:latin typeface="Montserrat"/>
-              </a:rPr>
-              <a:t>•  </a:t>
+                  <a:srgbClr val="E8801A"/>
+                </a:solidFill>
+                <a:latin typeface="Montserrat"/>
+              </a:rPr>
+              <a:t>▸  </a:t>
             </a:r>
             <a:r>
               <a:rPr sz="1600" b="0" i="0">
@@ -9804,23 +11003,23 @@
                 </a:solidFill>
                 <a:latin typeface="Montserrat"/>
               </a:rPr>
-              <a:t>Conducidos (B y C) de más de 24,4 kW</a:t>
+              <a:t>No conectados a instalación receptora</a:t>
             </a:r>
           </a:p>
           <a:p>
             <a:pPr>
               <a:spcAft>
-                <a:spcPts val="1000"/>
+                <a:spcPts val="1100"/>
               </a:spcAft>
             </a:pPr>
             <a:r>
               <a:rPr sz="1600" b="1" i="0">
                 <a:solidFill>
-                  <a:srgbClr val="2E3A80"/>
-                </a:solidFill>
-                <a:latin typeface="Montserrat"/>
-              </a:rPr>
-              <a:t>•  </a:t>
+                  <a:srgbClr val="E8801A"/>
+                </a:solidFill>
+                <a:latin typeface="Montserrat"/>
+              </a:rPr>
+              <a:t>▸  </a:t>
             </a:r>
             <a:r>
               <a:rPr sz="1600" b="0" i="0">
@@ -9829,23 +11028,23 @@
                 </a:solidFill>
                 <a:latin typeface="Montserrat"/>
               </a:rPr>
-              <a:t>Y vitrocerámicas de fuegos cubiertos</a:t>
+              <a:t>Condiciones de ubicación: UNE 60670-6</a:t>
             </a:r>
           </a:p>
           <a:p>
             <a:pPr>
               <a:spcAft>
-                <a:spcPts val="1000"/>
+                <a:spcPts val="1100"/>
               </a:spcAft>
             </a:pPr>
             <a:r>
               <a:rPr sz="1600" b="1" i="0">
                 <a:solidFill>
-                  <a:srgbClr val="2E3A80"/>
-                </a:solidFill>
-                <a:latin typeface="Montserrat"/>
-              </a:rPr>
-              <a:t>•  </a:t>
+                  <a:srgbClr val="E8801A"/>
+                </a:solidFill>
+                <a:latin typeface="Montserrat"/>
+              </a:rPr>
+              <a:t>▸  </a:t>
             </a:r>
             <a:r>
               <a:rPr sz="1600" b="0" i="0">
@@ -9854,39 +11053,14 @@
                 </a:solidFill>
                 <a:latin typeface="Montserrat"/>
               </a:rPr>
-              <a:t>Solo SAT certificado o instalador cualificado</a:t>
-            </a:r>
-          </a:p>
-          <a:p>
-            <a:pPr>
-              <a:spcAft>
-                <a:spcPts val="1000"/>
-              </a:spcAft>
-            </a:pPr>
-            <a:r>
-              <a:rPr sz="1600" b="1" i="0">
-                <a:solidFill>
-                  <a:srgbClr val="2E3A80"/>
-                </a:solidFill>
-                <a:latin typeface="Montserrat"/>
-              </a:rPr>
-              <a:t>•  </a:t>
-            </a:r>
-            <a:r>
-              <a:rPr sz="1600" b="0" i="0">
-                <a:solidFill>
-                  <a:srgbClr val="1B2330"/>
-                </a:solidFill>
-                <a:latin typeface="Montserrat"/>
-              </a:rPr>
-              <a:t>El resto: SAT o empresa instaladora</a:t>
-            </a:r>
-          </a:p>
-        </p:txBody>
-      </p:sp>
-      <p:sp>
-        <p:nvSpPr>
-          <p:cNvPr id="8" name="imgph" descr="IMGQ:technician servicing gas boiler"/>
+              <a:t>Regla: conectado → 7; suelto → 6</a:t>
+            </a:r>
+          </a:p>
+        </p:txBody>
+      </p:sp>
+      <p:sp>
+        <p:nvSpPr>
+          <p:cNvPr id="9" name="imgph" descr="IMGQ:portable gas heater room"/>
           <p:cNvSpPr/>
           <p:nvPr/>
         </p:nvSpPr>
@@ -9932,7 +11106,7 @@
       </p:sp>
       <p:sp>
         <p:nvSpPr>
-          <p:cNvPr id="9" name="TextBox 8"/>
+          <p:cNvPr id="10" name="TextBox 9"/>
           <p:cNvSpPr txBox="1"/>
           <p:nvPr/>
         </p:nvSpPr>
@@ -9972,7 +11146,7 @@
                 </a:solidFill>
                 <a:latin typeface="Montserrat"/>
               </a:rPr>
-              <a:t>technician servicing gas boiler</a:t>
+              <a:t>portable gas heater room</a:t>
             </a:r>
           </a:p>
         </p:txBody>

--- a/Curso Gas B/05 - ITC-ICG 08 - Aparatos de gas/05 - ITC-ICG 08 - Aparatos de gas - Vídeo 2.pptx
+++ b/Curso Gas B/05 - ITC-ICG 08 - Aparatos de gas/05 - ITC-ICG 08 - Aparatos de gas - Vídeo 2.pptx
@@ -20,6 +20,11 @@
     <p:sldId id="268" r:id="rId20"/>
     <p:sldId id="269" r:id="rId21"/>
     <p:sldId id="270" r:id="rId22"/>
+    <p:sldId id="271" r:id="rId23"/>
+    <p:sldId id="272" r:id="rId24"/>
+    <p:sldId id="273" r:id="rId25"/>
+    <p:sldId id="274" r:id="rId26"/>
+    <p:sldId id="275" r:id="rId27"/>
   </p:sldIdLst>
   <p:sldSz cx="12191695" cy="6858000" type="screen4x3"/>
   <p:notesSz cx="6858000" cy="9144000"/>
@@ -591,12 +596,12 @@
           <a:lstStyle/>
           <a:p>
             <a:r>
-              <a:t>N1: ¿Quién puede poner en marcha, mantener y reparar un aparato?</a:t>
-            </a:r>
-          </a:p>
-          <a:p>
-            <a:r>
-              <a:t>N2: Aquí hay una línea que separa el aparato exigente del aparato normal, y es la potencia. Los aparatos conducidos, es decir tipo B y C, de más de veinticuatro coma cuatro kilovatios de potencia útil, y las vitrocerámicas a gas de fuegos cubiertos, solo los pueden poner en marcha, mantener o reparar el servicio técnico del fabricante con un sistema de calidad certificado, o instaladores de gas que cumplan el capítulo cuatro de la ITC-ICG cero nueve. Para todo lo demás, los de menor potencia o los de tipo A, basta con el servicio técnico del fabricante o una empresa instaladora. Truco: más de veinticuatro coma cuatro kilovatios y con humos conducidos, gente especialmente cualificada.</a:t>
+              <a:t>N1: Para colocar un aparato, ¿hay que pedir permiso a la Administración?</a:t>
+            </a:r>
+          </a:p>
+          <a:p>
+            <a:r>
+              <a:t>N2: No. La instalación de los aparatos de gas no precisa autorización administrativa. Enlázalo con la lógica de todo el Reglamento de gas: lo normal es hacer y, cuando toca, comunicar; no pedir permiso y esperar de brazos cruzados. Y en el caso del aparato, la cosa va todavía más lejos, porque como veremos al final del apartado cinco, ni siquiera hay que comunicar. El único papel obligatorio será el certificado de puesta en marcha que le das al cliente.</a:t>
             </a:r>
           </a:p>
         </p:txBody>
@@ -666,12 +671,12 @@
           <a:lstStyle/>
           <a:p>
             <a:r>
-              <a:t>N1: ¿Qué es adecuar un aparato por cambio de familia de gas?</a:t>
-            </a:r>
-          </a:p>
-          <a:p>
-            <a:r>
-              <a:t>N2: Cambiar de familia es, ni más ni menos, cambiar el tipo de gas. Por ejemplo, pasar una caldera de gas natural, que es la segunda familia, a propano o butano, que es la tercera familia; hay que cambiar inyectores y reglajes. La ITC lo reserva a dos: al servicio técnico del fabricante con sistema de calidad certificado, o a instaladores de gas de categoría A o B que cumplan el capítulo cuatro de la ITC-ICG cero nueve. Fíjate en que aquí sí manda la categoría del carné: la categoría C no puede hacerlo. Y una condición de oro: los recambios deben ser de características idénticas a las aprobadas en la certificación de tipo. Nada de piezas que hacen el apaño, porque una mala adecuación te da llamas amarillas y monóxido de carbono.</a:t>
+              <a:t>N1: ¿Puede cualquiera conectar un aparato de gas?</a:t>
+            </a:r>
+          </a:p>
+          <a:p>
+            <a:r>
+              <a:t>N2: La regla general es clara: la conexión de los aparatos a las instalaciones receptoras se hace según la norma UNE sesenta mil seiscientos setenta, parte siete, y siempre por un instalador. Pero hay una única excepción, y es muy práctica de conocer: cuando la conexión se hace con un tubo flexible elastomérico con abrazadera, que es el típico latiguillo de goma de una cocina de butano, la puede hacer el propio usuario. Por eso cualquiera puede cambiar el tubo de su cocina de gas, pero no conectar una caldera con tubería rígida: eso, sí o sí, es cosa del instalador.</a:t>
             </a:r>
           </a:p>
         </p:txBody>
@@ -741,12 +746,12 @@
           <a:lstStyle/>
           <a:p>
             <a:r>
-              <a:t>N1: Al arrancar el aparato, ¿qué se comprueba y qué papel se entrega?</a:t>
-            </a:r>
-          </a:p>
-          <a:p>
-            <a:r>
-              <a:t>N2: Dos cosas van juntas. Primero, las comprobaciones mínimas para la puesta en marcha de los aparatos conectados salen de la norma UNE sesenta mil seiscientos setenta, parte diez, más las indicaciones adicionales del fabricante. Nunca es solo la norma ni solo el manual: son las dos cosas, porque el fabricante conoce su aparato y puede exigir pasos extra. Segundo, no basta con dejarlo funcionando: el agente que hace la puesta en marcha debe emitir y entregar al cliente un certificado de puesta en marcha, según el modelo del anexo cuatro. Y guardarse una copia cinco años a disposición de la comunidad autónoma. Dos datos de examen que caen juntos: certificado de puesta en marcha, y cinco años de archivo.</a:t>
+              <a:t>N1: ¿Y los aparatos que no van conectados a la instalación receptora?</a:t>
+            </a:r>
+          </a:p>
+          <a:p>
+            <a:r>
+              <a:t>N2: Distingue las dos normas gemelas, porque el examen las cruza. Los aparatos conectados a una instalación receptora van por la UNE sesenta mil seiscientos setenta, parte siete, la de conexión. Los no conectados, por ejemplo una estufa o un aparato suelto, deben cumplir las condiciones de ubicación del capítulo cuatro de la UNE sesenta mil seiscientos setenta, parte seis. La regla de bolsillo para no fallar: conectado, la parte siete; suelto, la parte seis.</a:t>
             </a:r>
           </a:p>
         </p:txBody>
@@ -816,12 +821,12 @@
           <a:lstStyle/>
           <a:p>
             <a:r>
-              <a:t>N1: Después de instalar el aparato, ¿hay que comunicar algo a la Administración?</a:t>
-            </a:r>
-          </a:p>
-          <a:p>
-            <a:r>
-              <a:t>N2: No se precisa ninguna comunicación. Cierra el círculo con lo que vimos en el cinco punto uno: instalar un aparato ni necesita autorización previa ni comunicación posterior. Lo único obligatorio es el certificado de puesta en marcha que le das al cliente y archivas tú. Pero ojo con no mezclar dos papeles: esto es del aparato. La comunicación de la instalación receptora es otra cosa, esa sí, la presenta el titular en un plazo de treinta días. Instalación y aparato tienen su propio papeleo; no los confundas.</a:t>
+              <a:t>N1: ¿Quién puede poner en marcha, mantener y reparar un aparato?</a:t>
+            </a:r>
+          </a:p>
+          <a:p>
+            <a:r>
+              <a:t>N2: Aquí hay una línea que separa el aparato exigente del aparato normal, y es la potencia. Los aparatos conducidos, es decir tipo B y C, de más de veinticuatro coma cuatro kilovatios de potencia útil, y las vitrocerámicas a gas de fuegos cubiertos, solo los pueden poner en marcha, mantener o reparar el servicio técnico del fabricante con un sistema de calidad certificado, o instaladores de gas que cumplan el capítulo cuatro de la ITC-ICG cero nueve. Para todo lo demás, los de menor potencia o los de tipo A, basta con el servicio técnico del fabricante o una empresa instaladora. Truco: más de veinticuatro coma cuatro kilovatios y con humos conducidos, gente especialmente cualificada.</a:t>
             </a:r>
           </a:p>
         </p:txBody>
@@ -891,12 +896,12 @@
           <a:lstStyle/>
           <a:p>
             <a:r>
-              <a:t>N1: ¿Qué información mínima lleva ese certificado?</a:t>
-            </a:r>
-          </a:p>
-          <a:p>
-            <a:r>
-              <a:t>N2: Tiene bloques fáciles de recordar, contesta a cuatro preguntas: quién arranca, el agente, con nombre, dirección, NIF y categoría; para quién, el cliente, con nombre y dirección; qué, el aparato, con tipo, marca, modelo, potencia y número de fabricación; y cómo salió, las pruebas realizadas y sus resultados. Y aquí un detalle que le encanta al examen: cuando procede, se adjunta la impresión del análisis de combustión, ese ticket de papel que escupe el analizador con el monóxido de carbono, el dióxido de carbono, el tiro y el rendimiento. Es la prueba física de que la combustión es correcta. Por último, lo firma el técnico, con sello de la empresa, y también lo firma el cliente.</a:t>
+              <a:t>N1: Un número muy concreto que le encanta al examen.</a:t>
+            </a:r>
+          </a:p>
+          <a:p>
+            <a:r>
+              <a:t>N2: Es la línea que separa el aparato exigente del normal. Piensa en la cifra de potencia útil que marca la frontera; ojo, no la redondees.</a:t>
             </a:r>
           </a:p>
         </p:txBody>
@@ -966,22 +971,312 @@
           <a:lstStyle/>
           <a:p>
             <a:r>
-              <a:t>N1: Este vídeo es muy práctico. ¿Cómo lo ordeno en la cabeza?</a:t>
-            </a:r>
-          </a:p>
-          <a:p>
-            <a:r>
-              <a:t>N2: Sigamos el hilo, que va del aparato al papel. Primero, aprendiste a clasificar por combustión: A respira del local y echa al local, B respira del local y echa fuera, C respira de fuera y echa fuera; B y C son los conducidos. Y no confundes eso con la categoría del carné, que es otra letra distinta. Segundo, quién conecta: siempre el instalador y según la parte siete, salvo el latiguillo de goma, que lo pone el usuario; y el suelto va por la parte seis. Tercero, quién arranca y repara: por encima de veinticuatro coma cuatro kilovatios y conducido, gente muy cualificada; y adecuar de familia de gas, categorías A o B con piezas idénticas. Y cuarto, cómo cierras: comprobaciones según la parte diez más el fabricante, certificado de puesta en marcha del anexo cuatro con el ticket del análisis de combustión, y cinco años de archivo.</a:t>
-            </a:r>
-          </a:p>
-          <a:p>
-            <a:r>
-              <a:t>N1: ¿Y esto cómo aparece en el examen y en la obra?</a:t>
-            </a:r>
-          </a:p>
-          <a:p>
-            <a:r>
-              <a:t>N2: En el examen te van a cruzar las letras a propósito, te van a preguntar quién puede conectar el latiguillo, o a partir de cuántos kilovatios hace falta gente cualificada, o cuántos años se archiva el certificado. En la obra es tu día a día: un flexible caducado es olor a gas asegurado, y sin el análisis de combustión no sabes si has dejado una avería dentro de casa. Hoy ya no eres solo teoría: sabes dejar un aparato en regla y con su papel firmado. En el siguiente vídeo entramos en la letra pequeña de la certificación, el anexo uno: cómo un organismo de control demuestra que ese aparato es de fiar. Vamos a por él.</a:t>
+              <a:t>N1: ¿Por qué esa cifra?</a:t>
+            </a:r>
+          </a:p>
+          <a:p>
+            <a:r>
+              <a:t>N2: Porque la ITC fija el umbral en veinticuatro coma cuatro kilovatios de potencia útil para los aparatos conducidos; por encima de ahí, y las vitrocerámicas de fuegos cubiertos, solo los toca gente especialmente cualificada. El truco para no fallar: memoriza veinticuatro coma cuatro, no lo redondees a veinticinco.</a:t>
+            </a:r>
+          </a:p>
+        </p:txBody>
+      </p:sp>
+      <p:sp>
+        <p:nvSpPr>
+          <p:cNvPr id="4" name="Slide Number Placeholder 3"/>
+          <p:cNvSpPr>
+            <a:spLocks noGrp="1"/>
+          </p:cNvSpPr>
+          <p:nvPr>
+            <p:ph type="sldNum" idx="5" sz="quarter"/>
+          </p:nvPr>
+        </p:nvSpPr>
+        <p:spPr/>
+      </p:sp>
+    </p:spTree>
+  </p:cSld>
+  <p:clrMapOvr>
+    <a:masterClrMapping/>
+  </p:clrMapOvr>
+</p:notes>
+</file>
+
+<file path=ppt/notesSlides/notesSlide16.xml><?xml version="1.0" encoding="utf-8"?>
+<p:notes xmlns:a="http://schemas.openxmlformats.org/drawingml/2006/main" xmlns:p="http://schemas.openxmlformats.org/presentationml/2006/main" xmlns:r="http://schemas.openxmlformats.org/officeDocument/2006/relationships">
+  <p:cSld>
+    <p:spTree>
+      <p:nvGrpSpPr>
+        <p:cNvPr id="1" name=""/>
+        <p:cNvGrpSpPr/>
+        <p:nvPr/>
+      </p:nvGrpSpPr>
+      <p:grpSpPr>
+        <a:xfrm>
+          <a:off x="0" y="0"/>
+          <a:ext cx="0" cy="0"/>
+          <a:chOff x="0" y="0"/>
+          <a:chExt cx="0" cy="0"/>
+        </a:xfrm>
+      </p:grpSpPr>
+      <p:sp>
+        <p:nvSpPr>
+          <p:cNvPr id="2" name="Slide Image Placeholder 1"/>
+          <p:cNvSpPr>
+            <a:spLocks noGrp="1"/>
+          </p:cNvSpPr>
+          <p:nvPr>
+            <p:ph type="sldImg" idx="2"/>
+          </p:nvPr>
+        </p:nvSpPr>
+        <p:spPr/>
+      </p:sp>
+      <p:sp>
+        <p:nvSpPr>
+          <p:cNvPr id="3" name="Notes Placeholder 2"/>
+          <p:cNvSpPr>
+            <a:spLocks noGrp="1"/>
+          </p:cNvSpPr>
+          <p:nvPr>
+            <p:ph type="body" idx="3" sz="quarter"/>
+          </p:nvPr>
+        </p:nvSpPr>
+        <p:spPr/>
+        <p:txBody>
+          <a:bodyPr/>
+          <a:lstStyle/>
+          <a:p>
+            <a:r>
+              <a:t>N1: ¿Qué es adecuar un aparato por cambio de familia de gas?</a:t>
+            </a:r>
+          </a:p>
+          <a:p>
+            <a:r>
+              <a:t>N2: Cambiar de familia es, ni más ni menos, cambiar el tipo de gas. Por ejemplo, pasar una caldera de gas natural, que es la segunda familia, a propano o butano, que es la tercera familia; hay que cambiar inyectores y reglajes. La ITC lo reserva a dos: al servicio técnico del fabricante con sistema de calidad certificado, o a instaladores de gas de categoría A o B que cumplan el capítulo cuatro de la ITC-ICG cero nueve. Fíjate en que aquí sí manda la categoría del carné: la categoría C no puede hacerlo. Y una condición de oro: los recambios deben ser de características idénticas a las aprobadas en la certificación de tipo. Nada de piezas que hacen el apaño, porque una mala adecuación te da llamas amarillas y monóxido de carbono.</a:t>
+            </a:r>
+          </a:p>
+        </p:txBody>
+      </p:sp>
+      <p:sp>
+        <p:nvSpPr>
+          <p:cNvPr id="4" name="Slide Number Placeholder 3"/>
+          <p:cNvSpPr>
+            <a:spLocks noGrp="1"/>
+          </p:cNvSpPr>
+          <p:nvPr>
+            <p:ph type="sldNum" idx="5" sz="quarter"/>
+          </p:nvPr>
+        </p:nvSpPr>
+        <p:spPr/>
+      </p:sp>
+    </p:spTree>
+  </p:cSld>
+  <p:clrMapOvr>
+    <a:masterClrMapping/>
+  </p:clrMapOvr>
+</p:notes>
+</file>
+
+<file path=ppt/notesSlides/notesSlide17.xml><?xml version="1.0" encoding="utf-8"?>
+<p:notes xmlns:a="http://schemas.openxmlformats.org/drawingml/2006/main" xmlns:p="http://schemas.openxmlformats.org/presentationml/2006/main" xmlns:r="http://schemas.openxmlformats.org/officeDocument/2006/relationships">
+  <p:cSld>
+    <p:spTree>
+      <p:nvGrpSpPr>
+        <p:cNvPr id="1" name=""/>
+        <p:cNvGrpSpPr/>
+        <p:nvPr/>
+      </p:nvGrpSpPr>
+      <p:grpSpPr>
+        <a:xfrm>
+          <a:off x="0" y="0"/>
+          <a:ext cx="0" cy="0"/>
+          <a:chOff x="0" y="0"/>
+          <a:chExt cx="0" cy="0"/>
+        </a:xfrm>
+      </p:grpSpPr>
+      <p:sp>
+        <p:nvSpPr>
+          <p:cNvPr id="2" name="Slide Image Placeholder 1"/>
+          <p:cNvSpPr>
+            <a:spLocks noGrp="1"/>
+          </p:cNvSpPr>
+          <p:nvPr>
+            <p:ph type="sldImg" idx="2"/>
+          </p:nvPr>
+        </p:nvSpPr>
+        <p:spPr/>
+      </p:sp>
+      <p:sp>
+        <p:nvSpPr>
+          <p:cNvPr id="3" name="Notes Placeholder 2"/>
+          <p:cNvSpPr>
+            <a:spLocks noGrp="1"/>
+          </p:cNvSpPr>
+          <p:nvPr>
+            <p:ph type="body" idx="3" sz="quarter"/>
+          </p:nvPr>
+        </p:nvSpPr>
+        <p:spPr/>
+        <p:txBody>
+          <a:bodyPr/>
+          <a:lstStyle/>
+          <a:p>
+            <a:r>
+              <a:t>N1: Al arrancar el aparato, ¿qué se comprueba y qué papel se entrega?</a:t>
+            </a:r>
+          </a:p>
+          <a:p>
+            <a:r>
+              <a:t>N2: Dos cosas van juntas. Primero, las comprobaciones mínimas para la puesta en marcha de los aparatos conectados salen de la norma UNE sesenta mil seiscientos setenta, parte diez, más las indicaciones adicionales del fabricante. Nunca es solo la norma ni solo el manual: son las dos cosas, porque el fabricante conoce su aparato y puede exigir pasos extra. Segundo, no basta con dejarlo funcionando: el agente que hace la puesta en marcha debe emitir y entregar al cliente un certificado de puesta en marcha, según el modelo del anexo cuatro. Y guardarse una copia cinco años a disposición de la comunidad autónoma. Dos datos de examen que caen juntos: certificado de puesta en marcha, y cinco años de archivo.</a:t>
+            </a:r>
+          </a:p>
+        </p:txBody>
+      </p:sp>
+      <p:sp>
+        <p:nvSpPr>
+          <p:cNvPr id="4" name="Slide Number Placeholder 3"/>
+          <p:cNvSpPr>
+            <a:spLocks noGrp="1"/>
+          </p:cNvSpPr>
+          <p:nvPr>
+            <p:ph type="sldNum" idx="5" sz="quarter"/>
+          </p:nvPr>
+        </p:nvSpPr>
+        <p:spPr/>
+      </p:sp>
+    </p:spTree>
+  </p:cSld>
+  <p:clrMapOvr>
+    <a:masterClrMapping/>
+  </p:clrMapOvr>
+</p:notes>
+</file>
+
+<file path=ppt/notesSlides/notesSlide18.xml><?xml version="1.0" encoding="utf-8"?>
+<p:notes xmlns:a="http://schemas.openxmlformats.org/drawingml/2006/main" xmlns:p="http://schemas.openxmlformats.org/presentationml/2006/main" xmlns:r="http://schemas.openxmlformats.org/officeDocument/2006/relationships">
+  <p:cSld>
+    <p:spTree>
+      <p:nvGrpSpPr>
+        <p:cNvPr id="1" name=""/>
+        <p:cNvGrpSpPr/>
+        <p:nvPr/>
+      </p:nvGrpSpPr>
+      <p:grpSpPr>
+        <a:xfrm>
+          <a:off x="0" y="0"/>
+          <a:ext cx="0" cy="0"/>
+          <a:chOff x="0" y="0"/>
+          <a:chExt cx="0" cy="0"/>
+        </a:xfrm>
+      </p:grpSpPr>
+      <p:sp>
+        <p:nvSpPr>
+          <p:cNvPr id="2" name="Slide Image Placeholder 1"/>
+          <p:cNvSpPr>
+            <a:spLocks noGrp="1"/>
+          </p:cNvSpPr>
+          <p:nvPr>
+            <p:ph type="sldImg" idx="2"/>
+          </p:nvPr>
+        </p:nvSpPr>
+        <p:spPr/>
+      </p:sp>
+      <p:sp>
+        <p:nvSpPr>
+          <p:cNvPr id="3" name="Notes Placeholder 2"/>
+          <p:cNvSpPr>
+            <a:spLocks noGrp="1"/>
+          </p:cNvSpPr>
+          <p:nvPr>
+            <p:ph type="body" idx="3" sz="quarter"/>
+          </p:nvPr>
+        </p:nvSpPr>
+        <p:spPr/>
+        <p:txBody>
+          <a:bodyPr/>
+          <a:lstStyle/>
+          <a:p>
+            <a:r>
+              <a:t>N1: Después de instalar el aparato, ¿hay que comunicar algo a la Administración?</a:t>
+            </a:r>
+          </a:p>
+          <a:p>
+            <a:r>
+              <a:t>N2: No se precisa ninguna comunicación. Cierra el círculo con lo que vimos en el cinco punto uno: instalar un aparato ni necesita autorización previa ni comunicación posterior. Lo único obligatorio es el certificado de puesta en marcha que le das al cliente y archivas tú. Pero ojo con no mezclar dos papeles: esto es del aparato. La comunicación de la instalación receptora es otra cosa, esa sí, la presenta el titular en un plazo de treinta días. Instalación y aparato tienen su propio papeleo; no los confundas.</a:t>
+            </a:r>
+          </a:p>
+        </p:txBody>
+      </p:sp>
+      <p:sp>
+        <p:nvSpPr>
+          <p:cNvPr id="4" name="Slide Number Placeholder 3"/>
+          <p:cNvSpPr>
+            <a:spLocks noGrp="1"/>
+          </p:cNvSpPr>
+          <p:nvPr>
+            <p:ph type="sldNum" idx="5" sz="quarter"/>
+          </p:nvPr>
+        </p:nvSpPr>
+        <p:spPr/>
+      </p:sp>
+    </p:spTree>
+  </p:cSld>
+  <p:clrMapOvr>
+    <a:masterClrMapping/>
+  </p:clrMapOvr>
+</p:notes>
+</file>
+
+<file path=ppt/notesSlides/notesSlide19.xml><?xml version="1.0" encoding="utf-8"?>
+<p:notes xmlns:a="http://schemas.openxmlformats.org/drawingml/2006/main" xmlns:p="http://schemas.openxmlformats.org/presentationml/2006/main" xmlns:r="http://schemas.openxmlformats.org/officeDocument/2006/relationships">
+  <p:cSld>
+    <p:spTree>
+      <p:nvGrpSpPr>
+        <p:cNvPr id="1" name=""/>
+        <p:cNvGrpSpPr/>
+        <p:nvPr/>
+      </p:nvGrpSpPr>
+      <p:grpSpPr>
+        <a:xfrm>
+          <a:off x="0" y="0"/>
+          <a:ext cx="0" cy="0"/>
+          <a:chOff x="0" y="0"/>
+          <a:chExt cx="0" cy="0"/>
+        </a:xfrm>
+      </p:grpSpPr>
+      <p:sp>
+        <p:nvSpPr>
+          <p:cNvPr id="2" name="Slide Image Placeholder 1"/>
+          <p:cNvSpPr>
+            <a:spLocks noGrp="1"/>
+          </p:cNvSpPr>
+          <p:nvPr>
+            <p:ph type="sldImg" idx="2"/>
+          </p:nvPr>
+        </p:nvSpPr>
+        <p:spPr/>
+      </p:sp>
+      <p:sp>
+        <p:nvSpPr>
+          <p:cNvPr id="3" name="Notes Placeholder 2"/>
+          <p:cNvSpPr>
+            <a:spLocks noGrp="1"/>
+          </p:cNvSpPr>
+          <p:nvPr>
+            <p:ph type="body" idx="3" sz="quarter"/>
+          </p:nvPr>
+        </p:nvSpPr>
+        <p:spPr/>
+        <p:txBody>
+          <a:bodyPr/>
+          <a:lstStyle/>
+          <a:p>
+            <a:r>
+              <a:t>N1: ¿Qué información mínima lleva ese certificado?</a:t>
+            </a:r>
+          </a:p>
+          <a:p>
+            <a:r>
+              <a:t>N2: Tiene bloques fáciles de recordar, contesta a cuatro preguntas: quién arranca, el agente, con nombre, dirección, NIF y categoría; para quién, el cliente, con nombre y dirección; qué, el aparato, con tipo, marca, modelo, potencia y número de fabricación; y cómo salió, las pruebas realizadas y sus resultados. Y aquí un detalle que le encanta al examen: cuando procede, se adjunta la impresión del análisis de combustión, ese ticket de papel que escupe el analizador con el monóxido de carbono, el dióxido de carbono, el tiro y el rendimiento. Es la prueba física de que la combustión es correcta. Por último, lo firma el técnico, con sello de la empresa, y también lo firma el cliente.</a:t>
             </a:r>
           </a:p>
         </p:txBody>
@@ -1081,6 +1376,91 @@
 </p:notes>
 </file>
 
+<file path=ppt/notesSlides/notesSlide20.xml><?xml version="1.0" encoding="utf-8"?>
+<p:notes xmlns:a="http://schemas.openxmlformats.org/drawingml/2006/main" xmlns:p="http://schemas.openxmlformats.org/presentationml/2006/main" xmlns:r="http://schemas.openxmlformats.org/officeDocument/2006/relationships">
+  <p:cSld>
+    <p:spTree>
+      <p:nvGrpSpPr>
+        <p:cNvPr id="1" name=""/>
+        <p:cNvGrpSpPr/>
+        <p:nvPr/>
+      </p:nvGrpSpPr>
+      <p:grpSpPr>
+        <a:xfrm>
+          <a:off x="0" y="0"/>
+          <a:ext cx="0" cy="0"/>
+          <a:chOff x="0" y="0"/>
+          <a:chExt cx="0" cy="0"/>
+        </a:xfrm>
+      </p:grpSpPr>
+      <p:sp>
+        <p:nvSpPr>
+          <p:cNvPr id="2" name="Slide Image Placeholder 1"/>
+          <p:cNvSpPr>
+            <a:spLocks noGrp="1"/>
+          </p:cNvSpPr>
+          <p:nvPr>
+            <p:ph type="sldImg" idx="2"/>
+          </p:nvPr>
+        </p:nvSpPr>
+        <p:spPr/>
+      </p:sp>
+      <p:sp>
+        <p:nvSpPr>
+          <p:cNvPr id="3" name="Notes Placeholder 2"/>
+          <p:cNvSpPr>
+            <a:spLocks noGrp="1"/>
+          </p:cNvSpPr>
+          <p:nvPr>
+            <p:ph type="body" idx="3" sz="quarter"/>
+          </p:nvPr>
+        </p:nvSpPr>
+        <p:spPr/>
+        <p:txBody>
+          <a:bodyPr/>
+          <a:lstStyle/>
+          <a:p>
+            <a:r>
+              <a:t>N1: Este vídeo es muy práctico. ¿Cómo lo ordeno en la cabeza?</a:t>
+            </a:r>
+          </a:p>
+          <a:p>
+            <a:r>
+              <a:t>N2: Sigamos el hilo, que va del aparato al papel. Primero, aprendiste a clasificar por combustión: A respira del local y echa al local, B respira del local y echa fuera, C respira de fuera y echa fuera; B y C son los conducidos. Y no confundes eso con la categoría del carné, que es otra letra distinta. Segundo, quién conecta: siempre el instalador y según la parte siete, salvo el latiguillo de goma, que lo pone el usuario; y el suelto va por la parte seis. Tercero, quién arranca y repara: por encima de veinticuatro coma cuatro kilovatios y conducido, gente muy cualificada; y adecuar de familia de gas, categorías A o B con piezas idénticas. Y cuarto, cómo cierras: comprobaciones según la parte diez más el fabricante, certificado de puesta en marcha del anexo cuatro con el ticket del análisis de combustión, y cinco años de archivo.</a:t>
+            </a:r>
+          </a:p>
+          <a:p>
+            <a:r>
+              <a:t>N1: ¿Y esto cómo aparece en el examen y en la obra?</a:t>
+            </a:r>
+          </a:p>
+          <a:p>
+            <a:r>
+              <a:t>N2: En el examen te van a cruzar las letras a propósito, te van a preguntar quién puede conectar el latiguillo, o a partir de cuántos kilovatios hace falta gente cualificada, o cuántos años se archiva el certificado. En la obra es tu día a día: un flexible caducado es olor a gas asegurado, y sin el análisis de combustión no sabes si has dejado una avería dentro de casa. Hoy ya no eres solo teoría: sabes dejar un aparato en regla y con su papel firmado. En el siguiente vídeo entramos en la letra pequeña de la certificación, el anexo uno: cómo un organismo de control demuestra que ese aparato es de fiar. Vamos a por él.</a:t>
+            </a:r>
+          </a:p>
+        </p:txBody>
+      </p:sp>
+      <p:sp>
+        <p:nvSpPr>
+          <p:cNvPr id="4" name="Slide Number Placeholder 3"/>
+          <p:cNvSpPr>
+            <a:spLocks noGrp="1"/>
+          </p:cNvSpPr>
+          <p:nvPr>
+            <p:ph type="sldNum" idx="5" sz="quarter"/>
+          </p:nvPr>
+        </p:nvSpPr>
+        <p:spPr/>
+      </p:sp>
+    </p:spTree>
+  </p:cSld>
+  <p:clrMapOvr>
+    <a:masterClrMapping/>
+  </p:clrMapOvr>
+</p:notes>
+</file>
+
 <file path=ppt/notesSlides/notesSlide3.xml><?xml version="1.0" encoding="utf-8"?>
 <p:notes xmlns:a="http://schemas.openxmlformats.org/drawingml/2006/main" xmlns:p="http://schemas.openxmlformats.org/presentationml/2006/main" xmlns:r="http://schemas.openxmlformats.org/officeDocument/2006/relationships">
   <p:cSld>
@@ -1342,12 +1722,12 @@
           <a:lstStyle/>
           <a:p>
             <a:r>
-              <a:t>N1: Tipos A, B, C y categorías A, B, C. ¿No es fácil liarse?</a:t>
-            </a:r>
-          </a:p>
-          <a:p>
-            <a:r>
-              <a:t>N2: Es la trampa clásica del examen, así que vamos a dejarlo clavado. Los aparatos de tipo B y C son los que la ITC llama aparatos conducidos, porque van unidos a un conducto de evacuación de humos. Ahora, no confundas los tipos de aparato con las categorías de instalador de la ITC-ICG cero nueve. Son cosas distintas que comparten letra para liarte. El tipo A, B o C describe cómo quema y evacúa el aparato, su circuito de combustión. La categoría A, B o C es el nivel del carné del instalador, qué instalaciones puede montar una persona. No tienen nada que ver una letra con la otra: un instalador de categoría B puede trabajar con aparatos de tipo A, B o C sin problema.</a:t>
+              <a:t>N1: ¿Cómo se leen de un vistazo los tres tipos de aparato?</a:t>
+            </a:r>
+          </a:p>
+          <a:p>
+            <a:r>
+              <a:t>N2: Esta tabla es el mapa de la clasificación por combustión, y se lee con una frase: de dónde respira y por dónde echa el humo. Fila del tipo a, no conducido: respira del local y devuelve los humos al local, no tiene conducto; por eso exige buena ventilación, como una cocina o un horno. Fila del tipo be, conducido de cámara abierta: respira del local pero echa los humos fuera por un conducto, como un calentador atmosférico. Fila del tipo ce, estanco: respira del exterior y echa fuera, aislado del local, como una caldera estanca o de condensación. Los tipos be y ce son los conducidos. Ejemplo de obra: en un baño pequeño y poco ventilado, el tipo ce es la opción segura, porque no depende del aire de la estancia.</a:t>
             </a:r>
           </a:p>
         </p:txBody>
@@ -1417,12 +1797,12 @@
           <a:lstStyle/>
           <a:p>
             <a:r>
-              <a:t>N1: Para colocar un aparato, ¿hay que pedir permiso a la Administración?</a:t>
-            </a:r>
-          </a:p>
-          <a:p>
-            <a:r>
-              <a:t>N2: No. La instalación de los aparatos de gas no precisa autorización administrativa. Enlázalo con la lógica de todo el Reglamento de gas: lo normal es hacer y, cuando toca, comunicar; no pedir permiso y esperar de brazos cruzados. Y en el caso del aparato, la cosa va todavía más lejos, porque como veremos al final del apartado cinco, ni siquiera hay que comunicar. El único papel obligatorio será el certificado de puesta en marcha que le das al cliente.</a:t>
+              <a:t>N1: Con la tabla fresca, una pregunta directa.</a:t>
+            </a:r>
+          </a:p>
+          <a:p>
+            <a:r>
+              <a:t>N2: Recuerda cuáles echaban los humos al exterior por un conducto. El que los suelta al propio local se queda fuera de la definición.</a:t>
             </a:r>
           </a:p>
         </p:txBody>
@@ -1492,12 +1872,12 @@
           <a:lstStyle/>
           <a:p>
             <a:r>
-              <a:t>N1: ¿Puede cualquiera conectar un aparato de gas?</a:t>
-            </a:r>
-          </a:p>
-          <a:p>
-            <a:r>
-              <a:t>N2: La regla general es clara: la conexión de los aparatos a las instalaciones receptoras se hace según la norma UNE sesenta mil seiscientos setenta, parte siete, y siempre por un instalador. Pero hay una única excepción, y es muy práctica de conocer: cuando la conexión se hace con un tubo flexible elastomérico con abrazadera, que es el típico latiguillo de goma de una cocina de butano, la puede hacer el propio usuario. Por eso cualquiera puede cambiar el tubo de su cocina de gas, pero no conectar una caldera con tubería rígida: eso, sí o sí, es cosa del instalador.</a:t>
+              <a:t>N1: ¿Por qué be y ce?</a:t>
+            </a:r>
+          </a:p>
+          <a:p>
+            <a:r>
+              <a:t>N2: Porque ambos evacúan al exterior por un conducto de humos; el tipo a no está unido a ningún conducto, devuelve los productos al local. El truco: conducido es el que tiene conducto, y eso solo lo cumplen la be y la ce.</a:t>
             </a:r>
           </a:p>
         </p:txBody>
@@ -1567,12 +1947,12 @@
           <a:lstStyle/>
           <a:p>
             <a:r>
-              <a:t>N1: ¿Y los aparatos que no van conectados a la instalación receptora?</a:t>
-            </a:r>
-          </a:p>
-          <a:p>
-            <a:r>
-              <a:t>N2: Distingue las dos normas gemelas, porque el examen las cruza. Los aparatos conectados a una instalación receptora van por la UNE sesenta mil seiscientos setenta, parte siete, la de conexión. Los no conectados, por ejemplo una estufa o un aparato suelto, deben cumplir las condiciones de ubicación del capítulo cuatro de la UNE sesenta mil seiscientos setenta, parte seis. La regla de bolsillo para no fallar: conectado, la parte siete; suelto, la parte seis.</a:t>
+              <a:t>N1: Tipos A, B, C y categorías A, B, C. ¿No es fácil liarse?</a:t>
+            </a:r>
+          </a:p>
+          <a:p>
+            <a:r>
+              <a:t>N2: Es la trampa clásica del examen, así que vamos a dejarlo clavado. Los aparatos de tipo B y C son los que la ITC llama aparatos conducidos, porque van unidos a un conducto de evacuación de humos. Ahora, no confundas los tipos de aparato con las categorías de instalador de la ITC-ICG cero nueve. Son cosas distintas que comparten letra para liarte. El tipo A, B o C describe cómo quema y evacúa el aparato, su circuito de combustión. La categoría A, B o C es el nivel del carné del instalador, qué instalaciones puede montar una persona. No tienen nada que ver una letra con la otra: un instalador de categoría B puede trabajar con aparatos de tipo A, B o C sin problema.</a:t>
             </a:r>
           </a:p>
         </p:txBody>
@@ -4658,7 +5038,7 @@
       </p:sp>
       <p:sp>
         <p:nvSpPr>
-          <p:cNvPr id="4" name="Rounded Rectangle 3"/>
+          <p:cNvPr id="4" name="Rectangle 3"/>
           <p:cNvSpPr/>
           <p:nvPr/>
         </p:nvSpPr>
@@ -4667,7 +5047,7 @@
             <a:off x="868680" y="2057400"/>
             <a:ext cx="1463040" cy="82296"/>
           </a:xfrm>
-          <a:prstGeom prst="roundRect">
+          <a:prstGeom prst="rect">
             <a:avLst/>
           </a:prstGeom>
           <a:solidFill>
@@ -4784,6 +5164,18 @@
   <p:clrMapOvr>
     <a:masterClrMapping/>
   </p:clrMapOvr>
+  <mc:AlternateContent xmlns:mc="http://schemas.openxmlformats.org/markup-compatibility/2006">
+    <mc:Choice xmlns:p14="http://schemas.microsoft.com/office/powerpoint/2010/main" Requires="p14">
+      <p:transition spd="med" p14:dur="700">
+        <p14:cube dir="l"/>
+      </p:transition>
+    </mc:Choice>
+    <mc:Fallback>
+      <p:transition spd="med">
+        <p:push dir="l"/>
+      </p:transition>
+    </mc:Fallback>
+  </mc:AlternateContent>
 </p:sld>
 </file>
 
@@ -4871,7 +5263,7 @@
                 </a:solidFill>
                 <a:latin typeface="Montserrat"/>
               </a:rPr>
-              <a:t>010 / 015</a:t>
+              <a:t>010 / 020</a:t>
             </a:r>
           </a:p>
         </p:txBody>
@@ -4939,7 +5331,7 @@
                 </a:solidFill>
                 <a:latin typeface="Montserrat"/>
               </a:rPr>
-              <a:t>APARTADO 5.3.1 · QUIÉN ARRANCA</a:t>
+              <a:t>APARTADO 5.1 · AUTORIZACIÓN</a:t>
             </a:r>
           </a:p>
         </p:txBody>
@@ -4973,14 +5365,14 @@
                 </a:solidFill>
                 <a:latin typeface="Montserrat"/>
               </a:rPr>
-              <a:t>El umbral de los 24,4 kW</a:t>
-            </a:r>
-          </a:p>
-        </p:txBody>
-      </p:sp>
-      <p:sp>
-        <p:nvSpPr>
-          <p:cNvPr id="7" name="Rounded Rectangle 6"/>
+              <a:t>Instalar un aparato no pide permiso</a:t>
+            </a:r>
+          </a:p>
+        </p:txBody>
+      </p:sp>
+      <p:sp>
+        <p:nvSpPr>
+          <p:cNvPr id="7" name="Rectangle 6"/>
           <p:cNvSpPr/>
           <p:nvPr/>
         </p:nvSpPr>
@@ -4989,7 +5381,7 @@
             <a:off x="868680" y="1627632"/>
             <a:ext cx="2011680" cy="73152"/>
           </a:xfrm>
-          <a:prstGeom prst="roundRect">
+          <a:prstGeom prst="rect">
             <a:avLst/>
           </a:prstGeom>
           <a:solidFill>
@@ -5030,8 +5422,8 @@
         </p:nvSpPr>
         <p:spPr>
           <a:xfrm>
-            <a:off x="822960" y="1965960"/>
-            <a:ext cx="4983480" cy="4206240"/>
+            <a:off x="6355080" y="1965960"/>
+            <a:ext cx="5029200" cy="4206240"/>
           </a:xfrm>
           <a:prstGeom prst="rect">
             <a:avLst/>
@@ -5065,7 +5457,7 @@
                 </a:solidFill>
                 <a:latin typeface="Montserrat"/>
               </a:rPr>
-              <a:t>Conducidos (B y C) de más de 24,4 kW</a:t>
+              <a:t>No precisa autorización administrativa</a:t>
             </a:r>
           </a:p>
           <a:p>
@@ -5090,7 +5482,7 @@
                 </a:solidFill>
                 <a:latin typeface="Montserrat"/>
               </a:rPr>
-              <a:t>Y vitrocerámicas de fuegos cubiertos</a:t>
+              <a:t>En gas: hacer y, si toca, comunicar</a:t>
             </a:r>
           </a:p>
           <a:p>
@@ -5115,46 +5507,21 @@
                 </a:solidFill>
                 <a:latin typeface="Montserrat"/>
               </a:rPr>
-              <a:t>Solo SAT certificado o instalador cualificado</a:t>
-            </a:r>
-          </a:p>
-          <a:p>
-            <a:pPr>
-              <a:spcAft>
-                <a:spcPts val="1100"/>
-              </a:spcAft>
-            </a:pPr>
-            <a:r>
-              <a:rPr sz="1600" b="1" i="0">
-                <a:solidFill>
-                  <a:srgbClr val="E8801A"/>
-                </a:solidFill>
-                <a:latin typeface="Montserrat"/>
-              </a:rPr>
-              <a:t>▸  </a:t>
-            </a:r>
-            <a:r>
-              <a:rPr sz="1600" b="0" i="0">
-                <a:solidFill>
-                  <a:srgbClr val="1B2330"/>
-                </a:solidFill>
-                <a:latin typeface="Montserrat"/>
-              </a:rPr>
-              <a:t>El resto: SAT o empresa instaladora</a:t>
-            </a:r>
-          </a:p>
-        </p:txBody>
-      </p:sp>
-      <p:sp>
-        <p:nvSpPr>
-          <p:cNvPr id="9" name="imgph" descr="IMGQ:technician servicing gas boiler"/>
+              <a:t>Aquí ni siquiera hay que comunicar</a:t>
+            </a:r>
+          </a:p>
+        </p:txBody>
+      </p:sp>
+      <p:sp>
+        <p:nvSpPr>
+          <p:cNvPr id="9" name="imgph" descr="IMGQ:gas boiler wall mounted kitchen"/>
           <p:cNvSpPr/>
           <p:nvPr/>
         </p:nvSpPr>
         <p:spPr>
           <a:xfrm>
-            <a:off x="5806440" y="1051560"/>
-            <a:ext cx="5298947" cy="4629150"/>
+            <a:off x="822960" y="1965960"/>
+            <a:ext cx="5303520" cy="4572000"/>
           </a:xfrm>
           <a:prstGeom prst="roundRect">
             <a:avLst/>
@@ -5199,8 +5566,8 @@
         </p:nvSpPr>
         <p:spPr>
           <a:xfrm>
-            <a:off x="6080760" y="2726055"/>
-            <a:ext cx="4750307" cy="1280160"/>
+            <a:off x="1097280" y="3611880"/>
+            <a:ext cx="4754880" cy="1280160"/>
           </a:xfrm>
           <a:prstGeom prst="rect">
             <a:avLst/>
@@ -5221,7 +5588,7 @@
                 </a:solidFill>
                 <a:latin typeface="Montserrat"/>
               </a:rPr>
-              <a:t>IMAGEN REALISTA</a:t>
+              <a:t>IMAGEN</a:t>
             </a:r>
           </a:p>
           <a:p>
@@ -5233,7 +5600,7 @@
                 </a:solidFill>
                 <a:latin typeface="Montserrat"/>
               </a:rPr>
-              <a:t>technician servicing gas boiler</a:t>
+              <a:t>gas boiler wall mounted kitchen</a:t>
             </a:r>
           </a:p>
         </p:txBody>
@@ -5243,6 +5610,18 @@
   <p:clrMapOvr>
     <a:masterClrMapping/>
   </p:clrMapOvr>
+  <mc:AlternateContent xmlns:mc="http://schemas.openxmlformats.org/markup-compatibility/2006">
+    <mc:Choice xmlns:p14="http://schemas.microsoft.com/office/powerpoint/2010/main" Requires="p14">
+      <p:transition spd="med" p14:dur="700">
+        <p14:cube dir="r"/>
+      </p:transition>
+    </mc:Choice>
+    <mc:Fallback>
+      <p:transition spd="med">
+        <p:push dir="r"/>
+      </p:transition>
+    </mc:Fallback>
+  </mc:AlternateContent>
 </p:sld>
 </file>
 
@@ -5330,7 +5709,7 @@
                 </a:solidFill>
                 <a:latin typeface="Montserrat"/>
               </a:rPr>
-              <a:t>011 / 015</a:t>
+              <a:t>011 / 020</a:t>
             </a:r>
           </a:p>
         </p:txBody>
@@ -5398,7 +5777,7 @@
                 </a:solidFill>
                 <a:latin typeface="Montserrat"/>
               </a:rPr>
-              <a:t>APARTADO 5.3.2 · ADECUACIÓN</a:t>
+              <a:t>APARTADO 5.2 · CONEXIÓN</a:t>
             </a:r>
           </a:p>
         </p:txBody>
@@ -5432,14 +5811,14 @@
                 </a:solidFill>
                 <a:latin typeface="Montserrat"/>
               </a:rPr>
-              <a:t>Cambiar de familia de gas</a:t>
-            </a:r>
-          </a:p>
-        </p:txBody>
-      </p:sp>
-      <p:sp>
-        <p:nvSpPr>
-          <p:cNvPr id="7" name="Rounded Rectangle 6"/>
+              <a:t>Quién conecta el aparato</a:t>
+            </a:r>
+          </a:p>
+        </p:txBody>
+      </p:sp>
+      <p:sp>
+        <p:nvSpPr>
+          <p:cNvPr id="7" name="Rectangle 6"/>
           <p:cNvSpPr/>
           <p:nvPr/>
         </p:nvSpPr>
@@ -5448,7 +5827,7 @@
             <a:off x="868680" y="1627632"/>
             <a:ext cx="2011680" cy="73152"/>
           </a:xfrm>
-          <a:prstGeom prst="roundRect">
+          <a:prstGeom prst="rect">
             <a:avLst/>
           </a:prstGeom>
           <a:solidFill>
@@ -5490,7 +5869,7 @@
         <p:spPr>
           <a:xfrm>
             <a:off x="822960" y="1965960"/>
-            <a:ext cx="4983480" cy="4206240"/>
+            <a:ext cx="5029200" cy="4206240"/>
           </a:xfrm>
           <a:prstGeom prst="rect">
             <a:avLst/>
@@ -5524,7 +5903,7 @@
                 </a:solidFill>
                 <a:latin typeface="Montserrat"/>
               </a:rPr>
-              <a:t>Ejemplo: de natural a propano/butano</a:t>
+              <a:t>Regla: siempre un instalador</a:t>
             </a:r>
           </a:p>
           <a:p>
@@ -5549,7 +5928,7 @@
                 </a:solidFill>
                 <a:latin typeface="Montserrat"/>
               </a:rPr>
-              <a:t>Solo SAT certificado o categorías A o B</a:t>
+              <a:t>Conexión según UNE 60670-7</a:t>
             </a:r>
           </a:p>
           <a:p>
@@ -5574,7 +5953,7 @@
                 </a:solidFill>
                 <a:latin typeface="Montserrat"/>
               </a:rPr>
-              <a:t>La categoría C no puede</a:t>
+              <a:t>Excepción: tubo flexible con abrazadera</a:t>
             </a:r>
           </a:p>
           <a:p>
@@ -5599,21 +5978,21 @@
                 </a:solidFill>
                 <a:latin typeface="Montserrat"/>
               </a:rPr>
-              <a:t>Componentes idénticos a los certificados</a:t>
-            </a:r>
-          </a:p>
-        </p:txBody>
-      </p:sp>
-      <p:sp>
-        <p:nvSpPr>
-          <p:cNvPr id="9" name="imgph" descr="IMGQ:gas burner injector nozzle replacement"/>
+              <a:t>Ese lo puede poner el usuario</a:t>
+            </a:r>
+          </a:p>
+        </p:txBody>
+      </p:sp>
+      <p:sp>
+        <p:nvSpPr>
+          <p:cNvPr id="9" name="imgph" descr="IMGQ:flexible gas hose stove connection"/>
           <p:cNvSpPr/>
           <p:nvPr/>
         </p:nvSpPr>
         <p:spPr>
           <a:xfrm>
-            <a:off x="5806440" y="1051560"/>
-            <a:ext cx="5298947" cy="4629150"/>
+            <a:off x="6080760" y="1965960"/>
+            <a:ext cx="5303520" cy="4572000"/>
           </a:xfrm>
           <a:prstGeom prst="roundRect">
             <a:avLst/>
@@ -5658,8 +6037,8 @@
         </p:nvSpPr>
         <p:spPr>
           <a:xfrm>
-            <a:off x="6080760" y="2726055"/>
-            <a:ext cx="4750307" cy="1280160"/>
+            <a:off x="6355080" y="3611880"/>
+            <a:ext cx="4754880" cy="1280160"/>
           </a:xfrm>
           <a:prstGeom prst="rect">
             <a:avLst/>
@@ -5680,7 +6059,7 @@
                 </a:solidFill>
                 <a:latin typeface="Montserrat"/>
               </a:rPr>
-              <a:t>IMAGEN REALISTA</a:t>
+              <a:t>IMAGEN</a:t>
             </a:r>
           </a:p>
           <a:p>
@@ -5692,7 +6071,7 @@
                 </a:solidFill>
                 <a:latin typeface="Montserrat"/>
               </a:rPr>
-              <a:t>gas burner injector nozzle replacement</a:t>
+              <a:t>flexible gas hose stove connection</a:t>
             </a:r>
           </a:p>
         </p:txBody>
@@ -5702,6 +6081,18 @@
   <p:clrMapOvr>
     <a:masterClrMapping/>
   </p:clrMapOvr>
+  <mc:AlternateContent xmlns:mc="http://schemas.openxmlformats.org/markup-compatibility/2006">
+    <mc:Choice xmlns:p14="http://schemas.microsoft.com/office/powerpoint/2010/main" Requires="p14">
+      <p:transition spd="med" p14:dur="700">
+        <p14:cube dir="l"/>
+      </p:transition>
+    </mc:Choice>
+    <mc:Fallback>
+      <p:transition spd="med">
+        <p:push dir="l"/>
+      </p:transition>
+    </mc:Fallback>
+  </mc:AlternateContent>
 </p:sld>
 </file>
 
@@ -5789,7 +6180,7 @@
                 </a:solidFill>
                 <a:latin typeface="Montserrat"/>
               </a:rPr>
-              <a:t>012 / 015</a:t>
+              <a:t>012 / 020</a:t>
             </a:r>
           </a:p>
         </p:txBody>
@@ -5857,7 +6248,7 @@
                 </a:solidFill>
                 <a:latin typeface="Montserrat"/>
               </a:rPr>
-              <a:t>APARTADO 5.4 · COMPROBACIONES</a:t>
+              <a:t>APARTADO 5.2 · NO CONECTADOS</a:t>
             </a:r>
           </a:p>
         </p:txBody>
@@ -5891,14 +6282,14 @@
                 </a:solidFill>
                 <a:latin typeface="Montserrat"/>
               </a:rPr>
-              <a:t>El papel que cierra el trabajo</a:t>
-            </a:r>
-          </a:p>
-        </p:txBody>
-      </p:sp>
-      <p:sp>
-        <p:nvSpPr>
-          <p:cNvPr id="7" name="Rounded Rectangle 6"/>
+              <a:t>Los aparatos sueltos</a:t>
+            </a:r>
+          </a:p>
+        </p:txBody>
+      </p:sp>
+      <p:sp>
+        <p:nvSpPr>
+          <p:cNvPr id="7" name="Rectangle 6"/>
           <p:cNvSpPr/>
           <p:nvPr/>
         </p:nvSpPr>
@@ -5907,7 +6298,7 @@
             <a:off x="868680" y="1627632"/>
             <a:ext cx="2011680" cy="73152"/>
           </a:xfrm>
-          <a:prstGeom prst="roundRect">
+          <a:prstGeom prst="rect">
             <a:avLst/>
           </a:prstGeom>
           <a:solidFill>
@@ -5948,8 +6339,8 @@
         </p:nvSpPr>
         <p:spPr>
           <a:xfrm>
-            <a:off x="822960" y="1965960"/>
-            <a:ext cx="4983480" cy="4206240"/>
+            <a:off x="6355080" y="1965960"/>
+            <a:ext cx="5029200" cy="4206240"/>
           </a:xfrm>
           <a:prstGeom prst="rect">
             <a:avLst/>
@@ -5983,7 +6374,7 @@
                 </a:solidFill>
                 <a:latin typeface="Montserrat"/>
               </a:rPr>
-              <a:t>Comprobaciones: UNE 60670-10 + fabricante</a:t>
+              <a:t>No conectados a instalación receptora</a:t>
             </a:r>
           </a:p>
           <a:p>
@@ -6008,7 +6399,7 @@
                 </a:solidFill>
                 <a:latin typeface="Montserrat"/>
               </a:rPr>
-              <a:t>Emites certificado de puesta en marcha</a:t>
+              <a:t>Condiciones de ubicación: UNE 60670-6</a:t>
             </a:r>
           </a:p>
           <a:p>
@@ -6033,46 +6424,21 @@
                 </a:solidFill>
                 <a:latin typeface="Montserrat"/>
               </a:rPr>
-              <a:t>Modelo del anexo 4; lo firma el cliente</a:t>
-            </a:r>
-          </a:p>
-          <a:p>
-            <a:pPr>
-              <a:spcAft>
-                <a:spcPts val="1100"/>
-              </a:spcAft>
-            </a:pPr>
-            <a:r>
-              <a:rPr sz="1600" b="1" i="0">
-                <a:solidFill>
-                  <a:srgbClr val="E8801A"/>
-                </a:solidFill>
-                <a:latin typeface="Montserrat"/>
-              </a:rPr>
-              <a:t>▸  </a:t>
-            </a:r>
-            <a:r>
-              <a:rPr sz="1600" b="0" i="0">
-                <a:solidFill>
-                  <a:srgbClr val="1B2330"/>
-                </a:solidFill>
-                <a:latin typeface="Montserrat"/>
-              </a:rPr>
-              <a:t>Archivas 5 años (comunidad autónoma)</a:t>
-            </a:r>
-          </a:p>
-        </p:txBody>
-      </p:sp>
-      <p:sp>
-        <p:nvSpPr>
-          <p:cNvPr id="9" name="imgph" descr="IMGQ:flue gas combustion analyzer boiler"/>
+              <a:t>Regla: conectado → 7; suelto → 6</a:t>
+            </a:r>
+          </a:p>
+        </p:txBody>
+      </p:sp>
+      <p:sp>
+        <p:nvSpPr>
+          <p:cNvPr id="9" name="imgph" descr="IMGQ:portable gas heater room"/>
           <p:cNvSpPr/>
           <p:nvPr/>
         </p:nvSpPr>
         <p:spPr>
           <a:xfrm>
-            <a:off x="5806440" y="1051560"/>
-            <a:ext cx="5298947" cy="4629150"/>
+            <a:off x="822960" y="1965960"/>
+            <a:ext cx="5303520" cy="4572000"/>
           </a:xfrm>
           <a:prstGeom prst="roundRect">
             <a:avLst/>
@@ -6117,8 +6483,8 @@
         </p:nvSpPr>
         <p:spPr>
           <a:xfrm>
-            <a:off x="6080760" y="2726055"/>
-            <a:ext cx="4750307" cy="1280160"/>
+            <a:off x="1097280" y="3611880"/>
+            <a:ext cx="4754880" cy="1280160"/>
           </a:xfrm>
           <a:prstGeom prst="rect">
             <a:avLst/>
@@ -6139,7 +6505,7 @@
                 </a:solidFill>
                 <a:latin typeface="Montserrat"/>
               </a:rPr>
-              <a:t>IMAGEN REALISTA</a:t>
+              <a:t>IMAGEN</a:t>
             </a:r>
           </a:p>
           <a:p>
@@ -6151,7 +6517,7 @@
                 </a:solidFill>
                 <a:latin typeface="Montserrat"/>
               </a:rPr>
-              <a:t>flue gas combustion analyzer boiler</a:t>
+              <a:t>portable gas heater room</a:t>
             </a:r>
           </a:p>
         </p:txBody>
@@ -6161,6 +6527,18 @@
   <p:clrMapOvr>
     <a:masterClrMapping/>
   </p:clrMapOvr>
+  <mc:AlternateContent xmlns:mc="http://schemas.openxmlformats.org/markup-compatibility/2006">
+    <mc:Choice xmlns:p14="http://schemas.microsoft.com/office/powerpoint/2010/main" Requires="p14">
+      <p:transition spd="med" p14:dur="700">
+        <p14:cube dir="r"/>
+      </p:transition>
+    </mc:Choice>
+    <mc:Fallback>
+      <p:transition spd="med">
+        <p:push dir="r"/>
+      </p:transition>
+    </mc:Fallback>
+  </mc:AlternateContent>
 </p:sld>
 </file>
 
@@ -6248,7 +6626,7 @@
                 </a:solidFill>
                 <a:latin typeface="Montserrat"/>
               </a:rPr>
-              <a:t>013 / 015</a:t>
+              <a:t>013 / 020</a:t>
             </a:r>
           </a:p>
         </p:txBody>
@@ -6316,7 +6694,7 @@
                 </a:solidFill>
                 <a:latin typeface="Montserrat"/>
               </a:rPr>
-              <a:t>APARTADO 5.5 · COMUNICACIÓN</a:t>
+              <a:t>APARTADO 5.3.1 · QUIÉN ARRANCA</a:t>
             </a:r>
           </a:p>
         </p:txBody>
@@ -6350,14 +6728,14 @@
                 </a:solidFill>
                 <a:latin typeface="Montserrat"/>
               </a:rPr>
-              <a:t>Ni permiso antes, ni aviso después</a:t>
-            </a:r>
-          </a:p>
-        </p:txBody>
-      </p:sp>
-      <p:sp>
-        <p:nvSpPr>
-          <p:cNvPr id="7" name="Rounded Rectangle 6"/>
+              <a:t>El umbral de los 24,4 kW</a:t>
+            </a:r>
+          </a:p>
+        </p:txBody>
+      </p:sp>
+      <p:sp>
+        <p:nvSpPr>
+          <p:cNvPr id="7" name="Rectangle 6"/>
           <p:cNvSpPr/>
           <p:nvPr/>
         </p:nvSpPr>
@@ -6366,7 +6744,7 @@
             <a:off x="868680" y="1627632"/>
             <a:ext cx="2011680" cy="73152"/>
           </a:xfrm>
-          <a:prstGeom prst="roundRect">
+          <a:prstGeom prst="rect">
             <a:avLst/>
           </a:prstGeom>
           <a:solidFill>
@@ -6408,7 +6786,7 @@
         <p:spPr>
           <a:xfrm>
             <a:off x="822960" y="1965960"/>
-            <a:ext cx="4983480" cy="4206240"/>
+            <a:ext cx="5029200" cy="4206240"/>
           </a:xfrm>
           <a:prstGeom prst="rect">
             <a:avLst/>
@@ -6442,7 +6820,7 @@
                 </a:solidFill>
                 <a:latin typeface="Montserrat"/>
               </a:rPr>
-              <a:t>El aparato no precisa comunicación</a:t>
+              <a:t>Conducidos (B y C) de más de 24,4 kW</a:t>
             </a:r>
           </a:p>
           <a:p>
@@ -6467,7 +6845,7 @@
                 </a:solidFill>
                 <a:latin typeface="Montserrat"/>
               </a:rPr>
-              <a:t>Sí es obligatorio el certificado al cliente</a:t>
+              <a:t>Y vitrocerámicas de fuegos cubiertos</a:t>
             </a:r>
           </a:p>
           <a:p>
@@ -6492,21 +6870,46 @@
                 </a:solidFill>
                 <a:latin typeface="Montserrat"/>
               </a:rPr>
-              <a:t>No confundir con la instalación receptora</a:t>
-            </a:r>
-          </a:p>
-        </p:txBody>
-      </p:sp>
-      <p:sp>
-        <p:nvSpPr>
-          <p:cNvPr id="9" name="imgph" descr="IMGQ:gas installation paperwork clipboard"/>
+              <a:t>Solo SAT certificado o instalador cualificado</a:t>
+            </a:r>
+          </a:p>
+          <a:p>
+            <a:pPr>
+              <a:spcAft>
+                <a:spcPts val="1100"/>
+              </a:spcAft>
+            </a:pPr>
+            <a:r>
+              <a:rPr sz="1600" b="1" i="0">
+                <a:solidFill>
+                  <a:srgbClr val="E8801A"/>
+                </a:solidFill>
+                <a:latin typeface="Montserrat"/>
+              </a:rPr>
+              <a:t>▸  </a:t>
+            </a:r>
+            <a:r>
+              <a:rPr sz="1600" b="0" i="0">
+                <a:solidFill>
+                  <a:srgbClr val="1B2330"/>
+                </a:solidFill>
+                <a:latin typeface="Montserrat"/>
+              </a:rPr>
+              <a:t>El resto: SAT o empresa instaladora</a:t>
+            </a:r>
+          </a:p>
+        </p:txBody>
+      </p:sp>
+      <p:sp>
+        <p:nvSpPr>
+          <p:cNvPr id="9" name="imgph" descr="IMGQ:technician servicing gas boiler"/>
           <p:cNvSpPr/>
           <p:nvPr/>
         </p:nvSpPr>
         <p:spPr>
           <a:xfrm>
-            <a:off x="5806440" y="1051560"/>
-            <a:ext cx="5298947" cy="4629150"/>
+            <a:off x="6080760" y="1965960"/>
+            <a:ext cx="5303520" cy="4572000"/>
           </a:xfrm>
           <a:prstGeom prst="roundRect">
             <a:avLst/>
@@ -6551,8 +6954,8 @@
         </p:nvSpPr>
         <p:spPr>
           <a:xfrm>
-            <a:off x="6080760" y="2726055"/>
-            <a:ext cx="4750307" cy="1280160"/>
+            <a:off x="6355080" y="3611880"/>
+            <a:ext cx="4754880" cy="1280160"/>
           </a:xfrm>
           <a:prstGeom prst="rect">
             <a:avLst/>
@@ -6573,7 +6976,7 @@
                 </a:solidFill>
                 <a:latin typeface="Montserrat"/>
               </a:rPr>
-              <a:t>IMAGEN REALISTA</a:t>
+              <a:t>IMAGEN</a:t>
             </a:r>
           </a:p>
           <a:p>
@@ -6585,7 +6988,7 @@
                 </a:solidFill>
                 <a:latin typeface="Montserrat"/>
               </a:rPr>
-              <a:t>gas installation paperwork clipboard</a:t>
+              <a:t>technician servicing gas boiler</a:t>
             </a:r>
           </a:p>
         </p:txBody>
@@ -6595,6 +6998,18 @@
   <p:clrMapOvr>
     <a:masterClrMapping/>
   </p:clrMapOvr>
+  <mc:AlternateContent xmlns:mc="http://schemas.openxmlformats.org/markup-compatibility/2006">
+    <mc:Choice xmlns:p14="http://schemas.microsoft.com/office/powerpoint/2010/main" Requires="p14">
+      <p:transition spd="med" p14:dur="700">
+        <p14:cube dir="l"/>
+      </p:transition>
+    </mc:Choice>
+    <mc:Fallback>
+      <p:transition spd="med">
+        <p:push dir="l"/>
+      </p:transition>
+    </mc:Fallback>
+  </mc:AlternateContent>
 </p:sld>
 </file>
 
@@ -6682,7 +7097,7 @@
                 </a:solidFill>
                 <a:latin typeface="Montserrat"/>
               </a:rPr>
-              <a:t>014 / 015</a:t>
+              <a:t>014 / 020</a:t>
             </a:r>
           </a:p>
         </p:txBody>
@@ -6723,84 +7138,16 @@
       </p:sp>
       <p:sp>
         <p:nvSpPr>
-          <p:cNvPr id="5" name="TextBox 4"/>
-          <p:cNvSpPr txBox="1"/>
-          <p:nvPr/>
-        </p:nvSpPr>
-        <p:spPr>
-          <a:xfrm>
-            <a:off x="822960" y="457200"/>
-            <a:ext cx="10058400" cy="365760"/>
-          </a:xfrm>
-          <a:prstGeom prst="rect">
-            <a:avLst/>
-          </a:prstGeom>
-          <a:noFill/>
-        </p:spPr>
-        <p:txBody>
-          <a:bodyPr wrap="square">
-            <a:spAutoFit/>
-          </a:bodyPr>
-          <a:lstStyle/>
-          <a:p>
-            <a:r>
-              <a:rPr sz="1300" b="1" i="0">
-                <a:solidFill>
-                  <a:srgbClr val="E8801A"/>
-                </a:solidFill>
-                <a:latin typeface="Montserrat"/>
-              </a:rPr>
-              <a:t>ANEXO 4 · CERTIFICADO</a:t>
-            </a:r>
-          </a:p>
-        </p:txBody>
-      </p:sp>
-      <p:sp>
-        <p:nvSpPr>
-          <p:cNvPr id="6" name="TextBox 5"/>
-          <p:cNvSpPr txBox="1"/>
-          <p:nvPr/>
-        </p:nvSpPr>
-        <p:spPr>
-          <a:xfrm>
-            <a:off x="822960" y="868680"/>
-            <a:ext cx="10515600" cy="914400"/>
-          </a:xfrm>
-          <a:prstGeom prst="rect">
-            <a:avLst/>
-          </a:prstGeom>
-          <a:noFill/>
-        </p:spPr>
-        <p:txBody>
-          <a:bodyPr wrap="square">
-            <a:spAutoFit/>
-          </a:bodyPr>
-          <a:lstStyle/>
-          <a:p>
-            <a:r>
-              <a:rPr sz="2800" b="1" i="0">
-                <a:solidFill>
-                  <a:srgbClr val="1E2761"/>
-                </a:solidFill>
-                <a:latin typeface="Montserrat"/>
-              </a:rPr>
-              <a:t>Qué lleva el certificado</a:t>
-            </a:r>
-          </a:p>
-        </p:txBody>
-      </p:sp>
-      <p:sp>
-        <p:nvSpPr>
-          <p:cNvPr id="7" name="Rounded Rectangle 6"/>
+          <p:cNvPr id="5" name="Rectangle 4"/>
           <p:cNvSpPr/>
           <p:nvPr/>
         </p:nvSpPr>
         <p:spPr>
           <a:xfrm>
-            <a:off x="868680" y="1627632"/>
-            <a:ext cx="2011680" cy="73152"/>
-          </a:xfrm>
-          <a:prstGeom prst="roundRect">
+            <a:off x="0" y="0"/>
+            <a:ext cx="12191695" cy="1143000"/>
+          </a:xfrm>
+          <a:prstGeom prst="rect">
             <a:avLst/>
           </a:prstGeom>
           <a:solidFill>
@@ -6835,14 +7182,14 @@
       </p:sp>
       <p:sp>
         <p:nvSpPr>
-          <p:cNvPr id="8" name="TextBox 7"/>
+          <p:cNvPr id="6" name="TextBox 5"/>
           <p:cNvSpPr txBox="1"/>
           <p:nvPr/>
         </p:nvSpPr>
         <p:spPr>
           <a:xfrm>
-            <a:off x="822960" y="1965960"/>
-            <a:ext cx="4983480" cy="4206240"/>
+            <a:off x="822960" y="274320"/>
+            <a:ext cx="10515600" cy="640080"/>
           </a:xfrm>
           <a:prstGeom prst="rect">
             <a:avLst/>
@@ -6855,117 +7202,62 @@
           </a:bodyPr>
           <a:lstStyle/>
           <a:p>
-            <a:pPr>
-              <a:spcAft>
-                <a:spcPts val="1100"/>
-              </a:spcAft>
-            </a:pPr>
-            <a:r>
-              <a:rPr sz="1600" b="1" i="0">
-                <a:solidFill>
-                  <a:srgbClr val="E8801A"/>
-                </a:solidFill>
-                <a:latin typeface="Montserrat"/>
-              </a:rPr>
-              <a:t>▸  </a:t>
-            </a:r>
-            <a:r>
-              <a:rPr sz="1600" b="0" i="0">
-                <a:solidFill>
-                  <a:srgbClr val="1B2330"/>
-                </a:solidFill>
-                <a:latin typeface="Montserrat"/>
-              </a:rPr>
-              <a:t>Agente, cliente y datos del aparato</a:t>
-            </a:r>
-          </a:p>
-          <a:p>
-            <a:pPr>
-              <a:spcAft>
-                <a:spcPts val="1100"/>
-              </a:spcAft>
-            </a:pPr>
-            <a:r>
-              <a:rPr sz="1600" b="1" i="0">
-                <a:solidFill>
-                  <a:srgbClr val="E8801A"/>
-                </a:solidFill>
-                <a:latin typeface="Montserrat"/>
-              </a:rPr>
-              <a:t>▸  </a:t>
-            </a:r>
-            <a:r>
-              <a:rPr sz="1600" b="0" i="0">
-                <a:solidFill>
-                  <a:srgbClr val="1B2330"/>
-                </a:solidFill>
-                <a:latin typeface="Montserrat"/>
-              </a:rPr>
-              <a:t>Pruebas y sus resultados</a:t>
-            </a:r>
-          </a:p>
-          <a:p>
-            <a:pPr>
-              <a:spcAft>
-                <a:spcPts val="1100"/>
-              </a:spcAft>
-            </a:pPr>
-            <a:r>
-              <a:rPr sz="1600" b="1" i="0">
-                <a:solidFill>
-                  <a:srgbClr val="E8801A"/>
-                </a:solidFill>
-                <a:latin typeface="Montserrat"/>
-              </a:rPr>
-              <a:t>▸  </a:t>
-            </a:r>
-            <a:r>
-              <a:rPr sz="1600" b="0" i="0">
-                <a:solidFill>
-                  <a:srgbClr val="1B2330"/>
-                </a:solidFill>
-                <a:latin typeface="Montserrat"/>
-              </a:rPr>
-              <a:t>Ticket del análisis de combustión</a:t>
-            </a:r>
-          </a:p>
-          <a:p>
-            <a:pPr>
-              <a:spcAft>
-                <a:spcPts val="1100"/>
-              </a:spcAft>
-            </a:pPr>
-            <a:r>
-              <a:rPr sz="1600" b="1" i="0">
-                <a:solidFill>
-                  <a:srgbClr val="E8801A"/>
-                </a:solidFill>
-                <a:latin typeface="Montserrat"/>
-              </a:rPr>
-              <a:t>▸  </a:t>
-            </a:r>
-            <a:r>
-              <a:rPr sz="1600" b="0" i="0">
-                <a:solidFill>
-                  <a:srgbClr val="1B2330"/>
-                </a:solidFill>
-                <a:latin typeface="Montserrat"/>
-              </a:rPr>
-              <a:t>Firma del técnico, sello y firma del cliente</a:t>
-            </a:r>
-          </a:p>
-        </p:txBody>
-      </p:sp>
-      <p:sp>
-        <p:nvSpPr>
-          <p:cNvPr id="9" name="imgph" descr="IMGQ:signed technical certificate document"/>
+            <a:r>
+              <a:rPr sz="2400" b="1" i="0">
+                <a:solidFill>
+                  <a:srgbClr val="FFFFFF"/>
+                </a:solidFill>
+                <a:latin typeface="Montserrat"/>
+              </a:rPr>
+              <a:t>⚡  PREGUNTA RÁPIDA</a:t>
+            </a:r>
+          </a:p>
+        </p:txBody>
+      </p:sp>
+      <p:sp>
+        <p:nvSpPr>
+          <p:cNvPr id="7" name="TextBox 6"/>
+          <p:cNvSpPr txBox="1"/>
+          <p:nvPr/>
+        </p:nvSpPr>
+        <p:spPr>
+          <a:xfrm>
+            <a:off x="822960" y="1508760"/>
+            <a:ext cx="10515600" cy="1371600"/>
+          </a:xfrm>
+          <a:prstGeom prst="rect">
+            <a:avLst/>
+          </a:prstGeom>
+          <a:noFill/>
+        </p:spPr>
+        <p:txBody>
+          <a:bodyPr wrap="square">
+            <a:spAutoFit/>
+          </a:bodyPr>
+          <a:lstStyle/>
+          <a:p>
+            <a:r>
+              <a:rPr sz="2400" b="1" i="0">
+                <a:solidFill>
+                  <a:srgbClr val="1E2761"/>
+                </a:solidFill>
+                <a:latin typeface="Montserrat"/>
+              </a:rPr>
+              <a:t>¿A partir de qué potencia un aparato conducido (tipo B o C) solo lo pone en marcha personal especialmente cualificado?</a:t>
+            </a:r>
+          </a:p>
+        </p:txBody>
+      </p:sp>
+      <p:sp>
+        <p:nvSpPr>
+          <p:cNvPr id="8" name="Rounded Rectangle 7"/>
           <p:cNvSpPr/>
           <p:nvPr/>
         </p:nvSpPr>
         <p:spPr>
           <a:xfrm>
-            <a:off x="5806440" y="1051560"/>
-            <a:ext cx="5298947" cy="4629150"/>
+            <a:off x="822960" y="3291840"/>
+            <a:ext cx="4983480" cy="1143000"/>
           </a:xfrm>
           <a:prstGeom prst="roundRect">
             <a:avLst/>
@@ -7004,14 +7296,58 @@
       </p:sp>
       <p:sp>
         <p:nvSpPr>
+          <p:cNvPr id="9" name="Rectangle 8"/>
+          <p:cNvSpPr/>
+          <p:nvPr/>
+        </p:nvSpPr>
+        <p:spPr>
+          <a:xfrm>
+            <a:off x="822960" y="3291840"/>
+            <a:ext cx="640080" cy="1143000"/>
+          </a:xfrm>
+          <a:prstGeom prst="rect">
+            <a:avLst/>
+          </a:prstGeom>
+          <a:solidFill>
+            <a:srgbClr val="1E2761"/>
+          </a:solidFill>
+          <a:ln>
+            <a:noFill/>
+          </a:ln>
+          <a:effectLst/>
+        </p:spPr>
+        <p:style>
+          <a:lnRef idx="1">
+            <a:schemeClr val="accent1"/>
+          </a:lnRef>
+          <a:fillRef idx="3">
+            <a:schemeClr val="accent1"/>
+          </a:fillRef>
+          <a:effectRef idx="2">
+            <a:schemeClr val="accent1"/>
+          </a:effectRef>
+          <a:fontRef idx="minor">
+            <a:schemeClr val="lt1"/>
+          </a:fontRef>
+        </p:style>
+        <p:txBody>
+          <a:bodyPr rtlCol="0" anchor="ctr"/>
+          <a:lstStyle/>
+          <a:p>
+            <a:pPr algn="ctr"/>
+          </a:p>
+        </p:txBody>
+      </p:sp>
+      <p:sp>
+        <p:nvSpPr>
           <p:cNvPr id="10" name="TextBox 9"/>
           <p:cNvSpPr txBox="1"/>
           <p:nvPr/>
         </p:nvSpPr>
         <p:spPr>
           <a:xfrm>
-            <a:off x="6080760" y="2726055"/>
-            <a:ext cx="4750307" cy="1280160"/>
+            <a:off x="822960" y="3611880"/>
+            <a:ext cx="640080" cy="548640"/>
           </a:xfrm>
           <a:prstGeom prst="rect">
             <a:avLst/>
@@ -7026,25 +7362,524 @@
           <a:p>
             <a:pPr algn="ctr"/>
             <a:r>
-              <a:rPr sz="1400" b="1" i="0">
-                <a:solidFill>
-                  <a:srgbClr val="64748B"/>
-                </a:solidFill>
-                <a:latin typeface="Montserrat"/>
-              </a:rPr>
-              <a:t>IMAGEN REALISTA</a:t>
-            </a:r>
-          </a:p>
+              <a:rPr sz="2200" b="1" i="0">
+                <a:solidFill>
+                  <a:srgbClr val="FFFFFF"/>
+                </a:solidFill>
+                <a:latin typeface="Montserrat"/>
+              </a:rPr>
+              <a:t>A</a:t>
+            </a:r>
+          </a:p>
+        </p:txBody>
+      </p:sp>
+      <p:sp>
+        <p:nvSpPr>
+          <p:cNvPr id="11" name="TextBox 10"/>
+          <p:cNvSpPr txBox="1"/>
+          <p:nvPr/>
+        </p:nvSpPr>
+        <p:spPr>
+          <a:xfrm>
+            <a:off x="1600200" y="3474720"/>
+            <a:ext cx="4114800" cy="868680"/>
+          </a:xfrm>
+          <a:prstGeom prst="rect">
+            <a:avLst/>
+          </a:prstGeom>
+          <a:noFill/>
+        </p:spPr>
+        <p:txBody>
+          <a:bodyPr wrap="square">
+            <a:spAutoFit/>
+          </a:bodyPr>
+          <a:lstStyle/>
+          <a:p>
+            <a:r>
+              <a:rPr sz="1400" b="0" i="0">
+                <a:solidFill>
+                  <a:srgbClr val="1B2330"/>
+                </a:solidFill>
+                <a:latin typeface="Montserrat"/>
+              </a:rPr>
+              <a:t>Más de 20 kW de potencia útil</a:t>
+            </a:r>
+          </a:p>
+        </p:txBody>
+      </p:sp>
+      <p:sp>
+        <p:nvSpPr>
+          <p:cNvPr id="12" name="Rounded Rectangle 11"/>
+          <p:cNvSpPr/>
+          <p:nvPr/>
+        </p:nvSpPr>
+        <p:spPr>
+          <a:xfrm>
+            <a:off x="6355080" y="3291840"/>
+            <a:ext cx="4983480" cy="1143000"/>
+          </a:xfrm>
+          <a:prstGeom prst="roundRect">
+            <a:avLst/>
+          </a:prstGeom>
+          <a:solidFill>
+            <a:srgbClr val="F3F6FB"/>
+          </a:solidFill>
+          <a:ln w="12700">
+            <a:solidFill>
+              <a:srgbClr val="C7D2E6"/>
+            </a:solidFill>
+          </a:ln>
+          <a:effectLst/>
+        </p:spPr>
+        <p:style>
+          <a:lnRef idx="1">
+            <a:schemeClr val="accent1"/>
+          </a:lnRef>
+          <a:fillRef idx="3">
+            <a:schemeClr val="accent1"/>
+          </a:fillRef>
+          <a:effectRef idx="2">
+            <a:schemeClr val="accent1"/>
+          </a:effectRef>
+          <a:fontRef idx="minor">
+            <a:schemeClr val="lt1"/>
+          </a:fontRef>
+        </p:style>
+        <p:txBody>
+          <a:bodyPr rtlCol="0" anchor="ctr"/>
+          <a:lstStyle/>
           <a:p>
             <a:pPr algn="ctr"/>
-            <a:r>
-              <a:rPr sz="1100" b="0" i="1">
-                <a:solidFill>
-                  <a:srgbClr val="64748B"/>
-                </a:solidFill>
-                <a:latin typeface="Montserrat"/>
-              </a:rPr>
-              <a:t>signed technical certificate document</a:t>
+          </a:p>
+        </p:txBody>
+      </p:sp>
+      <p:sp>
+        <p:nvSpPr>
+          <p:cNvPr id="13" name="Rectangle 12"/>
+          <p:cNvSpPr/>
+          <p:nvPr/>
+        </p:nvSpPr>
+        <p:spPr>
+          <a:xfrm>
+            <a:off x="6355080" y="3291840"/>
+            <a:ext cx="640080" cy="1143000"/>
+          </a:xfrm>
+          <a:prstGeom prst="rect">
+            <a:avLst/>
+          </a:prstGeom>
+          <a:solidFill>
+            <a:srgbClr val="1E2761"/>
+          </a:solidFill>
+          <a:ln>
+            <a:noFill/>
+          </a:ln>
+          <a:effectLst/>
+        </p:spPr>
+        <p:style>
+          <a:lnRef idx="1">
+            <a:schemeClr val="accent1"/>
+          </a:lnRef>
+          <a:fillRef idx="3">
+            <a:schemeClr val="accent1"/>
+          </a:fillRef>
+          <a:effectRef idx="2">
+            <a:schemeClr val="accent1"/>
+          </a:effectRef>
+          <a:fontRef idx="minor">
+            <a:schemeClr val="lt1"/>
+          </a:fontRef>
+        </p:style>
+        <p:txBody>
+          <a:bodyPr rtlCol="0" anchor="ctr"/>
+          <a:lstStyle/>
+          <a:p>
+            <a:pPr algn="ctr"/>
+          </a:p>
+        </p:txBody>
+      </p:sp>
+      <p:sp>
+        <p:nvSpPr>
+          <p:cNvPr id="14" name="TextBox 13"/>
+          <p:cNvSpPr txBox="1"/>
+          <p:nvPr/>
+        </p:nvSpPr>
+        <p:spPr>
+          <a:xfrm>
+            <a:off x="6355080" y="3611880"/>
+            <a:ext cx="640080" cy="548640"/>
+          </a:xfrm>
+          <a:prstGeom prst="rect">
+            <a:avLst/>
+          </a:prstGeom>
+          <a:noFill/>
+        </p:spPr>
+        <p:txBody>
+          <a:bodyPr wrap="square">
+            <a:spAutoFit/>
+          </a:bodyPr>
+          <a:lstStyle/>
+          <a:p>
+            <a:pPr algn="ctr"/>
+            <a:r>
+              <a:rPr sz="2200" b="1" i="0">
+                <a:solidFill>
+                  <a:srgbClr val="FFFFFF"/>
+                </a:solidFill>
+                <a:latin typeface="Montserrat"/>
+              </a:rPr>
+              <a:t>B</a:t>
+            </a:r>
+          </a:p>
+        </p:txBody>
+      </p:sp>
+      <p:sp>
+        <p:nvSpPr>
+          <p:cNvPr id="15" name="TextBox 14"/>
+          <p:cNvSpPr txBox="1"/>
+          <p:nvPr/>
+        </p:nvSpPr>
+        <p:spPr>
+          <a:xfrm>
+            <a:off x="7132320" y="3474720"/>
+            <a:ext cx="4114800" cy="868680"/>
+          </a:xfrm>
+          <a:prstGeom prst="rect">
+            <a:avLst/>
+          </a:prstGeom>
+          <a:noFill/>
+        </p:spPr>
+        <p:txBody>
+          <a:bodyPr wrap="square">
+            <a:spAutoFit/>
+          </a:bodyPr>
+          <a:lstStyle/>
+          <a:p>
+            <a:r>
+              <a:rPr sz="1400" b="0" i="0">
+                <a:solidFill>
+                  <a:srgbClr val="1B2330"/>
+                </a:solidFill>
+                <a:latin typeface="Montserrat"/>
+              </a:rPr>
+              <a:t>Más de 24,4 kW de potencia útil</a:t>
+            </a:r>
+          </a:p>
+        </p:txBody>
+      </p:sp>
+      <p:sp>
+        <p:nvSpPr>
+          <p:cNvPr id="16" name="Rounded Rectangle 15"/>
+          <p:cNvSpPr/>
+          <p:nvPr/>
+        </p:nvSpPr>
+        <p:spPr>
+          <a:xfrm>
+            <a:off x="822960" y="4617720"/>
+            <a:ext cx="4983480" cy="1143000"/>
+          </a:xfrm>
+          <a:prstGeom prst="roundRect">
+            <a:avLst/>
+          </a:prstGeom>
+          <a:solidFill>
+            <a:srgbClr val="F3F6FB"/>
+          </a:solidFill>
+          <a:ln w="12700">
+            <a:solidFill>
+              <a:srgbClr val="C7D2E6"/>
+            </a:solidFill>
+          </a:ln>
+          <a:effectLst/>
+        </p:spPr>
+        <p:style>
+          <a:lnRef idx="1">
+            <a:schemeClr val="accent1"/>
+          </a:lnRef>
+          <a:fillRef idx="3">
+            <a:schemeClr val="accent1"/>
+          </a:fillRef>
+          <a:effectRef idx="2">
+            <a:schemeClr val="accent1"/>
+          </a:effectRef>
+          <a:fontRef idx="minor">
+            <a:schemeClr val="lt1"/>
+          </a:fontRef>
+        </p:style>
+        <p:txBody>
+          <a:bodyPr rtlCol="0" anchor="ctr"/>
+          <a:lstStyle/>
+          <a:p>
+            <a:pPr algn="ctr"/>
+          </a:p>
+        </p:txBody>
+      </p:sp>
+      <p:sp>
+        <p:nvSpPr>
+          <p:cNvPr id="17" name="Rectangle 16"/>
+          <p:cNvSpPr/>
+          <p:nvPr/>
+        </p:nvSpPr>
+        <p:spPr>
+          <a:xfrm>
+            <a:off x="822960" y="4617720"/>
+            <a:ext cx="640080" cy="1143000"/>
+          </a:xfrm>
+          <a:prstGeom prst="rect">
+            <a:avLst/>
+          </a:prstGeom>
+          <a:solidFill>
+            <a:srgbClr val="1E2761"/>
+          </a:solidFill>
+          <a:ln>
+            <a:noFill/>
+          </a:ln>
+          <a:effectLst/>
+        </p:spPr>
+        <p:style>
+          <a:lnRef idx="1">
+            <a:schemeClr val="accent1"/>
+          </a:lnRef>
+          <a:fillRef idx="3">
+            <a:schemeClr val="accent1"/>
+          </a:fillRef>
+          <a:effectRef idx="2">
+            <a:schemeClr val="accent1"/>
+          </a:effectRef>
+          <a:fontRef idx="minor">
+            <a:schemeClr val="lt1"/>
+          </a:fontRef>
+        </p:style>
+        <p:txBody>
+          <a:bodyPr rtlCol="0" anchor="ctr"/>
+          <a:lstStyle/>
+          <a:p>
+            <a:pPr algn="ctr"/>
+          </a:p>
+        </p:txBody>
+      </p:sp>
+      <p:sp>
+        <p:nvSpPr>
+          <p:cNvPr id="18" name="TextBox 17"/>
+          <p:cNvSpPr txBox="1"/>
+          <p:nvPr/>
+        </p:nvSpPr>
+        <p:spPr>
+          <a:xfrm>
+            <a:off x="822960" y="4937760"/>
+            <a:ext cx="640080" cy="548640"/>
+          </a:xfrm>
+          <a:prstGeom prst="rect">
+            <a:avLst/>
+          </a:prstGeom>
+          <a:noFill/>
+        </p:spPr>
+        <p:txBody>
+          <a:bodyPr wrap="square">
+            <a:spAutoFit/>
+          </a:bodyPr>
+          <a:lstStyle/>
+          <a:p>
+            <a:pPr algn="ctr"/>
+            <a:r>
+              <a:rPr sz="2200" b="1" i="0">
+                <a:solidFill>
+                  <a:srgbClr val="FFFFFF"/>
+                </a:solidFill>
+                <a:latin typeface="Montserrat"/>
+              </a:rPr>
+              <a:t>C</a:t>
+            </a:r>
+          </a:p>
+        </p:txBody>
+      </p:sp>
+      <p:sp>
+        <p:nvSpPr>
+          <p:cNvPr id="19" name="TextBox 18"/>
+          <p:cNvSpPr txBox="1"/>
+          <p:nvPr/>
+        </p:nvSpPr>
+        <p:spPr>
+          <a:xfrm>
+            <a:off x="1600200" y="4800600"/>
+            <a:ext cx="4114800" cy="868680"/>
+          </a:xfrm>
+          <a:prstGeom prst="rect">
+            <a:avLst/>
+          </a:prstGeom>
+          <a:noFill/>
+        </p:spPr>
+        <p:txBody>
+          <a:bodyPr wrap="square">
+            <a:spAutoFit/>
+          </a:bodyPr>
+          <a:lstStyle/>
+          <a:p>
+            <a:r>
+              <a:rPr sz="1400" b="0" i="0">
+                <a:solidFill>
+                  <a:srgbClr val="1B2330"/>
+                </a:solidFill>
+                <a:latin typeface="Montserrat"/>
+              </a:rPr>
+              <a:t>Más de 30 kW de potencia útil</a:t>
+            </a:r>
+          </a:p>
+        </p:txBody>
+      </p:sp>
+      <p:sp>
+        <p:nvSpPr>
+          <p:cNvPr id="20" name="Rounded Rectangle 19"/>
+          <p:cNvSpPr/>
+          <p:nvPr/>
+        </p:nvSpPr>
+        <p:spPr>
+          <a:xfrm>
+            <a:off x="6355080" y="4617720"/>
+            <a:ext cx="4983480" cy="1143000"/>
+          </a:xfrm>
+          <a:prstGeom prst="roundRect">
+            <a:avLst/>
+          </a:prstGeom>
+          <a:solidFill>
+            <a:srgbClr val="F3F6FB"/>
+          </a:solidFill>
+          <a:ln w="12700">
+            <a:solidFill>
+              <a:srgbClr val="C7D2E6"/>
+            </a:solidFill>
+          </a:ln>
+          <a:effectLst/>
+        </p:spPr>
+        <p:style>
+          <a:lnRef idx="1">
+            <a:schemeClr val="accent1"/>
+          </a:lnRef>
+          <a:fillRef idx="3">
+            <a:schemeClr val="accent1"/>
+          </a:fillRef>
+          <a:effectRef idx="2">
+            <a:schemeClr val="accent1"/>
+          </a:effectRef>
+          <a:fontRef idx="minor">
+            <a:schemeClr val="lt1"/>
+          </a:fontRef>
+        </p:style>
+        <p:txBody>
+          <a:bodyPr rtlCol="0" anchor="ctr"/>
+          <a:lstStyle/>
+          <a:p>
+            <a:pPr algn="ctr"/>
+          </a:p>
+        </p:txBody>
+      </p:sp>
+      <p:sp>
+        <p:nvSpPr>
+          <p:cNvPr id="21" name="Rectangle 20"/>
+          <p:cNvSpPr/>
+          <p:nvPr/>
+        </p:nvSpPr>
+        <p:spPr>
+          <a:xfrm>
+            <a:off x="6355080" y="4617720"/>
+            <a:ext cx="640080" cy="1143000"/>
+          </a:xfrm>
+          <a:prstGeom prst="rect">
+            <a:avLst/>
+          </a:prstGeom>
+          <a:solidFill>
+            <a:srgbClr val="1E2761"/>
+          </a:solidFill>
+          <a:ln>
+            <a:noFill/>
+          </a:ln>
+          <a:effectLst/>
+        </p:spPr>
+        <p:style>
+          <a:lnRef idx="1">
+            <a:schemeClr val="accent1"/>
+          </a:lnRef>
+          <a:fillRef idx="3">
+            <a:schemeClr val="accent1"/>
+          </a:fillRef>
+          <a:effectRef idx="2">
+            <a:schemeClr val="accent1"/>
+          </a:effectRef>
+          <a:fontRef idx="minor">
+            <a:schemeClr val="lt1"/>
+          </a:fontRef>
+        </p:style>
+        <p:txBody>
+          <a:bodyPr rtlCol="0" anchor="ctr"/>
+          <a:lstStyle/>
+          <a:p>
+            <a:pPr algn="ctr"/>
+          </a:p>
+        </p:txBody>
+      </p:sp>
+      <p:sp>
+        <p:nvSpPr>
+          <p:cNvPr id="22" name="TextBox 21"/>
+          <p:cNvSpPr txBox="1"/>
+          <p:nvPr/>
+        </p:nvSpPr>
+        <p:spPr>
+          <a:xfrm>
+            <a:off x="6355080" y="4937760"/>
+            <a:ext cx="640080" cy="548640"/>
+          </a:xfrm>
+          <a:prstGeom prst="rect">
+            <a:avLst/>
+          </a:prstGeom>
+          <a:noFill/>
+        </p:spPr>
+        <p:txBody>
+          <a:bodyPr wrap="square">
+            <a:spAutoFit/>
+          </a:bodyPr>
+          <a:lstStyle/>
+          <a:p>
+            <a:pPr algn="ctr"/>
+            <a:r>
+              <a:rPr sz="2200" b="1" i="0">
+                <a:solidFill>
+                  <a:srgbClr val="FFFFFF"/>
+                </a:solidFill>
+                <a:latin typeface="Montserrat"/>
+              </a:rPr>
+              <a:t>D</a:t>
+            </a:r>
+          </a:p>
+        </p:txBody>
+      </p:sp>
+      <p:sp>
+        <p:nvSpPr>
+          <p:cNvPr id="23" name="TextBox 22"/>
+          <p:cNvSpPr txBox="1"/>
+          <p:nvPr/>
+        </p:nvSpPr>
+        <p:spPr>
+          <a:xfrm>
+            <a:off x="7132320" y="4800600"/>
+            <a:ext cx="4114800" cy="868680"/>
+          </a:xfrm>
+          <a:prstGeom prst="rect">
+            <a:avLst/>
+          </a:prstGeom>
+          <a:noFill/>
+        </p:spPr>
+        <p:txBody>
+          <a:bodyPr wrap="square">
+            <a:spAutoFit/>
+          </a:bodyPr>
+          <a:lstStyle/>
+          <a:p>
+            <a:r>
+              <a:rPr sz="1400" b="0" i="0">
+                <a:solidFill>
+                  <a:srgbClr val="1B2330"/>
+                </a:solidFill>
+                <a:latin typeface="Montserrat"/>
+              </a:rPr>
+              <a:t>Más de 15 kW de potencia útil</a:t>
             </a:r>
           </a:p>
         </p:txBody>
@@ -7054,6 +7889,18 @@
   <p:clrMapOvr>
     <a:masterClrMapping/>
   </p:clrMapOvr>
+  <mc:AlternateContent xmlns:mc="http://schemas.openxmlformats.org/markup-compatibility/2006">
+    <mc:Choice xmlns:p14="http://schemas.microsoft.com/office/powerpoint/2010/main" Requires="p14">
+      <p:transition spd="med" p14:dur="700">
+        <p14:cube dir="r"/>
+      </p:transition>
+    </mc:Choice>
+    <mc:Fallback>
+      <p:transition spd="med">
+        <p:push dir="r"/>
+      </p:transition>
+    </mc:Fallback>
+  </mc:AlternateContent>
 </p:sld>
 </file>
 
@@ -7082,7 +7929,7 @@
             <a:avLst/>
           </a:prstGeom>
           <a:solidFill>
-            <a:srgbClr val="1E2761"/>
+            <a:srgbClr val="FFFFFF"/>
           </a:solidFill>
           <a:ln>
             <a:noFill/>
@@ -7119,8 +7966,8 @@
         </p:nvSpPr>
         <p:spPr>
           <a:xfrm>
-            <a:off x="822960" y="640080"/>
-            <a:ext cx="10515600" cy="457200"/>
+            <a:off x="10607040" y="320040"/>
+            <a:ext cx="1371600" cy="365760"/>
           </a:xfrm>
           <a:prstGeom prst="rect">
             <a:avLst/>
@@ -7133,30 +7980,520 @@
           </a:bodyPr>
           <a:lstStyle/>
           <a:p>
-            <a:r>
-              <a:rPr sz="1400" b="1" i="0">
-                <a:solidFill>
-                  <a:srgbClr val="F4A24C"/>
-                </a:solidFill>
-                <a:latin typeface="Montserrat"/>
-              </a:rPr>
-              <a:t>LO QUE YA DOMINAS</a:t>
-            </a:r>
-          </a:p>
-        </p:txBody>
-      </p:sp>
-      <p:sp>
-        <p:nvSpPr>
-          <p:cNvPr id="4" name="Rounded Rectangle 3"/>
+            <a:pPr algn="r"/>
+            <a:r>
+              <a:rPr sz="1000" b="1" i="0">
+                <a:solidFill>
+                  <a:srgbClr val="64748B"/>
+                </a:solidFill>
+                <a:latin typeface="Montserrat"/>
+              </a:rPr>
+              <a:t>015 / 020</a:t>
+            </a:r>
+          </a:p>
+        </p:txBody>
+      </p:sp>
+      <p:sp>
+        <p:nvSpPr>
+          <p:cNvPr id="4" name="TextBox 3"/>
+          <p:cNvSpPr txBox="1"/>
+          <p:nvPr/>
+        </p:nvSpPr>
+        <p:spPr>
+          <a:xfrm>
+            <a:off x="457200" y="6419088"/>
+            <a:ext cx="8229600" cy="365760"/>
+          </a:xfrm>
+          <a:prstGeom prst="rect">
+            <a:avLst/>
+          </a:prstGeom>
+          <a:noFill/>
+        </p:spPr>
+        <p:txBody>
+          <a:bodyPr wrap="square">
+            <a:spAutoFit/>
+          </a:bodyPr>
+          <a:lstStyle/>
+          <a:p>
+            <a:r>
+              <a:rPr sz="900" b="0" i="0">
+                <a:solidFill>
+                  <a:srgbClr val="64748B"/>
+                </a:solidFill>
+                <a:latin typeface="Montserrat"/>
+              </a:rPr>
+              <a:t>Curso Gas B · Tema 05 · Aparatos de gas</a:t>
+            </a:r>
+          </a:p>
+        </p:txBody>
+      </p:sp>
+      <p:sp>
+        <p:nvSpPr>
+          <p:cNvPr id="5" name="Rectangle 4"/>
           <p:cNvSpPr/>
           <p:nvPr/>
         </p:nvSpPr>
         <p:spPr>
           <a:xfrm>
-            <a:off x="868680" y="1051560"/>
-            <a:ext cx="1463040" cy="82296"/>
+            <a:off x="0" y="0"/>
+            <a:ext cx="12191695" cy="1143000"/>
+          </a:xfrm>
+          <a:prstGeom prst="rect">
+            <a:avLst/>
+          </a:prstGeom>
+          <a:solidFill>
+            <a:srgbClr val="1E8E4B"/>
+          </a:solidFill>
+          <a:ln>
+            <a:noFill/>
+          </a:ln>
+          <a:effectLst/>
+        </p:spPr>
+        <p:style>
+          <a:lnRef idx="1">
+            <a:schemeClr val="accent1"/>
+          </a:lnRef>
+          <a:fillRef idx="3">
+            <a:schemeClr val="accent1"/>
+          </a:fillRef>
+          <a:effectRef idx="2">
+            <a:schemeClr val="accent1"/>
+          </a:effectRef>
+          <a:fontRef idx="minor">
+            <a:schemeClr val="lt1"/>
+          </a:fontRef>
+        </p:style>
+        <p:txBody>
+          <a:bodyPr rtlCol="0" anchor="ctr"/>
+          <a:lstStyle/>
+          <a:p>
+            <a:pPr algn="ctr"/>
+          </a:p>
+        </p:txBody>
+      </p:sp>
+      <p:sp>
+        <p:nvSpPr>
+          <p:cNvPr id="6" name="TextBox 5"/>
+          <p:cNvSpPr txBox="1"/>
+          <p:nvPr/>
+        </p:nvSpPr>
+        <p:spPr>
+          <a:xfrm>
+            <a:off x="822960" y="274320"/>
+            <a:ext cx="10515600" cy="640080"/>
+          </a:xfrm>
+          <a:prstGeom prst="rect">
+            <a:avLst/>
+          </a:prstGeom>
+          <a:noFill/>
+        </p:spPr>
+        <p:txBody>
+          <a:bodyPr wrap="square">
+            <a:spAutoFit/>
+          </a:bodyPr>
+          <a:lstStyle/>
+          <a:p>
+            <a:r>
+              <a:rPr sz="2400" b="1" i="0">
+                <a:solidFill>
+                  <a:srgbClr val="FFFFFF"/>
+                </a:solidFill>
+                <a:latin typeface="Montserrat"/>
+              </a:rPr>
+              <a:t>✔  RESPUESTA:  B</a:t>
+            </a:r>
+          </a:p>
+        </p:txBody>
+      </p:sp>
+      <p:sp>
+        <p:nvSpPr>
+          <p:cNvPr id="7" name="TextBox 6"/>
+          <p:cNvSpPr txBox="1"/>
+          <p:nvPr/>
+        </p:nvSpPr>
+        <p:spPr>
+          <a:xfrm>
+            <a:off x="822960" y="1417320"/>
+            <a:ext cx="10515600" cy="914400"/>
+          </a:xfrm>
+          <a:prstGeom prst="rect">
+            <a:avLst/>
+          </a:prstGeom>
+          <a:noFill/>
+        </p:spPr>
+        <p:txBody>
+          <a:bodyPr wrap="square">
+            <a:spAutoFit/>
+          </a:bodyPr>
+          <a:lstStyle/>
+          <a:p>
+            <a:r>
+              <a:rPr sz="1800" b="1" i="0">
+                <a:solidFill>
+                  <a:srgbClr val="64748B"/>
+                </a:solidFill>
+                <a:latin typeface="Montserrat"/>
+              </a:rPr>
+              <a:t>¿A partir de qué potencia un aparato conducido (tipo B o C) solo lo pone en marcha personal especialmente cualificado?</a:t>
+            </a:r>
+          </a:p>
+        </p:txBody>
+      </p:sp>
+      <p:sp>
+        <p:nvSpPr>
+          <p:cNvPr id="8" name="Rounded Rectangle 7"/>
+          <p:cNvSpPr/>
+          <p:nvPr/>
+        </p:nvSpPr>
+        <p:spPr>
+          <a:xfrm>
+            <a:off x="822960" y="2514600"/>
+            <a:ext cx="10515600" cy="914400"/>
           </a:xfrm>
           <a:prstGeom prst="roundRect">
+            <a:avLst/>
+          </a:prstGeom>
+          <a:solidFill>
+            <a:srgbClr val="E9F6EE"/>
+          </a:solidFill>
+          <a:ln w="12700">
+            <a:solidFill>
+              <a:srgbClr val="1E8E4B"/>
+            </a:solidFill>
+          </a:ln>
+          <a:effectLst/>
+        </p:spPr>
+        <p:style>
+          <a:lnRef idx="1">
+            <a:schemeClr val="accent1"/>
+          </a:lnRef>
+          <a:fillRef idx="3">
+            <a:schemeClr val="accent1"/>
+          </a:fillRef>
+          <a:effectRef idx="2">
+            <a:schemeClr val="accent1"/>
+          </a:effectRef>
+          <a:fontRef idx="minor">
+            <a:schemeClr val="lt1"/>
+          </a:fontRef>
+        </p:style>
+        <p:txBody>
+          <a:bodyPr rtlCol="0" anchor="ctr"/>
+          <a:lstStyle/>
+          <a:p>
+            <a:pPr algn="ctr"/>
+          </a:p>
+        </p:txBody>
+      </p:sp>
+      <p:sp>
+        <p:nvSpPr>
+          <p:cNvPr id="9" name="TextBox 8"/>
+          <p:cNvSpPr txBox="1"/>
+          <p:nvPr/>
+        </p:nvSpPr>
+        <p:spPr>
+          <a:xfrm>
+            <a:off x="1097280" y="2697480"/>
+            <a:ext cx="10058400" cy="640080"/>
+          </a:xfrm>
+          <a:prstGeom prst="rect">
+            <a:avLst/>
+          </a:prstGeom>
+          <a:noFill/>
+        </p:spPr>
+        <p:txBody>
+          <a:bodyPr wrap="square">
+            <a:spAutoFit/>
+          </a:bodyPr>
+          <a:lstStyle/>
+          <a:p>
+            <a:r>
+              <a:rPr sz="1800" b="1" i="0">
+                <a:solidFill>
+                  <a:srgbClr val="1E8E4B"/>
+                </a:solidFill>
+                <a:latin typeface="Montserrat"/>
+              </a:rPr>
+              <a:t>B.  </a:t>
+            </a:r>
+            <a:r>
+              <a:rPr sz="1800" b="1" i="0">
+                <a:solidFill>
+                  <a:srgbClr val="1E2761"/>
+                </a:solidFill>
+                <a:latin typeface="Montserrat"/>
+              </a:rPr>
+              <a:t>Más de 24,4 kW de potencia útil</a:t>
+            </a:r>
+          </a:p>
+        </p:txBody>
+      </p:sp>
+      <p:sp>
+        <p:nvSpPr>
+          <p:cNvPr id="10" name="TextBox 9"/>
+          <p:cNvSpPr txBox="1"/>
+          <p:nvPr/>
+        </p:nvSpPr>
+        <p:spPr>
+          <a:xfrm>
+            <a:off x="822960" y="3749039"/>
+            <a:ext cx="10515600" cy="2194560"/>
+          </a:xfrm>
+          <a:prstGeom prst="rect">
+            <a:avLst/>
+          </a:prstGeom>
+          <a:noFill/>
+        </p:spPr>
+        <p:txBody>
+          <a:bodyPr wrap="square">
+            <a:spAutoFit/>
+          </a:bodyPr>
+          <a:lstStyle/>
+          <a:p>
+            <a:r>
+              <a:rPr sz="1500" b="1" i="0">
+                <a:solidFill>
+                  <a:srgbClr val="E8801A"/>
+                </a:solidFill>
+                <a:latin typeface="Montserrat"/>
+              </a:rPr>
+              <a:t>Por qué:  </a:t>
+            </a:r>
+            <a:r>
+              <a:rPr sz="1500" b="0" i="0">
+                <a:solidFill>
+                  <a:srgbClr val="1B2330"/>
+                </a:solidFill>
+                <a:latin typeface="Montserrat"/>
+              </a:rPr>
+              <a:t>Los conducidos de tipo B y C de más de 24,4 kW y las vitrocerámicas de fuegos cubiertos solo los atiende el SAT del fabricante con calidad certificada o un instalador que cumpla el capítulo 4 de la ITC-ICG 09.</a:t>
+            </a:r>
+          </a:p>
+        </p:txBody>
+      </p:sp>
+    </p:spTree>
+  </p:cSld>
+  <p:clrMapOvr>
+    <a:masterClrMapping/>
+  </p:clrMapOvr>
+  <mc:AlternateContent xmlns:mc="http://schemas.openxmlformats.org/markup-compatibility/2006">
+    <mc:Choice xmlns:p14="http://schemas.microsoft.com/office/powerpoint/2010/main" Requires="p14">
+      <p:transition spd="med" p14:dur="700">
+        <p14:cube dir="l"/>
+      </p:transition>
+    </mc:Choice>
+    <mc:Fallback>
+      <p:transition spd="med">
+        <p:push dir="l"/>
+      </p:transition>
+    </mc:Fallback>
+  </mc:AlternateContent>
+</p:sld>
+</file>
+
+<file path=ppt/slides/slide16.xml><?xml version="1.0" encoding="utf-8"?>
+<p:sld xmlns:a="http://schemas.openxmlformats.org/drawingml/2006/main" xmlns:p="http://schemas.openxmlformats.org/presentationml/2006/main" xmlns:r="http://schemas.openxmlformats.org/officeDocument/2006/relationships">
+  <p:cSld>
+    <p:spTree>
+      <p:nvGrpSpPr>
+        <p:cNvPr id="1" name=""/>
+        <p:cNvGrpSpPr/>
+        <p:nvPr/>
+      </p:nvGrpSpPr>
+      <p:grpSpPr/>
+      <p:sp>
+        <p:nvSpPr>
+          <p:cNvPr id="2" name="Rectangle 1"/>
+          <p:cNvSpPr/>
+          <p:nvPr/>
+        </p:nvSpPr>
+        <p:spPr>
+          <a:xfrm>
+            <a:off x="0" y="0"/>
+            <a:ext cx="12191695" cy="6858000"/>
+          </a:xfrm>
+          <a:prstGeom prst="rect">
+            <a:avLst/>
+          </a:prstGeom>
+          <a:solidFill>
+            <a:srgbClr val="FFFFFF"/>
+          </a:solidFill>
+          <a:ln>
+            <a:noFill/>
+          </a:ln>
+          <a:effectLst/>
+        </p:spPr>
+        <p:style>
+          <a:lnRef idx="1">
+            <a:schemeClr val="accent1"/>
+          </a:lnRef>
+          <a:fillRef idx="3">
+            <a:schemeClr val="accent1"/>
+          </a:fillRef>
+          <a:effectRef idx="2">
+            <a:schemeClr val="accent1"/>
+          </a:effectRef>
+          <a:fontRef idx="minor">
+            <a:schemeClr val="lt1"/>
+          </a:fontRef>
+        </p:style>
+        <p:txBody>
+          <a:bodyPr rtlCol="0" anchor="ctr"/>
+          <a:lstStyle/>
+          <a:p>
+            <a:pPr algn="ctr"/>
+          </a:p>
+        </p:txBody>
+      </p:sp>
+      <p:sp>
+        <p:nvSpPr>
+          <p:cNvPr id="3" name="TextBox 2"/>
+          <p:cNvSpPr txBox="1"/>
+          <p:nvPr/>
+        </p:nvSpPr>
+        <p:spPr>
+          <a:xfrm>
+            <a:off x="10607040" y="320040"/>
+            <a:ext cx="1371600" cy="365760"/>
+          </a:xfrm>
+          <a:prstGeom prst="rect">
+            <a:avLst/>
+          </a:prstGeom>
+          <a:noFill/>
+        </p:spPr>
+        <p:txBody>
+          <a:bodyPr wrap="square">
+            <a:spAutoFit/>
+          </a:bodyPr>
+          <a:lstStyle/>
+          <a:p>
+            <a:pPr algn="r"/>
+            <a:r>
+              <a:rPr sz="1000" b="1" i="0">
+                <a:solidFill>
+                  <a:srgbClr val="64748B"/>
+                </a:solidFill>
+                <a:latin typeface="Montserrat"/>
+              </a:rPr>
+              <a:t>016 / 020</a:t>
+            </a:r>
+          </a:p>
+        </p:txBody>
+      </p:sp>
+      <p:sp>
+        <p:nvSpPr>
+          <p:cNvPr id="4" name="TextBox 3"/>
+          <p:cNvSpPr txBox="1"/>
+          <p:nvPr/>
+        </p:nvSpPr>
+        <p:spPr>
+          <a:xfrm>
+            <a:off x="457200" y="6419088"/>
+            <a:ext cx="8229600" cy="365760"/>
+          </a:xfrm>
+          <a:prstGeom prst="rect">
+            <a:avLst/>
+          </a:prstGeom>
+          <a:noFill/>
+        </p:spPr>
+        <p:txBody>
+          <a:bodyPr wrap="square">
+            <a:spAutoFit/>
+          </a:bodyPr>
+          <a:lstStyle/>
+          <a:p>
+            <a:r>
+              <a:rPr sz="900" b="0" i="0">
+                <a:solidFill>
+                  <a:srgbClr val="64748B"/>
+                </a:solidFill>
+                <a:latin typeface="Montserrat"/>
+              </a:rPr>
+              <a:t>Curso Gas B · Tema 05 · Aparatos de gas</a:t>
+            </a:r>
+          </a:p>
+        </p:txBody>
+      </p:sp>
+      <p:sp>
+        <p:nvSpPr>
+          <p:cNvPr id="5" name="TextBox 4"/>
+          <p:cNvSpPr txBox="1"/>
+          <p:nvPr/>
+        </p:nvSpPr>
+        <p:spPr>
+          <a:xfrm>
+            <a:off x="822960" y="457200"/>
+            <a:ext cx="10058400" cy="365760"/>
+          </a:xfrm>
+          <a:prstGeom prst="rect">
+            <a:avLst/>
+          </a:prstGeom>
+          <a:noFill/>
+        </p:spPr>
+        <p:txBody>
+          <a:bodyPr wrap="square">
+            <a:spAutoFit/>
+          </a:bodyPr>
+          <a:lstStyle/>
+          <a:p>
+            <a:r>
+              <a:rPr sz="1300" b="1" i="0">
+                <a:solidFill>
+                  <a:srgbClr val="E8801A"/>
+                </a:solidFill>
+                <a:latin typeface="Montserrat"/>
+              </a:rPr>
+              <a:t>APARTADO 5.3.2 · ADECUACIÓN</a:t>
+            </a:r>
+          </a:p>
+        </p:txBody>
+      </p:sp>
+      <p:sp>
+        <p:nvSpPr>
+          <p:cNvPr id="6" name="TextBox 5"/>
+          <p:cNvSpPr txBox="1"/>
+          <p:nvPr/>
+        </p:nvSpPr>
+        <p:spPr>
+          <a:xfrm>
+            <a:off x="822960" y="868680"/>
+            <a:ext cx="10515600" cy="914400"/>
+          </a:xfrm>
+          <a:prstGeom prst="rect">
+            <a:avLst/>
+          </a:prstGeom>
+          <a:noFill/>
+        </p:spPr>
+        <p:txBody>
+          <a:bodyPr wrap="square">
+            <a:spAutoFit/>
+          </a:bodyPr>
+          <a:lstStyle/>
+          <a:p>
+            <a:r>
+              <a:rPr sz="2800" b="1" i="0">
+                <a:solidFill>
+                  <a:srgbClr val="1E2761"/>
+                </a:solidFill>
+                <a:latin typeface="Montserrat"/>
+              </a:rPr>
+              <a:t>Cambiar de familia de gas</a:t>
+            </a:r>
+          </a:p>
+        </p:txBody>
+      </p:sp>
+      <p:sp>
+        <p:nvSpPr>
+          <p:cNvPr id="7" name="Rectangle 6"/>
+          <p:cNvSpPr/>
+          <p:nvPr/>
+        </p:nvSpPr>
+        <p:spPr>
+          <a:xfrm>
+            <a:off x="868680" y="1627632"/>
+            <a:ext cx="2011680" cy="73152"/>
+          </a:xfrm>
+          <a:prstGeom prst="rect">
             <a:avLst/>
           </a:prstGeom>
           <a:solidFill>
@@ -7191,14 +8528,14 @@
       </p:sp>
       <p:sp>
         <p:nvSpPr>
-          <p:cNvPr id="5" name="TextBox 4"/>
+          <p:cNvPr id="8" name="TextBox 7"/>
           <p:cNvSpPr txBox="1"/>
           <p:nvPr/>
         </p:nvSpPr>
         <p:spPr>
           <a:xfrm>
-            <a:off x="822960" y="1234440"/>
-            <a:ext cx="10515600" cy="1097280"/>
+            <a:off x="6355080" y="1965960"/>
+            <a:ext cx="5029200" cy="4206240"/>
           </a:xfrm>
           <a:prstGeom prst="rect">
             <a:avLst/>
@@ -7211,28 +8548,163 @@
           </a:bodyPr>
           <a:lstStyle/>
           <a:p>
-            <a:r>
-              <a:rPr sz="3400" b="1" i="0">
-                <a:solidFill>
-                  <a:srgbClr val="FFFFFF"/>
-                </a:solidFill>
-                <a:latin typeface="Montserrat"/>
-              </a:rPr>
-              <a:t>Ya sabes clasificar, conectar y certificar</a:t>
-            </a:r>
-          </a:p>
-        </p:txBody>
-      </p:sp>
-      <p:sp>
-        <p:nvSpPr>
-          <p:cNvPr id="6" name="TextBox 5"/>
+            <a:pPr>
+              <a:spcAft>
+                <a:spcPts val="1100"/>
+              </a:spcAft>
+            </a:pPr>
+            <a:r>
+              <a:rPr sz="1600" b="1" i="0">
+                <a:solidFill>
+                  <a:srgbClr val="E8801A"/>
+                </a:solidFill>
+                <a:latin typeface="Montserrat"/>
+              </a:rPr>
+              <a:t>▸  </a:t>
+            </a:r>
+            <a:r>
+              <a:rPr sz="1600" b="0" i="0">
+                <a:solidFill>
+                  <a:srgbClr val="1B2330"/>
+                </a:solidFill>
+                <a:latin typeface="Montserrat"/>
+              </a:rPr>
+              <a:t>Ejemplo: de natural a propano/butano</a:t>
+            </a:r>
+          </a:p>
+          <a:p>
+            <a:pPr>
+              <a:spcAft>
+                <a:spcPts val="1100"/>
+              </a:spcAft>
+            </a:pPr>
+            <a:r>
+              <a:rPr sz="1600" b="1" i="0">
+                <a:solidFill>
+                  <a:srgbClr val="E8801A"/>
+                </a:solidFill>
+                <a:latin typeface="Montserrat"/>
+              </a:rPr>
+              <a:t>▸  </a:t>
+            </a:r>
+            <a:r>
+              <a:rPr sz="1600" b="0" i="0">
+                <a:solidFill>
+                  <a:srgbClr val="1B2330"/>
+                </a:solidFill>
+                <a:latin typeface="Montserrat"/>
+              </a:rPr>
+              <a:t>Solo SAT certificado o categorías A o B</a:t>
+            </a:r>
+          </a:p>
+          <a:p>
+            <a:pPr>
+              <a:spcAft>
+                <a:spcPts val="1100"/>
+              </a:spcAft>
+            </a:pPr>
+            <a:r>
+              <a:rPr sz="1600" b="1" i="0">
+                <a:solidFill>
+                  <a:srgbClr val="E8801A"/>
+                </a:solidFill>
+                <a:latin typeface="Montserrat"/>
+              </a:rPr>
+              <a:t>▸  </a:t>
+            </a:r>
+            <a:r>
+              <a:rPr sz="1600" b="0" i="0">
+                <a:solidFill>
+                  <a:srgbClr val="1B2330"/>
+                </a:solidFill>
+                <a:latin typeface="Montserrat"/>
+              </a:rPr>
+              <a:t>La categoría C no puede</a:t>
+            </a:r>
+          </a:p>
+          <a:p>
+            <a:pPr>
+              <a:spcAft>
+                <a:spcPts val="1100"/>
+              </a:spcAft>
+            </a:pPr>
+            <a:r>
+              <a:rPr sz="1600" b="1" i="0">
+                <a:solidFill>
+                  <a:srgbClr val="E8801A"/>
+                </a:solidFill>
+                <a:latin typeface="Montserrat"/>
+              </a:rPr>
+              <a:t>▸  </a:t>
+            </a:r>
+            <a:r>
+              <a:rPr sz="1600" b="0" i="0">
+                <a:solidFill>
+                  <a:srgbClr val="1B2330"/>
+                </a:solidFill>
+                <a:latin typeface="Montserrat"/>
+              </a:rPr>
+              <a:t>Componentes idénticos a los certificados</a:t>
+            </a:r>
+          </a:p>
+        </p:txBody>
+      </p:sp>
+      <p:sp>
+        <p:nvSpPr>
+          <p:cNvPr id="9" name="imgph" descr="IMGQ:gas burner injector nozzle replacement"/>
+          <p:cNvSpPr/>
+          <p:nvPr/>
+        </p:nvSpPr>
+        <p:spPr>
+          <a:xfrm>
+            <a:off x="822960" y="1965960"/>
+            <a:ext cx="5303520" cy="4572000"/>
+          </a:xfrm>
+          <a:prstGeom prst="roundRect">
+            <a:avLst/>
+          </a:prstGeom>
+          <a:solidFill>
+            <a:srgbClr val="F3F6FB"/>
+          </a:solidFill>
+          <a:ln w="12700">
+            <a:solidFill>
+              <a:srgbClr val="C7D2E6"/>
+            </a:solidFill>
+          </a:ln>
+          <a:effectLst/>
+        </p:spPr>
+        <p:style>
+          <a:lnRef idx="1">
+            <a:schemeClr val="accent1"/>
+          </a:lnRef>
+          <a:fillRef idx="3">
+            <a:schemeClr val="accent1"/>
+          </a:fillRef>
+          <a:effectRef idx="2">
+            <a:schemeClr val="accent1"/>
+          </a:effectRef>
+          <a:fontRef idx="minor">
+            <a:schemeClr val="lt1"/>
+          </a:fontRef>
+        </p:style>
+        <p:txBody>
+          <a:bodyPr rtlCol="0" anchor="ctr"/>
+          <a:lstStyle/>
+          <a:p>
+            <a:pPr algn="ctr"/>
+          </a:p>
+        </p:txBody>
+      </p:sp>
+      <p:sp>
+        <p:nvSpPr>
+          <p:cNvPr id="10" name="TextBox 9"/>
           <p:cNvSpPr txBox="1"/>
           <p:nvPr/>
         </p:nvSpPr>
         <p:spPr>
           <a:xfrm>
-            <a:off x="822960" y="2606040"/>
-            <a:ext cx="10515600" cy="2743200"/>
+            <a:off x="1097280" y="3611880"/>
+            <a:ext cx="4754880" cy="1280160"/>
           </a:xfrm>
           <a:prstGeom prst="rect">
             <a:avLst/>
@@ -7245,119 +8717,254 @@
           </a:bodyPr>
           <a:lstStyle/>
           <a:p>
-            <a:pPr>
-              <a:spcAft>
-                <a:spcPts val="1200"/>
-              </a:spcAft>
-            </a:pPr>
-            <a:r>
-              <a:rPr sz="2000" b="1" i="0">
-                <a:solidFill>
-                  <a:srgbClr val="F4A24C"/>
-                </a:solidFill>
-                <a:latin typeface="Montserrat"/>
-              </a:rPr>
-              <a:t>✓  </a:t>
-            </a:r>
-            <a:r>
-              <a:rPr sz="1900" b="0" i="0">
-                <a:solidFill>
-                  <a:srgbClr val="FFFFFF"/>
-                </a:solidFill>
-                <a:latin typeface="Montserrat"/>
-              </a:rPr>
-              <a:t>Tipos A, B y C: de dónde respira y por dónde echa el humo</a:t>
-            </a:r>
-          </a:p>
-          <a:p>
-            <a:pPr>
-              <a:spcAft>
-                <a:spcPts val="1200"/>
-              </a:spcAft>
-            </a:pPr>
-            <a:r>
-              <a:rPr sz="2000" b="1" i="0">
-                <a:solidFill>
-                  <a:srgbClr val="F4A24C"/>
-                </a:solidFill>
-                <a:latin typeface="Montserrat"/>
-              </a:rPr>
-              <a:t>✓  </a:t>
-            </a:r>
-            <a:r>
-              <a:rPr sz="1900" b="0" i="0">
-                <a:solidFill>
-                  <a:srgbClr val="FFFFFF"/>
-                </a:solidFill>
-                <a:latin typeface="Montserrat"/>
-              </a:rPr>
-              <a:t>Tipo de aparato ≠ categoría del carné</a:t>
-            </a:r>
-          </a:p>
-          <a:p>
-            <a:pPr>
-              <a:spcAft>
-                <a:spcPts val="1200"/>
-              </a:spcAft>
-            </a:pPr>
-            <a:r>
-              <a:rPr sz="2000" b="1" i="0">
-                <a:solidFill>
-                  <a:srgbClr val="F4A24C"/>
-                </a:solidFill>
-                <a:latin typeface="Montserrat"/>
-              </a:rPr>
-              <a:t>✓  </a:t>
-            </a:r>
-            <a:r>
-              <a:rPr sz="1900" b="0" i="0">
-                <a:solidFill>
-                  <a:srgbClr val="FFFFFF"/>
-                </a:solidFill>
-                <a:latin typeface="Montserrat"/>
-              </a:rPr>
-              <a:t>Conectado → 7; suelto → 6; latiguillo lo pone el usuario</a:t>
-            </a:r>
-          </a:p>
-          <a:p>
-            <a:pPr>
-              <a:spcAft>
-                <a:spcPts val="1200"/>
-              </a:spcAft>
-            </a:pPr>
-            <a:r>
-              <a:rPr sz="2000" b="1" i="0">
-                <a:solidFill>
-                  <a:srgbClr val="F4A24C"/>
-                </a:solidFill>
-                <a:latin typeface="Montserrat"/>
-              </a:rPr>
-              <a:t>✓  </a:t>
-            </a:r>
-            <a:r>
-              <a:rPr sz="1900" b="0" i="0">
-                <a:solidFill>
-                  <a:srgbClr val="FFFFFF"/>
-                </a:solidFill>
-                <a:latin typeface="Montserrat"/>
-              </a:rPr>
-              <a:t>Arrancas, certificas (anexo 4) y archivas 5 años</a:t>
-            </a:r>
-          </a:p>
-        </p:txBody>
-      </p:sp>
-      <p:sp>
-        <p:nvSpPr>
-          <p:cNvPr id="7" name="Rounded Rectangle 6"/>
+            <a:pPr algn="ctr"/>
+            <a:r>
+              <a:rPr sz="1400" b="1" i="0">
+                <a:solidFill>
+                  <a:srgbClr val="64748B"/>
+                </a:solidFill>
+                <a:latin typeface="Montserrat"/>
+              </a:rPr>
+              <a:t>IMAGEN</a:t>
+            </a:r>
+          </a:p>
+          <a:p>
+            <a:pPr algn="ctr"/>
+            <a:r>
+              <a:rPr sz="1100" b="0" i="1">
+                <a:solidFill>
+                  <a:srgbClr val="64748B"/>
+                </a:solidFill>
+                <a:latin typeface="Montserrat"/>
+              </a:rPr>
+              <a:t>gas burner injector nozzle replacement</a:t>
+            </a:r>
+          </a:p>
+        </p:txBody>
+      </p:sp>
+    </p:spTree>
+  </p:cSld>
+  <p:clrMapOvr>
+    <a:masterClrMapping/>
+  </p:clrMapOvr>
+  <mc:AlternateContent xmlns:mc="http://schemas.openxmlformats.org/markup-compatibility/2006">
+    <mc:Choice xmlns:p14="http://schemas.microsoft.com/office/powerpoint/2010/main" Requires="p14">
+      <p:transition spd="med" p14:dur="700">
+        <p14:cube dir="r"/>
+      </p:transition>
+    </mc:Choice>
+    <mc:Fallback>
+      <p:transition spd="med">
+        <p:push dir="r"/>
+      </p:transition>
+    </mc:Fallback>
+  </mc:AlternateContent>
+</p:sld>
+</file>
+
+<file path=ppt/slides/slide17.xml><?xml version="1.0" encoding="utf-8"?>
+<p:sld xmlns:a="http://schemas.openxmlformats.org/drawingml/2006/main" xmlns:p="http://schemas.openxmlformats.org/presentationml/2006/main" xmlns:r="http://schemas.openxmlformats.org/officeDocument/2006/relationships">
+  <p:cSld>
+    <p:spTree>
+      <p:nvGrpSpPr>
+        <p:cNvPr id="1" name=""/>
+        <p:cNvGrpSpPr/>
+        <p:nvPr/>
+      </p:nvGrpSpPr>
+      <p:grpSpPr/>
+      <p:sp>
+        <p:nvSpPr>
+          <p:cNvPr id="2" name="Rectangle 1"/>
           <p:cNvSpPr/>
           <p:nvPr/>
         </p:nvSpPr>
         <p:spPr>
           <a:xfrm>
-            <a:off x="822960" y="5532120"/>
-            <a:ext cx="10515600" cy="822960"/>
-          </a:xfrm>
-          <a:prstGeom prst="roundRect">
+            <a:off x="0" y="0"/>
+            <a:ext cx="12191695" cy="6858000"/>
+          </a:xfrm>
+          <a:prstGeom prst="rect">
+            <a:avLst/>
+          </a:prstGeom>
+          <a:solidFill>
+            <a:srgbClr val="FFFFFF"/>
+          </a:solidFill>
+          <a:ln>
+            <a:noFill/>
+          </a:ln>
+          <a:effectLst/>
+        </p:spPr>
+        <p:style>
+          <a:lnRef idx="1">
+            <a:schemeClr val="accent1"/>
+          </a:lnRef>
+          <a:fillRef idx="3">
+            <a:schemeClr val="accent1"/>
+          </a:fillRef>
+          <a:effectRef idx="2">
+            <a:schemeClr val="accent1"/>
+          </a:effectRef>
+          <a:fontRef idx="minor">
+            <a:schemeClr val="lt1"/>
+          </a:fontRef>
+        </p:style>
+        <p:txBody>
+          <a:bodyPr rtlCol="0" anchor="ctr"/>
+          <a:lstStyle/>
+          <a:p>
+            <a:pPr algn="ctr"/>
+          </a:p>
+        </p:txBody>
+      </p:sp>
+      <p:sp>
+        <p:nvSpPr>
+          <p:cNvPr id="3" name="TextBox 2"/>
+          <p:cNvSpPr txBox="1"/>
+          <p:nvPr/>
+        </p:nvSpPr>
+        <p:spPr>
+          <a:xfrm>
+            <a:off x="10607040" y="320040"/>
+            <a:ext cx="1371600" cy="365760"/>
+          </a:xfrm>
+          <a:prstGeom prst="rect">
+            <a:avLst/>
+          </a:prstGeom>
+          <a:noFill/>
+        </p:spPr>
+        <p:txBody>
+          <a:bodyPr wrap="square">
+            <a:spAutoFit/>
+          </a:bodyPr>
+          <a:lstStyle/>
+          <a:p>
+            <a:pPr algn="r"/>
+            <a:r>
+              <a:rPr sz="1000" b="1" i="0">
+                <a:solidFill>
+                  <a:srgbClr val="64748B"/>
+                </a:solidFill>
+                <a:latin typeface="Montserrat"/>
+              </a:rPr>
+              <a:t>017 / 020</a:t>
+            </a:r>
+          </a:p>
+        </p:txBody>
+      </p:sp>
+      <p:sp>
+        <p:nvSpPr>
+          <p:cNvPr id="4" name="TextBox 3"/>
+          <p:cNvSpPr txBox="1"/>
+          <p:nvPr/>
+        </p:nvSpPr>
+        <p:spPr>
+          <a:xfrm>
+            <a:off x="457200" y="6419088"/>
+            <a:ext cx="8229600" cy="365760"/>
+          </a:xfrm>
+          <a:prstGeom prst="rect">
+            <a:avLst/>
+          </a:prstGeom>
+          <a:noFill/>
+        </p:spPr>
+        <p:txBody>
+          <a:bodyPr wrap="square">
+            <a:spAutoFit/>
+          </a:bodyPr>
+          <a:lstStyle/>
+          <a:p>
+            <a:r>
+              <a:rPr sz="900" b="0" i="0">
+                <a:solidFill>
+                  <a:srgbClr val="64748B"/>
+                </a:solidFill>
+                <a:latin typeface="Montserrat"/>
+              </a:rPr>
+              <a:t>Curso Gas B · Tema 05 · Aparatos de gas</a:t>
+            </a:r>
+          </a:p>
+        </p:txBody>
+      </p:sp>
+      <p:sp>
+        <p:nvSpPr>
+          <p:cNvPr id="5" name="TextBox 4"/>
+          <p:cNvSpPr txBox="1"/>
+          <p:nvPr/>
+        </p:nvSpPr>
+        <p:spPr>
+          <a:xfrm>
+            <a:off x="822960" y="457200"/>
+            <a:ext cx="10058400" cy="365760"/>
+          </a:xfrm>
+          <a:prstGeom prst="rect">
+            <a:avLst/>
+          </a:prstGeom>
+          <a:noFill/>
+        </p:spPr>
+        <p:txBody>
+          <a:bodyPr wrap="square">
+            <a:spAutoFit/>
+          </a:bodyPr>
+          <a:lstStyle/>
+          <a:p>
+            <a:r>
+              <a:rPr sz="1300" b="1" i="0">
+                <a:solidFill>
+                  <a:srgbClr val="E8801A"/>
+                </a:solidFill>
+                <a:latin typeface="Montserrat"/>
+              </a:rPr>
+              <a:t>APARTADO 5.4 · COMPROBACIONES</a:t>
+            </a:r>
+          </a:p>
+        </p:txBody>
+      </p:sp>
+      <p:sp>
+        <p:nvSpPr>
+          <p:cNvPr id="6" name="TextBox 5"/>
+          <p:cNvSpPr txBox="1"/>
+          <p:nvPr/>
+        </p:nvSpPr>
+        <p:spPr>
+          <a:xfrm>
+            <a:off x="822960" y="868680"/>
+            <a:ext cx="10515600" cy="914400"/>
+          </a:xfrm>
+          <a:prstGeom prst="rect">
+            <a:avLst/>
+          </a:prstGeom>
+          <a:noFill/>
+        </p:spPr>
+        <p:txBody>
+          <a:bodyPr wrap="square">
+            <a:spAutoFit/>
+          </a:bodyPr>
+          <a:lstStyle/>
+          <a:p>
+            <a:r>
+              <a:rPr sz="2800" b="1" i="0">
+                <a:solidFill>
+                  <a:srgbClr val="1E2761"/>
+                </a:solidFill>
+                <a:latin typeface="Montserrat"/>
+              </a:rPr>
+              <a:t>El papel que cierra el trabajo</a:t>
+            </a:r>
+          </a:p>
+        </p:txBody>
+      </p:sp>
+      <p:sp>
+        <p:nvSpPr>
+          <p:cNvPr id="7" name="Rectangle 6"/>
+          <p:cNvSpPr/>
+          <p:nvPr/>
+        </p:nvSpPr>
+        <p:spPr>
+          <a:xfrm>
+            <a:off x="868680" y="1627632"/>
+            <a:ext cx="2011680" cy="73152"/>
+          </a:xfrm>
+          <a:prstGeom prst="rect">
             <a:avLst/>
           </a:prstGeom>
           <a:solidFill>
@@ -7398,8 +9005,8 @@
         </p:nvSpPr>
         <p:spPr>
           <a:xfrm>
-            <a:off x="1051560" y="5623560"/>
-            <a:ext cx="10058400" cy="640080"/>
+            <a:off x="822960" y="1965960"/>
+            <a:ext cx="5029200" cy="4206240"/>
           </a:xfrm>
           <a:prstGeom prst="rect">
             <a:avLst/>
@@ -7412,14 +9019,196 @@
           </a:bodyPr>
           <a:lstStyle/>
           <a:p>
-            <a:r>
-              <a:rPr sz="1500" b="1" i="1">
-                <a:solidFill>
-                  <a:srgbClr val="1E2761"/>
-                </a:solidFill>
-                <a:latin typeface="Montserrat"/>
-              </a:rPr>
-              <a:t>Ya no eres solo teoría: sabes dejar un aparato en regla. Vamos a la letra pequeña de la certificación.</a:t>
+            <a:pPr>
+              <a:spcAft>
+                <a:spcPts val="1100"/>
+              </a:spcAft>
+            </a:pPr>
+            <a:r>
+              <a:rPr sz="1600" b="1" i="0">
+                <a:solidFill>
+                  <a:srgbClr val="E8801A"/>
+                </a:solidFill>
+                <a:latin typeface="Montserrat"/>
+              </a:rPr>
+              <a:t>▸  </a:t>
+            </a:r>
+            <a:r>
+              <a:rPr sz="1600" b="0" i="0">
+                <a:solidFill>
+                  <a:srgbClr val="1B2330"/>
+                </a:solidFill>
+                <a:latin typeface="Montserrat"/>
+              </a:rPr>
+              <a:t>Comprobaciones: UNE 60670-10 + fabricante</a:t>
+            </a:r>
+          </a:p>
+          <a:p>
+            <a:pPr>
+              <a:spcAft>
+                <a:spcPts val="1100"/>
+              </a:spcAft>
+            </a:pPr>
+            <a:r>
+              <a:rPr sz="1600" b="1" i="0">
+                <a:solidFill>
+                  <a:srgbClr val="E8801A"/>
+                </a:solidFill>
+                <a:latin typeface="Montserrat"/>
+              </a:rPr>
+              <a:t>▸  </a:t>
+            </a:r>
+            <a:r>
+              <a:rPr sz="1600" b="0" i="0">
+                <a:solidFill>
+                  <a:srgbClr val="1B2330"/>
+                </a:solidFill>
+                <a:latin typeface="Montserrat"/>
+              </a:rPr>
+              <a:t>Emites certificado de puesta en marcha</a:t>
+            </a:r>
+          </a:p>
+          <a:p>
+            <a:pPr>
+              <a:spcAft>
+                <a:spcPts val="1100"/>
+              </a:spcAft>
+            </a:pPr>
+            <a:r>
+              <a:rPr sz="1600" b="1" i="0">
+                <a:solidFill>
+                  <a:srgbClr val="E8801A"/>
+                </a:solidFill>
+                <a:latin typeface="Montserrat"/>
+              </a:rPr>
+              <a:t>▸  </a:t>
+            </a:r>
+            <a:r>
+              <a:rPr sz="1600" b="0" i="0">
+                <a:solidFill>
+                  <a:srgbClr val="1B2330"/>
+                </a:solidFill>
+                <a:latin typeface="Montserrat"/>
+              </a:rPr>
+              <a:t>Modelo del anexo 4; lo firma el cliente</a:t>
+            </a:r>
+          </a:p>
+          <a:p>
+            <a:pPr>
+              <a:spcAft>
+                <a:spcPts val="1100"/>
+              </a:spcAft>
+            </a:pPr>
+            <a:r>
+              <a:rPr sz="1600" b="1" i="0">
+                <a:solidFill>
+                  <a:srgbClr val="E8801A"/>
+                </a:solidFill>
+                <a:latin typeface="Montserrat"/>
+              </a:rPr>
+              <a:t>▸  </a:t>
+            </a:r>
+            <a:r>
+              <a:rPr sz="1600" b="0" i="0">
+                <a:solidFill>
+                  <a:srgbClr val="1B2330"/>
+                </a:solidFill>
+                <a:latin typeface="Montserrat"/>
+              </a:rPr>
+              <a:t>Archivas 5 años (comunidad autónoma)</a:t>
+            </a:r>
+          </a:p>
+        </p:txBody>
+      </p:sp>
+      <p:sp>
+        <p:nvSpPr>
+          <p:cNvPr id="9" name="imgph" descr="IMGQ:flue gas combustion analyzer boiler"/>
+          <p:cNvSpPr/>
+          <p:nvPr/>
+        </p:nvSpPr>
+        <p:spPr>
+          <a:xfrm>
+            <a:off x="6080760" y="1965960"/>
+            <a:ext cx="5303520" cy="4572000"/>
+          </a:xfrm>
+          <a:prstGeom prst="roundRect">
+            <a:avLst/>
+          </a:prstGeom>
+          <a:solidFill>
+            <a:srgbClr val="F3F6FB"/>
+          </a:solidFill>
+          <a:ln w="12700">
+            <a:solidFill>
+              <a:srgbClr val="C7D2E6"/>
+            </a:solidFill>
+          </a:ln>
+          <a:effectLst/>
+        </p:spPr>
+        <p:style>
+          <a:lnRef idx="1">
+            <a:schemeClr val="accent1"/>
+          </a:lnRef>
+          <a:fillRef idx="3">
+            <a:schemeClr val="accent1"/>
+          </a:fillRef>
+          <a:effectRef idx="2">
+            <a:schemeClr val="accent1"/>
+          </a:effectRef>
+          <a:fontRef idx="minor">
+            <a:schemeClr val="lt1"/>
+          </a:fontRef>
+        </p:style>
+        <p:txBody>
+          <a:bodyPr rtlCol="0" anchor="ctr"/>
+          <a:lstStyle/>
+          <a:p>
+            <a:pPr algn="ctr"/>
+          </a:p>
+        </p:txBody>
+      </p:sp>
+      <p:sp>
+        <p:nvSpPr>
+          <p:cNvPr id="10" name="TextBox 9"/>
+          <p:cNvSpPr txBox="1"/>
+          <p:nvPr/>
+        </p:nvSpPr>
+        <p:spPr>
+          <a:xfrm>
+            <a:off x="6355080" y="3611880"/>
+            <a:ext cx="4754880" cy="1280160"/>
+          </a:xfrm>
+          <a:prstGeom prst="rect">
+            <a:avLst/>
+          </a:prstGeom>
+          <a:noFill/>
+        </p:spPr>
+        <p:txBody>
+          <a:bodyPr wrap="square">
+            <a:spAutoFit/>
+          </a:bodyPr>
+          <a:lstStyle/>
+          <a:p>
+            <a:pPr algn="ctr"/>
+            <a:r>
+              <a:rPr sz="1400" b="1" i="0">
+                <a:solidFill>
+                  <a:srgbClr val="64748B"/>
+                </a:solidFill>
+                <a:latin typeface="Montserrat"/>
+              </a:rPr>
+              <a:t>IMAGEN</a:t>
+            </a:r>
+          </a:p>
+          <a:p>
+            <a:pPr algn="ctr"/>
+            <a:r>
+              <a:rPr sz="1100" b="0" i="1">
+                <a:solidFill>
+                  <a:srgbClr val="64748B"/>
+                </a:solidFill>
+                <a:latin typeface="Montserrat"/>
+              </a:rPr>
+              <a:t>flue gas combustion analyzer boiler</a:t>
             </a:r>
           </a:p>
         </p:txBody>
@@ -7429,6 +9218,935 @@
   <p:clrMapOvr>
     <a:masterClrMapping/>
   </p:clrMapOvr>
+  <mc:AlternateContent xmlns:mc="http://schemas.openxmlformats.org/markup-compatibility/2006">
+    <mc:Choice xmlns:p14="http://schemas.microsoft.com/office/powerpoint/2010/main" Requires="p14">
+      <p:transition spd="med" p14:dur="700">
+        <p14:cube dir="l"/>
+      </p:transition>
+    </mc:Choice>
+    <mc:Fallback>
+      <p:transition spd="med">
+        <p:push dir="l"/>
+      </p:transition>
+    </mc:Fallback>
+  </mc:AlternateContent>
+</p:sld>
+</file>
+
+<file path=ppt/slides/slide18.xml><?xml version="1.0" encoding="utf-8"?>
+<p:sld xmlns:a="http://schemas.openxmlformats.org/drawingml/2006/main" xmlns:p="http://schemas.openxmlformats.org/presentationml/2006/main" xmlns:r="http://schemas.openxmlformats.org/officeDocument/2006/relationships">
+  <p:cSld>
+    <p:spTree>
+      <p:nvGrpSpPr>
+        <p:cNvPr id="1" name=""/>
+        <p:cNvGrpSpPr/>
+        <p:nvPr/>
+      </p:nvGrpSpPr>
+      <p:grpSpPr/>
+      <p:sp>
+        <p:nvSpPr>
+          <p:cNvPr id="2" name="Rectangle 1"/>
+          <p:cNvSpPr/>
+          <p:nvPr/>
+        </p:nvSpPr>
+        <p:spPr>
+          <a:xfrm>
+            <a:off x="0" y="0"/>
+            <a:ext cx="12191695" cy="6858000"/>
+          </a:xfrm>
+          <a:prstGeom prst="rect">
+            <a:avLst/>
+          </a:prstGeom>
+          <a:solidFill>
+            <a:srgbClr val="FFFFFF"/>
+          </a:solidFill>
+          <a:ln>
+            <a:noFill/>
+          </a:ln>
+          <a:effectLst/>
+        </p:spPr>
+        <p:style>
+          <a:lnRef idx="1">
+            <a:schemeClr val="accent1"/>
+          </a:lnRef>
+          <a:fillRef idx="3">
+            <a:schemeClr val="accent1"/>
+          </a:fillRef>
+          <a:effectRef idx="2">
+            <a:schemeClr val="accent1"/>
+          </a:effectRef>
+          <a:fontRef idx="minor">
+            <a:schemeClr val="lt1"/>
+          </a:fontRef>
+        </p:style>
+        <p:txBody>
+          <a:bodyPr rtlCol="0" anchor="ctr"/>
+          <a:lstStyle/>
+          <a:p>
+            <a:pPr algn="ctr"/>
+          </a:p>
+        </p:txBody>
+      </p:sp>
+      <p:sp>
+        <p:nvSpPr>
+          <p:cNvPr id="3" name="TextBox 2"/>
+          <p:cNvSpPr txBox="1"/>
+          <p:nvPr/>
+        </p:nvSpPr>
+        <p:spPr>
+          <a:xfrm>
+            <a:off x="10607040" y="320040"/>
+            <a:ext cx="1371600" cy="365760"/>
+          </a:xfrm>
+          <a:prstGeom prst="rect">
+            <a:avLst/>
+          </a:prstGeom>
+          <a:noFill/>
+        </p:spPr>
+        <p:txBody>
+          <a:bodyPr wrap="square">
+            <a:spAutoFit/>
+          </a:bodyPr>
+          <a:lstStyle/>
+          <a:p>
+            <a:pPr algn="r"/>
+            <a:r>
+              <a:rPr sz="1000" b="1" i="0">
+                <a:solidFill>
+                  <a:srgbClr val="64748B"/>
+                </a:solidFill>
+                <a:latin typeface="Montserrat"/>
+              </a:rPr>
+              <a:t>018 / 020</a:t>
+            </a:r>
+          </a:p>
+        </p:txBody>
+      </p:sp>
+      <p:sp>
+        <p:nvSpPr>
+          <p:cNvPr id="4" name="TextBox 3"/>
+          <p:cNvSpPr txBox="1"/>
+          <p:nvPr/>
+        </p:nvSpPr>
+        <p:spPr>
+          <a:xfrm>
+            <a:off x="457200" y="6419088"/>
+            <a:ext cx="8229600" cy="365760"/>
+          </a:xfrm>
+          <a:prstGeom prst="rect">
+            <a:avLst/>
+          </a:prstGeom>
+          <a:noFill/>
+        </p:spPr>
+        <p:txBody>
+          <a:bodyPr wrap="square">
+            <a:spAutoFit/>
+          </a:bodyPr>
+          <a:lstStyle/>
+          <a:p>
+            <a:r>
+              <a:rPr sz="900" b="0" i="0">
+                <a:solidFill>
+                  <a:srgbClr val="64748B"/>
+                </a:solidFill>
+                <a:latin typeface="Montserrat"/>
+              </a:rPr>
+              <a:t>Curso Gas B · Tema 05 · Aparatos de gas</a:t>
+            </a:r>
+          </a:p>
+        </p:txBody>
+      </p:sp>
+      <p:sp>
+        <p:nvSpPr>
+          <p:cNvPr id="5" name="TextBox 4"/>
+          <p:cNvSpPr txBox="1"/>
+          <p:nvPr/>
+        </p:nvSpPr>
+        <p:spPr>
+          <a:xfrm>
+            <a:off x="822960" y="457200"/>
+            <a:ext cx="10058400" cy="365760"/>
+          </a:xfrm>
+          <a:prstGeom prst="rect">
+            <a:avLst/>
+          </a:prstGeom>
+          <a:noFill/>
+        </p:spPr>
+        <p:txBody>
+          <a:bodyPr wrap="square">
+            <a:spAutoFit/>
+          </a:bodyPr>
+          <a:lstStyle/>
+          <a:p>
+            <a:r>
+              <a:rPr sz="1300" b="1" i="0">
+                <a:solidFill>
+                  <a:srgbClr val="E8801A"/>
+                </a:solidFill>
+                <a:latin typeface="Montserrat"/>
+              </a:rPr>
+              <a:t>APARTADO 5.5 · COMUNICACIÓN</a:t>
+            </a:r>
+          </a:p>
+        </p:txBody>
+      </p:sp>
+      <p:sp>
+        <p:nvSpPr>
+          <p:cNvPr id="6" name="TextBox 5"/>
+          <p:cNvSpPr txBox="1"/>
+          <p:nvPr/>
+        </p:nvSpPr>
+        <p:spPr>
+          <a:xfrm>
+            <a:off x="822960" y="868680"/>
+            <a:ext cx="10515600" cy="914400"/>
+          </a:xfrm>
+          <a:prstGeom prst="rect">
+            <a:avLst/>
+          </a:prstGeom>
+          <a:noFill/>
+        </p:spPr>
+        <p:txBody>
+          <a:bodyPr wrap="square">
+            <a:spAutoFit/>
+          </a:bodyPr>
+          <a:lstStyle/>
+          <a:p>
+            <a:r>
+              <a:rPr sz="2800" b="1" i="0">
+                <a:solidFill>
+                  <a:srgbClr val="1E2761"/>
+                </a:solidFill>
+                <a:latin typeface="Montserrat"/>
+              </a:rPr>
+              <a:t>Ni permiso antes, ni aviso después</a:t>
+            </a:r>
+          </a:p>
+        </p:txBody>
+      </p:sp>
+      <p:sp>
+        <p:nvSpPr>
+          <p:cNvPr id="7" name="Rectangle 6"/>
+          <p:cNvSpPr/>
+          <p:nvPr/>
+        </p:nvSpPr>
+        <p:spPr>
+          <a:xfrm>
+            <a:off x="868680" y="1627632"/>
+            <a:ext cx="2011680" cy="73152"/>
+          </a:xfrm>
+          <a:prstGeom prst="rect">
+            <a:avLst/>
+          </a:prstGeom>
+          <a:solidFill>
+            <a:srgbClr val="E8801A"/>
+          </a:solidFill>
+          <a:ln>
+            <a:noFill/>
+          </a:ln>
+          <a:effectLst/>
+        </p:spPr>
+        <p:style>
+          <a:lnRef idx="1">
+            <a:schemeClr val="accent1"/>
+          </a:lnRef>
+          <a:fillRef idx="3">
+            <a:schemeClr val="accent1"/>
+          </a:fillRef>
+          <a:effectRef idx="2">
+            <a:schemeClr val="accent1"/>
+          </a:effectRef>
+          <a:fontRef idx="minor">
+            <a:schemeClr val="lt1"/>
+          </a:fontRef>
+        </p:style>
+        <p:txBody>
+          <a:bodyPr rtlCol="0" anchor="ctr"/>
+          <a:lstStyle/>
+          <a:p>
+            <a:pPr algn="ctr"/>
+          </a:p>
+        </p:txBody>
+      </p:sp>
+      <p:sp>
+        <p:nvSpPr>
+          <p:cNvPr id="8" name="TextBox 7"/>
+          <p:cNvSpPr txBox="1"/>
+          <p:nvPr/>
+        </p:nvSpPr>
+        <p:spPr>
+          <a:xfrm>
+            <a:off x="6355080" y="1965960"/>
+            <a:ext cx="5029200" cy="4206240"/>
+          </a:xfrm>
+          <a:prstGeom prst="rect">
+            <a:avLst/>
+          </a:prstGeom>
+          <a:noFill/>
+        </p:spPr>
+        <p:txBody>
+          <a:bodyPr wrap="square">
+            <a:spAutoFit/>
+          </a:bodyPr>
+          <a:lstStyle/>
+          <a:p>
+            <a:pPr>
+              <a:spcAft>
+                <a:spcPts val="1100"/>
+              </a:spcAft>
+            </a:pPr>
+            <a:r>
+              <a:rPr sz="1600" b="1" i="0">
+                <a:solidFill>
+                  <a:srgbClr val="E8801A"/>
+                </a:solidFill>
+                <a:latin typeface="Montserrat"/>
+              </a:rPr>
+              <a:t>▸  </a:t>
+            </a:r>
+            <a:r>
+              <a:rPr sz="1600" b="0" i="0">
+                <a:solidFill>
+                  <a:srgbClr val="1B2330"/>
+                </a:solidFill>
+                <a:latin typeface="Montserrat"/>
+              </a:rPr>
+              <a:t>El aparato no precisa comunicación</a:t>
+            </a:r>
+          </a:p>
+          <a:p>
+            <a:pPr>
+              <a:spcAft>
+                <a:spcPts val="1100"/>
+              </a:spcAft>
+            </a:pPr>
+            <a:r>
+              <a:rPr sz="1600" b="1" i="0">
+                <a:solidFill>
+                  <a:srgbClr val="E8801A"/>
+                </a:solidFill>
+                <a:latin typeface="Montserrat"/>
+              </a:rPr>
+              <a:t>▸  </a:t>
+            </a:r>
+            <a:r>
+              <a:rPr sz="1600" b="0" i="0">
+                <a:solidFill>
+                  <a:srgbClr val="1B2330"/>
+                </a:solidFill>
+                <a:latin typeface="Montserrat"/>
+              </a:rPr>
+              <a:t>Sí es obligatorio el certificado al cliente</a:t>
+            </a:r>
+          </a:p>
+          <a:p>
+            <a:pPr>
+              <a:spcAft>
+                <a:spcPts val="1100"/>
+              </a:spcAft>
+            </a:pPr>
+            <a:r>
+              <a:rPr sz="1600" b="1" i="0">
+                <a:solidFill>
+                  <a:srgbClr val="E8801A"/>
+                </a:solidFill>
+                <a:latin typeface="Montserrat"/>
+              </a:rPr>
+              <a:t>▸  </a:t>
+            </a:r>
+            <a:r>
+              <a:rPr sz="1600" b="0" i="0">
+                <a:solidFill>
+                  <a:srgbClr val="1B2330"/>
+                </a:solidFill>
+                <a:latin typeface="Montserrat"/>
+              </a:rPr>
+              <a:t>No confundir con la instalación receptora</a:t>
+            </a:r>
+          </a:p>
+        </p:txBody>
+      </p:sp>
+      <p:sp>
+        <p:nvSpPr>
+          <p:cNvPr id="9" name="imgph" descr="IMGQ:gas installation paperwork clipboard"/>
+          <p:cNvSpPr/>
+          <p:nvPr/>
+        </p:nvSpPr>
+        <p:spPr>
+          <a:xfrm>
+            <a:off x="822960" y="1965960"/>
+            <a:ext cx="5303520" cy="4572000"/>
+          </a:xfrm>
+          <a:prstGeom prst="roundRect">
+            <a:avLst/>
+          </a:prstGeom>
+          <a:solidFill>
+            <a:srgbClr val="F3F6FB"/>
+          </a:solidFill>
+          <a:ln w="12700">
+            <a:solidFill>
+              <a:srgbClr val="C7D2E6"/>
+            </a:solidFill>
+          </a:ln>
+          <a:effectLst/>
+        </p:spPr>
+        <p:style>
+          <a:lnRef idx="1">
+            <a:schemeClr val="accent1"/>
+          </a:lnRef>
+          <a:fillRef idx="3">
+            <a:schemeClr val="accent1"/>
+          </a:fillRef>
+          <a:effectRef idx="2">
+            <a:schemeClr val="accent1"/>
+          </a:effectRef>
+          <a:fontRef idx="minor">
+            <a:schemeClr val="lt1"/>
+          </a:fontRef>
+        </p:style>
+        <p:txBody>
+          <a:bodyPr rtlCol="0" anchor="ctr"/>
+          <a:lstStyle/>
+          <a:p>
+            <a:pPr algn="ctr"/>
+          </a:p>
+        </p:txBody>
+      </p:sp>
+      <p:sp>
+        <p:nvSpPr>
+          <p:cNvPr id="10" name="TextBox 9"/>
+          <p:cNvSpPr txBox="1"/>
+          <p:nvPr/>
+        </p:nvSpPr>
+        <p:spPr>
+          <a:xfrm>
+            <a:off x="1097280" y="3611880"/>
+            <a:ext cx="4754880" cy="1280160"/>
+          </a:xfrm>
+          <a:prstGeom prst="rect">
+            <a:avLst/>
+          </a:prstGeom>
+          <a:noFill/>
+        </p:spPr>
+        <p:txBody>
+          <a:bodyPr wrap="square">
+            <a:spAutoFit/>
+          </a:bodyPr>
+          <a:lstStyle/>
+          <a:p>
+            <a:pPr algn="ctr"/>
+            <a:r>
+              <a:rPr sz="1400" b="1" i="0">
+                <a:solidFill>
+                  <a:srgbClr val="64748B"/>
+                </a:solidFill>
+                <a:latin typeface="Montserrat"/>
+              </a:rPr>
+              <a:t>IMAGEN</a:t>
+            </a:r>
+          </a:p>
+          <a:p>
+            <a:pPr algn="ctr"/>
+            <a:r>
+              <a:rPr sz="1100" b="0" i="1">
+                <a:solidFill>
+                  <a:srgbClr val="64748B"/>
+                </a:solidFill>
+                <a:latin typeface="Montserrat"/>
+              </a:rPr>
+              <a:t>gas installation paperwork clipboard</a:t>
+            </a:r>
+          </a:p>
+        </p:txBody>
+      </p:sp>
+    </p:spTree>
+  </p:cSld>
+  <p:clrMapOvr>
+    <a:masterClrMapping/>
+  </p:clrMapOvr>
+  <mc:AlternateContent xmlns:mc="http://schemas.openxmlformats.org/markup-compatibility/2006">
+    <mc:Choice xmlns:p14="http://schemas.microsoft.com/office/powerpoint/2010/main" Requires="p14">
+      <p:transition spd="med" p14:dur="700">
+        <p14:cube dir="r"/>
+      </p:transition>
+    </mc:Choice>
+    <mc:Fallback>
+      <p:transition spd="med">
+        <p:push dir="r"/>
+      </p:transition>
+    </mc:Fallback>
+  </mc:AlternateContent>
+</p:sld>
+</file>
+
+<file path=ppt/slides/slide19.xml><?xml version="1.0" encoding="utf-8"?>
+<p:sld xmlns:a="http://schemas.openxmlformats.org/drawingml/2006/main" xmlns:p="http://schemas.openxmlformats.org/presentationml/2006/main" xmlns:r="http://schemas.openxmlformats.org/officeDocument/2006/relationships">
+  <p:cSld>
+    <p:spTree>
+      <p:nvGrpSpPr>
+        <p:cNvPr id="1" name=""/>
+        <p:cNvGrpSpPr/>
+        <p:nvPr/>
+      </p:nvGrpSpPr>
+      <p:grpSpPr/>
+      <p:sp>
+        <p:nvSpPr>
+          <p:cNvPr id="2" name="Rectangle 1"/>
+          <p:cNvSpPr/>
+          <p:nvPr/>
+        </p:nvSpPr>
+        <p:spPr>
+          <a:xfrm>
+            <a:off x="0" y="0"/>
+            <a:ext cx="12191695" cy="6858000"/>
+          </a:xfrm>
+          <a:prstGeom prst="rect">
+            <a:avLst/>
+          </a:prstGeom>
+          <a:solidFill>
+            <a:srgbClr val="FFFFFF"/>
+          </a:solidFill>
+          <a:ln>
+            <a:noFill/>
+          </a:ln>
+          <a:effectLst/>
+        </p:spPr>
+        <p:style>
+          <a:lnRef idx="1">
+            <a:schemeClr val="accent1"/>
+          </a:lnRef>
+          <a:fillRef idx="3">
+            <a:schemeClr val="accent1"/>
+          </a:fillRef>
+          <a:effectRef idx="2">
+            <a:schemeClr val="accent1"/>
+          </a:effectRef>
+          <a:fontRef idx="minor">
+            <a:schemeClr val="lt1"/>
+          </a:fontRef>
+        </p:style>
+        <p:txBody>
+          <a:bodyPr rtlCol="0" anchor="ctr"/>
+          <a:lstStyle/>
+          <a:p>
+            <a:pPr algn="ctr"/>
+          </a:p>
+        </p:txBody>
+      </p:sp>
+      <p:sp>
+        <p:nvSpPr>
+          <p:cNvPr id="3" name="TextBox 2"/>
+          <p:cNvSpPr txBox="1"/>
+          <p:nvPr/>
+        </p:nvSpPr>
+        <p:spPr>
+          <a:xfrm>
+            <a:off x="10607040" y="320040"/>
+            <a:ext cx="1371600" cy="365760"/>
+          </a:xfrm>
+          <a:prstGeom prst="rect">
+            <a:avLst/>
+          </a:prstGeom>
+          <a:noFill/>
+        </p:spPr>
+        <p:txBody>
+          <a:bodyPr wrap="square">
+            <a:spAutoFit/>
+          </a:bodyPr>
+          <a:lstStyle/>
+          <a:p>
+            <a:pPr algn="r"/>
+            <a:r>
+              <a:rPr sz="1000" b="1" i="0">
+                <a:solidFill>
+                  <a:srgbClr val="64748B"/>
+                </a:solidFill>
+                <a:latin typeface="Montserrat"/>
+              </a:rPr>
+              <a:t>019 / 020</a:t>
+            </a:r>
+          </a:p>
+        </p:txBody>
+      </p:sp>
+      <p:sp>
+        <p:nvSpPr>
+          <p:cNvPr id="4" name="TextBox 3"/>
+          <p:cNvSpPr txBox="1"/>
+          <p:nvPr/>
+        </p:nvSpPr>
+        <p:spPr>
+          <a:xfrm>
+            <a:off x="457200" y="6419088"/>
+            <a:ext cx="8229600" cy="365760"/>
+          </a:xfrm>
+          <a:prstGeom prst="rect">
+            <a:avLst/>
+          </a:prstGeom>
+          <a:noFill/>
+        </p:spPr>
+        <p:txBody>
+          <a:bodyPr wrap="square">
+            <a:spAutoFit/>
+          </a:bodyPr>
+          <a:lstStyle/>
+          <a:p>
+            <a:r>
+              <a:rPr sz="900" b="0" i="0">
+                <a:solidFill>
+                  <a:srgbClr val="64748B"/>
+                </a:solidFill>
+                <a:latin typeface="Montserrat"/>
+              </a:rPr>
+              <a:t>Curso Gas B · Tema 05 · Aparatos de gas</a:t>
+            </a:r>
+          </a:p>
+        </p:txBody>
+      </p:sp>
+      <p:sp>
+        <p:nvSpPr>
+          <p:cNvPr id="5" name="TextBox 4"/>
+          <p:cNvSpPr txBox="1"/>
+          <p:nvPr/>
+        </p:nvSpPr>
+        <p:spPr>
+          <a:xfrm>
+            <a:off x="822960" y="457200"/>
+            <a:ext cx="10058400" cy="365760"/>
+          </a:xfrm>
+          <a:prstGeom prst="rect">
+            <a:avLst/>
+          </a:prstGeom>
+          <a:noFill/>
+        </p:spPr>
+        <p:txBody>
+          <a:bodyPr wrap="square">
+            <a:spAutoFit/>
+          </a:bodyPr>
+          <a:lstStyle/>
+          <a:p>
+            <a:r>
+              <a:rPr sz="1300" b="1" i="0">
+                <a:solidFill>
+                  <a:srgbClr val="E8801A"/>
+                </a:solidFill>
+                <a:latin typeface="Montserrat"/>
+              </a:rPr>
+              <a:t>ANEXO 4 · CERTIFICADO</a:t>
+            </a:r>
+          </a:p>
+        </p:txBody>
+      </p:sp>
+      <p:sp>
+        <p:nvSpPr>
+          <p:cNvPr id="6" name="TextBox 5"/>
+          <p:cNvSpPr txBox="1"/>
+          <p:nvPr/>
+        </p:nvSpPr>
+        <p:spPr>
+          <a:xfrm>
+            <a:off x="822960" y="868680"/>
+            <a:ext cx="10515600" cy="914400"/>
+          </a:xfrm>
+          <a:prstGeom prst="rect">
+            <a:avLst/>
+          </a:prstGeom>
+          <a:noFill/>
+        </p:spPr>
+        <p:txBody>
+          <a:bodyPr wrap="square">
+            <a:spAutoFit/>
+          </a:bodyPr>
+          <a:lstStyle/>
+          <a:p>
+            <a:r>
+              <a:rPr sz="2800" b="1" i="0">
+                <a:solidFill>
+                  <a:srgbClr val="1E2761"/>
+                </a:solidFill>
+                <a:latin typeface="Montserrat"/>
+              </a:rPr>
+              <a:t>Qué lleva el certificado</a:t>
+            </a:r>
+          </a:p>
+        </p:txBody>
+      </p:sp>
+      <p:sp>
+        <p:nvSpPr>
+          <p:cNvPr id="7" name="Rectangle 6"/>
+          <p:cNvSpPr/>
+          <p:nvPr/>
+        </p:nvSpPr>
+        <p:spPr>
+          <a:xfrm>
+            <a:off x="868680" y="1627632"/>
+            <a:ext cx="2011680" cy="73152"/>
+          </a:xfrm>
+          <a:prstGeom prst="rect">
+            <a:avLst/>
+          </a:prstGeom>
+          <a:solidFill>
+            <a:srgbClr val="E8801A"/>
+          </a:solidFill>
+          <a:ln>
+            <a:noFill/>
+          </a:ln>
+          <a:effectLst/>
+        </p:spPr>
+        <p:style>
+          <a:lnRef idx="1">
+            <a:schemeClr val="accent1"/>
+          </a:lnRef>
+          <a:fillRef idx="3">
+            <a:schemeClr val="accent1"/>
+          </a:fillRef>
+          <a:effectRef idx="2">
+            <a:schemeClr val="accent1"/>
+          </a:effectRef>
+          <a:fontRef idx="minor">
+            <a:schemeClr val="lt1"/>
+          </a:fontRef>
+        </p:style>
+        <p:txBody>
+          <a:bodyPr rtlCol="0" anchor="ctr"/>
+          <a:lstStyle/>
+          <a:p>
+            <a:pPr algn="ctr"/>
+          </a:p>
+        </p:txBody>
+      </p:sp>
+      <p:sp>
+        <p:nvSpPr>
+          <p:cNvPr id="8" name="TextBox 7"/>
+          <p:cNvSpPr txBox="1"/>
+          <p:nvPr/>
+        </p:nvSpPr>
+        <p:spPr>
+          <a:xfrm>
+            <a:off x="822960" y="1965960"/>
+            <a:ext cx="5029200" cy="4206240"/>
+          </a:xfrm>
+          <a:prstGeom prst="rect">
+            <a:avLst/>
+          </a:prstGeom>
+          <a:noFill/>
+        </p:spPr>
+        <p:txBody>
+          <a:bodyPr wrap="square">
+            <a:spAutoFit/>
+          </a:bodyPr>
+          <a:lstStyle/>
+          <a:p>
+            <a:pPr>
+              <a:spcAft>
+                <a:spcPts val="1100"/>
+              </a:spcAft>
+            </a:pPr>
+            <a:r>
+              <a:rPr sz="1600" b="1" i="0">
+                <a:solidFill>
+                  <a:srgbClr val="E8801A"/>
+                </a:solidFill>
+                <a:latin typeface="Montserrat"/>
+              </a:rPr>
+              <a:t>▸  </a:t>
+            </a:r>
+            <a:r>
+              <a:rPr sz="1600" b="0" i="0">
+                <a:solidFill>
+                  <a:srgbClr val="1B2330"/>
+                </a:solidFill>
+                <a:latin typeface="Montserrat"/>
+              </a:rPr>
+              <a:t>Agente, cliente y datos del aparato</a:t>
+            </a:r>
+          </a:p>
+          <a:p>
+            <a:pPr>
+              <a:spcAft>
+                <a:spcPts val="1100"/>
+              </a:spcAft>
+            </a:pPr>
+            <a:r>
+              <a:rPr sz="1600" b="1" i="0">
+                <a:solidFill>
+                  <a:srgbClr val="E8801A"/>
+                </a:solidFill>
+                <a:latin typeface="Montserrat"/>
+              </a:rPr>
+              <a:t>▸  </a:t>
+            </a:r>
+            <a:r>
+              <a:rPr sz="1600" b="0" i="0">
+                <a:solidFill>
+                  <a:srgbClr val="1B2330"/>
+                </a:solidFill>
+                <a:latin typeface="Montserrat"/>
+              </a:rPr>
+              <a:t>Pruebas y sus resultados</a:t>
+            </a:r>
+          </a:p>
+          <a:p>
+            <a:pPr>
+              <a:spcAft>
+                <a:spcPts val="1100"/>
+              </a:spcAft>
+            </a:pPr>
+            <a:r>
+              <a:rPr sz="1600" b="1" i="0">
+                <a:solidFill>
+                  <a:srgbClr val="E8801A"/>
+                </a:solidFill>
+                <a:latin typeface="Montserrat"/>
+              </a:rPr>
+              <a:t>▸  </a:t>
+            </a:r>
+            <a:r>
+              <a:rPr sz="1600" b="0" i="0">
+                <a:solidFill>
+                  <a:srgbClr val="1B2330"/>
+                </a:solidFill>
+                <a:latin typeface="Montserrat"/>
+              </a:rPr>
+              <a:t>Ticket del análisis de combustión</a:t>
+            </a:r>
+          </a:p>
+          <a:p>
+            <a:pPr>
+              <a:spcAft>
+                <a:spcPts val="1100"/>
+              </a:spcAft>
+            </a:pPr>
+            <a:r>
+              <a:rPr sz="1600" b="1" i="0">
+                <a:solidFill>
+                  <a:srgbClr val="E8801A"/>
+                </a:solidFill>
+                <a:latin typeface="Montserrat"/>
+              </a:rPr>
+              <a:t>▸  </a:t>
+            </a:r>
+            <a:r>
+              <a:rPr sz="1600" b="0" i="0">
+                <a:solidFill>
+                  <a:srgbClr val="1B2330"/>
+                </a:solidFill>
+                <a:latin typeface="Montserrat"/>
+              </a:rPr>
+              <a:t>Firma del técnico, sello y firma del cliente</a:t>
+            </a:r>
+          </a:p>
+        </p:txBody>
+      </p:sp>
+      <p:sp>
+        <p:nvSpPr>
+          <p:cNvPr id="9" name="imgph" descr="IMGQ:signed technical certificate document"/>
+          <p:cNvSpPr/>
+          <p:nvPr/>
+        </p:nvSpPr>
+        <p:spPr>
+          <a:xfrm>
+            <a:off x="6080760" y="1965960"/>
+            <a:ext cx="5303520" cy="4572000"/>
+          </a:xfrm>
+          <a:prstGeom prst="roundRect">
+            <a:avLst/>
+          </a:prstGeom>
+          <a:solidFill>
+            <a:srgbClr val="F3F6FB"/>
+          </a:solidFill>
+          <a:ln w="12700">
+            <a:solidFill>
+              <a:srgbClr val="C7D2E6"/>
+            </a:solidFill>
+          </a:ln>
+          <a:effectLst/>
+        </p:spPr>
+        <p:style>
+          <a:lnRef idx="1">
+            <a:schemeClr val="accent1"/>
+          </a:lnRef>
+          <a:fillRef idx="3">
+            <a:schemeClr val="accent1"/>
+          </a:fillRef>
+          <a:effectRef idx="2">
+            <a:schemeClr val="accent1"/>
+          </a:effectRef>
+          <a:fontRef idx="minor">
+            <a:schemeClr val="lt1"/>
+          </a:fontRef>
+        </p:style>
+        <p:txBody>
+          <a:bodyPr rtlCol="0" anchor="ctr"/>
+          <a:lstStyle/>
+          <a:p>
+            <a:pPr algn="ctr"/>
+          </a:p>
+        </p:txBody>
+      </p:sp>
+      <p:sp>
+        <p:nvSpPr>
+          <p:cNvPr id="10" name="TextBox 9"/>
+          <p:cNvSpPr txBox="1"/>
+          <p:nvPr/>
+        </p:nvSpPr>
+        <p:spPr>
+          <a:xfrm>
+            <a:off x="6355080" y="3611880"/>
+            <a:ext cx="4754880" cy="1280160"/>
+          </a:xfrm>
+          <a:prstGeom prst="rect">
+            <a:avLst/>
+          </a:prstGeom>
+          <a:noFill/>
+        </p:spPr>
+        <p:txBody>
+          <a:bodyPr wrap="square">
+            <a:spAutoFit/>
+          </a:bodyPr>
+          <a:lstStyle/>
+          <a:p>
+            <a:pPr algn="ctr"/>
+            <a:r>
+              <a:rPr sz="1400" b="1" i="0">
+                <a:solidFill>
+                  <a:srgbClr val="64748B"/>
+                </a:solidFill>
+                <a:latin typeface="Montserrat"/>
+              </a:rPr>
+              <a:t>IMAGEN</a:t>
+            </a:r>
+          </a:p>
+          <a:p>
+            <a:pPr algn="ctr"/>
+            <a:r>
+              <a:rPr sz="1100" b="0" i="1">
+                <a:solidFill>
+                  <a:srgbClr val="64748B"/>
+                </a:solidFill>
+                <a:latin typeface="Montserrat"/>
+              </a:rPr>
+              <a:t>signed technical certificate document</a:t>
+            </a:r>
+          </a:p>
+        </p:txBody>
+      </p:sp>
+    </p:spTree>
+  </p:cSld>
+  <p:clrMapOvr>
+    <a:masterClrMapping/>
+  </p:clrMapOvr>
+  <mc:AlternateContent xmlns:mc="http://schemas.openxmlformats.org/markup-compatibility/2006">
+    <mc:Choice xmlns:p14="http://schemas.microsoft.com/office/powerpoint/2010/main" Requires="p14">
+      <p:transition spd="med" p14:dur="700">
+        <p14:cube dir="l"/>
+      </p:transition>
+    </mc:Choice>
+    <mc:Fallback>
+      <p:transition spd="med">
+        <p:push dir="l"/>
+      </p:transition>
+    </mc:Fallback>
+  </mc:AlternateContent>
 </p:sld>
 </file>
 
@@ -7516,7 +10234,7 @@
                 </a:solidFill>
                 <a:latin typeface="Montserrat"/>
               </a:rPr>
-              <a:t>002 / 015</a:t>
+              <a:t>002 / 020</a:t>
             </a:r>
           </a:p>
         </p:txBody>
@@ -7591,7 +10309,7 @@
       </p:sp>
       <p:sp>
         <p:nvSpPr>
-          <p:cNvPr id="6" name="Rounded Rectangle 5"/>
+          <p:cNvPr id="6" name="Rectangle 5"/>
           <p:cNvSpPr/>
           <p:nvPr/>
         </p:nvSpPr>
@@ -7600,7 +10318,7 @@
             <a:off x="868680" y="1234440"/>
             <a:ext cx="1463040" cy="73152"/>
           </a:xfrm>
-          <a:prstGeom prst="roundRect">
+          <a:prstGeom prst="rect">
             <a:avLst/>
           </a:prstGeom>
           <a:solidFill>
@@ -7681,14 +10399,58 @@
       </p:sp>
       <p:sp>
         <p:nvSpPr>
-          <p:cNvPr id="8" name="TextBox 7"/>
+          <p:cNvPr id="8" name="Rectangle 7"/>
+          <p:cNvSpPr/>
+          <p:nvPr/>
+        </p:nvSpPr>
+        <p:spPr>
+          <a:xfrm>
+            <a:off x="822960" y="2011680"/>
+            <a:ext cx="3017520" cy="128016"/>
+          </a:xfrm>
+          <a:prstGeom prst="rect">
+            <a:avLst/>
+          </a:prstGeom>
+          <a:solidFill>
+            <a:srgbClr val="E8801A"/>
+          </a:solidFill>
+          <a:ln>
+            <a:noFill/>
+          </a:ln>
+          <a:effectLst/>
+        </p:spPr>
+        <p:style>
+          <a:lnRef idx="1">
+            <a:schemeClr val="accent1"/>
+          </a:lnRef>
+          <a:fillRef idx="3">
+            <a:schemeClr val="accent1"/>
+          </a:fillRef>
+          <a:effectRef idx="2">
+            <a:schemeClr val="accent1"/>
+          </a:effectRef>
+          <a:fontRef idx="minor">
+            <a:schemeClr val="lt1"/>
+          </a:fontRef>
+        </p:style>
+        <p:txBody>
+          <a:bodyPr rtlCol="0" anchor="ctr"/>
+          <a:lstStyle/>
+          <a:p>
+            <a:pPr algn="ctr"/>
+          </a:p>
+        </p:txBody>
+      </p:sp>
+      <p:sp>
+        <p:nvSpPr>
+          <p:cNvPr id="9" name="TextBox 8"/>
           <p:cNvSpPr txBox="1"/>
           <p:nvPr/>
         </p:nvSpPr>
         <p:spPr>
           <a:xfrm>
-            <a:off x="822960" y="2331720"/>
-            <a:ext cx="3017520" cy="1463040"/>
+            <a:off x="822960" y="2377440"/>
+            <a:ext cx="3017520" cy="1371600"/>
           </a:xfrm>
           <a:prstGeom prst="rect">
             <a:avLst/>
@@ -7703,7 +10465,7 @@
           <a:p>
             <a:pPr algn="ctr"/>
             <a:r>
-              <a:rPr sz="6000" b="1" i="0">
+              <a:rPr sz="5800" b="1" i="0">
                 <a:solidFill>
                   <a:srgbClr val="1E2761"/>
                 </a:solidFill>
@@ -7716,13 +10478,13 @@
       </p:sp>
       <p:sp>
         <p:nvSpPr>
-          <p:cNvPr id="9" name="TextBox 8"/>
+          <p:cNvPr id="10" name="TextBox 9"/>
           <p:cNvSpPr txBox="1"/>
           <p:nvPr/>
         </p:nvSpPr>
         <p:spPr>
           <a:xfrm>
-            <a:off x="1051560" y="3611880"/>
+            <a:off x="1051560" y="3657600"/>
             <a:ext cx="2560320" cy="1005840"/>
           </a:xfrm>
           <a:prstGeom prst="rect">
@@ -7751,7 +10513,7 @@
       </p:sp>
       <p:sp>
         <p:nvSpPr>
-          <p:cNvPr id="10" name="Rounded Rectangle 9"/>
+          <p:cNvPr id="11" name="Rounded Rectangle 10"/>
           <p:cNvSpPr/>
           <p:nvPr/>
         </p:nvSpPr>
@@ -7797,14 +10559,58 @@
       </p:sp>
       <p:sp>
         <p:nvSpPr>
-          <p:cNvPr id="11" name="TextBox 10"/>
+          <p:cNvPr id="12" name="Rectangle 11"/>
+          <p:cNvSpPr/>
+          <p:nvPr/>
+        </p:nvSpPr>
+        <p:spPr>
+          <a:xfrm>
+            <a:off x="4617720" y="2011680"/>
+            <a:ext cx="3017520" cy="128016"/>
+          </a:xfrm>
+          <a:prstGeom prst="rect">
+            <a:avLst/>
+          </a:prstGeom>
+          <a:solidFill>
+            <a:srgbClr val="E8801A"/>
+          </a:solidFill>
+          <a:ln>
+            <a:noFill/>
+          </a:ln>
+          <a:effectLst/>
+        </p:spPr>
+        <p:style>
+          <a:lnRef idx="1">
+            <a:schemeClr val="accent1"/>
+          </a:lnRef>
+          <a:fillRef idx="3">
+            <a:schemeClr val="accent1"/>
+          </a:fillRef>
+          <a:effectRef idx="2">
+            <a:schemeClr val="accent1"/>
+          </a:effectRef>
+          <a:fontRef idx="minor">
+            <a:schemeClr val="lt1"/>
+          </a:fontRef>
+        </p:style>
+        <p:txBody>
+          <a:bodyPr rtlCol="0" anchor="ctr"/>
+          <a:lstStyle/>
+          <a:p>
+            <a:pPr algn="ctr"/>
+          </a:p>
+        </p:txBody>
+      </p:sp>
+      <p:sp>
+        <p:nvSpPr>
+          <p:cNvPr id="13" name="TextBox 12"/>
           <p:cNvSpPr txBox="1"/>
           <p:nvPr/>
         </p:nvSpPr>
         <p:spPr>
           <a:xfrm>
-            <a:off x="4617720" y="2331720"/>
-            <a:ext cx="3017520" cy="1463040"/>
+            <a:off x="4617720" y="2377440"/>
+            <a:ext cx="3017520" cy="1371600"/>
           </a:xfrm>
           <a:prstGeom prst="rect">
             <a:avLst/>
@@ -7819,7 +10625,7 @@
           <a:p>
             <a:pPr algn="ctr"/>
             <a:r>
-              <a:rPr sz="6000" b="1" i="0">
+              <a:rPr sz="5800" b="1" i="0">
                 <a:solidFill>
                   <a:srgbClr val="1E2761"/>
                 </a:solidFill>
@@ -7832,13 +10638,13 @@
       </p:sp>
       <p:sp>
         <p:nvSpPr>
-          <p:cNvPr id="12" name="TextBox 11"/>
+          <p:cNvPr id="14" name="TextBox 13"/>
           <p:cNvSpPr txBox="1"/>
           <p:nvPr/>
         </p:nvSpPr>
         <p:spPr>
           <a:xfrm>
-            <a:off x="4846320" y="3611880"/>
+            <a:off x="4846320" y="3657600"/>
             <a:ext cx="2560320" cy="1005840"/>
           </a:xfrm>
           <a:prstGeom prst="rect">
@@ -7867,7 +10673,7 @@
       </p:sp>
       <p:sp>
         <p:nvSpPr>
-          <p:cNvPr id="13" name="Rounded Rectangle 12"/>
+          <p:cNvPr id="15" name="Rounded Rectangle 14"/>
           <p:cNvSpPr/>
           <p:nvPr/>
         </p:nvSpPr>
@@ -7913,14 +10719,58 @@
       </p:sp>
       <p:sp>
         <p:nvSpPr>
-          <p:cNvPr id="14" name="TextBox 13"/>
+          <p:cNvPr id="16" name="Rectangle 15"/>
+          <p:cNvSpPr/>
+          <p:nvPr/>
+        </p:nvSpPr>
+        <p:spPr>
+          <a:xfrm>
+            <a:off x="8412480" y="2011680"/>
+            <a:ext cx="3017520" cy="128016"/>
+          </a:xfrm>
+          <a:prstGeom prst="rect">
+            <a:avLst/>
+          </a:prstGeom>
+          <a:solidFill>
+            <a:srgbClr val="E8801A"/>
+          </a:solidFill>
+          <a:ln>
+            <a:noFill/>
+          </a:ln>
+          <a:effectLst/>
+        </p:spPr>
+        <p:style>
+          <a:lnRef idx="1">
+            <a:schemeClr val="accent1"/>
+          </a:lnRef>
+          <a:fillRef idx="3">
+            <a:schemeClr val="accent1"/>
+          </a:fillRef>
+          <a:effectRef idx="2">
+            <a:schemeClr val="accent1"/>
+          </a:effectRef>
+          <a:fontRef idx="minor">
+            <a:schemeClr val="lt1"/>
+          </a:fontRef>
+        </p:style>
+        <p:txBody>
+          <a:bodyPr rtlCol="0" anchor="ctr"/>
+          <a:lstStyle/>
+          <a:p>
+            <a:pPr algn="ctr"/>
+          </a:p>
+        </p:txBody>
+      </p:sp>
+      <p:sp>
+        <p:nvSpPr>
+          <p:cNvPr id="17" name="TextBox 16"/>
           <p:cNvSpPr txBox="1"/>
           <p:nvPr/>
         </p:nvSpPr>
         <p:spPr>
           <a:xfrm>
-            <a:off x="8412480" y="2331720"/>
-            <a:ext cx="3017520" cy="1463040"/>
+            <a:off x="8412480" y="2377440"/>
+            <a:ext cx="3017520" cy="1371600"/>
           </a:xfrm>
           <a:prstGeom prst="rect">
             <a:avLst/>
@@ -7935,7 +10785,7 @@
           <a:p>
             <a:pPr algn="ctr"/>
             <a:r>
-              <a:rPr sz="6000" b="1" i="0">
+              <a:rPr sz="5800" b="1" i="0">
                 <a:solidFill>
                   <a:srgbClr val="1E2761"/>
                 </a:solidFill>
@@ -7948,13 +10798,13 @@
       </p:sp>
       <p:sp>
         <p:nvSpPr>
-          <p:cNvPr id="15" name="TextBox 14"/>
+          <p:cNvPr id="18" name="TextBox 17"/>
           <p:cNvSpPr txBox="1"/>
           <p:nvPr/>
         </p:nvSpPr>
         <p:spPr>
           <a:xfrm>
-            <a:off x="8641080" y="3611880"/>
+            <a:off x="8641080" y="3657600"/>
             <a:ext cx="2560320" cy="1005840"/>
           </a:xfrm>
           <a:prstGeom prst="rect">
@@ -7986,6 +10836,405 @@
   <p:clrMapOvr>
     <a:masterClrMapping/>
   </p:clrMapOvr>
+  <mc:AlternateContent xmlns:mc="http://schemas.openxmlformats.org/markup-compatibility/2006">
+    <mc:Choice xmlns:p14="http://schemas.microsoft.com/office/powerpoint/2010/main" Requires="p14">
+      <p:transition spd="med" p14:dur="700">
+        <p14:cube dir="r"/>
+      </p:transition>
+    </mc:Choice>
+    <mc:Fallback>
+      <p:transition spd="med">
+        <p:push dir="r"/>
+      </p:transition>
+    </mc:Fallback>
+  </mc:AlternateContent>
+</p:sld>
+</file>
+
+<file path=ppt/slides/slide20.xml><?xml version="1.0" encoding="utf-8"?>
+<p:sld xmlns:a="http://schemas.openxmlformats.org/drawingml/2006/main" xmlns:p="http://schemas.openxmlformats.org/presentationml/2006/main" xmlns:r="http://schemas.openxmlformats.org/officeDocument/2006/relationships">
+  <p:cSld>
+    <p:spTree>
+      <p:nvGrpSpPr>
+        <p:cNvPr id="1" name=""/>
+        <p:cNvGrpSpPr/>
+        <p:nvPr/>
+      </p:nvGrpSpPr>
+      <p:grpSpPr/>
+      <p:sp>
+        <p:nvSpPr>
+          <p:cNvPr id="2" name="Rectangle 1"/>
+          <p:cNvSpPr/>
+          <p:nvPr/>
+        </p:nvSpPr>
+        <p:spPr>
+          <a:xfrm>
+            <a:off x="0" y="0"/>
+            <a:ext cx="12191695" cy="6858000"/>
+          </a:xfrm>
+          <a:prstGeom prst="rect">
+            <a:avLst/>
+          </a:prstGeom>
+          <a:solidFill>
+            <a:srgbClr val="1E2761"/>
+          </a:solidFill>
+          <a:ln>
+            <a:noFill/>
+          </a:ln>
+          <a:effectLst/>
+        </p:spPr>
+        <p:style>
+          <a:lnRef idx="1">
+            <a:schemeClr val="accent1"/>
+          </a:lnRef>
+          <a:fillRef idx="3">
+            <a:schemeClr val="accent1"/>
+          </a:fillRef>
+          <a:effectRef idx="2">
+            <a:schemeClr val="accent1"/>
+          </a:effectRef>
+          <a:fontRef idx="minor">
+            <a:schemeClr val="lt1"/>
+          </a:fontRef>
+        </p:style>
+        <p:txBody>
+          <a:bodyPr rtlCol="0" anchor="ctr"/>
+          <a:lstStyle/>
+          <a:p>
+            <a:pPr algn="ctr"/>
+          </a:p>
+        </p:txBody>
+      </p:sp>
+      <p:sp>
+        <p:nvSpPr>
+          <p:cNvPr id="3" name="TextBox 2"/>
+          <p:cNvSpPr txBox="1"/>
+          <p:nvPr/>
+        </p:nvSpPr>
+        <p:spPr>
+          <a:xfrm>
+            <a:off x="822960" y="640080"/>
+            <a:ext cx="10515600" cy="457200"/>
+          </a:xfrm>
+          <a:prstGeom prst="rect">
+            <a:avLst/>
+          </a:prstGeom>
+          <a:noFill/>
+        </p:spPr>
+        <p:txBody>
+          <a:bodyPr wrap="square">
+            <a:spAutoFit/>
+          </a:bodyPr>
+          <a:lstStyle/>
+          <a:p>
+            <a:r>
+              <a:rPr sz="1400" b="1" i="0">
+                <a:solidFill>
+                  <a:srgbClr val="F4A24C"/>
+                </a:solidFill>
+                <a:latin typeface="Montserrat"/>
+              </a:rPr>
+              <a:t>LO QUE YA DOMINAS</a:t>
+            </a:r>
+          </a:p>
+        </p:txBody>
+      </p:sp>
+      <p:sp>
+        <p:nvSpPr>
+          <p:cNvPr id="4" name="Rectangle 3"/>
+          <p:cNvSpPr/>
+          <p:nvPr/>
+        </p:nvSpPr>
+        <p:spPr>
+          <a:xfrm>
+            <a:off x="868680" y="1051560"/>
+            <a:ext cx="1463040" cy="82296"/>
+          </a:xfrm>
+          <a:prstGeom prst="rect">
+            <a:avLst/>
+          </a:prstGeom>
+          <a:solidFill>
+            <a:srgbClr val="E8801A"/>
+          </a:solidFill>
+          <a:ln>
+            <a:noFill/>
+          </a:ln>
+          <a:effectLst/>
+        </p:spPr>
+        <p:style>
+          <a:lnRef idx="1">
+            <a:schemeClr val="accent1"/>
+          </a:lnRef>
+          <a:fillRef idx="3">
+            <a:schemeClr val="accent1"/>
+          </a:fillRef>
+          <a:effectRef idx="2">
+            <a:schemeClr val="accent1"/>
+          </a:effectRef>
+          <a:fontRef idx="minor">
+            <a:schemeClr val="lt1"/>
+          </a:fontRef>
+        </p:style>
+        <p:txBody>
+          <a:bodyPr rtlCol="0" anchor="ctr"/>
+          <a:lstStyle/>
+          <a:p>
+            <a:pPr algn="ctr"/>
+          </a:p>
+        </p:txBody>
+      </p:sp>
+      <p:sp>
+        <p:nvSpPr>
+          <p:cNvPr id="5" name="TextBox 4"/>
+          <p:cNvSpPr txBox="1"/>
+          <p:nvPr/>
+        </p:nvSpPr>
+        <p:spPr>
+          <a:xfrm>
+            <a:off x="822960" y="1234440"/>
+            <a:ext cx="10515600" cy="1097280"/>
+          </a:xfrm>
+          <a:prstGeom prst="rect">
+            <a:avLst/>
+          </a:prstGeom>
+          <a:noFill/>
+        </p:spPr>
+        <p:txBody>
+          <a:bodyPr wrap="square">
+            <a:spAutoFit/>
+          </a:bodyPr>
+          <a:lstStyle/>
+          <a:p>
+            <a:r>
+              <a:rPr sz="3400" b="1" i="0">
+                <a:solidFill>
+                  <a:srgbClr val="FFFFFF"/>
+                </a:solidFill>
+                <a:latin typeface="Montserrat"/>
+              </a:rPr>
+              <a:t>Ya sabes clasificar, conectar y certificar</a:t>
+            </a:r>
+          </a:p>
+        </p:txBody>
+      </p:sp>
+      <p:sp>
+        <p:nvSpPr>
+          <p:cNvPr id="6" name="TextBox 5"/>
+          <p:cNvSpPr txBox="1"/>
+          <p:nvPr/>
+        </p:nvSpPr>
+        <p:spPr>
+          <a:xfrm>
+            <a:off x="822960" y="2606040"/>
+            <a:ext cx="10515600" cy="2743200"/>
+          </a:xfrm>
+          <a:prstGeom prst="rect">
+            <a:avLst/>
+          </a:prstGeom>
+          <a:noFill/>
+        </p:spPr>
+        <p:txBody>
+          <a:bodyPr wrap="square">
+            <a:spAutoFit/>
+          </a:bodyPr>
+          <a:lstStyle/>
+          <a:p>
+            <a:pPr>
+              <a:spcAft>
+                <a:spcPts val="1200"/>
+              </a:spcAft>
+            </a:pPr>
+            <a:r>
+              <a:rPr sz="2000" b="1" i="0">
+                <a:solidFill>
+                  <a:srgbClr val="F4A24C"/>
+                </a:solidFill>
+                <a:latin typeface="Montserrat"/>
+              </a:rPr>
+              <a:t>✓  </a:t>
+            </a:r>
+            <a:r>
+              <a:rPr sz="1900" b="0" i="0">
+                <a:solidFill>
+                  <a:srgbClr val="FFFFFF"/>
+                </a:solidFill>
+                <a:latin typeface="Montserrat"/>
+              </a:rPr>
+              <a:t>Tipos A, B y C: de dónde respira y por dónde echa el humo</a:t>
+            </a:r>
+          </a:p>
+          <a:p>
+            <a:pPr>
+              <a:spcAft>
+                <a:spcPts val="1200"/>
+              </a:spcAft>
+            </a:pPr>
+            <a:r>
+              <a:rPr sz="2000" b="1" i="0">
+                <a:solidFill>
+                  <a:srgbClr val="F4A24C"/>
+                </a:solidFill>
+                <a:latin typeface="Montserrat"/>
+              </a:rPr>
+              <a:t>✓  </a:t>
+            </a:r>
+            <a:r>
+              <a:rPr sz="1900" b="0" i="0">
+                <a:solidFill>
+                  <a:srgbClr val="FFFFFF"/>
+                </a:solidFill>
+                <a:latin typeface="Montserrat"/>
+              </a:rPr>
+              <a:t>Tipo de aparato ≠ categoría del carné</a:t>
+            </a:r>
+          </a:p>
+          <a:p>
+            <a:pPr>
+              <a:spcAft>
+                <a:spcPts val="1200"/>
+              </a:spcAft>
+            </a:pPr>
+            <a:r>
+              <a:rPr sz="2000" b="1" i="0">
+                <a:solidFill>
+                  <a:srgbClr val="F4A24C"/>
+                </a:solidFill>
+                <a:latin typeface="Montserrat"/>
+              </a:rPr>
+              <a:t>✓  </a:t>
+            </a:r>
+            <a:r>
+              <a:rPr sz="1900" b="0" i="0">
+                <a:solidFill>
+                  <a:srgbClr val="FFFFFF"/>
+                </a:solidFill>
+                <a:latin typeface="Montserrat"/>
+              </a:rPr>
+              <a:t>Conectado → 7; suelto → 6; latiguillo lo pone el usuario</a:t>
+            </a:r>
+          </a:p>
+          <a:p>
+            <a:pPr>
+              <a:spcAft>
+                <a:spcPts val="1200"/>
+              </a:spcAft>
+            </a:pPr>
+            <a:r>
+              <a:rPr sz="2000" b="1" i="0">
+                <a:solidFill>
+                  <a:srgbClr val="F4A24C"/>
+                </a:solidFill>
+                <a:latin typeface="Montserrat"/>
+              </a:rPr>
+              <a:t>✓  </a:t>
+            </a:r>
+            <a:r>
+              <a:rPr sz="1900" b="0" i="0">
+                <a:solidFill>
+                  <a:srgbClr val="FFFFFF"/>
+                </a:solidFill>
+                <a:latin typeface="Montserrat"/>
+              </a:rPr>
+              <a:t>Arrancas, certificas (anexo 4) y archivas 5 años</a:t>
+            </a:r>
+          </a:p>
+        </p:txBody>
+      </p:sp>
+      <p:sp>
+        <p:nvSpPr>
+          <p:cNvPr id="7" name="Rounded Rectangle 6"/>
+          <p:cNvSpPr/>
+          <p:nvPr/>
+        </p:nvSpPr>
+        <p:spPr>
+          <a:xfrm>
+            <a:off x="822960" y="5532120"/>
+            <a:ext cx="10515600" cy="822960"/>
+          </a:xfrm>
+          <a:prstGeom prst="roundRect">
+            <a:avLst/>
+          </a:prstGeom>
+          <a:solidFill>
+            <a:srgbClr val="E8801A"/>
+          </a:solidFill>
+          <a:ln>
+            <a:noFill/>
+          </a:ln>
+          <a:effectLst/>
+        </p:spPr>
+        <p:style>
+          <a:lnRef idx="1">
+            <a:schemeClr val="accent1"/>
+          </a:lnRef>
+          <a:fillRef idx="3">
+            <a:schemeClr val="accent1"/>
+          </a:fillRef>
+          <a:effectRef idx="2">
+            <a:schemeClr val="accent1"/>
+          </a:effectRef>
+          <a:fontRef idx="minor">
+            <a:schemeClr val="lt1"/>
+          </a:fontRef>
+        </p:style>
+        <p:txBody>
+          <a:bodyPr rtlCol="0" anchor="ctr"/>
+          <a:lstStyle/>
+          <a:p>
+            <a:pPr algn="ctr"/>
+          </a:p>
+        </p:txBody>
+      </p:sp>
+      <p:sp>
+        <p:nvSpPr>
+          <p:cNvPr id="8" name="TextBox 7"/>
+          <p:cNvSpPr txBox="1"/>
+          <p:nvPr/>
+        </p:nvSpPr>
+        <p:spPr>
+          <a:xfrm>
+            <a:off x="1051560" y="5623560"/>
+            <a:ext cx="10058400" cy="640080"/>
+          </a:xfrm>
+          <a:prstGeom prst="rect">
+            <a:avLst/>
+          </a:prstGeom>
+          <a:noFill/>
+        </p:spPr>
+        <p:txBody>
+          <a:bodyPr wrap="square">
+            <a:spAutoFit/>
+          </a:bodyPr>
+          <a:lstStyle/>
+          <a:p>
+            <a:r>
+              <a:rPr sz="1500" b="1" i="1">
+                <a:solidFill>
+                  <a:srgbClr val="1E2761"/>
+                </a:solidFill>
+                <a:latin typeface="Montserrat"/>
+              </a:rPr>
+              <a:t>Ya no eres solo teoría: sabes dejar un aparato en regla. Vamos a la letra pequeña de la certificación.</a:t>
+            </a:r>
+          </a:p>
+        </p:txBody>
+      </p:sp>
+    </p:spTree>
+  </p:cSld>
+  <p:clrMapOvr>
+    <a:masterClrMapping/>
+  </p:clrMapOvr>
+  <mc:AlternateContent xmlns:mc="http://schemas.openxmlformats.org/markup-compatibility/2006">
+    <mc:Choice xmlns:p14="http://schemas.microsoft.com/office/powerpoint/2010/main" Requires="p14">
+      <p:transition spd="med" p14:dur="700">
+        <p14:cube dir="r"/>
+      </p:transition>
+    </mc:Choice>
+    <mc:Fallback>
+      <p:transition spd="med">
+        <p:push dir="r"/>
+      </p:transition>
+    </mc:Fallback>
+  </mc:AlternateContent>
 </p:sld>
 </file>
 
@@ -8073,7 +11322,7 @@
                 </a:solidFill>
                 <a:latin typeface="Montserrat"/>
               </a:rPr>
-              <a:t>003 / 015</a:t>
+              <a:t>003 / 020</a:t>
             </a:r>
           </a:p>
         </p:txBody>
@@ -8182,7 +11431,7 @@
       </p:sp>
       <p:sp>
         <p:nvSpPr>
-          <p:cNvPr id="7" name="Rounded Rectangle 6"/>
+          <p:cNvPr id="7" name="Rectangle 6"/>
           <p:cNvSpPr/>
           <p:nvPr/>
         </p:nvSpPr>
@@ -8191,7 +11440,7 @@
             <a:off x="868680" y="1673352"/>
             <a:ext cx="2011680" cy="73152"/>
           </a:xfrm>
-          <a:prstGeom prst="roundRect">
+          <a:prstGeom prst="rect">
             <a:avLst/>
           </a:prstGeom>
           <a:solidFill>
@@ -8477,6 +11726,18 @@
   <p:clrMapOvr>
     <a:masterClrMapping/>
   </p:clrMapOvr>
+  <mc:AlternateContent xmlns:mc="http://schemas.openxmlformats.org/markup-compatibility/2006">
+    <mc:Choice xmlns:p14="http://schemas.microsoft.com/office/powerpoint/2010/main" Requires="p14">
+      <p:transition spd="med" p14:dur="700">
+        <p14:cube dir="l"/>
+      </p:transition>
+    </mc:Choice>
+    <mc:Fallback>
+      <p:transition spd="med">
+        <p:push dir="l"/>
+      </p:transition>
+    </mc:Fallback>
+  </mc:AlternateContent>
 </p:sld>
 </file>
 
@@ -8564,7 +11825,7 @@
                 </a:solidFill>
                 <a:latin typeface="Montserrat"/>
               </a:rPr>
-              <a:t>004 / 015</a:t>
+              <a:t>004 / 020</a:t>
             </a:r>
           </a:p>
         </p:txBody>
@@ -8673,7 +11934,7 @@
       </p:sp>
       <p:sp>
         <p:nvSpPr>
-          <p:cNvPr id="7" name="Rounded Rectangle 6"/>
+          <p:cNvPr id="7" name="Rectangle 6"/>
           <p:cNvSpPr/>
           <p:nvPr/>
         </p:nvSpPr>
@@ -8682,7 +11943,7 @@
             <a:off x="868680" y="1627632"/>
             <a:ext cx="2011680" cy="73152"/>
           </a:xfrm>
-          <a:prstGeom prst="roundRect">
+          <a:prstGeom prst="rect">
             <a:avLst/>
           </a:prstGeom>
           <a:solidFill>
@@ -8724,7 +11985,7 @@
         <p:spPr>
           <a:xfrm>
             <a:off x="822960" y="1965960"/>
-            <a:ext cx="4983480" cy="4206240"/>
+            <a:ext cx="5029200" cy="4206240"/>
           </a:xfrm>
           <a:prstGeom prst="rect">
             <a:avLst/>
@@ -8821,8 +12082,8 @@
         </p:nvSpPr>
         <p:spPr>
           <a:xfrm>
-            <a:off x="5806440" y="1051560"/>
-            <a:ext cx="5298947" cy="4629150"/>
+            <a:off x="6080760" y="1965960"/>
+            <a:ext cx="5303520" cy="4572000"/>
           </a:xfrm>
           <a:prstGeom prst="roundRect">
             <a:avLst/>
@@ -8867,8 +12128,8 @@
         </p:nvSpPr>
         <p:spPr>
           <a:xfrm>
-            <a:off x="6080760" y="2726055"/>
-            <a:ext cx="4750307" cy="1280160"/>
+            <a:off x="6355080" y="3611880"/>
+            <a:ext cx="4754880" cy="1280160"/>
           </a:xfrm>
           <a:prstGeom prst="rect">
             <a:avLst/>
@@ -8889,7 +12150,7 @@
                 </a:solidFill>
                 <a:latin typeface="Montserrat"/>
               </a:rPr>
-              <a:t>IMAGEN REALISTA</a:t>
+              <a:t>IMAGEN</a:t>
             </a:r>
           </a:p>
           <a:p>
@@ -8911,6 +12172,18 @@
   <p:clrMapOvr>
     <a:masterClrMapping/>
   </p:clrMapOvr>
+  <mc:AlternateContent xmlns:mc="http://schemas.openxmlformats.org/markup-compatibility/2006">
+    <mc:Choice xmlns:p14="http://schemas.microsoft.com/office/powerpoint/2010/main" Requires="p14">
+      <p:transition spd="med" p14:dur="700">
+        <p14:cube dir="r"/>
+      </p:transition>
+    </mc:Choice>
+    <mc:Fallback>
+      <p:transition spd="med">
+        <p:push dir="r"/>
+      </p:transition>
+    </mc:Fallback>
+  </mc:AlternateContent>
 </p:sld>
 </file>
 
@@ -8998,7 +12271,7 @@
                 </a:solidFill>
                 <a:latin typeface="Montserrat"/>
               </a:rPr>
-              <a:t>005 / 015</a:t>
+              <a:t>005 / 020</a:t>
             </a:r>
           </a:p>
         </p:txBody>
@@ -9107,7 +12380,7 @@
       </p:sp>
       <p:sp>
         <p:nvSpPr>
-          <p:cNvPr id="7" name="Rounded Rectangle 6"/>
+          <p:cNvPr id="7" name="Rectangle 6"/>
           <p:cNvSpPr/>
           <p:nvPr/>
         </p:nvSpPr>
@@ -9116,7 +12389,7 @@
             <a:off x="868680" y="1627632"/>
             <a:ext cx="2011680" cy="73152"/>
           </a:xfrm>
-          <a:prstGeom prst="roundRect">
+          <a:prstGeom prst="rect">
             <a:avLst/>
           </a:prstGeom>
           <a:solidFill>
@@ -9157,8 +12430,8 @@
         </p:nvSpPr>
         <p:spPr>
           <a:xfrm>
-            <a:off x="822960" y="1965960"/>
-            <a:ext cx="4983480" cy="4206240"/>
+            <a:off x="6355080" y="1965960"/>
+            <a:ext cx="5029200" cy="4206240"/>
           </a:xfrm>
           <a:prstGeom prst="rect">
             <a:avLst/>
@@ -9280,8 +12553,8 @@
         </p:nvSpPr>
         <p:spPr>
           <a:xfrm>
-            <a:off x="5806440" y="1051560"/>
-            <a:ext cx="5298947" cy="4629150"/>
+            <a:off x="822960" y="1965960"/>
+            <a:ext cx="5303520" cy="4572000"/>
           </a:xfrm>
           <a:prstGeom prst="roundRect">
             <a:avLst/>
@@ -9326,8 +12599,8 @@
         </p:nvSpPr>
         <p:spPr>
           <a:xfrm>
-            <a:off x="6080760" y="2726055"/>
-            <a:ext cx="4750307" cy="1280160"/>
+            <a:off x="1097280" y="3611880"/>
+            <a:ext cx="4754880" cy="1280160"/>
           </a:xfrm>
           <a:prstGeom prst="rect">
             <a:avLst/>
@@ -9348,7 +12621,7 @@
                 </a:solidFill>
                 <a:latin typeface="Montserrat"/>
               </a:rPr>
-              <a:t>IMAGEN REALISTA</a:t>
+              <a:t>IMAGEN</a:t>
             </a:r>
           </a:p>
           <a:p>
@@ -9370,6 +12643,18 @@
   <p:clrMapOvr>
     <a:masterClrMapping/>
   </p:clrMapOvr>
+  <mc:AlternateContent xmlns:mc="http://schemas.openxmlformats.org/markup-compatibility/2006">
+    <mc:Choice xmlns:p14="http://schemas.microsoft.com/office/powerpoint/2010/main" Requires="p14">
+      <p:transition spd="med" p14:dur="700">
+        <p14:cube dir="l"/>
+      </p:transition>
+    </mc:Choice>
+    <mc:Fallback>
+      <p:transition spd="med">
+        <p:push dir="l"/>
+      </p:transition>
+    </mc:Fallback>
+  </mc:AlternateContent>
 </p:sld>
 </file>
 
@@ -9457,7 +12742,7 @@
                 </a:solidFill>
                 <a:latin typeface="Montserrat"/>
               </a:rPr>
-              <a:t>006 / 015</a:t>
+              <a:t>006 / 020</a:t>
             </a:r>
           </a:p>
         </p:txBody>
@@ -9504,7 +12789,7 @@
         </p:nvSpPr>
         <p:spPr>
           <a:xfrm>
-            <a:off x="822960" y="457200"/>
+            <a:off x="822960" y="411480"/>
             <a:ext cx="10058400" cy="365760"/>
           </a:xfrm>
           <a:prstGeom prst="rect">
@@ -9525,7 +12810,7 @@
                 </a:solidFill>
                 <a:latin typeface="Montserrat"/>
               </a:rPr>
-              <a:t>CONDUCIDOS VS. CARNÉ</a:t>
+              <a:t>TIPOS A · B · C</a:t>
             </a:r>
           </a:p>
         </p:txBody>
@@ -9538,8 +12823,8 @@
         </p:nvSpPr>
         <p:spPr>
           <a:xfrm>
-            <a:off x="822960" y="868680"/>
-            <a:ext cx="10515600" cy="914400"/>
+            <a:off x="822960" y="777240"/>
+            <a:ext cx="10515600" cy="822960"/>
           </a:xfrm>
           <a:prstGeom prst="rect">
             <a:avLst/>
@@ -9553,29 +12838,29 @@
           <a:lstStyle/>
           <a:p>
             <a:r>
-              <a:rPr sz="2800" b="1" i="0">
+              <a:rPr sz="2600" b="1" i="0">
                 <a:solidFill>
                   <a:srgbClr val="1E2761"/>
                 </a:solidFill>
                 <a:latin typeface="Montserrat"/>
               </a:rPr>
-              <a:t>No confundas tipo con categoría</a:t>
-            </a:r>
-          </a:p>
-        </p:txBody>
-      </p:sp>
-      <p:sp>
-        <p:nvSpPr>
-          <p:cNvPr id="7" name="Rounded Rectangle 6"/>
+              <a:t>Clasificación por circuito de combustión</a:t>
+            </a:r>
+          </a:p>
+        </p:txBody>
+      </p:sp>
+      <p:sp>
+        <p:nvSpPr>
+          <p:cNvPr id="7" name="Rectangle 6"/>
           <p:cNvSpPr/>
           <p:nvPr/>
         </p:nvSpPr>
         <p:spPr>
           <a:xfrm>
-            <a:off x="868680" y="1627632"/>
+            <a:off x="868680" y="1481328"/>
             <a:ext cx="2011680" cy="73152"/>
           </a:xfrm>
-          <a:prstGeom prst="roundRect">
+          <a:prstGeom prst="rect">
             <a:avLst/>
           </a:prstGeom>
           <a:solidFill>
@@ -9608,139 +12893,493 @@
           </a:p>
         </p:txBody>
       </p:sp>
-      <p:sp>
-        <p:nvSpPr>
-          <p:cNvPr id="8" name="TextBox 7"/>
-          <p:cNvSpPr txBox="1"/>
-          <p:nvPr/>
-        </p:nvSpPr>
-        <p:spPr>
-          <a:xfrm>
-            <a:off x="822960" y="1965960"/>
-            <a:ext cx="4983480" cy="4206240"/>
-          </a:xfrm>
-          <a:prstGeom prst="rect">
-            <a:avLst/>
-          </a:prstGeom>
-          <a:noFill/>
-        </p:spPr>
-        <p:txBody>
-          <a:bodyPr wrap="square">
-            <a:spAutoFit/>
-          </a:bodyPr>
-          <a:lstStyle/>
-          <a:p>
-            <a:pPr>
-              <a:spcAft>
-                <a:spcPts val="1100"/>
-              </a:spcAft>
-            </a:pPr>
-            <a:r>
-              <a:rPr sz="1600" b="1" i="0">
-                <a:solidFill>
-                  <a:srgbClr val="E8801A"/>
-                </a:solidFill>
-                <a:latin typeface="Montserrat"/>
-              </a:rPr>
-              <a:t>▸  </a:t>
-            </a:r>
-            <a:r>
-              <a:rPr sz="1600" b="0" i="0">
-                <a:solidFill>
-                  <a:srgbClr val="1B2330"/>
-                </a:solidFill>
-                <a:latin typeface="Montserrat"/>
-              </a:rPr>
-              <a:t>B y C = aparatos conducidos</a:t>
-            </a:r>
-          </a:p>
-          <a:p>
-            <a:pPr>
-              <a:spcAft>
-                <a:spcPts val="1100"/>
-              </a:spcAft>
-            </a:pPr>
-            <a:r>
-              <a:rPr sz="1600" b="1" i="0">
-                <a:solidFill>
-                  <a:srgbClr val="E8801A"/>
-                </a:solidFill>
-                <a:latin typeface="Montserrat"/>
-              </a:rPr>
-              <a:t>▸  </a:t>
-            </a:r>
-            <a:r>
-              <a:rPr sz="1600" b="0" i="0">
-                <a:solidFill>
-                  <a:srgbClr val="1B2330"/>
-                </a:solidFill>
-                <a:latin typeface="Montserrat"/>
-              </a:rPr>
-              <a:t>Tipo A/B/C = cómo quema el aparato</a:t>
-            </a:r>
-          </a:p>
-          <a:p>
-            <a:pPr>
-              <a:spcAft>
-                <a:spcPts val="1100"/>
-              </a:spcAft>
-            </a:pPr>
-            <a:r>
-              <a:rPr sz="1600" b="1" i="0">
-                <a:solidFill>
-                  <a:srgbClr val="E8801A"/>
-                </a:solidFill>
-                <a:latin typeface="Montserrat"/>
-              </a:rPr>
-              <a:t>▸  </a:t>
-            </a:r>
-            <a:r>
-              <a:rPr sz="1600" b="0" i="0">
-                <a:solidFill>
-                  <a:srgbClr val="1B2330"/>
-                </a:solidFill>
-                <a:latin typeface="Montserrat"/>
-              </a:rPr>
-              <a:t>Categoría A/B/C = carné del instalador</a:t>
-            </a:r>
-          </a:p>
-          <a:p>
-            <a:pPr>
-              <a:spcAft>
-                <a:spcPts val="1100"/>
-              </a:spcAft>
-            </a:pPr>
-            <a:r>
-              <a:rPr sz="1600" b="1" i="0">
-                <a:solidFill>
-                  <a:srgbClr val="E8801A"/>
-                </a:solidFill>
-                <a:latin typeface="Montserrat"/>
-              </a:rPr>
-              <a:t>▸  </a:t>
-            </a:r>
-            <a:r>
-              <a:rPr sz="1600" b="0" i="0">
-                <a:solidFill>
-                  <a:srgbClr val="1B2330"/>
-                </a:solidFill>
-                <a:latin typeface="Montserrat"/>
-              </a:rPr>
-              <a:t>Con categoría B trabajas tipos A, B o C</a:t>
-            </a:r>
-          </a:p>
-        </p:txBody>
-      </p:sp>
-      <p:sp>
-        <p:nvSpPr>
-          <p:cNvPr id="9" name="imgph" descr="IMGQ:gas installer certification card"/>
+      <p:graphicFrame>
+        <p:nvGraphicFramePr>
+          <p:cNvPr id="8" name="Table 7"/>
+          <p:cNvGraphicFramePr>
+            <a:graphicFrameLocks noGrp="1"/>
+          </p:cNvGraphicFramePr>
+          <p:nvPr/>
+        </p:nvGraphicFramePr>
+        <p:xfrm>
+          <a:off x="548640" y="1783080"/>
+          <a:ext cx="11091672" cy="4023360"/>
+        </p:xfrm>
+        <a:graphic>
+          <a:graphicData uri="http://schemas.openxmlformats.org/drawingml/2006/table">
+            <a:tbl>
+              <a:tblPr firstRow="1" bandRow="1">
+                <a:tableStyleId>{5C22544A-7EE6-4342-B048-85BDC9FD1C3A}</a:tableStyleId>
+              </a:tblPr>
+              <a:tblGrid>
+                <a:gridCol w="2218334"/>
+                <a:gridCol w="2218334"/>
+                <a:gridCol w="2218334"/>
+                <a:gridCol w="2218334"/>
+                <a:gridCol w="2218336"/>
+              </a:tblGrid>
+              <a:tr h="1005840">
+                <a:tc>
+                  <a:txBody>
+                    <a:bodyPr/>
+                    <a:lstStyle/>
+                    <a:p>
+                      <a:r>
+                        <a:rPr sz="1100" b="1" i="0">
+                          <a:solidFill>
+                            <a:srgbClr val="FFFFFF"/>
+                          </a:solidFill>
+                          <a:latin typeface="Montserrat"/>
+                        </a:rPr>
+                        <a:t>Tipo</a:t>
+                      </a:r>
+                    </a:p>
+                  </a:txBody>
+                  <a:tcPr>
+                    <a:solidFill>
+                      <a:srgbClr val="1E2761"/>
+                    </a:solidFill>
+                  </a:tcPr>
+                </a:tc>
+                <a:tc>
+                  <a:txBody>
+                    <a:bodyPr/>
+                    <a:lstStyle/>
+                    <a:p>
+                      <a:r>
+                        <a:rPr sz="1100" b="1" i="0">
+                          <a:solidFill>
+                            <a:srgbClr val="FFFFFF"/>
+                          </a:solidFill>
+                          <a:latin typeface="Montserrat"/>
+                        </a:rPr>
+                        <a:t>Nombre</a:t>
+                      </a:r>
+                    </a:p>
+                  </a:txBody>
+                  <a:tcPr>
+                    <a:solidFill>
+                      <a:srgbClr val="1E2761"/>
+                    </a:solidFill>
+                  </a:tcPr>
+                </a:tc>
+                <a:tc>
+                  <a:txBody>
+                    <a:bodyPr/>
+                    <a:lstStyle/>
+                    <a:p>
+                      <a:r>
+                        <a:rPr sz="1100" b="1" i="0">
+                          <a:solidFill>
+                            <a:srgbClr val="FFFFFF"/>
+                          </a:solidFill>
+                          <a:latin typeface="Montserrat"/>
+                        </a:rPr>
+                        <a:t>Toma de aire</a:t>
+                      </a:r>
+                    </a:p>
+                  </a:txBody>
+                  <a:tcPr>
+                    <a:solidFill>
+                      <a:srgbClr val="1E2761"/>
+                    </a:solidFill>
+                  </a:tcPr>
+                </a:tc>
+                <a:tc>
+                  <a:txBody>
+                    <a:bodyPr/>
+                    <a:lstStyle/>
+                    <a:p>
+                      <a:r>
+                        <a:rPr sz="1100" b="1" i="0">
+                          <a:solidFill>
+                            <a:srgbClr val="FFFFFF"/>
+                          </a:solidFill>
+                          <a:latin typeface="Montserrat"/>
+                        </a:rPr>
+                        <a:t>Evacúa humos</a:t>
+                      </a:r>
+                    </a:p>
+                  </a:txBody>
+                  <a:tcPr>
+                    <a:solidFill>
+                      <a:srgbClr val="1E2761"/>
+                    </a:solidFill>
+                  </a:tcPr>
+                </a:tc>
+                <a:tc>
+                  <a:txBody>
+                    <a:bodyPr/>
+                    <a:lstStyle/>
+                    <a:p>
+                      <a:r>
+                        <a:rPr sz="1100" b="1" i="0">
+                          <a:solidFill>
+                            <a:srgbClr val="FFFFFF"/>
+                          </a:solidFill>
+                          <a:latin typeface="Montserrat"/>
+                        </a:rPr>
+                        <a:t>Ejemplos típicos</a:t>
+                      </a:r>
+                    </a:p>
+                  </a:txBody>
+                  <a:tcPr>
+                    <a:solidFill>
+                      <a:srgbClr val="1E2761"/>
+                    </a:solidFill>
+                  </a:tcPr>
+                </a:tc>
+              </a:tr>
+              <a:tr h="1005840">
+                <a:tc>
+                  <a:txBody>
+                    <a:bodyPr/>
+                    <a:lstStyle/>
+                    <a:p>
+                      <a:r>
+                        <a:rPr sz="1100" b="0" i="0">
+                          <a:solidFill>
+                            <a:srgbClr val="1B2330"/>
+                          </a:solidFill>
+                          <a:latin typeface="Montserrat"/>
+                        </a:rPr>
+                        <a:t>A</a:t>
+                      </a:r>
+                    </a:p>
+                  </a:txBody>
+                  <a:tcPr>
+                    <a:solidFill>
+                      <a:srgbClr val="F6F8FC"/>
+                    </a:solidFill>
+                  </a:tcPr>
+                </a:tc>
+                <a:tc>
+                  <a:txBody>
+                    <a:bodyPr/>
+                    <a:lstStyle/>
+                    <a:p>
+                      <a:r>
+                        <a:rPr sz="1100" b="0" i="0">
+                          <a:solidFill>
+                            <a:srgbClr val="1B2330"/>
+                          </a:solidFill>
+                          <a:latin typeface="Montserrat"/>
+                        </a:rPr>
+                        <a:t>No conducido</a:t>
+                      </a:r>
+                    </a:p>
+                  </a:txBody>
+                  <a:tcPr>
+                    <a:solidFill>
+                      <a:srgbClr val="F6F8FC"/>
+                    </a:solidFill>
+                  </a:tcPr>
+                </a:tc>
+                <a:tc>
+                  <a:txBody>
+                    <a:bodyPr/>
+                    <a:lstStyle/>
+                    <a:p>
+                      <a:r>
+                        <a:rPr sz="1100" b="0" i="0">
+                          <a:solidFill>
+                            <a:srgbClr val="1B2330"/>
+                          </a:solidFill>
+                          <a:latin typeface="Montserrat"/>
+                        </a:rPr>
+                        <a:t>Del local</a:t>
+                      </a:r>
+                    </a:p>
+                  </a:txBody>
+                  <a:tcPr>
+                    <a:solidFill>
+                      <a:srgbClr val="F6F8FC"/>
+                    </a:solidFill>
+                  </a:tcPr>
+                </a:tc>
+                <a:tc>
+                  <a:txBody>
+                    <a:bodyPr/>
+                    <a:lstStyle/>
+                    <a:p>
+                      <a:r>
+                        <a:rPr sz="1100" b="0" i="0">
+                          <a:solidFill>
+                            <a:srgbClr val="1B2330"/>
+                          </a:solidFill>
+                          <a:latin typeface="Montserrat"/>
+                        </a:rPr>
+                        <a:t>Al local (sin conducto de evacuación)</a:t>
+                      </a:r>
+                    </a:p>
+                  </a:txBody>
+                  <a:tcPr>
+                    <a:solidFill>
+                      <a:srgbClr val="F6F8FC"/>
+                    </a:solidFill>
+                  </a:tcPr>
+                </a:tc>
+                <a:tc>
+                  <a:txBody>
+                    <a:bodyPr/>
+                    <a:lstStyle/>
+                    <a:p>
+                      <a:r>
+                        <a:rPr sz="1100" b="0" i="0">
+                          <a:solidFill>
+                            <a:srgbClr val="1B2330"/>
+                          </a:solidFill>
+                          <a:latin typeface="Montserrat"/>
+                        </a:rPr>
+                        <a:t>Cocina, horno, encimera, calentadores pequeños</a:t>
+                      </a:r>
+                    </a:p>
+                  </a:txBody>
+                  <a:tcPr>
+                    <a:solidFill>
+                      <a:srgbClr val="F6F8FC"/>
+                    </a:solidFill>
+                  </a:tcPr>
+                </a:tc>
+              </a:tr>
+              <a:tr h="1005840">
+                <a:tc>
+                  <a:txBody>
+                    <a:bodyPr/>
+                    <a:lstStyle/>
+                    <a:p>
+                      <a:r>
+                        <a:rPr sz="1100" b="0" i="0">
+                          <a:solidFill>
+                            <a:srgbClr val="1B2330"/>
+                          </a:solidFill>
+                          <a:latin typeface="Montserrat"/>
+                        </a:rPr>
+                        <a:t>B</a:t>
+                      </a:r>
+                    </a:p>
+                  </a:txBody>
+                  <a:tcPr>
+                    <a:solidFill>
+                      <a:srgbClr val="FFFFFF"/>
+                    </a:solidFill>
+                  </a:tcPr>
+                </a:tc>
+                <a:tc>
+                  <a:txBody>
+                    <a:bodyPr/>
+                    <a:lstStyle/>
+                    <a:p>
+                      <a:r>
+                        <a:rPr sz="1100" b="0" i="0">
+                          <a:solidFill>
+                            <a:srgbClr val="1B2330"/>
+                          </a:solidFill>
+                          <a:latin typeface="Montserrat"/>
+                        </a:rPr>
+                        <a:t>Conducido de cámara abierta</a:t>
+                      </a:r>
+                    </a:p>
+                  </a:txBody>
+                  <a:tcPr>
+                    <a:solidFill>
+                      <a:srgbClr val="FFFFFF"/>
+                    </a:solidFill>
+                  </a:tcPr>
+                </a:tc>
+                <a:tc>
+                  <a:txBody>
+                    <a:bodyPr/>
+                    <a:lstStyle/>
+                    <a:p>
+                      <a:r>
+                        <a:rPr sz="1100" b="0" i="0">
+                          <a:solidFill>
+                            <a:srgbClr val="1B2330"/>
+                          </a:solidFill>
+                          <a:latin typeface="Montserrat"/>
+                        </a:rPr>
+                        <a:t>Del local</a:t>
+                      </a:r>
+                    </a:p>
+                  </a:txBody>
+                  <a:tcPr>
+                    <a:solidFill>
+                      <a:srgbClr val="FFFFFF"/>
+                    </a:solidFill>
+                  </a:tcPr>
+                </a:tc>
+                <a:tc>
+                  <a:txBody>
+                    <a:bodyPr/>
+                    <a:lstStyle/>
+                    <a:p>
+                      <a:r>
+                        <a:rPr sz="1100" b="0" i="0">
+                          <a:solidFill>
+                            <a:srgbClr val="1B2330"/>
+                          </a:solidFill>
+                          <a:latin typeface="Montserrat"/>
+                        </a:rPr>
+                        <a:t>Al exterior por conducto de humos</a:t>
+                      </a:r>
+                    </a:p>
+                  </a:txBody>
+                  <a:tcPr>
+                    <a:solidFill>
+                      <a:srgbClr val="FFFFFF"/>
+                    </a:solidFill>
+                  </a:tcPr>
+                </a:tc>
+                <a:tc>
+                  <a:txBody>
+                    <a:bodyPr/>
+                    <a:lstStyle/>
+                    <a:p>
+                      <a:r>
+                        <a:rPr sz="1100" b="0" i="0">
+                          <a:solidFill>
+                            <a:srgbClr val="1B2330"/>
+                          </a:solidFill>
+                          <a:latin typeface="Montserrat"/>
+                        </a:rPr>
+                        <a:t>Calentador atmosférico, caldera atmosférica</a:t>
+                      </a:r>
+                    </a:p>
+                  </a:txBody>
+                  <a:tcPr>
+                    <a:solidFill>
+                      <a:srgbClr val="FFFFFF"/>
+                    </a:solidFill>
+                  </a:tcPr>
+                </a:tc>
+              </a:tr>
+              <a:tr h="1005840">
+                <a:tc>
+                  <a:txBody>
+                    <a:bodyPr/>
+                    <a:lstStyle/>
+                    <a:p>
+                      <a:r>
+                        <a:rPr sz="1100" b="0" i="0">
+                          <a:solidFill>
+                            <a:srgbClr val="1B2330"/>
+                          </a:solidFill>
+                          <a:latin typeface="Montserrat"/>
+                        </a:rPr>
+                        <a:t>C</a:t>
+                      </a:r>
+                    </a:p>
+                  </a:txBody>
+                  <a:tcPr>
+                    <a:solidFill>
+                      <a:srgbClr val="F6F8FC"/>
+                    </a:solidFill>
+                  </a:tcPr>
+                </a:tc>
+                <a:tc>
+                  <a:txBody>
+                    <a:bodyPr/>
+                    <a:lstStyle/>
+                    <a:p>
+                      <a:r>
+                        <a:rPr sz="1100" b="0" i="0">
+                          <a:solidFill>
+                            <a:srgbClr val="1B2330"/>
+                          </a:solidFill>
+                          <a:latin typeface="Montserrat"/>
+                        </a:rPr>
+                        <a:t>Estanco</a:t>
+                      </a:r>
+                    </a:p>
+                  </a:txBody>
+                  <a:tcPr>
+                    <a:solidFill>
+                      <a:srgbClr val="F6F8FC"/>
+                    </a:solidFill>
+                  </a:tcPr>
+                </a:tc>
+                <a:tc>
+                  <a:txBody>
+                    <a:bodyPr/>
+                    <a:lstStyle/>
+                    <a:p>
+                      <a:r>
+                        <a:rPr sz="1100" b="0" i="0">
+                          <a:solidFill>
+                            <a:srgbClr val="1B2330"/>
+                          </a:solidFill>
+                          <a:latin typeface="Montserrat"/>
+                        </a:rPr>
+                        <a:t>Del exterior</a:t>
+                      </a:r>
+                    </a:p>
+                  </a:txBody>
+                  <a:tcPr>
+                    <a:solidFill>
+                      <a:srgbClr val="F6F8FC"/>
+                    </a:solidFill>
+                  </a:tcPr>
+                </a:tc>
+                <a:tc>
+                  <a:txBody>
+                    <a:bodyPr/>
+                    <a:lstStyle/>
+                    <a:p>
+                      <a:r>
+                        <a:rPr sz="1100" b="0" i="0">
+                          <a:solidFill>
+                            <a:srgbClr val="1B2330"/>
+                          </a:solidFill>
+                          <a:latin typeface="Montserrat"/>
+                        </a:rPr>
+                        <a:t>Al exterior (circuito estanco respecto al local)</a:t>
+                      </a:r>
+                    </a:p>
+                  </a:txBody>
+                  <a:tcPr>
+                    <a:solidFill>
+                      <a:srgbClr val="F6F8FC"/>
+                    </a:solidFill>
+                  </a:tcPr>
+                </a:tc>
+                <a:tc>
+                  <a:txBody>
+                    <a:bodyPr/>
+                    <a:lstStyle/>
+                    <a:p>
+                      <a:r>
+                        <a:rPr sz="1100" b="0" i="0">
+                          <a:solidFill>
+                            <a:srgbClr val="1B2330"/>
+                          </a:solidFill>
+                          <a:latin typeface="Montserrat"/>
+                        </a:rPr>
+                        <a:t>Caldera estanca, caldera de condensación estanca</a:t>
+                      </a:r>
+                    </a:p>
+                  </a:txBody>
+                  <a:tcPr>
+                    <a:solidFill>
+                      <a:srgbClr val="F6F8FC"/>
+                    </a:solidFill>
+                  </a:tcPr>
+                </a:tc>
+              </a:tr>
+            </a:tbl>
+          </a:graphicData>
+        </a:graphic>
+      </p:graphicFrame>
+      <p:sp>
+        <p:nvSpPr>
+          <p:cNvPr id="9" name="Rounded Rectangle 8"/>
           <p:cNvSpPr/>
           <p:nvPr/>
         </p:nvSpPr>
         <p:spPr>
           <a:xfrm>
-            <a:off x="5806440" y="1051560"/>
-            <a:ext cx="5298947" cy="4629150"/>
+            <a:off x="548640" y="5943600"/>
+            <a:ext cx="11091672" cy="384048"/>
           </a:xfrm>
           <a:prstGeom prst="roundRect">
             <a:avLst/>
@@ -9750,7 +13389,7 @@
           </a:solidFill>
           <a:ln w="12700">
             <a:solidFill>
-              <a:srgbClr val="C7D2E6"/>
+              <a:srgbClr val="D7DEEA"/>
             </a:solidFill>
           </a:ln>
           <a:effectLst/>
@@ -9785,8 +13424,8 @@
         </p:nvSpPr>
         <p:spPr>
           <a:xfrm>
-            <a:off x="6080760" y="2726055"/>
-            <a:ext cx="4750307" cy="1280160"/>
+            <a:off x="731520" y="5961888"/>
+            <a:ext cx="10789920" cy="365760"/>
           </a:xfrm>
           <a:prstGeom prst="rect">
             <a:avLst/>
@@ -9799,27 +13438,23 @@
           </a:bodyPr>
           <a:lstStyle/>
           <a:p>
-            <a:pPr algn="ctr"/>
-            <a:r>
-              <a:rPr sz="1400" b="1" i="0">
-                <a:solidFill>
-                  <a:srgbClr val="64748B"/>
-                </a:solidFill>
-                <a:latin typeface="Montserrat"/>
-              </a:rPr>
-              <a:t>IMAGEN REALISTA</a:t>
-            </a:r>
-          </a:p>
-          <a:p>
-            <a:pPr algn="ctr"/>
-            <a:r>
-              <a:rPr sz="1100" b="0" i="1">
-                <a:solidFill>
-                  <a:srgbClr val="64748B"/>
-                </a:solidFill>
-                <a:latin typeface="Montserrat"/>
-              </a:rPr>
-              <a:t>gas installer certification card</a:t>
+            <a:r>
+              <a:rPr sz="1100" b="1" i="0">
+                <a:solidFill>
+                  <a:srgbClr val="E8801A"/>
+                </a:solidFill>
+                <a:latin typeface="Montserrat"/>
+              </a:rPr>
+              <a:t>Qué significa:  </a:t>
+            </a:r>
+            <a:r>
+              <a:rPr sz="1100" b="0" i="0">
+                <a:solidFill>
+                  <a:srgbClr val="1B2330"/>
+                </a:solidFill>
+                <a:latin typeface="Montserrat"/>
+              </a:rPr>
+              <a:t>Los tipos B y C son los aparatos conducidos: van unidos a un conducto de evacuación de los humos.</a:t>
             </a:r>
           </a:p>
         </p:txBody>
@@ -9829,6 +13464,18 @@
   <p:clrMapOvr>
     <a:masterClrMapping/>
   </p:clrMapOvr>
+  <mc:AlternateContent xmlns:mc="http://schemas.openxmlformats.org/markup-compatibility/2006">
+    <mc:Choice xmlns:p14="http://schemas.microsoft.com/office/powerpoint/2010/main" Requires="p14">
+      <p:transition spd="med" p14:dur="700">
+        <p14:cube dir="r"/>
+      </p:transition>
+    </mc:Choice>
+    <mc:Fallback>
+      <p:transition spd="med">
+        <p:push dir="r"/>
+      </p:transition>
+    </mc:Fallback>
+  </mc:AlternateContent>
 </p:sld>
 </file>
 
@@ -9916,7 +13563,7 @@
                 </a:solidFill>
                 <a:latin typeface="Montserrat"/>
               </a:rPr>
-              <a:t>007 / 015</a:t>
+              <a:t>007 / 020</a:t>
             </a:r>
           </a:p>
         </p:txBody>
@@ -9957,84 +13604,16 @@
       </p:sp>
       <p:sp>
         <p:nvSpPr>
-          <p:cNvPr id="5" name="TextBox 4"/>
-          <p:cNvSpPr txBox="1"/>
-          <p:nvPr/>
-        </p:nvSpPr>
-        <p:spPr>
-          <a:xfrm>
-            <a:off x="822960" y="457200"/>
-            <a:ext cx="10058400" cy="365760"/>
-          </a:xfrm>
-          <a:prstGeom prst="rect">
-            <a:avLst/>
-          </a:prstGeom>
-          <a:noFill/>
-        </p:spPr>
-        <p:txBody>
-          <a:bodyPr wrap="square">
-            <a:spAutoFit/>
-          </a:bodyPr>
-          <a:lstStyle/>
-          <a:p>
-            <a:r>
-              <a:rPr sz="1300" b="1" i="0">
-                <a:solidFill>
-                  <a:srgbClr val="E8801A"/>
-                </a:solidFill>
-                <a:latin typeface="Montserrat"/>
-              </a:rPr>
-              <a:t>APARTADO 5.1 · AUTORIZACIÓN</a:t>
-            </a:r>
-          </a:p>
-        </p:txBody>
-      </p:sp>
-      <p:sp>
-        <p:nvSpPr>
-          <p:cNvPr id="6" name="TextBox 5"/>
-          <p:cNvSpPr txBox="1"/>
-          <p:nvPr/>
-        </p:nvSpPr>
-        <p:spPr>
-          <a:xfrm>
-            <a:off x="822960" y="868680"/>
-            <a:ext cx="10515600" cy="914400"/>
-          </a:xfrm>
-          <a:prstGeom prst="rect">
-            <a:avLst/>
-          </a:prstGeom>
-          <a:noFill/>
-        </p:spPr>
-        <p:txBody>
-          <a:bodyPr wrap="square">
-            <a:spAutoFit/>
-          </a:bodyPr>
-          <a:lstStyle/>
-          <a:p>
-            <a:r>
-              <a:rPr sz="2800" b="1" i="0">
-                <a:solidFill>
-                  <a:srgbClr val="1E2761"/>
-                </a:solidFill>
-                <a:latin typeface="Montserrat"/>
-              </a:rPr>
-              <a:t>Instalar un aparato no pide permiso</a:t>
-            </a:r>
-          </a:p>
-        </p:txBody>
-      </p:sp>
-      <p:sp>
-        <p:nvSpPr>
-          <p:cNvPr id="7" name="Rounded Rectangle 6"/>
+          <p:cNvPr id="5" name="Rectangle 4"/>
           <p:cNvSpPr/>
           <p:nvPr/>
         </p:nvSpPr>
         <p:spPr>
           <a:xfrm>
-            <a:off x="868680" y="1627632"/>
-            <a:ext cx="2011680" cy="73152"/>
-          </a:xfrm>
-          <a:prstGeom prst="roundRect">
+            <a:off x="0" y="0"/>
+            <a:ext cx="12191695" cy="1143000"/>
+          </a:xfrm>
+          <a:prstGeom prst="rect">
             <a:avLst/>
           </a:prstGeom>
           <a:solidFill>
@@ -10069,14 +13648,14 @@
       </p:sp>
       <p:sp>
         <p:nvSpPr>
-          <p:cNvPr id="8" name="TextBox 7"/>
+          <p:cNvPr id="6" name="TextBox 5"/>
           <p:cNvSpPr txBox="1"/>
           <p:nvPr/>
         </p:nvSpPr>
         <p:spPr>
           <a:xfrm>
-            <a:off x="822960" y="1965960"/>
-            <a:ext cx="4983480" cy="4206240"/>
+            <a:off x="822960" y="274320"/>
+            <a:ext cx="10515600" cy="640080"/>
           </a:xfrm>
           <a:prstGeom prst="rect">
             <a:avLst/>
@@ -10089,92 +13668,62 @@
           </a:bodyPr>
           <a:lstStyle/>
           <a:p>
-            <a:pPr>
-              <a:spcAft>
-                <a:spcPts val="1100"/>
-              </a:spcAft>
-            </a:pPr>
-            <a:r>
-              <a:rPr sz="1600" b="1" i="0">
-                <a:solidFill>
-                  <a:srgbClr val="E8801A"/>
-                </a:solidFill>
-                <a:latin typeface="Montserrat"/>
-              </a:rPr>
-              <a:t>▸  </a:t>
-            </a:r>
-            <a:r>
-              <a:rPr sz="1600" b="0" i="0">
-                <a:solidFill>
-                  <a:srgbClr val="1B2330"/>
-                </a:solidFill>
-                <a:latin typeface="Montserrat"/>
-              </a:rPr>
-              <a:t>No precisa autorización administrativa</a:t>
-            </a:r>
-          </a:p>
-          <a:p>
-            <a:pPr>
-              <a:spcAft>
-                <a:spcPts val="1100"/>
-              </a:spcAft>
-            </a:pPr>
-            <a:r>
-              <a:rPr sz="1600" b="1" i="0">
-                <a:solidFill>
-                  <a:srgbClr val="E8801A"/>
-                </a:solidFill>
-                <a:latin typeface="Montserrat"/>
-              </a:rPr>
-              <a:t>▸  </a:t>
-            </a:r>
-            <a:r>
-              <a:rPr sz="1600" b="0" i="0">
-                <a:solidFill>
-                  <a:srgbClr val="1B2330"/>
-                </a:solidFill>
-                <a:latin typeface="Montserrat"/>
-              </a:rPr>
-              <a:t>En gas: hacer y, si toca, comunicar</a:t>
-            </a:r>
-          </a:p>
-          <a:p>
-            <a:pPr>
-              <a:spcAft>
-                <a:spcPts val="1100"/>
-              </a:spcAft>
-            </a:pPr>
-            <a:r>
-              <a:rPr sz="1600" b="1" i="0">
-                <a:solidFill>
-                  <a:srgbClr val="E8801A"/>
-                </a:solidFill>
-                <a:latin typeface="Montserrat"/>
-              </a:rPr>
-              <a:t>▸  </a:t>
-            </a:r>
-            <a:r>
-              <a:rPr sz="1600" b="0" i="0">
-                <a:solidFill>
-                  <a:srgbClr val="1B2330"/>
-                </a:solidFill>
-                <a:latin typeface="Montserrat"/>
-              </a:rPr>
-              <a:t>Aquí ni siquiera hay que comunicar</a:t>
-            </a:r>
-          </a:p>
-        </p:txBody>
-      </p:sp>
-      <p:sp>
-        <p:nvSpPr>
-          <p:cNvPr id="9" name="imgph" descr="IMGQ:gas boiler wall mounted kitchen"/>
+            <a:r>
+              <a:rPr sz="2400" b="1" i="0">
+                <a:solidFill>
+                  <a:srgbClr val="FFFFFF"/>
+                </a:solidFill>
+                <a:latin typeface="Montserrat"/>
+              </a:rPr>
+              <a:t>⚡  PREGUNTA RÁPIDA</a:t>
+            </a:r>
+          </a:p>
+        </p:txBody>
+      </p:sp>
+      <p:sp>
+        <p:nvSpPr>
+          <p:cNvPr id="7" name="TextBox 6"/>
+          <p:cNvSpPr txBox="1"/>
+          <p:nvPr/>
+        </p:nvSpPr>
+        <p:spPr>
+          <a:xfrm>
+            <a:off x="822960" y="1508760"/>
+            <a:ext cx="10515600" cy="1371600"/>
+          </a:xfrm>
+          <a:prstGeom prst="rect">
+            <a:avLst/>
+          </a:prstGeom>
+          <a:noFill/>
+        </p:spPr>
+        <p:txBody>
+          <a:bodyPr wrap="square">
+            <a:spAutoFit/>
+          </a:bodyPr>
+          <a:lstStyle/>
+          <a:p>
+            <a:r>
+              <a:rPr sz="2400" b="1" i="0">
+                <a:solidFill>
+                  <a:srgbClr val="1E2761"/>
+                </a:solidFill>
+                <a:latin typeface="Montserrat"/>
+              </a:rPr>
+              <a:t>¿Qué tipos de aparato son los que la ITC llama conducidos?</a:t>
+            </a:r>
+          </a:p>
+        </p:txBody>
+      </p:sp>
+      <p:sp>
+        <p:nvSpPr>
+          <p:cNvPr id="8" name="Rounded Rectangle 7"/>
           <p:cNvSpPr/>
           <p:nvPr/>
         </p:nvSpPr>
         <p:spPr>
           <a:xfrm>
-            <a:off x="5806440" y="1051560"/>
-            <a:ext cx="5298947" cy="4629150"/>
+            <a:off x="822960" y="3291840"/>
+            <a:ext cx="4983480" cy="1143000"/>
           </a:xfrm>
           <a:prstGeom prst="roundRect">
             <a:avLst/>
@@ -10213,14 +13762,58 @@
       </p:sp>
       <p:sp>
         <p:nvSpPr>
+          <p:cNvPr id="9" name="Rectangle 8"/>
+          <p:cNvSpPr/>
+          <p:nvPr/>
+        </p:nvSpPr>
+        <p:spPr>
+          <a:xfrm>
+            <a:off x="822960" y="3291840"/>
+            <a:ext cx="640080" cy="1143000"/>
+          </a:xfrm>
+          <a:prstGeom prst="rect">
+            <a:avLst/>
+          </a:prstGeom>
+          <a:solidFill>
+            <a:srgbClr val="1E2761"/>
+          </a:solidFill>
+          <a:ln>
+            <a:noFill/>
+          </a:ln>
+          <a:effectLst/>
+        </p:spPr>
+        <p:style>
+          <a:lnRef idx="1">
+            <a:schemeClr val="accent1"/>
+          </a:lnRef>
+          <a:fillRef idx="3">
+            <a:schemeClr val="accent1"/>
+          </a:fillRef>
+          <a:effectRef idx="2">
+            <a:schemeClr val="accent1"/>
+          </a:effectRef>
+          <a:fontRef idx="minor">
+            <a:schemeClr val="lt1"/>
+          </a:fontRef>
+        </p:style>
+        <p:txBody>
+          <a:bodyPr rtlCol="0" anchor="ctr"/>
+          <a:lstStyle/>
+          <a:p>
+            <a:pPr algn="ctr"/>
+          </a:p>
+        </p:txBody>
+      </p:sp>
+      <p:sp>
+        <p:nvSpPr>
           <p:cNvPr id="10" name="TextBox 9"/>
           <p:cNvSpPr txBox="1"/>
           <p:nvPr/>
         </p:nvSpPr>
         <p:spPr>
           <a:xfrm>
-            <a:off x="6080760" y="2726055"/>
-            <a:ext cx="4750307" cy="1280160"/>
+            <a:off x="822960" y="3611880"/>
+            <a:ext cx="640080" cy="548640"/>
           </a:xfrm>
           <a:prstGeom prst="rect">
             <a:avLst/>
@@ -10235,25 +13828,524 @@
           <a:p>
             <a:pPr algn="ctr"/>
             <a:r>
-              <a:rPr sz="1400" b="1" i="0">
-                <a:solidFill>
-                  <a:srgbClr val="64748B"/>
-                </a:solidFill>
-                <a:latin typeface="Montserrat"/>
-              </a:rPr>
-              <a:t>IMAGEN REALISTA</a:t>
-            </a:r>
-          </a:p>
+              <a:rPr sz="2200" b="1" i="0">
+                <a:solidFill>
+                  <a:srgbClr val="FFFFFF"/>
+                </a:solidFill>
+                <a:latin typeface="Montserrat"/>
+              </a:rPr>
+              <a:t>A</a:t>
+            </a:r>
+          </a:p>
+        </p:txBody>
+      </p:sp>
+      <p:sp>
+        <p:nvSpPr>
+          <p:cNvPr id="11" name="TextBox 10"/>
+          <p:cNvSpPr txBox="1"/>
+          <p:nvPr/>
+        </p:nvSpPr>
+        <p:spPr>
+          <a:xfrm>
+            <a:off x="1600200" y="3474720"/>
+            <a:ext cx="4114800" cy="868680"/>
+          </a:xfrm>
+          <a:prstGeom prst="rect">
+            <a:avLst/>
+          </a:prstGeom>
+          <a:noFill/>
+        </p:spPr>
+        <p:txBody>
+          <a:bodyPr wrap="square">
+            <a:spAutoFit/>
+          </a:bodyPr>
+          <a:lstStyle/>
+          <a:p>
+            <a:r>
+              <a:rPr sz="1400" b="0" i="0">
+                <a:solidFill>
+                  <a:srgbClr val="1B2330"/>
+                </a:solidFill>
+                <a:latin typeface="Montserrat"/>
+              </a:rPr>
+              <a:t>Solo el tipo A, el no conducido</a:t>
+            </a:r>
+          </a:p>
+        </p:txBody>
+      </p:sp>
+      <p:sp>
+        <p:nvSpPr>
+          <p:cNvPr id="12" name="Rounded Rectangle 11"/>
+          <p:cNvSpPr/>
+          <p:nvPr/>
+        </p:nvSpPr>
+        <p:spPr>
+          <a:xfrm>
+            <a:off x="6355080" y="3291840"/>
+            <a:ext cx="4983480" cy="1143000"/>
+          </a:xfrm>
+          <a:prstGeom prst="roundRect">
+            <a:avLst/>
+          </a:prstGeom>
+          <a:solidFill>
+            <a:srgbClr val="F3F6FB"/>
+          </a:solidFill>
+          <a:ln w="12700">
+            <a:solidFill>
+              <a:srgbClr val="C7D2E6"/>
+            </a:solidFill>
+          </a:ln>
+          <a:effectLst/>
+        </p:spPr>
+        <p:style>
+          <a:lnRef idx="1">
+            <a:schemeClr val="accent1"/>
+          </a:lnRef>
+          <a:fillRef idx="3">
+            <a:schemeClr val="accent1"/>
+          </a:fillRef>
+          <a:effectRef idx="2">
+            <a:schemeClr val="accent1"/>
+          </a:effectRef>
+          <a:fontRef idx="minor">
+            <a:schemeClr val="lt1"/>
+          </a:fontRef>
+        </p:style>
+        <p:txBody>
+          <a:bodyPr rtlCol="0" anchor="ctr"/>
+          <a:lstStyle/>
           <a:p>
             <a:pPr algn="ctr"/>
-            <a:r>
-              <a:rPr sz="1100" b="0" i="1">
-                <a:solidFill>
-                  <a:srgbClr val="64748B"/>
-                </a:solidFill>
-                <a:latin typeface="Montserrat"/>
-              </a:rPr>
-              <a:t>gas boiler wall mounted kitchen</a:t>
+          </a:p>
+        </p:txBody>
+      </p:sp>
+      <p:sp>
+        <p:nvSpPr>
+          <p:cNvPr id="13" name="Rectangle 12"/>
+          <p:cNvSpPr/>
+          <p:nvPr/>
+        </p:nvSpPr>
+        <p:spPr>
+          <a:xfrm>
+            <a:off x="6355080" y="3291840"/>
+            <a:ext cx="640080" cy="1143000"/>
+          </a:xfrm>
+          <a:prstGeom prst="rect">
+            <a:avLst/>
+          </a:prstGeom>
+          <a:solidFill>
+            <a:srgbClr val="1E2761"/>
+          </a:solidFill>
+          <a:ln>
+            <a:noFill/>
+          </a:ln>
+          <a:effectLst/>
+        </p:spPr>
+        <p:style>
+          <a:lnRef idx="1">
+            <a:schemeClr val="accent1"/>
+          </a:lnRef>
+          <a:fillRef idx="3">
+            <a:schemeClr val="accent1"/>
+          </a:fillRef>
+          <a:effectRef idx="2">
+            <a:schemeClr val="accent1"/>
+          </a:effectRef>
+          <a:fontRef idx="minor">
+            <a:schemeClr val="lt1"/>
+          </a:fontRef>
+        </p:style>
+        <p:txBody>
+          <a:bodyPr rtlCol="0" anchor="ctr"/>
+          <a:lstStyle/>
+          <a:p>
+            <a:pPr algn="ctr"/>
+          </a:p>
+        </p:txBody>
+      </p:sp>
+      <p:sp>
+        <p:nvSpPr>
+          <p:cNvPr id="14" name="TextBox 13"/>
+          <p:cNvSpPr txBox="1"/>
+          <p:nvPr/>
+        </p:nvSpPr>
+        <p:spPr>
+          <a:xfrm>
+            <a:off x="6355080" y="3611880"/>
+            <a:ext cx="640080" cy="548640"/>
+          </a:xfrm>
+          <a:prstGeom prst="rect">
+            <a:avLst/>
+          </a:prstGeom>
+          <a:noFill/>
+        </p:spPr>
+        <p:txBody>
+          <a:bodyPr wrap="square">
+            <a:spAutoFit/>
+          </a:bodyPr>
+          <a:lstStyle/>
+          <a:p>
+            <a:pPr algn="ctr"/>
+            <a:r>
+              <a:rPr sz="2200" b="1" i="0">
+                <a:solidFill>
+                  <a:srgbClr val="FFFFFF"/>
+                </a:solidFill>
+                <a:latin typeface="Montserrat"/>
+              </a:rPr>
+              <a:t>B</a:t>
+            </a:r>
+          </a:p>
+        </p:txBody>
+      </p:sp>
+      <p:sp>
+        <p:nvSpPr>
+          <p:cNvPr id="15" name="TextBox 14"/>
+          <p:cNvSpPr txBox="1"/>
+          <p:nvPr/>
+        </p:nvSpPr>
+        <p:spPr>
+          <a:xfrm>
+            <a:off x="7132320" y="3474720"/>
+            <a:ext cx="4114800" cy="868680"/>
+          </a:xfrm>
+          <a:prstGeom prst="rect">
+            <a:avLst/>
+          </a:prstGeom>
+          <a:noFill/>
+        </p:spPr>
+        <p:txBody>
+          <a:bodyPr wrap="square">
+            <a:spAutoFit/>
+          </a:bodyPr>
+          <a:lstStyle/>
+          <a:p>
+            <a:r>
+              <a:rPr sz="1400" b="0" i="0">
+                <a:solidFill>
+                  <a:srgbClr val="1B2330"/>
+                </a:solidFill>
+                <a:latin typeface="Montserrat"/>
+              </a:rPr>
+              <a:t>Los tipos B y C, unidos a conducto</a:t>
+            </a:r>
+          </a:p>
+        </p:txBody>
+      </p:sp>
+      <p:sp>
+        <p:nvSpPr>
+          <p:cNvPr id="16" name="Rounded Rectangle 15"/>
+          <p:cNvSpPr/>
+          <p:nvPr/>
+        </p:nvSpPr>
+        <p:spPr>
+          <a:xfrm>
+            <a:off x="822960" y="4617720"/>
+            <a:ext cx="4983480" cy="1143000"/>
+          </a:xfrm>
+          <a:prstGeom prst="roundRect">
+            <a:avLst/>
+          </a:prstGeom>
+          <a:solidFill>
+            <a:srgbClr val="F3F6FB"/>
+          </a:solidFill>
+          <a:ln w="12700">
+            <a:solidFill>
+              <a:srgbClr val="C7D2E6"/>
+            </a:solidFill>
+          </a:ln>
+          <a:effectLst/>
+        </p:spPr>
+        <p:style>
+          <a:lnRef idx="1">
+            <a:schemeClr val="accent1"/>
+          </a:lnRef>
+          <a:fillRef idx="3">
+            <a:schemeClr val="accent1"/>
+          </a:fillRef>
+          <a:effectRef idx="2">
+            <a:schemeClr val="accent1"/>
+          </a:effectRef>
+          <a:fontRef idx="minor">
+            <a:schemeClr val="lt1"/>
+          </a:fontRef>
+        </p:style>
+        <p:txBody>
+          <a:bodyPr rtlCol="0" anchor="ctr"/>
+          <a:lstStyle/>
+          <a:p>
+            <a:pPr algn="ctr"/>
+          </a:p>
+        </p:txBody>
+      </p:sp>
+      <p:sp>
+        <p:nvSpPr>
+          <p:cNvPr id="17" name="Rectangle 16"/>
+          <p:cNvSpPr/>
+          <p:nvPr/>
+        </p:nvSpPr>
+        <p:spPr>
+          <a:xfrm>
+            <a:off x="822960" y="4617720"/>
+            <a:ext cx="640080" cy="1143000"/>
+          </a:xfrm>
+          <a:prstGeom prst="rect">
+            <a:avLst/>
+          </a:prstGeom>
+          <a:solidFill>
+            <a:srgbClr val="1E2761"/>
+          </a:solidFill>
+          <a:ln>
+            <a:noFill/>
+          </a:ln>
+          <a:effectLst/>
+        </p:spPr>
+        <p:style>
+          <a:lnRef idx="1">
+            <a:schemeClr val="accent1"/>
+          </a:lnRef>
+          <a:fillRef idx="3">
+            <a:schemeClr val="accent1"/>
+          </a:fillRef>
+          <a:effectRef idx="2">
+            <a:schemeClr val="accent1"/>
+          </a:effectRef>
+          <a:fontRef idx="minor">
+            <a:schemeClr val="lt1"/>
+          </a:fontRef>
+        </p:style>
+        <p:txBody>
+          <a:bodyPr rtlCol="0" anchor="ctr"/>
+          <a:lstStyle/>
+          <a:p>
+            <a:pPr algn="ctr"/>
+          </a:p>
+        </p:txBody>
+      </p:sp>
+      <p:sp>
+        <p:nvSpPr>
+          <p:cNvPr id="18" name="TextBox 17"/>
+          <p:cNvSpPr txBox="1"/>
+          <p:nvPr/>
+        </p:nvSpPr>
+        <p:spPr>
+          <a:xfrm>
+            <a:off x="822960" y="4937760"/>
+            <a:ext cx="640080" cy="548640"/>
+          </a:xfrm>
+          <a:prstGeom prst="rect">
+            <a:avLst/>
+          </a:prstGeom>
+          <a:noFill/>
+        </p:spPr>
+        <p:txBody>
+          <a:bodyPr wrap="square">
+            <a:spAutoFit/>
+          </a:bodyPr>
+          <a:lstStyle/>
+          <a:p>
+            <a:pPr algn="ctr"/>
+            <a:r>
+              <a:rPr sz="2200" b="1" i="0">
+                <a:solidFill>
+                  <a:srgbClr val="FFFFFF"/>
+                </a:solidFill>
+                <a:latin typeface="Montserrat"/>
+              </a:rPr>
+              <a:t>C</a:t>
+            </a:r>
+          </a:p>
+        </p:txBody>
+      </p:sp>
+      <p:sp>
+        <p:nvSpPr>
+          <p:cNvPr id="19" name="TextBox 18"/>
+          <p:cNvSpPr txBox="1"/>
+          <p:nvPr/>
+        </p:nvSpPr>
+        <p:spPr>
+          <a:xfrm>
+            <a:off x="1600200" y="4800600"/>
+            <a:ext cx="4114800" cy="868680"/>
+          </a:xfrm>
+          <a:prstGeom prst="rect">
+            <a:avLst/>
+          </a:prstGeom>
+          <a:noFill/>
+        </p:spPr>
+        <p:txBody>
+          <a:bodyPr wrap="square">
+            <a:spAutoFit/>
+          </a:bodyPr>
+          <a:lstStyle/>
+          <a:p>
+            <a:r>
+              <a:rPr sz="1400" b="0" i="0">
+                <a:solidFill>
+                  <a:srgbClr val="1B2330"/>
+                </a:solidFill>
+                <a:latin typeface="Montserrat"/>
+              </a:rPr>
+              <a:t>Solo el tipo C, el estanco</a:t>
+            </a:r>
+          </a:p>
+        </p:txBody>
+      </p:sp>
+      <p:sp>
+        <p:nvSpPr>
+          <p:cNvPr id="20" name="Rounded Rectangle 19"/>
+          <p:cNvSpPr/>
+          <p:nvPr/>
+        </p:nvSpPr>
+        <p:spPr>
+          <a:xfrm>
+            <a:off x="6355080" y="4617720"/>
+            <a:ext cx="4983480" cy="1143000"/>
+          </a:xfrm>
+          <a:prstGeom prst="roundRect">
+            <a:avLst/>
+          </a:prstGeom>
+          <a:solidFill>
+            <a:srgbClr val="F3F6FB"/>
+          </a:solidFill>
+          <a:ln w="12700">
+            <a:solidFill>
+              <a:srgbClr val="C7D2E6"/>
+            </a:solidFill>
+          </a:ln>
+          <a:effectLst/>
+        </p:spPr>
+        <p:style>
+          <a:lnRef idx="1">
+            <a:schemeClr val="accent1"/>
+          </a:lnRef>
+          <a:fillRef idx="3">
+            <a:schemeClr val="accent1"/>
+          </a:fillRef>
+          <a:effectRef idx="2">
+            <a:schemeClr val="accent1"/>
+          </a:effectRef>
+          <a:fontRef idx="minor">
+            <a:schemeClr val="lt1"/>
+          </a:fontRef>
+        </p:style>
+        <p:txBody>
+          <a:bodyPr rtlCol="0" anchor="ctr"/>
+          <a:lstStyle/>
+          <a:p>
+            <a:pPr algn="ctr"/>
+          </a:p>
+        </p:txBody>
+      </p:sp>
+      <p:sp>
+        <p:nvSpPr>
+          <p:cNvPr id="21" name="Rectangle 20"/>
+          <p:cNvSpPr/>
+          <p:nvPr/>
+        </p:nvSpPr>
+        <p:spPr>
+          <a:xfrm>
+            <a:off x="6355080" y="4617720"/>
+            <a:ext cx="640080" cy="1143000"/>
+          </a:xfrm>
+          <a:prstGeom prst="rect">
+            <a:avLst/>
+          </a:prstGeom>
+          <a:solidFill>
+            <a:srgbClr val="1E2761"/>
+          </a:solidFill>
+          <a:ln>
+            <a:noFill/>
+          </a:ln>
+          <a:effectLst/>
+        </p:spPr>
+        <p:style>
+          <a:lnRef idx="1">
+            <a:schemeClr val="accent1"/>
+          </a:lnRef>
+          <a:fillRef idx="3">
+            <a:schemeClr val="accent1"/>
+          </a:fillRef>
+          <a:effectRef idx="2">
+            <a:schemeClr val="accent1"/>
+          </a:effectRef>
+          <a:fontRef idx="minor">
+            <a:schemeClr val="lt1"/>
+          </a:fontRef>
+        </p:style>
+        <p:txBody>
+          <a:bodyPr rtlCol="0" anchor="ctr"/>
+          <a:lstStyle/>
+          <a:p>
+            <a:pPr algn="ctr"/>
+          </a:p>
+        </p:txBody>
+      </p:sp>
+      <p:sp>
+        <p:nvSpPr>
+          <p:cNvPr id="22" name="TextBox 21"/>
+          <p:cNvSpPr txBox="1"/>
+          <p:nvPr/>
+        </p:nvSpPr>
+        <p:spPr>
+          <a:xfrm>
+            <a:off x="6355080" y="4937760"/>
+            <a:ext cx="640080" cy="548640"/>
+          </a:xfrm>
+          <a:prstGeom prst="rect">
+            <a:avLst/>
+          </a:prstGeom>
+          <a:noFill/>
+        </p:spPr>
+        <p:txBody>
+          <a:bodyPr wrap="square">
+            <a:spAutoFit/>
+          </a:bodyPr>
+          <a:lstStyle/>
+          <a:p>
+            <a:pPr algn="ctr"/>
+            <a:r>
+              <a:rPr sz="2200" b="1" i="0">
+                <a:solidFill>
+                  <a:srgbClr val="FFFFFF"/>
+                </a:solidFill>
+                <a:latin typeface="Montserrat"/>
+              </a:rPr>
+              <a:t>D</a:t>
+            </a:r>
+          </a:p>
+        </p:txBody>
+      </p:sp>
+      <p:sp>
+        <p:nvSpPr>
+          <p:cNvPr id="23" name="TextBox 22"/>
+          <p:cNvSpPr txBox="1"/>
+          <p:nvPr/>
+        </p:nvSpPr>
+        <p:spPr>
+          <a:xfrm>
+            <a:off x="7132320" y="4800600"/>
+            <a:ext cx="4114800" cy="868680"/>
+          </a:xfrm>
+          <a:prstGeom prst="rect">
+            <a:avLst/>
+          </a:prstGeom>
+          <a:noFill/>
+        </p:spPr>
+        <p:txBody>
+          <a:bodyPr wrap="square">
+            <a:spAutoFit/>
+          </a:bodyPr>
+          <a:lstStyle/>
+          <a:p>
+            <a:r>
+              <a:rPr sz="1400" b="0" i="0">
+                <a:solidFill>
+                  <a:srgbClr val="1B2330"/>
+                </a:solidFill>
+                <a:latin typeface="Montserrat"/>
+              </a:rPr>
+              <a:t>Los tipos A y B, de cámara abierta</a:t>
             </a:r>
           </a:p>
         </p:txBody>
@@ -10263,6 +14355,18 @@
   <p:clrMapOvr>
     <a:masterClrMapping/>
   </p:clrMapOvr>
+  <mc:AlternateContent xmlns:mc="http://schemas.openxmlformats.org/markup-compatibility/2006">
+    <mc:Choice xmlns:p14="http://schemas.microsoft.com/office/powerpoint/2010/main" Requires="p14">
+      <p:transition spd="med" p14:dur="700">
+        <p14:cube dir="l"/>
+      </p:transition>
+    </mc:Choice>
+    <mc:Fallback>
+      <p:transition spd="med">
+        <p:push dir="l"/>
+      </p:transition>
+    </mc:Fallback>
+  </mc:AlternateContent>
 </p:sld>
 </file>
 
@@ -10350,7 +14454,7 @@
                 </a:solidFill>
                 <a:latin typeface="Montserrat"/>
               </a:rPr>
-              <a:t>008 / 015</a:t>
+              <a:t>008 / 020</a:t>
             </a:r>
           </a:p>
         </p:txBody>
@@ -10391,88 +14495,20 @@
       </p:sp>
       <p:sp>
         <p:nvSpPr>
-          <p:cNvPr id="5" name="TextBox 4"/>
-          <p:cNvSpPr txBox="1"/>
-          <p:nvPr/>
-        </p:nvSpPr>
-        <p:spPr>
-          <a:xfrm>
-            <a:off x="822960" y="457200"/>
-            <a:ext cx="10058400" cy="365760"/>
-          </a:xfrm>
-          <a:prstGeom prst="rect">
-            <a:avLst/>
-          </a:prstGeom>
-          <a:noFill/>
-        </p:spPr>
-        <p:txBody>
-          <a:bodyPr wrap="square">
-            <a:spAutoFit/>
-          </a:bodyPr>
-          <a:lstStyle/>
-          <a:p>
-            <a:r>
-              <a:rPr sz="1300" b="1" i="0">
-                <a:solidFill>
-                  <a:srgbClr val="E8801A"/>
-                </a:solidFill>
-                <a:latin typeface="Montserrat"/>
-              </a:rPr>
-              <a:t>APARTADO 5.2 · CONEXIÓN</a:t>
-            </a:r>
-          </a:p>
-        </p:txBody>
-      </p:sp>
-      <p:sp>
-        <p:nvSpPr>
-          <p:cNvPr id="6" name="TextBox 5"/>
-          <p:cNvSpPr txBox="1"/>
-          <p:nvPr/>
-        </p:nvSpPr>
-        <p:spPr>
-          <a:xfrm>
-            <a:off x="822960" y="868680"/>
-            <a:ext cx="10515600" cy="914400"/>
-          </a:xfrm>
-          <a:prstGeom prst="rect">
-            <a:avLst/>
-          </a:prstGeom>
-          <a:noFill/>
-        </p:spPr>
-        <p:txBody>
-          <a:bodyPr wrap="square">
-            <a:spAutoFit/>
-          </a:bodyPr>
-          <a:lstStyle/>
-          <a:p>
-            <a:r>
-              <a:rPr sz="2800" b="1" i="0">
-                <a:solidFill>
-                  <a:srgbClr val="1E2761"/>
-                </a:solidFill>
-                <a:latin typeface="Montserrat"/>
-              </a:rPr>
-              <a:t>Quién conecta el aparato</a:t>
-            </a:r>
-          </a:p>
-        </p:txBody>
-      </p:sp>
-      <p:sp>
-        <p:nvSpPr>
-          <p:cNvPr id="7" name="Rounded Rectangle 6"/>
+          <p:cNvPr id="5" name="Rectangle 4"/>
           <p:cNvSpPr/>
           <p:nvPr/>
         </p:nvSpPr>
         <p:spPr>
           <a:xfrm>
-            <a:off x="868680" y="1627632"/>
-            <a:ext cx="2011680" cy="73152"/>
-          </a:xfrm>
-          <a:prstGeom prst="roundRect">
+            <a:off x="0" y="0"/>
+            <a:ext cx="12191695" cy="1143000"/>
+          </a:xfrm>
+          <a:prstGeom prst="rect">
             <a:avLst/>
           </a:prstGeom>
           <a:solidFill>
-            <a:srgbClr val="E8801A"/>
+            <a:srgbClr val="1E8E4B"/>
           </a:solidFill>
           <a:ln>
             <a:noFill/>
@@ -10503,14 +14539,14 @@
       </p:sp>
       <p:sp>
         <p:nvSpPr>
-          <p:cNvPr id="8" name="TextBox 7"/>
+          <p:cNvPr id="6" name="TextBox 5"/>
           <p:cNvSpPr txBox="1"/>
           <p:nvPr/>
         </p:nvSpPr>
         <p:spPr>
           <a:xfrm>
-            <a:off x="822960" y="1965960"/>
-            <a:ext cx="4983480" cy="4206240"/>
+            <a:off x="822960" y="274320"/>
+            <a:ext cx="10515600" cy="640080"/>
           </a:xfrm>
           <a:prstGeom prst="rect">
             <a:avLst/>
@@ -10523,127 +14559,72 @@
           </a:bodyPr>
           <a:lstStyle/>
           <a:p>
-            <a:pPr>
-              <a:spcAft>
-                <a:spcPts val="1100"/>
-              </a:spcAft>
-            </a:pPr>
-            <a:r>
-              <a:rPr sz="1600" b="1" i="0">
-                <a:solidFill>
-                  <a:srgbClr val="E8801A"/>
-                </a:solidFill>
-                <a:latin typeface="Montserrat"/>
-              </a:rPr>
-              <a:t>▸  </a:t>
-            </a:r>
-            <a:r>
-              <a:rPr sz="1600" b="0" i="0">
-                <a:solidFill>
-                  <a:srgbClr val="1B2330"/>
-                </a:solidFill>
-                <a:latin typeface="Montserrat"/>
-              </a:rPr>
-              <a:t>Regla: siempre un instalador</a:t>
-            </a:r>
-          </a:p>
-          <a:p>
-            <a:pPr>
-              <a:spcAft>
-                <a:spcPts val="1100"/>
-              </a:spcAft>
-            </a:pPr>
-            <a:r>
-              <a:rPr sz="1600" b="1" i="0">
-                <a:solidFill>
-                  <a:srgbClr val="E8801A"/>
-                </a:solidFill>
-                <a:latin typeface="Montserrat"/>
-              </a:rPr>
-              <a:t>▸  </a:t>
-            </a:r>
-            <a:r>
-              <a:rPr sz="1600" b="0" i="0">
-                <a:solidFill>
-                  <a:srgbClr val="1B2330"/>
-                </a:solidFill>
-                <a:latin typeface="Montserrat"/>
-              </a:rPr>
-              <a:t>Conexión según UNE 60670-7</a:t>
-            </a:r>
-          </a:p>
-          <a:p>
-            <a:pPr>
-              <a:spcAft>
-                <a:spcPts val="1100"/>
-              </a:spcAft>
-            </a:pPr>
-            <a:r>
-              <a:rPr sz="1600" b="1" i="0">
-                <a:solidFill>
-                  <a:srgbClr val="E8801A"/>
-                </a:solidFill>
-                <a:latin typeface="Montserrat"/>
-              </a:rPr>
-              <a:t>▸  </a:t>
-            </a:r>
-            <a:r>
-              <a:rPr sz="1600" b="0" i="0">
-                <a:solidFill>
-                  <a:srgbClr val="1B2330"/>
-                </a:solidFill>
-                <a:latin typeface="Montserrat"/>
-              </a:rPr>
-              <a:t>Excepción: tubo flexible con abrazadera</a:t>
-            </a:r>
-          </a:p>
-          <a:p>
-            <a:pPr>
-              <a:spcAft>
-                <a:spcPts val="1100"/>
-              </a:spcAft>
-            </a:pPr>
-            <a:r>
-              <a:rPr sz="1600" b="1" i="0">
-                <a:solidFill>
-                  <a:srgbClr val="E8801A"/>
-                </a:solidFill>
-                <a:latin typeface="Montserrat"/>
-              </a:rPr>
-              <a:t>▸  </a:t>
-            </a:r>
-            <a:r>
-              <a:rPr sz="1600" b="0" i="0">
-                <a:solidFill>
-                  <a:srgbClr val="1B2330"/>
-                </a:solidFill>
-                <a:latin typeface="Montserrat"/>
-              </a:rPr>
-              <a:t>Ese lo puede poner el usuario</a:t>
-            </a:r>
-          </a:p>
-        </p:txBody>
-      </p:sp>
-      <p:sp>
-        <p:nvSpPr>
-          <p:cNvPr id="9" name="imgph" descr="IMGQ:flexible gas hose stove connection"/>
+            <a:r>
+              <a:rPr sz="2400" b="1" i="0">
+                <a:solidFill>
+                  <a:srgbClr val="FFFFFF"/>
+                </a:solidFill>
+                <a:latin typeface="Montserrat"/>
+              </a:rPr>
+              <a:t>✔  RESPUESTA:  B</a:t>
+            </a:r>
+          </a:p>
+        </p:txBody>
+      </p:sp>
+      <p:sp>
+        <p:nvSpPr>
+          <p:cNvPr id="7" name="TextBox 6"/>
+          <p:cNvSpPr txBox="1"/>
+          <p:nvPr/>
+        </p:nvSpPr>
+        <p:spPr>
+          <a:xfrm>
+            <a:off x="822960" y="1417320"/>
+            <a:ext cx="10515600" cy="914400"/>
+          </a:xfrm>
+          <a:prstGeom prst="rect">
+            <a:avLst/>
+          </a:prstGeom>
+          <a:noFill/>
+        </p:spPr>
+        <p:txBody>
+          <a:bodyPr wrap="square">
+            <a:spAutoFit/>
+          </a:bodyPr>
+          <a:lstStyle/>
+          <a:p>
+            <a:r>
+              <a:rPr sz="1800" b="1" i="0">
+                <a:solidFill>
+                  <a:srgbClr val="64748B"/>
+                </a:solidFill>
+                <a:latin typeface="Montserrat"/>
+              </a:rPr>
+              <a:t>¿Qué tipos de aparato son los que la ITC llama conducidos?</a:t>
+            </a:r>
+          </a:p>
+        </p:txBody>
+      </p:sp>
+      <p:sp>
+        <p:nvSpPr>
+          <p:cNvPr id="8" name="Rounded Rectangle 7"/>
           <p:cNvSpPr/>
           <p:nvPr/>
         </p:nvSpPr>
         <p:spPr>
           <a:xfrm>
-            <a:off x="5806440" y="1051560"/>
-            <a:ext cx="5298947" cy="4629150"/>
+            <a:off x="822960" y="2514600"/>
+            <a:ext cx="10515600" cy="914400"/>
           </a:xfrm>
           <a:prstGeom prst="roundRect">
             <a:avLst/>
           </a:prstGeom>
           <a:solidFill>
-            <a:srgbClr val="F3F6FB"/>
+            <a:srgbClr val="E9F6EE"/>
           </a:solidFill>
           <a:ln w="12700">
             <a:solidFill>
-              <a:srgbClr val="C7D2E6"/>
+              <a:srgbClr val="1E8E4B"/>
             </a:solidFill>
           </a:ln>
           <a:effectLst/>
@@ -10672,14 +14653,14 @@
       </p:sp>
       <p:sp>
         <p:nvSpPr>
-          <p:cNvPr id="10" name="TextBox 9"/>
+          <p:cNvPr id="9" name="TextBox 8"/>
           <p:cNvSpPr txBox="1"/>
           <p:nvPr/>
         </p:nvSpPr>
         <p:spPr>
           <a:xfrm>
-            <a:off x="6080760" y="2726055"/>
-            <a:ext cx="4750307" cy="1280160"/>
+            <a:off x="1097280" y="2697480"/>
+            <a:ext cx="10058400" cy="640080"/>
           </a:xfrm>
           <a:prstGeom prst="rect">
             <a:avLst/>
@@ -10692,27 +14673,66 @@
           </a:bodyPr>
           <a:lstStyle/>
           <a:p>
-            <a:pPr algn="ctr"/>
-            <a:r>
-              <a:rPr sz="1400" b="1" i="0">
-                <a:solidFill>
-                  <a:srgbClr val="64748B"/>
-                </a:solidFill>
-                <a:latin typeface="Montserrat"/>
-              </a:rPr>
-              <a:t>IMAGEN REALISTA</a:t>
-            </a:r>
-          </a:p>
-          <a:p>
-            <a:pPr algn="ctr"/>
-            <a:r>
-              <a:rPr sz="1100" b="0" i="1">
-                <a:solidFill>
-                  <a:srgbClr val="64748B"/>
-                </a:solidFill>
-                <a:latin typeface="Montserrat"/>
-              </a:rPr>
-              <a:t>flexible gas hose stove connection</a:t>
+            <a:r>
+              <a:rPr sz="1800" b="1" i="0">
+                <a:solidFill>
+                  <a:srgbClr val="1E8E4B"/>
+                </a:solidFill>
+                <a:latin typeface="Montserrat"/>
+              </a:rPr>
+              <a:t>B.  </a:t>
+            </a:r>
+            <a:r>
+              <a:rPr sz="1800" b="1" i="0">
+                <a:solidFill>
+                  <a:srgbClr val="1E2761"/>
+                </a:solidFill>
+                <a:latin typeface="Montserrat"/>
+              </a:rPr>
+              <a:t>Los tipos B y C, unidos a conducto</a:t>
+            </a:r>
+          </a:p>
+        </p:txBody>
+      </p:sp>
+      <p:sp>
+        <p:nvSpPr>
+          <p:cNvPr id="10" name="TextBox 9"/>
+          <p:cNvSpPr txBox="1"/>
+          <p:nvPr/>
+        </p:nvSpPr>
+        <p:spPr>
+          <a:xfrm>
+            <a:off x="822960" y="3749039"/>
+            <a:ext cx="10515600" cy="2194560"/>
+          </a:xfrm>
+          <a:prstGeom prst="rect">
+            <a:avLst/>
+          </a:prstGeom>
+          <a:noFill/>
+        </p:spPr>
+        <p:txBody>
+          <a:bodyPr wrap="square">
+            <a:spAutoFit/>
+          </a:bodyPr>
+          <a:lstStyle/>
+          <a:p>
+            <a:r>
+              <a:rPr sz="1500" b="1" i="0">
+                <a:solidFill>
+                  <a:srgbClr val="E8801A"/>
+                </a:solidFill>
+                <a:latin typeface="Montserrat"/>
+              </a:rPr>
+              <a:t>Por qué:  </a:t>
+            </a:r>
+            <a:r>
+              <a:rPr sz="1500" b="0" i="0">
+                <a:solidFill>
+                  <a:srgbClr val="1B2330"/>
+                </a:solidFill>
+                <a:latin typeface="Montserrat"/>
+              </a:rPr>
+              <a:t>Los aparatos de tipo B y C van unidos a un conducto de evacuación de los productos de la combustión; el A no tiene conducto y devuelve los humos al local.</a:t>
             </a:r>
           </a:p>
         </p:txBody>
@@ -10722,6 +14742,18 @@
   <p:clrMapOvr>
     <a:masterClrMapping/>
   </p:clrMapOvr>
+  <mc:AlternateContent xmlns:mc="http://schemas.openxmlformats.org/markup-compatibility/2006">
+    <mc:Choice xmlns:p14="http://schemas.microsoft.com/office/powerpoint/2010/main" Requires="p14">
+      <p:transition spd="med" p14:dur="700">
+        <p14:cube dir="r"/>
+      </p:transition>
+    </mc:Choice>
+    <mc:Fallback>
+      <p:transition spd="med">
+        <p:push dir="r"/>
+      </p:transition>
+    </mc:Fallback>
+  </mc:AlternateContent>
 </p:sld>
 </file>
 
@@ -10809,7 +14841,7 @@
                 </a:solidFill>
                 <a:latin typeface="Montserrat"/>
               </a:rPr>
-              <a:t>009 / 015</a:t>
+              <a:t>009 / 020</a:t>
             </a:r>
           </a:p>
         </p:txBody>
@@ -10877,7 +14909,7 @@
                 </a:solidFill>
                 <a:latin typeface="Montserrat"/>
               </a:rPr>
-              <a:t>APARTADO 5.2 · NO CONECTADOS</a:t>
+              <a:t>CONDUCIDOS VS. CARNÉ</a:t>
             </a:r>
           </a:p>
         </p:txBody>
@@ -10911,14 +14943,14 @@
                 </a:solidFill>
                 <a:latin typeface="Montserrat"/>
               </a:rPr>
-              <a:t>Los aparatos sueltos</a:t>
-            </a:r>
-          </a:p>
-        </p:txBody>
-      </p:sp>
-      <p:sp>
-        <p:nvSpPr>
-          <p:cNvPr id="7" name="Rounded Rectangle 6"/>
+              <a:t>No confundas tipo con categoría</a:t>
+            </a:r>
+          </a:p>
+        </p:txBody>
+      </p:sp>
+      <p:sp>
+        <p:nvSpPr>
+          <p:cNvPr id="7" name="Rectangle 6"/>
           <p:cNvSpPr/>
           <p:nvPr/>
         </p:nvSpPr>
@@ -10927,7 +14959,7 @@
             <a:off x="868680" y="1627632"/>
             <a:ext cx="2011680" cy="73152"/>
           </a:xfrm>
-          <a:prstGeom prst="roundRect">
+          <a:prstGeom prst="rect">
             <a:avLst/>
           </a:prstGeom>
           <a:solidFill>
@@ -10969,7 +15001,7 @@
         <p:spPr>
           <a:xfrm>
             <a:off x="822960" y="1965960"/>
-            <a:ext cx="4983480" cy="4206240"/>
+            <a:ext cx="5029200" cy="4206240"/>
           </a:xfrm>
           <a:prstGeom prst="rect">
             <a:avLst/>
@@ -11003,7 +15035,7 @@
                 </a:solidFill>
                 <a:latin typeface="Montserrat"/>
               </a:rPr>
-              <a:t>No conectados a instalación receptora</a:t>
+              <a:t>B y C = aparatos conducidos</a:t>
             </a:r>
           </a:p>
           <a:p>
@@ -11028,7 +15060,7 @@
                 </a:solidFill>
                 <a:latin typeface="Montserrat"/>
               </a:rPr>
-              <a:t>Condiciones de ubicación: UNE 60670-6</a:t>
+              <a:t>Tipo A/B/C = cómo quema el aparato</a:t>
             </a:r>
           </a:p>
           <a:p>
@@ -11053,21 +15085,46 @@
                 </a:solidFill>
                 <a:latin typeface="Montserrat"/>
               </a:rPr>
-              <a:t>Regla: conectado → 7; suelto → 6</a:t>
-            </a:r>
-          </a:p>
-        </p:txBody>
-      </p:sp>
-      <p:sp>
-        <p:nvSpPr>
-          <p:cNvPr id="9" name="imgph" descr="IMGQ:portable gas heater room"/>
+              <a:t>Categoría A/B/C = carné del instalador</a:t>
+            </a:r>
+          </a:p>
+          <a:p>
+            <a:pPr>
+              <a:spcAft>
+                <a:spcPts val="1100"/>
+              </a:spcAft>
+            </a:pPr>
+            <a:r>
+              <a:rPr sz="1600" b="1" i="0">
+                <a:solidFill>
+                  <a:srgbClr val="E8801A"/>
+                </a:solidFill>
+                <a:latin typeface="Montserrat"/>
+              </a:rPr>
+              <a:t>▸  </a:t>
+            </a:r>
+            <a:r>
+              <a:rPr sz="1600" b="0" i="0">
+                <a:solidFill>
+                  <a:srgbClr val="1B2330"/>
+                </a:solidFill>
+                <a:latin typeface="Montserrat"/>
+              </a:rPr>
+              <a:t>Con categoría B trabajas tipos A, B o C</a:t>
+            </a:r>
+          </a:p>
+        </p:txBody>
+      </p:sp>
+      <p:sp>
+        <p:nvSpPr>
+          <p:cNvPr id="9" name="imgph" descr="IMGQ:gas installer certification card"/>
           <p:cNvSpPr/>
           <p:nvPr/>
         </p:nvSpPr>
         <p:spPr>
           <a:xfrm>
-            <a:off x="5806440" y="1051560"/>
-            <a:ext cx="5298947" cy="4629150"/>
+            <a:off x="6080760" y="1965960"/>
+            <a:ext cx="5303520" cy="4572000"/>
           </a:xfrm>
           <a:prstGeom prst="roundRect">
             <a:avLst/>
@@ -11112,8 +15169,8 @@
         </p:nvSpPr>
         <p:spPr>
           <a:xfrm>
-            <a:off x="6080760" y="2726055"/>
-            <a:ext cx="4750307" cy="1280160"/>
+            <a:off x="6355080" y="3611880"/>
+            <a:ext cx="4754880" cy="1280160"/>
           </a:xfrm>
           <a:prstGeom prst="rect">
             <a:avLst/>
@@ -11134,7 +15191,7 @@
                 </a:solidFill>
                 <a:latin typeface="Montserrat"/>
               </a:rPr>
-              <a:t>IMAGEN REALISTA</a:t>
+              <a:t>IMAGEN</a:t>
             </a:r>
           </a:p>
           <a:p>
@@ -11146,7 +15203,7 @@
                 </a:solidFill>
                 <a:latin typeface="Montserrat"/>
               </a:rPr>
-              <a:t>portable gas heater room</a:t>
+              <a:t>gas installer certification card</a:t>
             </a:r>
           </a:p>
         </p:txBody>
@@ -11156,6 +15213,18 @@
   <p:clrMapOvr>
     <a:masterClrMapping/>
   </p:clrMapOvr>
+  <mc:AlternateContent xmlns:mc="http://schemas.openxmlformats.org/markup-compatibility/2006">
+    <mc:Choice xmlns:p14="http://schemas.microsoft.com/office/powerpoint/2010/main" Requires="p14">
+      <p:transition spd="med" p14:dur="700">
+        <p14:cube dir="l"/>
+      </p:transition>
+    </mc:Choice>
+    <mc:Fallback>
+      <p:transition spd="med">
+        <p:push dir="l"/>
+      </p:transition>
+    </mc:Fallback>
+  </mc:AlternateContent>
 </p:sld>
 </file>
 

--- a/Curso Gas B/05 - ITC-ICG 08 - Aparatos de gas/05 - ITC-ICG 08 - Aparatos de gas - Vídeo 2.pptx
+++ b/Curso Gas B/05 - ITC-ICG 08 - Aparatos de gas/05 - ITC-ICG 08 - Aparatos de gas - Vídeo 2.pptx
@@ -896,12 +896,7 @@
           <a:lstStyle/>
           <a:p>
             <a:r>
-              <a:t>N1: Un número muy concreto que le encanta al examen.</a:t>
-            </a:r>
-          </a:p>
-          <a:p>
-            <a:r>
-              <a:t>N2: Es la línea que separa el aparato exigente del normal. Piensa en la cifra de potencia útil que marca la frontera; ojo, no la redondees.</a:t>
+              <a:t>N1: Un número muy concreto que le encanta al examen. Escucha: ¿a partir de qué potencia un aparato conducido, tipo be o ce, solo lo pone en marcha personal especialmente cualificado? Opción a: más de veinte kilovatios de potencia útil. Opción be: más de veinticuatro coma cuatro kilovatios de potencia útil. Opción ce: más de treinta kilovatios de potencia útil. Opción de: más de quince kilovatios de potencia útil. Piensa la cifra exacta, y ojo, no la redondees...</a:t>
             </a:r>
           </a:p>
         </p:txBody>
@@ -971,12 +966,12 @@
           <a:lstStyle/>
           <a:p>
             <a:r>
-              <a:t>N1: ¿Por qué esa cifra?</a:t>
-            </a:r>
-          </a:p>
-          <a:p>
-            <a:r>
-              <a:t>N2: Porque la ITC fija el umbral en veinticuatro coma cuatro kilovatios de potencia útil para los aparatos conducidos; por encima de ahí, y las vitrocerámicas de fuegos cubiertos, solo los toca gente especialmente cualificada. El truco para no fallar: memoriza veinticuatro coma cuatro, no lo redondees a veinticinco.</a:t>
+              <a:t>N2: La respuesta correcta es la opción be: más de veinticuatro coma cuatro kilovatios de potencia útil. El porqué: la ITC fija ahí el umbral para los aparatos conducidos; por encima de veinticuatro coma cuatro kilovatios, y también las vitrocerámicas a gas de fuegos cubiertos, solo los toca el servicio técnico del fabricante con calidad certificada o un instalador que cumpla el capítulo cuatro de la ITC-ICG cero nueve. El truco para no fallar: memoriza veinticuatro coma cuatro, y no lo redondees a veinticinco.</a:t>
+            </a:r>
+          </a:p>
+          <a:p>
+            <a:r>
+              <a:t>N1: Veinticuatro coma cuatro, ni un decimal de más.</a:t>
             </a:r>
           </a:p>
         </p:txBody>
@@ -1797,12 +1792,7 @@
           <a:lstStyle/>
           <a:p>
             <a:r>
-              <a:t>N1: Con la tabla fresca, una pregunta directa.</a:t>
-            </a:r>
-          </a:p>
-          <a:p>
-            <a:r>
-              <a:t>N2: Recuerda cuáles echaban los humos al exterior por un conducto. El que los suelta al propio local se queda fuera de la definición.</a:t>
+              <a:t>N1: Con la tabla de los tipos fresca, una pregunta directa: ¿qué tipos de aparato son los que la ITC llama conducidos? Opción a: solo el tipo a, el no conducido. Opción be: los tipos be y ce, unidos a conducto. Opción ce: solo el tipo ce, el estanco. Opción de: los tipos a y be, de cámara abierta. Piénsalo un momento... ¿cuáles echaban los humos al exterior por un conducto? El que los suelta al propio local se queda fuera.</a:t>
             </a:r>
           </a:p>
         </p:txBody>
@@ -1872,12 +1862,12 @@
           <a:lstStyle/>
           <a:p>
             <a:r>
-              <a:t>N1: ¿Por qué be y ce?</a:t>
-            </a:r>
-          </a:p>
-          <a:p>
-            <a:r>
-              <a:t>N2: Porque ambos evacúan al exterior por un conducto de humos; el tipo a no está unido a ningún conducto, devuelve los productos al local. El truco: conducido es el que tiene conducto, y eso solo lo cumplen la be y la ce.</a:t>
+              <a:t>N2: La respuesta correcta es la opción be: los tipos be y ce, unidos a conducto. El porqué es claro: tanto el be como el ce evacúan los humos al exterior por un conducto de evacuación; en cambio, el tipo a no está unido a ningún conducto, devuelve los productos de la combustión al propio local. El truco: conducido es el que tiene conducto, y eso solo lo cumplen la be y la ce.</a:t>
+            </a:r>
+          </a:p>
+          <a:p>
+            <a:r>
+              <a:t>N1: Be y ce, los conducidos. El a se queda fuera.</a:t>
             </a:r>
           </a:p>
         </p:txBody>
